--- a/lecons/LSA/Meteorology/18_LSA_MET_L18_Air_Masses.pptx
+++ b/lecons/LSA/Meteorology/18_LSA_MET_L18_Air_Masses.pptx
@@ -66,9 +66,13 @@
     <p:sldId id="314" r:id="rId60"/>
     <p:sldId id="315" r:id="rId61"/>
     <p:sldId id="316" r:id="rId62"/>
+    <p:sldId id="317" r:id="rId63"/>
+    <p:sldId id="318" r:id="rId64"/>
+    <p:sldId id="319" r:id="rId65"/>
+    <p:sldId id="320" r:id="rId66"/>
   </p:sldIdLst>
   <p:notesMasterIdLst>
-    <p:notesMasterId r:id="rId63"/>
+    <p:notesMasterId r:id="rId67"/>
   </p:notesMasterIdLst>
   <p:sldSz cx="12192000" cy="6858000"/>
   <p:notesSz cx="6858000" cy="12192000"/>
@@ -3202,7 +3206,7 @@
           <a:p>
             <a:r>
               <a:rPr lang="en-US" dirty="0"/>
-              <a:t>We continue with the definitions. On this slide we have Source region. Write each point on a new line, with the key term first, and explain it in your own words when we revise.</a:t>
+              <a:t>We continue with the definitions. On this slide we have Source region and Front. Write each point on a new line, with the key term first, and explain it in your own words when we revise. When you finish, we go to the next slide.</a:t>
             </a:r>
             <a:endParaRPr lang="en-US" dirty="0"/>
           </a:p>
@@ -3290,7 +3294,7 @@
           <a:p>
             <a:r>
               <a:rPr lang="en-US" dirty="0"/>
-              <a:t>Let us copy Meaning and Characteristics of Air Masses. Air masses are presented as follows. Copy the point on Size on the left, then draw the diagram on the right: source regions. Give it a title and label it clearly.</a:t>
+              <a:t>We continue with the definitions. On this slide we have Intertropical Convergence Zone (ITCZ). Write each point on a new line, with the key term first, and explain it in your own words when we revise.</a:t>
             </a:r>
             <a:endParaRPr lang="en-US" dirty="0"/>
           </a:p>
@@ -3378,7 +3382,7 @@
           <a:p>
             <a:r>
               <a:rPr lang="en-US" dirty="0"/>
-              <a:t>We continue with Meaning and Characteristics of Air Masses. On this slide we have Acquired characteristics and Good source regions. Write each point on a new line, with the key term first, and explain it in your own words when we revise. When you finish, we go to the next slide.</a:t>
+              <a:t>Let us copy Meaning and Characteristics of Air Masses. Air masses have the following characteristics. Copy the point on Size on the left, then draw the diagram on the right: source regions of air masses. Give it a title and label it clearly.</a:t>
             </a:r>
             <a:endParaRPr lang="en-US" dirty="0"/>
           </a:p>
@@ -3554,7 +3558,7 @@
           <a:p>
             <a:r>
               <a:rPr lang="en-US" dirty="0"/>
-              <a:t>We continue with Meaning and Characteristics of Air Masses. On this slide we have Movement. Write each point on a new line, with the key term first, and explain it in your own words when we revise.</a:t>
+              <a:t>We continue with Meaning and Characteristics of Air Masses. Copy the point on Uniform temperature and humidity: write the key term first, then its explanation.</a:t>
             </a:r>
             <a:endParaRPr lang="en-US" dirty="0"/>
           </a:p>
@@ -3642,7 +3646,7 @@
           <a:p>
             <a:r>
               <a:rPr lang="en-US" dirty="0"/>
-              <a:t>Let us copy Classification of Air Masses. Air masses are classified with two letters as follows. On this slide we have First letter (moisture). Write each point on a new line, with the key term first, and explain it in your own words when we revise. When you finish, we go to the next slide.</a:t>
+              <a:t>We continue with Meaning and Characteristics of Air Masses. Copy the point on Weather of its source: write the key term first, then its explanation.</a:t>
             </a:r>
             <a:endParaRPr lang="en-US" dirty="0"/>
           </a:p>
@@ -3730,7 +3734,7 @@
           <a:p>
             <a:r>
               <a:rPr lang="en-US" dirty="0"/>
-              <a:t>We continue with Classification of Air Masses. On this slide we have Second letter (temperature). Write each point on a new line, with the key term first, and explain it in your own words when we revise.</a:t>
+              <a:t>Let us copy Development of Air Masses. Air masses acquire their characteristics in the following way. Copy the point on A uniform source region: write the key term first, then its explanation.</a:t>
             </a:r>
             <a:endParaRPr lang="en-US" dirty="0"/>
           </a:p>
@@ -3818,7 +3822,7 @@
           <a:p>
             <a:r>
               <a:rPr lang="en-US" dirty="0"/>
-              <a:t>Copy the point on Examples on the left, then draw the diagram on the right: classification of air masses. Give it a title and label it clearly.</a:t>
+              <a:t>We continue with Development of Air Masses. Copy the point on A long stay over the source: write the key term first, then its explanation.</a:t>
             </a:r>
             <a:endParaRPr lang="en-US" dirty="0"/>
           </a:p>
@@ -3906,7 +3910,7 @@
           <a:p>
             <a:r>
               <a:rPr lang="en-US" dirty="0"/>
-              <a:t>Let us copy Air Masses Affecting Cameroon and West Africa. Two air masses control the seasons of Cameroon as follows. Copy the point on Tropical continental (cT) on the left, then draw the diagram on the right: harmattan haze. Give it a title and label it clearly.</a:t>
+              <a:t>We continue with Development of Air Masses. Copy the point on Modification when moving: write the key term first, then its explanation.</a:t>
             </a:r>
             <a:endParaRPr lang="en-US" dirty="0"/>
           </a:p>
@@ -3994,7 +3998,7 @@
           <a:p>
             <a:r>
               <a:rPr lang="en-US" dirty="0"/>
-              <a:t>We continue with Air Masses Affecting Cameroon and West Africa. On this slide we have Influence of cT. Write each point on a new line, with the key term first, and explain it in your own words when we revise.</a:t>
+              <a:t>Let us copy Classification and Examples. Air masses are classified with two letters as follows. Copy the point on First letter (humidity): write the key term first, then its explanation.</a:t>
             </a:r>
             <a:endParaRPr lang="en-US" dirty="0"/>
           </a:p>
@@ -4082,7 +4086,7 @@
           <a:p>
             <a:r>
               <a:rPr lang="en-US" dirty="0"/>
-              <a:t>Copy the point on Tropical maritime (mT) on the left, then draw the diagram on the right: heavy rain. Give it a title and label it clearly.</a:t>
+              <a:t>Copy the point on Second letter (temperature) on the left, then draw the diagram on the right: the classification of air masses. Give it a title and label it clearly.</a:t>
             </a:r>
             <a:endParaRPr lang="en-US" dirty="0"/>
           </a:p>
@@ -4170,7 +4174,7 @@
           <a:p>
             <a:r>
               <a:rPr lang="en-US" dirty="0"/>
-              <a:t>We continue with Air Masses Affecting Cameroon and West Africa. On this slide we have Influence of mT. Write each point on a new line, with the key term first, and explain it in your own words when we revise.</a:t>
+              <a:t>We continue with Classification and Examples. Copy the point on Examples: write the key term first, then its explanation.</a:t>
             </a:r>
             <a:endParaRPr lang="en-US" dirty="0"/>
           </a:p>
@@ -4258,7 +4262,7 @@
           <a:p>
             <a:r>
               <a:rPr lang="en-US" dirty="0"/>
-              <a:t>Copy the point on The meeting zone on the left, then draw the diagram on the right: air masses over West Africa. Give it a title and label it clearly.</a:t>
+              <a:t>Let us copy Types and Movements of Air Masses. Air masses are of the following types and move as follows. Copy the point on Warm air masses: write the key term first, then its explanation.</a:t>
             </a:r>
             <a:endParaRPr lang="en-US" dirty="0"/>
           </a:p>
@@ -4346,7 +4350,7 @@
           <a:p>
             <a:r>
               <a:rPr lang="en-US" dirty="0"/>
-              <a:t>Copy the point on Comparison on the left, then draw the diagram on the right: cT and mT compared. Give it a title and label it clearly.</a:t>
+              <a:t>We continue with Types and Movements of Air Masses. Copy the point on Cold air masses: write the key term first, then its explanation.</a:t>
             </a:r>
             <a:endParaRPr lang="en-US" dirty="0"/>
           </a:p>
@@ -4522,7 +4526,7 @@
           <a:p>
             <a:r>
               <a:rPr lang="en-US" dirty="0"/>
-              <a:t>Now let us check what you have understood. Question 1: Distinguish a continental air mass from a maritime air mass. Answer in your exercise book.</a:t>
+              <a:t>We continue with Types and Movements of Air Masses. Copy the point on Seasonal movement: write the key term first, then its explanation.</a:t>
             </a:r>
             <a:endParaRPr lang="en-US" dirty="0"/>
           </a:p>
@@ -4610,7 +4614,7 @@
           <a:p>
             <a:r>
               <a:rPr lang="en-US" dirty="0"/>
-              <a:t>The expected answer is: a continental air mass forms over land and is dry; a maritime air mass forms over the sea and is moist. If you got it right, well done.</a:t>
+              <a:t>Let us copy Air Masses Affecting Cameroon and West Africa. Two air masses control the seasons of Cameroon as follows. Copy the point on Tropical continental air (cT) on the left, then draw the diagram on the right: the Harmattan. Give it a title and label it clearly.</a:t>
             </a:r>
             <a:endParaRPr lang="en-US" dirty="0"/>
           </a:p>
@@ -4698,7 +4702,7 @@
           <a:p>
             <a:r>
               <a:rPr lang="en-US" dirty="0"/>
-              <a:t>Now let us check what you have understood. Question 2: Which air mass brings the rainy season to Garoua, and why? Answer in your exercise book.</a:t>
+              <a:t>Copy the point on Tropical maritime air (mT) on the left, then draw the diagram on the right: heavy rain. Give it a title and label it clearly.</a:t>
             </a:r>
             <a:endParaRPr lang="en-US" dirty="0"/>
           </a:p>
@@ -4786,7 +4790,7 @@
           <a:p>
             <a:r>
               <a:rPr lang="en-US" dirty="0"/>
-              <a:t>The expected answer is: the tropical maritime (mT) air mass, because it is moist and unstable. If you got it right, well done.</a:t>
+              <a:t>Copy the point on The Intertropical Front (ITF) on the left, then draw the diagram on the right: the air masses of West Africa. Give it a title and label it clearly.</a:t>
             </a:r>
             <a:endParaRPr lang="en-US" dirty="0"/>
           </a:p>
@@ -4874,7 +4878,7 @@
           <a:p>
             <a:r>
               <a:rPr lang="en-US" dirty="0"/>
-              <a:t>For those who need more practice, fill in the blanks in your exercise book. The answers are: number 1, source; number 2, tropical continental (cT); number 3, Intertropical Front (ITF).</a:t>
+              <a:t>Now let us check what you have understood. Question 1: Distinguish a continental air mass from a maritime air mass. Answer in your exercise book.</a:t>
             </a:r>
             <a:endParaRPr lang="en-US" dirty="0"/>
           </a:p>
@@ -4962,7 +4966,7 @@
           <a:p>
             <a:r>
               <a:rPr lang="en-US" dirty="0"/>
-              <a:t>For your homework: Define climate. We shall correct it at the beginning of our next lesson.</a:t>
+              <a:t>The expected answer is: a continental air mass forms over land and is dry; a maritime air mass forms over the sea and is moist. If you got it right, well done.</a:t>
             </a:r>
             <a:endParaRPr lang="en-US" dirty="0"/>
           </a:p>
@@ -5050,7 +5054,7 @@
           <a:p>
             <a:r>
               <a:rPr lang="en-US" dirty="0"/>
-              <a:t>Our next lesson will be on Lesson 19: Meaning of Climate and Köppen's Classification. Thank you for your attention, and see you next time.</a:t>
+              <a:t>Now let us check what you have understood. Question 2: Which air mass brings the rainy season to Garoua, and why? Answer in your exercise book.</a:t>
             </a:r>
             <a:endParaRPr lang="en-US" dirty="0"/>
           </a:p>
@@ -5138,7 +5142,7 @@
           <a:p>
             <a:r>
               <a:rPr lang="en-US" dirty="0"/>
-              <a:t>Let us play the bilingual game. I say a word in English, and you give me the French word. Then we do the reverse.</a:t>
+              <a:t>The expected answer is: the tropical maritime (mT) air mass, because it is moist and unstable. If you got it right, well done.</a:t>
             </a:r>
             <a:endParaRPr lang="en-US" dirty="0"/>
           </a:p>
@@ -5226,7 +5230,7 @@
           <a:p>
             <a:r>
               <a:rPr lang="en-US" dirty="0"/>
-              <a:t>I record this information in the official logbook of the class after the lesson.</a:t>
+              <a:t>For those who need more practice, fill in the blanks in your exercise book. The answers are: number 1, source; number 2, tropical continental (cT); number 3, Intertropical Front (ITF).</a:t>
             </a:r>
             <a:endParaRPr lang="en-US" dirty="0"/>
           </a:p>
@@ -5314,7 +5318,7 @@
           <a:p>
             <a:r>
               <a:rPr lang="en-US" dirty="0"/>
-              <a:t>I complete the second page of the logbook: the matter taught, the evaluation, the homework and the attendance.</a:t>
+              <a:t>For your homework: Define climate. We shall correct it at the beginning of our next lesson.</a:t>
             </a:r>
             <a:endParaRPr lang="en-US" dirty="0"/>
           </a:p>
@@ -5490,7 +5494,7 @@
           <a:p>
             <a:r>
               <a:rPr lang="en-US" dirty="0"/>
-              <a:t>This slide is for me, the teacher: it gives the timing of the lesson and what to do if the projector is not available.</a:t>
+              <a:t>Our next lesson will be on Lesson 19: Meaning of Climate and Köppen's Classification. Thank you for your attention, and see you next time.</a:t>
             </a:r>
             <a:endParaRPr lang="en-US" dirty="0"/>
           </a:p>
@@ -5578,7 +5582,7 @@
           <a:p>
             <a:r>
               <a:rPr lang="en-US" dirty="0"/>
-              <a:t>These are the references and picture credits used to prepare this lesson.</a:t>
+              <a:t>Let us play the bilingual game. I say a word in English, and you give me the French word. Then we do the reverse.</a:t>
             </a:r>
             <a:endParaRPr lang="en-US" dirty="0"/>
           </a:p>
@@ -5602,6 +5606,358 @@
             <a:fld id="{F7021451-1387-4CA6-816F-3879F97B5CBC}" type="slidenum">
               <a:rPr lang="en-US"/>
               <a:t>61</a:t>
+            </a:fld>
+            <a:endParaRPr lang="en-US"/>
+          </a:p>
+        </p:txBody>
+      </p:sp>
+    </p:spTree>
+    <p:extLst>
+      <p:ext uri="{BB962C8B-B14F-4D97-AF65-F5344CB8AC3E}">
+        <p14:creationId xmlns:p14="http://schemas.microsoft.com/office/powerpoint/2010/main" val="1024086991"/>
+      </p:ext>
+    </p:extLst>
+  </p:cSld>
+  <p:clrMapOvr>
+    <a:masterClrMapping/>
+  </p:clrMapOvr>
+</p:notes>
+</file>
+
+<file path=ppt/notesSlides/notesSlide62.xml><?xml version="1.0" encoding="utf-8"?>
+<p:notes xmlns:a="http://schemas.openxmlformats.org/drawingml/2006/main" xmlns:r="http://schemas.openxmlformats.org/officeDocument/2006/relationships" xmlns:p="http://schemas.openxmlformats.org/presentationml/2006/main">
+  <p:cSld>
+    <p:spTree>
+      <p:nvGrpSpPr>
+        <p:cNvPr id="1" name=""/>
+        <p:cNvGrpSpPr/>
+        <p:nvPr/>
+      </p:nvGrpSpPr>
+      <p:grpSpPr>
+        <a:xfrm>
+          <a:off x="0" y="0"/>
+          <a:ext cx="0" cy="0"/>
+          <a:chOff x="0" y="0"/>
+          <a:chExt cx="0" cy="0"/>
+        </a:xfrm>
+      </p:grpSpPr>
+      <p:sp>
+        <p:nvSpPr>
+          <p:cNvPr id="2" name="Slide Image Placeholder 1"/>
+          <p:cNvSpPr>
+            <a:spLocks noGrp="1" noRot="1" noChangeAspect="1"/>
+          </p:cNvSpPr>
+          <p:nvPr>
+            <p:ph type="sldImg"/>
+          </p:nvPr>
+        </p:nvSpPr>
+        <p:spPr/>
+      </p:sp>
+      <p:sp>
+        <p:nvSpPr>
+          <p:cNvPr id="3" name="Notes Placeholder 2"/>
+          <p:cNvSpPr>
+            <a:spLocks noGrp="1"/>
+          </p:cNvSpPr>
+          <p:nvPr>
+            <p:ph type="body" idx="1"/>
+          </p:nvPr>
+        </p:nvSpPr>
+        <p:spPr/>
+        <p:txBody>
+          <a:bodyPr/>
+          <a:lstStyle/>
+          <a:p>
+            <a:r>
+              <a:rPr lang="en-US" dirty="0"/>
+              <a:t>I record this information in the official logbook of the class after the lesson.</a:t>
+            </a:r>
+            <a:endParaRPr lang="en-US" dirty="0"/>
+          </a:p>
+        </p:txBody>
+      </p:sp>
+      <p:sp>
+        <p:nvSpPr>
+          <p:cNvPr id="4" name="Slide Number Placeholder 3"/>
+          <p:cNvSpPr>
+            <a:spLocks noGrp="1"/>
+          </p:cNvSpPr>
+          <p:nvPr>
+            <p:ph type="sldNum" sz="quarter" idx="10"/>
+          </p:nvPr>
+        </p:nvSpPr>
+        <p:spPr/>
+        <p:txBody>
+          <a:bodyPr/>
+          <a:lstStyle/>
+          <a:p>
+            <a:fld id="{F7021451-1387-4CA6-816F-3879F97B5CBC}" type="slidenum">
+              <a:rPr lang="en-US"/>
+              <a:t>62</a:t>
+            </a:fld>
+            <a:endParaRPr lang="en-US"/>
+          </a:p>
+        </p:txBody>
+      </p:sp>
+    </p:spTree>
+    <p:extLst>
+      <p:ext uri="{BB962C8B-B14F-4D97-AF65-F5344CB8AC3E}">
+        <p14:creationId xmlns:p14="http://schemas.microsoft.com/office/powerpoint/2010/main" val="1024086991"/>
+      </p:ext>
+    </p:extLst>
+  </p:cSld>
+  <p:clrMapOvr>
+    <a:masterClrMapping/>
+  </p:clrMapOvr>
+</p:notes>
+</file>
+
+<file path=ppt/notesSlides/notesSlide63.xml><?xml version="1.0" encoding="utf-8"?>
+<p:notes xmlns:a="http://schemas.openxmlformats.org/drawingml/2006/main" xmlns:r="http://schemas.openxmlformats.org/officeDocument/2006/relationships" xmlns:p="http://schemas.openxmlformats.org/presentationml/2006/main">
+  <p:cSld>
+    <p:spTree>
+      <p:nvGrpSpPr>
+        <p:cNvPr id="1" name=""/>
+        <p:cNvGrpSpPr/>
+        <p:nvPr/>
+      </p:nvGrpSpPr>
+      <p:grpSpPr>
+        <a:xfrm>
+          <a:off x="0" y="0"/>
+          <a:ext cx="0" cy="0"/>
+          <a:chOff x="0" y="0"/>
+          <a:chExt cx="0" cy="0"/>
+        </a:xfrm>
+      </p:grpSpPr>
+      <p:sp>
+        <p:nvSpPr>
+          <p:cNvPr id="2" name="Slide Image Placeholder 1"/>
+          <p:cNvSpPr>
+            <a:spLocks noGrp="1" noRot="1" noChangeAspect="1"/>
+          </p:cNvSpPr>
+          <p:nvPr>
+            <p:ph type="sldImg"/>
+          </p:nvPr>
+        </p:nvSpPr>
+        <p:spPr/>
+      </p:sp>
+      <p:sp>
+        <p:nvSpPr>
+          <p:cNvPr id="3" name="Notes Placeholder 2"/>
+          <p:cNvSpPr>
+            <a:spLocks noGrp="1"/>
+          </p:cNvSpPr>
+          <p:nvPr>
+            <p:ph type="body" idx="1"/>
+          </p:nvPr>
+        </p:nvSpPr>
+        <p:spPr/>
+        <p:txBody>
+          <a:bodyPr/>
+          <a:lstStyle/>
+          <a:p>
+            <a:r>
+              <a:rPr lang="en-US" dirty="0"/>
+              <a:t>I complete the second page of the logbook: the matter taught, the evaluation, the homework and the attendance.</a:t>
+            </a:r>
+            <a:endParaRPr lang="en-US" dirty="0"/>
+          </a:p>
+        </p:txBody>
+      </p:sp>
+      <p:sp>
+        <p:nvSpPr>
+          <p:cNvPr id="4" name="Slide Number Placeholder 3"/>
+          <p:cNvSpPr>
+            <a:spLocks noGrp="1"/>
+          </p:cNvSpPr>
+          <p:nvPr>
+            <p:ph type="sldNum" sz="quarter" idx="10"/>
+          </p:nvPr>
+        </p:nvSpPr>
+        <p:spPr/>
+        <p:txBody>
+          <a:bodyPr/>
+          <a:lstStyle/>
+          <a:p>
+            <a:fld id="{F7021451-1387-4CA6-816F-3879F97B5CBC}" type="slidenum">
+              <a:rPr lang="en-US"/>
+              <a:t>63</a:t>
+            </a:fld>
+            <a:endParaRPr lang="en-US"/>
+          </a:p>
+        </p:txBody>
+      </p:sp>
+    </p:spTree>
+    <p:extLst>
+      <p:ext uri="{BB962C8B-B14F-4D97-AF65-F5344CB8AC3E}">
+        <p14:creationId xmlns:p14="http://schemas.microsoft.com/office/powerpoint/2010/main" val="1024086991"/>
+      </p:ext>
+    </p:extLst>
+  </p:cSld>
+  <p:clrMapOvr>
+    <a:masterClrMapping/>
+  </p:clrMapOvr>
+</p:notes>
+</file>
+
+<file path=ppt/notesSlides/notesSlide64.xml><?xml version="1.0" encoding="utf-8"?>
+<p:notes xmlns:a="http://schemas.openxmlformats.org/drawingml/2006/main" xmlns:r="http://schemas.openxmlformats.org/officeDocument/2006/relationships" xmlns:p="http://schemas.openxmlformats.org/presentationml/2006/main">
+  <p:cSld>
+    <p:spTree>
+      <p:nvGrpSpPr>
+        <p:cNvPr id="1" name=""/>
+        <p:cNvGrpSpPr/>
+        <p:nvPr/>
+      </p:nvGrpSpPr>
+      <p:grpSpPr>
+        <a:xfrm>
+          <a:off x="0" y="0"/>
+          <a:ext cx="0" cy="0"/>
+          <a:chOff x="0" y="0"/>
+          <a:chExt cx="0" cy="0"/>
+        </a:xfrm>
+      </p:grpSpPr>
+      <p:sp>
+        <p:nvSpPr>
+          <p:cNvPr id="2" name="Slide Image Placeholder 1"/>
+          <p:cNvSpPr>
+            <a:spLocks noGrp="1" noRot="1" noChangeAspect="1"/>
+          </p:cNvSpPr>
+          <p:nvPr>
+            <p:ph type="sldImg"/>
+          </p:nvPr>
+        </p:nvSpPr>
+        <p:spPr/>
+      </p:sp>
+      <p:sp>
+        <p:nvSpPr>
+          <p:cNvPr id="3" name="Notes Placeholder 2"/>
+          <p:cNvSpPr>
+            <a:spLocks noGrp="1"/>
+          </p:cNvSpPr>
+          <p:nvPr>
+            <p:ph type="body" idx="1"/>
+          </p:nvPr>
+        </p:nvSpPr>
+        <p:spPr/>
+        <p:txBody>
+          <a:bodyPr/>
+          <a:lstStyle/>
+          <a:p>
+            <a:r>
+              <a:rPr lang="en-US" dirty="0"/>
+              <a:t>This slide is for me, the teacher: it gives the timing of the lesson and what to do if the projector is not available.</a:t>
+            </a:r>
+            <a:endParaRPr lang="en-US" dirty="0"/>
+          </a:p>
+        </p:txBody>
+      </p:sp>
+      <p:sp>
+        <p:nvSpPr>
+          <p:cNvPr id="4" name="Slide Number Placeholder 3"/>
+          <p:cNvSpPr>
+            <a:spLocks noGrp="1"/>
+          </p:cNvSpPr>
+          <p:nvPr>
+            <p:ph type="sldNum" sz="quarter" idx="10"/>
+          </p:nvPr>
+        </p:nvSpPr>
+        <p:spPr/>
+        <p:txBody>
+          <a:bodyPr/>
+          <a:lstStyle/>
+          <a:p>
+            <a:fld id="{F7021451-1387-4CA6-816F-3879F97B5CBC}" type="slidenum">
+              <a:rPr lang="en-US"/>
+              <a:t>64</a:t>
+            </a:fld>
+            <a:endParaRPr lang="en-US"/>
+          </a:p>
+        </p:txBody>
+      </p:sp>
+    </p:spTree>
+    <p:extLst>
+      <p:ext uri="{BB962C8B-B14F-4D97-AF65-F5344CB8AC3E}">
+        <p14:creationId xmlns:p14="http://schemas.microsoft.com/office/powerpoint/2010/main" val="1024086991"/>
+      </p:ext>
+    </p:extLst>
+  </p:cSld>
+  <p:clrMapOvr>
+    <a:masterClrMapping/>
+  </p:clrMapOvr>
+</p:notes>
+</file>
+
+<file path=ppt/notesSlides/notesSlide65.xml><?xml version="1.0" encoding="utf-8"?>
+<p:notes xmlns:a="http://schemas.openxmlformats.org/drawingml/2006/main" xmlns:r="http://schemas.openxmlformats.org/officeDocument/2006/relationships" xmlns:p="http://schemas.openxmlformats.org/presentationml/2006/main">
+  <p:cSld>
+    <p:spTree>
+      <p:nvGrpSpPr>
+        <p:cNvPr id="1" name=""/>
+        <p:cNvGrpSpPr/>
+        <p:nvPr/>
+      </p:nvGrpSpPr>
+      <p:grpSpPr>
+        <a:xfrm>
+          <a:off x="0" y="0"/>
+          <a:ext cx="0" cy="0"/>
+          <a:chOff x="0" y="0"/>
+          <a:chExt cx="0" cy="0"/>
+        </a:xfrm>
+      </p:grpSpPr>
+      <p:sp>
+        <p:nvSpPr>
+          <p:cNvPr id="2" name="Slide Image Placeholder 1"/>
+          <p:cNvSpPr>
+            <a:spLocks noGrp="1" noRot="1" noChangeAspect="1"/>
+          </p:cNvSpPr>
+          <p:nvPr>
+            <p:ph type="sldImg"/>
+          </p:nvPr>
+        </p:nvSpPr>
+        <p:spPr/>
+      </p:sp>
+      <p:sp>
+        <p:nvSpPr>
+          <p:cNvPr id="3" name="Notes Placeholder 2"/>
+          <p:cNvSpPr>
+            <a:spLocks noGrp="1"/>
+          </p:cNvSpPr>
+          <p:nvPr>
+            <p:ph type="body" idx="1"/>
+          </p:nvPr>
+        </p:nvSpPr>
+        <p:spPr/>
+        <p:txBody>
+          <a:bodyPr/>
+          <a:lstStyle/>
+          <a:p>
+            <a:r>
+              <a:rPr lang="en-US" dirty="0"/>
+              <a:t>These are the references and picture credits used to prepare this lesson.</a:t>
+            </a:r>
+            <a:endParaRPr lang="en-US" dirty="0"/>
+          </a:p>
+        </p:txBody>
+      </p:sp>
+      <p:sp>
+        <p:nvSpPr>
+          <p:cNvPr id="4" name="Slide Number Placeholder 3"/>
+          <p:cNvSpPr>
+            <a:spLocks noGrp="1"/>
+          </p:cNvSpPr>
+          <p:nvPr>
+            <p:ph type="sldNum" sz="quarter" idx="10"/>
+          </p:nvPr>
+        </p:nvSpPr>
+        <p:spPr/>
+        <p:txBody>
+          <a:bodyPr/>
+          <a:lstStyle/>
+          <a:p>
+            <a:fld id="{F7021451-1387-4CA6-816F-3879F97B5CBC}" type="slidenum">
+              <a:rPr lang="en-US"/>
+              <a:t>65</a:t>
             </a:fld>
             <a:endParaRPr lang="en-US"/>
           </a:p>
@@ -14831,7 +15187,7 @@
         <p:spPr>
           <a:xfrm>
             <a:off x="0" y="658368"/>
-            <a:ext cx="5120640" cy="5833872"/>
+            <a:ext cx="3840480" cy="5833872"/>
           </a:xfrm>
           <a:prstGeom prst="rect">
             <a:avLst/>
@@ -14846,8 +15202,8 @@
         </p:nvSpPr>
         <p:spPr>
           <a:xfrm>
-            <a:off x="5349240" y="1005840"/>
-            <a:ext cx="6522415" cy="731520"/>
+            <a:off x="4069080" y="1005840"/>
+            <a:ext cx="7802575" cy="731520"/>
           </a:xfrm>
           <a:prstGeom prst="rect">
             <a:avLst/>
@@ -14887,8 +15243,8 @@
         </p:nvSpPr>
         <p:spPr>
           <a:xfrm>
-            <a:off x="5349240" y="1783080"/>
-            <a:ext cx="6522415" cy="4663440"/>
+            <a:off x="4069080" y="1783080"/>
+            <a:ext cx="7802575" cy="4663440"/>
           </a:xfrm>
           <a:prstGeom prst="rect">
             <a:avLst/>
@@ -14933,6 +15289,43 @@
                 <a:cs typeface="Times New Roman" pitchFamily="34" charset="-120"/>
               </a:rPr>
               <a:t>It is the large, uniform area where an air mass forms and acquires its characteristics.</a:t>
+            </a:r>
+            <a:endParaRPr lang="en-US" sz="4000" dirty="0"/>
+          </a:p>
+          <a:p>
+            <a:pPr algn="l" indent="0" marL="0">
+              <a:spcAft>
+                <a:spcPts val="800"/>
+              </a:spcAft>
+              <a:buNone/>
+            </a:pPr>
+            <a:r>
+              <a:rPr lang="en-US" sz="4000" b="1" dirty="0">
+                <a:solidFill>
+                  <a:srgbClr val="111111"/>
+                </a:solidFill>
+                <a:latin typeface="Times New Roman" pitchFamily="34" charset="0"/>
+                <a:ea typeface="Times New Roman" pitchFamily="34" charset="-122"/>
+                <a:cs typeface="Times New Roman" pitchFamily="34" charset="-120"/>
+              </a:rPr>
+              <a:t>Front: </a:t>
+            </a:r>
+            <a:pPr algn="l" indent="0" marL="0">
+              <a:spcAft>
+                <a:spcPts val="800"/>
+              </a:spcAft>
+              <a:buNone/>
+            </a:pPr>
+            <a:r>
+              <a:rPr lang="en-US" sz="4000" dirty="0">
+                <a:solidFill>
+                  <a:srgbClr val="111111"/>
+                </a:solidFill>
+                <a:latin typeface="Times New Roman" pitchFamily="34" charset="0"/>
+                <a:ea typeface="Times New Roman" pitchFamily="34" charset="-122"/>
+                <a:cs typeface="Times New Roman" pitchFamily="34" charset="-120"/>
+              </a:rPr>
+              <a:t>It is the boundary between two air masses of different temperature and humidity.</a:t>
             </a:r>
             <a:endParaRPr lang="en-US" sz="4000" dirty="0"/>
           </a:p>
@@ -15050,129 +15443,9 @@
           </a:p>
         </p:txBody>
       </p:sp>
-      <p:sp>
-        <p:nvSpPr>
-          <p:cNvPr id="3" name="Text 1"/>
-          <p:cNvSpPr/>
-          <p:nvPr/>
-        </p:nvSpPr>
-        <p:spPr>
-          <a:xfrm>
-            <a:off x="365760" y="1005840"/>
-            <a:ext cx="11460175" cy="731520"/>
-          </a:xfrm>
-          <a:prstGeom prst="rect">
-            <a:avLst/>
-          </a:prstGeom>
-          <a:noFill/>
-          <a:ln/>
-        </p:spPr>
-        <p:txBody>
-          <a:bodyPr wrap="square" lIns="0" tIns="0" rIns="0" bIns="0" rtlCol="0" anchor="ctr">
-            <a:normAutofit/>
-          </a:bodyPr>
-          <a:lstStyle/>
-          <a:p>
-            <a:pPr algn="ctr" indent="0" marL="0">
-              <a:buNone/>
-            </a:pPr>
-            <a:r>
-              <a:rPr lang="en-US" sz="3600" b="1" dirty="0">
-                <a:solidFill>
-                  <a:srgbClr val="990011"/>
-                </a:solidFill>
-                <a:latin typeface="Times New Roman" pitchFamily="34" charset="0"/>
-                <a:ea typeface="Times New Roman" pitchFamily="34" charset="-122"/>
-                <a:cs typeface="Times New Roman" pitchFamily="34" charset="-120"/>
-              </a:rPr>
-              <a:t>1. Meaning and Characteristics of Air Masses</a:t>
-            </a:r>
-            <a:endParaRPr lang="en-US" sz="3600" dirty="0"/>
-          </a:p>
-        </p:txBody>
-      </p:sp>
-      <p:sp>
-        <p:nvSpPr>
-          <p:cNvPr id="4" name="Text 2"/>
-          <p:cNvSpPr/>
-          <p:nvPr/>
-        </p:nvSpPr>
-        <p:spPr>
-          <a:xfrm>
-            <a:off x="365760" y="1783080"/>
-            <a:ext cx="4846320" cy="4617720"/>
-          </a:xfrm>
-          <a:prstGeom prst="rect">
-            <a:avLst/>
-          </a:prstGeom>
-          <a:noFill/>
-          <a:ln/>
-        </p:spPr>
-        <p:txBody>
-          <a:bodyPr wrap="square" lIns="0" tIns="0" rIns="0" bIns="0" rtlCol="0" anchor="t"/>
-          <a:lstStyle/>
-          <a:p>
-            <a:pPr algn="l" indent="0" marL="0">
-              <a:spcAft>
-                <a:spcPts val="800"/>
-              </a:spcAft>
-              <a:buNone/>
-            </a:pPr>
-            <a:r>
-              <a:rPr lang="en-US" sz="3600" i="1" dirty="0">
-                <a:solidFill>
-                  <a:srgbClr val="111111"/>
-                </a:solidFill>
-                <a:latin typeface="Times New Roman" pitchFamily="34" charset="0"/>
-                <a:ea typeface="Times New Roman" pitchFamily="34" charset="-122"/>
-                <a:cs typeface="Times New Roman" pitchFamily="34" charset="-120"/>
-              </a:rPr>
-              <a:t>Air masses are presented as follows:</a:t>
-            </a:r>
-            <a:endParaRPr lang="en-US" sz="3600" dirty="0"/>
-          </a:p>
-          <a:p>
-            <a:pPr algn="l" indent="0" marL="0">
-              <a:spcAft>
-                <a:spcPts val="800"/>
-              </a:spcAft>
-              <a:buNone/>
-            </a:pPr>
-            <a:r>
-              <a:rPr lang="en-US" sz="3600" b="1" dirty="0">
-                <a:solidFill>
-                  <a:srgbClr val="111111"/>
-                </a:solidFill>
-                <a:latin typeface="Times New Roman" pitchFamily="34" charset="0"/>
-                <a:ea typeface="Times New Roman" pitchFamily="34" charset="-122"/>
-                <a:cs typeface="Times New Roman" pitchFamily="34" charset="-120"/>
-              </a:rPr>
-              <a:t>Size: </a:t>
-            </a:r>
-            <a:pPr algn="l" indent="0" marL="0">
-              <a:spcAft>
-                <a:spcPts val="800"/>
-              </a:spcAft>
-              <a:buNone/>
-            </a:pPr>
-            <a:r>
-              <a:rPr lang="en-US" sz="3600" dirty="0">
-                <a:solidFill>
-                  <a:srgbClr val="111111"/>
-                </a:solidFill>
-                <a:latin typeface="Times New Roman" pitchFamily="34" charset="0"/>
-                <a:ea typeface="Times New Roman" pitchFamily="34" charset="-122"/>
-                <a:cs typeface="Times New Roman" pitchFamily="34" charset="-120"/>
-              </a:rPr>
-              <a:t>An air mass covers thousands of square kilometres.</a:t>
-            </a:r>
-            <a:endParaRPr lang="en-US" sz="3600" dirty="0"/>
-          </a:p>
-        </p:txBody>
-      </p:sp>
       <p:pic>
         <p:nvPicPr>
-          <p:cNvPr id="5" name="Image 0" descr="/home/claude/f4/img/v2/airmass_source_big.png">    </p:cNvPr>
+          <p:cNvPr id="3" name="Image 0" descr="/home/claude/f4/img/minesec_sheet.png">    </p:cNvPr>
           <p:cNvPicPr>
             <a:picLocks noChangeAspect="1"/>
           </p:cNvPicPr>
@@ -15186,8 +15459,8 @@
         </p:blipFill>
         <p:spPr>
           <a:xfrm>
-            <a:off x="5349240" y="2617506"/>
-            <a:ext cx="6659575" cy="2601397"/>
+            <a:off x="0" y="658368"/>
+            <a:ext cx="5120640" cy="5833872"/>
           </a:xfrm>
           <a:prstGeom prst="rect">
             <a:avLst/>
@@ -15196,14 +15469,14 @@
       </p:pic>
       <p:sp>
         <p:nvSpPr>
-          <p:cNvPr id="6" name="Text 3"/>
+          <p:cNvPr id="4" name="Text 1"/>
           <p:cNvSpPr/>
           <p:nvPr/>
         </p:nvSpPr>
         <p:spPr>
           <a:xfrm>
-            <a:off x="5349240" y="6089904"/>
-            <a:ext cx="6659575" cy="347472"/>
+            <a:off x="5349240" y="1005840"/>
+            <a:ext cx="6522415" cy="731520"/>
           </a:xfrm>
           <a:prstGeom prst="rect">
             <a:avLst/>
@@ -15212,24 +15485,85 @@
           <a:ln/>
         </p:spPr>
         <p:txBody>
-          <a:bodyPr wrap="square" lIns="0" tIns="0" rIns="0" bIns="0" rtlCol="0" anchor="ctr"/>
+          <a:bodyPr wrap="square" lIns="0" tIns="0" rIns="0" bIns="0" rtlCol="0" anchor="ctr">
+            <a:normAutofit/>
+          </a:bodyPr>
           <a:lstStyle/>
           <a:p>
             <a:pPr algn="ctr" indent="0" marL="0">
               <a:buNone/>
             </a:pPr>
             <a:r>
-              <a:rPr lang="en-US" sz="1600" i="1" dirty="0">
-                <a:solidFill>
-                  <a:srgbClr val="555555"/>
+              <a:rPr lang="en-US" sz="3600" b="1" dirty="0">
+                <a:solidFill>
+                  <a:srgbClr val="990011"/>
                 </a:solidFill>
                 <a:latin typeface="Times New Roman" pitchFamily="34" charset="0"/>
                 <a:ea typeface="Times New Roman" pitchFamily="34" charset="-122"/>
                 <a:cs typeface="Times New Roman" pitchFamily="34" charset="-120"/>
               </a:rPr>
-              <a:t>Illustration: source regions</a:t>
-            </a:r>
-            <a:endParaRPr lang="en-US" sz="1600" dirty="0"/>
+              <a:t>DEFINITIONS (continued)</a:t>
+            </a:r>
+            <a:endParaRPr lang="en-US" sz="3600" dirty="0"/>
+          </a:p>
+        </p:txBody>
+      </p:sp>
+      <p:sp>
+        <p:nvSpPr>
+          <p:cNvPr id="5" name="Text 2"/>
+          <p:cNvSpPr/>
+          <p:nvPr/>
+        </p:nvSpPr>
+        <p:spPr>
+          <a:xfrm>
+            <a:off x="5349240" y="1783080"/>
+            <a:ext cx="6522415" cy="4663440"/>
+          </a:xfrm>
+          <a:prstGeom prst="rect">
+            <a:avLst/>
+          </a:prstGeom>
+          <a:noFill/>
+          <a:ln/>
+        </p:spPr>
+        <p:txBody>
+          <a:bodyPr wrap="square" lIns="0" tIns="0" rIns="0" bIns="0" rtlCol="0" anchor="t"/>
+          <a:lstStyle/>
+          <a:p>
+            <a:pPr algn="l" indent="0" marL="0">
+              <a:spcAft>
+                <a:spcPts val="800"/>
+              </a:spcAft>
+              <a:buNone/>
+            </a:pPr>
+            <a:r>
+              <a:rPr lang="en-US" sz="4000" b="1" dirty="0">
+                <a:solidFill>
+                  <a:srgbClr val="111111"/>
+                </a:solidFill>
+                <a:latin typeface="Times New Roman" pitchFamily="34" charset="0"/>
+                <a:ea typeface="Times New Roman" pitchFamily="34" charset="-122"/>
+                <a:cs typeface="Times New Roman" pitchFamily="34" charset="-120"/>
+              </a:rPr>
+              <a:t>Intertropical Convergence Zone (ITCZ): </a:t>
+            </a:r>
+            <a:pPr algn="l" indent="0" marL="0">
+              <a:spcAft>
+                <a:spcPts val="800"/>
+              </a:spcAft>
+              <a:buNone/>
+            </a:pPr>
+            <a:r>
+              <a:rPr lang="en-US" sz="4000" dirty="0">
+                <a:solidFill>
+                  <a:srgbClr val="111111"/>
+                </a:solidFill>
+                <a:latin typeface="Times New Roman" pitchFamily="34" charset="0"/>
+                <a:ea typeface="Times New Roman" pitchFamily="34" charset="-122"/>
+                <a:cs typeface="Times New Roman" pitchFamily="34" charset="-120"/>
+              </a:rPr>
+              <a:t>It is the zone where the air masses of the two hemispheres meet; over West Africa it is called the Intertropical Front (ITF).</a:t>
+            </a:r>
+            <a:endParaRPr lang="en-US" sz="4000" dirty="0"/>
           </a:p>
         </p:txBody>
       </p:sp>
@@ -15345,9 +15679,129 @@
           </a:p>
         </p:txBody>
       </p:sp>
+      <p:sp>
+        <p:nvSpPr>
+          <p:cNvPr id="3" name="Text 1"/>
+          <p:cNvSpPr/>
+          <p:nvPr/>
+        </p:nvSpPr>
+        <p:spPr>
+          <a:xfrm>
+            <a:off x="365760" y="1005840"/>
+            <a:ext cx="11460175" cy="731520"/>
+          </a:xfrm>
+          <a:prstGeom prst="rect">
+            <a:avLst/>
+          </a:prstGeom>
+          <a:noFill/>
+          <a:ln/>
+        </p:spPr>
+        <p:txBody>
+          <a:bodyPr wrap="square" lIns="0" tIns="0" rIns="0" bIns="0" rtlCol="0" anchor="ctr">
+            <a:normAutofit/>
+          </a:bodyPr>
+          <a:lstStyle/>
+          <a:p>
+            <a:pPr algn="ctr" indent="0" marL="0">
+              <a:buNone/>
+            </a:pPr>
+            <a:r>
+              <a:rPr lang="en-US" sz="3600" b="1" dirty="0">
+                <a:solidFill>
+                  <a:srgbClr val="990011"/>
+                </a:solidFill>
+                <a:latin typeface="Times New Roman" pitchFamily="34" charset="0"/>
+                <a:ea typeface="Times New Roman" pitchFamily="34" charset="-122"/>
+                <a:cs typeface="Times New Roman" pitchFamily="34" charset="-120"/>
+              </a:rPr>
+              <a:t>1. Meaning and Characteristics of Air Masses</a:t>
+            </a:r>
+            <a:endParaRPr lang="en-US" sz="3600" dirty="0"/>
+          </a:p>
+        </p:txBody>
+      </p:sp>
+      <p:sp>
+        <p:nvSpPr>
+          <p:cNvPr id="4" name="Text 2"/>
+          <p:cNvSpPr/>
+          <p:nvPr/>
+        </p:nvSpPr>
+        <p:spPr>
+          <a:xfrm>
+            <a:off x="365760" y="1783080"/>
+            <a:ext cx="6035040" cy="4617720"/>
+          </a:xfrm>
+          <a:prstGeom prst="rect">
+            <a:avLst/>
+          </a:prstGeom>
+          <a:noFill/>
+          <a:ln/>
+        </p:spPr>
+        <p:txBody>
+          <a:bodyPr wrap="square" lIns="0" tIns="0" rIns="0" bIns="0" rtlCol="0" anchor="t"/>
+          <a:lstStyle/>
+          <a:p>
+            <a:pPr algn="l" indent="0" marL="0">
+              <a:spcAft>
+                <a:spcPts val="800"/>
+              </a:spcAft>
+              <a:buNone/>
+            </a:pPr>
+            <a:r>
+              <a:rPr lang="en-US" sz="3600" i="1" dirty="0">
+                <a:solidFill>
+                  <a:srgbClr val="111111"/>
+                </a:solidFill>
+                <a:latin typeface="Times New Roman" pitchFamily="34" charset="0"/>
+                <a:ea typeface="Times New Roman" pitchFamily="34" charset="-122"/>
+                <a:cs typeface="Times New Roman" pitchFamily="34" charset="-120"/>
+              </a:rPr>
+              <a:t>Air masses have the following characteristics:</a:t>
+            </a:r>
+            <a:endParaRPr lang="en-US" sz="3600" dirty="0"/>
+          </a:p>
+          <a:p>
+            <a:pPr algn="l" indent="0" marL="0">
+              <a:spcAft>
+                <a:spcPts val="800"/>
+              </a:spcAft>
+              <a:buNone/>
+            </a:pPr>
+            <a:r>
+              <a:rPr lang="en-US" sz="3600" b="1" dirty="0">
+                <a:solidFill>
+                  <a:srgbClr val="111111"/>
+                </a:solidFill>
+                <a:latin typeface="Times New Roman" pitchFamily="34" charset="0"/>
+                <a:ea typeface="Times New Roman" pitchFamily="34" charset="-122"/>
+                <a:cs typeface="Times New Roman" pitchFamily="34" charset="-120"/>
+              </a:rPr>
+              <a:t>Size: </a:t>
+            </a:r>
+            <a:pPr algn="l" indent="0" marL="0">
+              <a:spcAft>
+                <a:spcPts val="800"/>
+              </a:spcAft>
+              <a:buNone/>
+            </a:pPr>
+            <a:r>
+              <a:rPr lang="en-US" sz="3600" dirty="0">
+                <a:solidFill>
+                  <a:srgbClr val="111111"/>
+                </a:solidFill>
+                <a:latin typeface="Times New Roman" pitchFamily="34" charset="0"/>
+                <a:ea typeface="Times New Roman" pitchFamily="34" charset="-122"/>
+                <a:cs typeface="Times New Roman" pitchFamily="34" charset="-120"/>
+              </a:rPr>
+              <a:t>An air mass is very large and can cover thousands of square kilometres, such as the whole of the Sahara. It can reach several kilometres in height.</a:t>
+            </a:r>
+            <a:endParaRPr lang="en-US" sz="3600" dirty="0"/>
+          </a:p>
+        </p:txBody>
+      </p:sp>
       <p:pic>
         <p:nvPicPr>
-          <p:cNvPr id="3" name="Image 0" descr="/home/claude/f4/img/minesec_sheet.png">    </p:cNvPr>
+          <p:cNvPr id="5" name="Image 0" descr="/home/claude/f4/img/v2/airmass_source_big.png">    </p:cNvPr>
           <p:cNvPicPr>
             <a:picLocks noChangeAspect="1"/>
           </p:cNvPicPr>
@@ -15361,8 +15815,8 @@
         </p:blipFill>
         <p:spPr>
           <a:xfrm>
-            <a:off x="0" y="658368"/>
-            <a:ext cx="3840480" cy="5833872"/>
+            <a:off x="6537960" y="2849678"/>
+            <a:ext cx="5470855" cy="2137053"/>
           </a:xfrm>
           <a:prstGeom prst="rect">
             <a:avLst/>
@@ -15371,14 +15825,14 @@
       </p:pic>
       <p:sp>
         <p:nvSpPr>
-          <p:cNvPr id="4" name="Text 1"/>
+          <p:cNvPr id="6" name="Text 3"/>
           <p:cNvSpPr/>
           <p:nvPr/>
         </p:nvSpPr>
         <p:spPr>
           <a:xfrm>
-            <a:off x="4069080" y="1005840"/>
-            <a:ext cx="7802575" cy="731520"/>
+            <a:off x="6537960" y="6089904"/>
+            <a:ext cx="5470855" cy="347472"/>
           </a:xfrm>
           <a:prstGeom prst="rect">
             <a:avLst/>
@@ -15387,122 +15841,24 @@
           <a:ln/>
         </p:spPr>
         <p:txBody>
-          <a:bodyPr wrap="square" lIns="0" tIns="0" rIns="0" bIns="0" rtlCol="0" anchor="ctr">
-            <a:normAutofit/>
-          </a:bodyPr>
+          <a:bodyPr wrap="square" lIns="0" tIns="0" rIns="0" bIns="0" rtlCol="0" anchor="ctr"/>
           <a:lstStyle/>
           <a:p>
             <a:pPr algn="ctr" indent="0" marL="0">
               <a:buNone/>
             </a:pPr>
             <a:r>
-              <a:rPr lang="en-US" sz="3600" b="1" dirty="0">
-                <a:solidFill>
-                  <a:srgbClr val="990011"/>
+              <a:rPr lang="en-US" sz="1600" i="1" dirty="0">
+                <a:solidFill>
+                  <a:srgbClr val="555555"/>
                 </a:solidFill>
                 <a:latin typeface="Times New Roman" pitchFamily="34" charset="0"/>
                 <a:ea typeface="Times New Roman" pitchFamily="34" charset="-122"/>
                 <a:cs typeface="Times New Roman" pitchFamily="34" charset="-120"/>
               </a:rPr>
-              <a:t>1. Meaning and Characteristics of Air Masses</a:t>
-            </a:r>
-            <a:endParaRPr lang="en-US" sz="3600" dirty="0"/>
-          </a:p>
-        </p:txBody>
-      </p:sp>
-      <p:sp>
-        <p:nvSpPr>
-          <p:cNvPr id="5" name="Text 2"/>
-          <p:cNvSpPr/>
-          <p:nvPr/>
-        </p:nvSpPr>
-        <p:spPr>
-          <a:xfrm>
-            <a:off x="4069080" y="1783080"/>
-            <a:ext cx="7802575" cy="4663440"/>
-          </a:xfrm>
-          <a:prstGeom prst="rect">
-            <a:avLst/>
-          </a:prstGeom>
-          <a:noFill/>
-          <a:ln/>
-        </p:spPr>
-        <p:txBody>
-          <a:bodyPr wrap="square" lIns="0" tIns="0" rIns="0" bIns="0" rtlCol="0" anchor="t"/>
-          <a:lstStyle/>
-          <a:p>
-            <a:pPr algn="l" indent="0" marL="0">
-              <a:spcAft>
-                <a:spcPts val="800"/>
-              </a:spcAft>
-              <a:buNone/>
-            </a:pPr>
-            <a:r>
-              <a:rPr lang="en-US" sz="4000" b="1" dirty="0">
-                <a:solidFill>
-                  <a:srgbClr val="111111"/>
-                </a:solidFill>
-                <a:latin typeface="Times New Roman" pitchFamily="34" charset="0"/>
-                <a:ea typeface="Times New Roman" pitchFamily="34" charset="-122"/>
-                <a:cs typeface="Times New Roman" pitchFamily="34" charset="-120"/>
-              </a:rPr>
-              <a:t>Acquired characteristics: </a:t>
-            </a:r>
-            <a:pPr algn="l" indent="0" marL="0">
-              <a:spcAft>
-                <a:spcPts val="800"/>
-              </a:spcAft>
-              <a:buNone/>
-            </a:pPr>
-            <a:r>
-              <a:rPr lang="en-US" sz="4000" dirty="0">
-                <a:solidFill>
-                  <a:srgbClr val="111111"/>
-                </a:solidFill>
-                <a:latin typeface="Times New Roman" pitchFamily="34" charset="0"/>
-                <a:ea typeface="Times New Roman" pitchFamily="34" charset="-122"/>
-                <a:cs typeface="Times New Roman" pitchFamily="34" charset="-120"/>
-              </a:rPr>
-              <a:t>Air staying long over a surface takes its temperature and moisture, like a sponge.</a:t>
-            </a:r>
-            <a:endParaRPr lang="en-US" sz="4000" dirty="0"/>
-          </a:p>
-          <a:p>
-            <a:pPr algn="l" indent="0" marL="0">
-              <a:spcAft>
-                <a:spcPts val="800"/>
-              </a:spcAft>
-              <a:buNone/>
-            </a:pPr>
-            <a:r>
-              <a:rPr lang="en-US" sz="4000" b="1" dirty="0">
-                <a:solidFill>
-                  <a:srgbClr val="111111"/>
-                </a:solidFill>
-                <a:latin typeface="Times New Roman" pitchFamily="34" charset="0"/>
-                <a:ea typeface="Times New Roman" pitchFamily="34" charset="-122"/>
-                <a:cs typeface="Times New Roman" pitchFamily="34" charset="-120"/>
-              </a:rPr>
-              <a:t>Good source regions: </a:t>
-            </a:r>
-            <a:pPr algn="l" indent="0" marL="0">
-              <a:spcAft>
-                <a:spcPts val="800"/>
-              </a:spcAft>
-              <a:buNone/>
-            </a:pPr>
-            <a:r>
-              <a:rPr lang="en-US" sz="4000" dirty="0">
-                <a:solidFill>
-                  <a:srgbClr val="111111"/>
-                </a:solidFill>
-                <a:latin typeface="Times New Roman" pitchFamily="34" charset="0"/>
-                <a:ea typeface="Times New Roman" pitchFamily="34" charset="-122"/>
-                <a:cs typeface="Times New Roman" pitchFamily="34" charset="-120"/>
-              </a:rPr>
-              <a:t>Large, flat and uniform areas such as deserts, oceans and ice-covered lands.</a:t>
-            </a:r>
-            <a:endParaRPr lang="en-US" sz="4000" dirty="0"/>
+              <a:t>Illustration: source regions of air masses</a:t>
+            </a:r>
+            <a:endParaRPr lang="en-US" sz="1600" dirty="0"/>
           </a:p>
         </p:txBody>
       </p:sp>
@@ -15874,7 +16230,7 @@
         <p:spPr>
           <a:xfrm>
             <a:off x="0" y="658368"/>
-            <a:ext cx="5120640" cy="5833872"/>
+            <a:ext cx="3840480" cy="5833872"/>
           </a:xfrm>
           <a:prstGeom prst="rect">
             <a:avLst/>
@@ -15889,8 +16245,8 @@
         </p:nvSpPr>
         <p:spPr>
           <a:xfrm>
-            <a:off x="5349240" y="1005840"/>
-            <a:ext cx="6522415" cy="731520"/>
+            <a:off x="4069080" y="1005840"/>
+            <a:ext cx="7802575" cy="731520"/>
           </a:xfrm>
           <a:prstGeom prst="rect">
             <a:avLst/>
@@ -15916,7 +16272,7 @@
                 <a:ea typeface="Times New Roman" pitchFamily="34" charset="-122"/>
                 <a:cs typeface="Times New Roman" pitchFamily="34" charset="-120"/>
               </a:rPr>
-              <a:t>1. Meaning and Characteristics of Air Masses (continued)</a:t>
+              <a:t>1. Meaning and Characteristics of Air Masses</a:t>
             </a:r>
             <a:endParaRPr lang="en-US" sz="3600" dirty="0"/>
           </a:p>
@@ -15930,8 +16286,8 @@
         </p:nvSpPr>
         <p:spPr>
           <a:xfrm>
-            <a:off x="5349240" y="1783080"/>
-            <a:ext cx="6522415" cy="4663440"/>
+            <a:off x="4069080" y="1783080"/>
+            <a:ext cx="7802575" cy="4663440"/>
           </a:xfrm>
           <a:prstGeom prst="rect">
             <a:avLst/>
@@ -15958,7 +16314,7 @@
                 <a:ea typeface="Times New Roman" pitchFamily="34" charset="-122"/>
                 <a:cs typeface="Times New Roman" pitchFamily="34" charset="-120"/>
               </a:rPr>
-              <a:t>Movement: </a:t>
+              <a:t>Uniform temperature and humidity: </a:t>
             </a:r>
             <a:pPr algn="l" indent="0" marL="0">
               <a:spcAft>
@@ -15975,7 +16331,7 @@
                 <a:ea typeface="Times New Roman" pitchFamily="34" charset="-122"/>
                 <a:cs typeface="Times New Roman" pitchFamily="34" charset="-120"/>
               </a:rPr>
-              <a:t>When an air mass moves, it brings the weather of its source region.</a:t>
+              <a:t>At the same height, the temperature and moisture of an air mass are almost the same everywhere. This is what distinguishes it from the air masses around it.</a:t>
             </a:r>
             <a:endParaRPr lang="en-US" sz="4000" dirty="0"/>
           </a:p>
@@ -16110,7 +16466,7 @@
         <p:spPr>
           <a:xfrm>
             <a:off x="0" y="658368"/>
-            <a:ext cx="1463040" cy="5833872"/>
+            <a:ext cx="5120640" cy="5833872"/>
           </a:xfrm>
           <a:prstGeom prst="rect">
             <a:avLst/>
@@ -16125,8 +16481,8 @@
         </p:nvSpPr>
         <p:spPr>
           <a:xfrm>
-            <a:off x="1691640" y="1005840"/>
-            <a:ext cx="10180015" cy="731520"/>
+            <a:off x="5349240" y="1005840"/>
+            <a:ext cx="6522415" cy="731520"/>
           </a:xfrm>
           <a:prstGeom prst="rect">
             <a:avLst/>
@@ -16152,7 +16508,7 @@
                 <a:ea typeface="Times New Roman" pitchFamily="34" charset="-122"/>
                 <a:cs typeface="Times New Roman" pitchFamily="34" charset="-120"/>
               </a:rPr>
-              <a:t>2. Classification of Air Masses</a:t>
+              <a:t>1. Meaning and Characteristics of Air Masses</a:t>
             </a:r>
             <a:endParaRPr lang="en-US" sz="3600" dirty="0"/>
           </a:p>
@@ -16166,8 +16522,8 @@
         </p:nvSpPr>
         <p:spPr>
           <a:xfrm>
-            <a:off x="1691640" y="1783080"/>
-            <a:ext cx="10180015" cy="4663440"/>
+            <a:off x="5349240" y="1783080"/>
+            <a:ext cx="6522415" cy="4663440"/>
           </a:xfrm>
           <a:prstGeom prst="rect">
             <a:avLst/>
@@ -16186,7 +16542,7 @@
               <a:buNone/>
             </a:pPr>
             <a:r>
-              <a:rPr lang="en-US" sz="4000" i="1" dirty="0">
+              <a:rPr lang="en-US" sz="4000" b="1" dirty="0">
                 <a:solidFill>
                   <a:srgbClr val="111111"/>
                 </a:solidFill>
@@ -16194,11 +16550,8 @@
                 <a:ea typeface="Times New Roman" pitchFamily="34" charset="-122"/>
                 <a:cs typeface="Times New Roman" pitchFamily="34" charset="-120"/>
               </a:rPr>
-              <a:t>Air masses are classified with two letters as follows:</a:t>
-            </a:r>
-            <a:endParaRPr lang="en-US" sz="4000" dirty="0"/>
-          </a:p>
-          <a:p>
+              <a:t>Weather of its source: </a:t>
+            </a:r>
             <a:pPr algn="l" indent="0" marL="0">
               <a:spcAft>
                 <a:spcPts val="800"/>
@@ -16206,7 +16559,7 @@
               <a:buNone/>
             </a:pPr>
             <a:r>
-              <a:rPr lang="en-US" sz="4000" b="1" dirty="0">
+              <a:rPr lang="en-US" sz="4000" dirty="0">
                 <a:solidFill>
                   <a:srgbClr val="111111"/>
                 </a:solidFill>
@@ -16214,49 +16567,7 @@
                 <a:ea typeface="Times New Roman" pitchFamily="34" charset="-122"/>
                 <a:cs typeface="Times New Roman" pitchFamily="34" charset="-120"/>
               </a:rPr>
-              <a:t>First letter (moisture):</a:t>
-            </a:r>
-            <a:endParaRPr lang="en-US" sz="4000" dirty="0"/>
-          </a:p>
-          <a:p>
-            <a:pPr algn="l" marL="342900" indent="-342900">
-              <a:spcAft>
-                <a:spcPts val="800"/>
-              </a:spcAft>
-              <a:buSzPct val="100000"/>
-              <a:buChar char="•"/>
-            </a:pPr>
-            <a:r>
-              <a:rPr lang="en-US" sz="4000" dirty="0">
-                <a:solidFill>
-                  <a:srgbClr val="111111"/>
-                </a:solidFill>
-                <a:latin typeface="Times New Roman" pitchFamily="34" charset="0"/>
-                <a:ea typeface="Times New Roman" pitchFamily="34" charset="-122"/>
-                <a:cs typeface="Times New Roman" pitchFamily="34" charset="-120"/>
-              </a:rPr>
-              <a:t>c = continental: formed over land, dry.</a:t>
-            </a:r>
-            <a:endParaRPr lang="en-US" sz="4000" dirty="0"/>
-          </a:p>
-          <a:p>
-            <a:pPr algn="l" marL="342900" indent="-342900">
-              <a:spcAft>
-                <a:spcPts val="800"/>
-              </a:spcAft>
-              <a:buSzPct val="100000"/>
-              <a:buChar char="•"/>
-            </a:pPr>
-            <a:r>
-              <a:rPr lang="en-US" sz="4000" dirty="0">
-                <a:solidFill>
-                  <a:srgbClr val="111111"/>
-                </a:solidFill>
-                <a:latin typeface="Times New Roman" pitchFamily="34" charset="0"/>
-                <a:ea typeface="Times New Roman" pitchFamily="34" charset="-122"/>
-                <a:cs typeface="Times New Roman" pitchFamily="34" charset="-120"/>
-              </a:rPr>
-              <a:t>m = maritime: formed over the sea, moist.</a:t>
+              <a:t>An air mass brings the weather of its source region to the places it crosses. For example, air from the Sahara is always dry, while air from the ocean is moist.</a:t>
             </a:r>
             <a:endParaRPr lang="en-US" sz="4000" dirty="0"/>
           </a:p>
@@ -16391,7 +16702,7 @@
         <p:spPr>
           <a:xfrm>
             <a:off x="0" y="658368"/>
-            <a:ext cx="5120640" cy="5833872"/>
+            <a:ext cx="1463040" cy="5833872"/>
           </a:xfrm>
           <a:prstGeom prst="rect">
             <a:avLst/>
@@ -16406,8 +16717,8 @@
         </p:nvSpPr>
         <p:spPr>
           <a:xfrm>
-            <a:off x="5349240" y="1005840"/>
-            <a:ext cx="6522415" cy="731520"/>
+            <a:off x="1691640" y="1005840"/>
+            <a:ext cx="10180015" cy="731520"/>
           </a:xfrm>
           <a:prstGeom prst="rect">
             <a:avLst/>
@@ -16433,7 +16744,7 @@
                 <a:ea typeface="Times New Roman" pitchFamily="34" charset="-122"/>
                 <a:cs typeface="Times New Roman" pitchFamily="34" charset="-120"/>
               </a:rPr>
-              <a:t>2. Classification of Air Masses (continued)</a:t>
+              <a:t>2. Development of Air Masses</a:t>
             </a:r>
             <a:endParaRPr lang="en-US" sz="3600" dirty="0"/>
           </a:p>
@@ -16447,8 +16758,8 @@
         </p:nvSpPr>
         <p:spPr>
           <a:xfrm>
-            <a:off x="5349240" y="1783080"/>
-            <a:ext cx="6522415" cy="4663440"/>
+            <a:off x="1691640" y="1783080"/>
+            <a:ext cx="10180015" cy="4663440"/>
           </a:xfrm>
           <a:prstGeom prst="rect">
             <a:avLst/>
@@ -16467,7 +16778,7 @@
               <a:buNone/>
             </a:pPr>
             <a:r>
-              <a:rPr lang="en-US" sz="4000" b="1" dirty="0">
+              <a:rPr lang="en-US" sz="4000" i="1" dirty="0">
                 <a:solidFill>
                   <a:srgbClr val="111111"/>
                 </a:solidFill>
@@ -16475,20 +16786,19 @@
                 <a:ea typeface="Times New Roman" pitchFamily="34" charset="-122"/>
                 <a:cs typeface="Times New Roman" pitchFamily="34" charset="-120"/>
               </a:rPr>
-              <a:t>Second letter (temperature):</a:t>
+              <a:t>Air masses acquire their characteristics in the following way:</a:t>
             </a:r>
             <a:endParaRPr lang="en-US" sz="4000" dirty="0"/>
           </a:p>
           <a:p>
-            <a:pPr algn="l" marL="342900" indent="-342900">
+            <a:pPr algn="l" indent="0" marL="0">
               <a:spcAft>
                 <a:spcPts val="800"/>
               </a:spcAft>
-              <a:buSzPct val="100000"/>
-              <a:buChar char="•"/>
+              <a:buNone/>
             </a:pPr>
             <a:r>
-              <a:rPr lang="en-US" sz="4000" dirty="0">
+              <a:rPr lang="en-US" sz="4000" b="1" dirty="0">
                 <a:solidFill>
                   <a:srgbClr val="111111"/>
                 </a:solidFill>
@@ -16496,17 +16806,13 @@
                 <a:ea typeface="Times New Roman" pitchFamily="34" charset="-122"/>
                 <a:cs typeface="Times New Roman" pitchFamily="34" charset="-120"/>
               </a:rPr>
-              <a:t>E = equatorial: very warm.</a:t>
-            </a:r>
-            <a:endParaRPr lang="en-US" sz="4000" dirty="0"/>
-          </a:p>
-          <a:p>
-            <a:pPr algn="l" marL="342900" indent="-342900">
+              <a:t>A uniform source region: </a:t>
+            </a:r>
+            <a:pPr algn="l" indent="0" marL="0">
               <a:spcAft>
                 <a:spcPts val="800"/>
               </a:spcAft>
-              <a:buSzPct val="100000"/>
-              <a:buChar char="•"/>
+              <a:buNone/>
             </a:pPr>
             <a:r>
               <a:rPr lang="en-US" sz="4000" dirty="0">
@@ -16517,49 +16823,7 @@
                 <a:ea typeface="Times New Roman" pitchFamily="34" charset="-122"/>
                 <a:cs typeface="Times New Roman" pitchFamily="34" charset="-120"/>
               </a:rPr>
-              <a:t>T = tropical: warm.</a:t>
-            </a:r>
-            <a:endParaRPr lang="en-US" sz="4000" dirty="0"/>
-          </a:p>
-          <a:p>
-            <a:pPr algn="l" marL="342900" indent="-342900">
-              <a:spcAft>
-                <a:spcPts val="800"/>
-              </a:spcAft>
-              <a:buSzPct val="100000"/>
-              <a:buChar char="•"/>
-            </a:pPr>
-            <a:r>
-              <a:rPr lang="en-US" sz="4000" dirty="0">
-                <a:solidFill>
-                  <a:srgbClr val="111111"/>
-                </a:solidFill>
-                <a:latin typeface="Times New Roman" pitchFamily="34" charset="0"/>
-                <a:ea typeface="Times New Roman" pitchFamily="34" charset="-122"/>
-                <a:cs typeface="Times New Roman" pitchFamily="34" charset="-120"/>
-              </a:rPr>
-              <a:t>P = polar: cold.</a:t>
-            </a:r>
-            <a:endParaRPr lang="en-US" sz="4000" dirty="0"/>
-          </a:p>
-          <a:p>
-            <a:pPr algn="l" marL="342900" indent="-342900">
-              <a:spcAft>
-                <a:spcPts val="800"/>
-              </a:spcAft>
-              <a:buSzPct val="100000"/>
-              <a:buChar char="•"/>
-            </a:pPr>
-            <a:r>
-              <a:rPr lang="en-US" sz="4000" dirty="0">
-                <a:solidFill>
-                  <a:srgbClr val="111111"/>
-                </a:solidFill>
-                <a:latin typeface="Times New Roman" pitchFamily="34" charset="0"/>
-                <a:ea typeface="Times New Roman" pitchFamily="34" charset="-122"/>
-                <a:cs typeface="Times New Roman" pitchFamily="34" charset="-120"/>
-              </a:rPr>
-              <a:t>A = arctic or antarctic: very cold.</a:t>
+              <a:t>An air mass forms over a large, flat and uniform surface, such as a desert, an ocean or an ice-covered plain. Mountains and mixed surfaces do not make good source regions.</a:t>
             </a:r>
             <a:endParaRPr lang="en-US" sz="4000" dirty="0"/>
           </a:p>
@@ -16677,109 +16941,9 @@
           </a:p>
         </p:txBody>
       </p:sp>
-      <p:sp>
-        <p:nvSpPr>
-          <p:cNvPr id="3" name="Text 1"/>
-          <p:cNvSpPr/>
-          <p:nvPr/>
-        </p:nvSpPr>
-        <p:spPr>
-          <a:xfrm>
-            <a:off x="365760" y="1005840"/>
-            <a:ext cx="11460175" cy="731520"/>
-          </a:xfrm>
-          <a:prstGeom prst="rect">
-            <a:avLst/>
-          </a:prstGeom>
-          <a:noFill/>
-          <a:ln/>
-        </p:spPr>
-        <p:txBody>
-          <a:bodyPr wrap="square" lIns="0" tIns="0" rIns="0" bIns="0" rtlCol="0" anchor="ctr">
-            <a:normAutofit/>
-          </a:bodyPr>
-          <a:lstStyle/>
-          <a:p>
-            <a:pPr algn="ctr" indent="0" marL="0">
-              <a:buNone/>
-            </a:pPr>
-            <a:r>
-              <a:rPr lang="en-US" sz="3600" b="1" dirty="0">
-                <a:solidFill>
-                  <a:srgbClr val="990011"/>
-                </a:solidFill>
-                <a:latin typeface="Times New Roman" pitchFamily="34" charset="0"/>
-                <a:ea typeface="Times New Roman" pitchFamily="34" charset="-122"/>
-                <a:cs typeface="Times New Roman" pitchFamily="34" charset="-120"/>
-              </a:rPr>
-              <a:t>2. Classification of Air Masses</a:t>
-            </a:r>
-            <a:endParaRPr lang="en-US" sz="3600" dirty="0"/>
-          </a:p>
-        </p:txBody>
-      </p:sp>
-      <p:sp>
-        <p:nvSpPr>
-          <p:cNvPr id="4" name="Text 2"/>
-          <p:cNvSpPr/>
-          <p:nvPr/>
-        </p:nvSpPr>
-        <p:spPr>
-          <a:xfrm>
-            <a:off x="365760" y="1783080"/>
-            <a:ext cx="4846320" cy="4617720"/>
-          </a:xfrm>
-          <a:prstGeom prst="rect">
-            <a:avLst/>
-          </a:prstGeom>
-          <a:noFill/>
-          <a:ln/>
-        </p:spPr>
-        <p:txBody>
-          <a:bodyPr wrap="square" lIns="0" tIns="0" rIns="0" bIns="0" rtlCol="0" anchor="t"/>
-          <a:lstStyle/>
-          <a:p>
-            <a:pPr algn="l" indent="0" marL="0">
-              <a:spcAft>
-                <a:spcPts val="800"/>
-              </a:spcAft>
-              <a:buNone/>
-            </a:pPr>
-            <a:r>
-              <a:rPr lang="en-US" sz="3600" b="1" dirty="0">
-                <a:solidFill>
-                  <a:srgbClr val="111111"/>
-                </a:solidFill>
-                <a:latin typeface="Times New Roman" pitchFamily="34" charset="0"/>
-                <a:ea typeface="Times New Roman" pitchFamily="34" charset="-122"/>
-                <a:cs typeface="Times New Roman" pitchFamily="34" charset="-120"/>
-              </a:rPr>
-              <a:t>Examples: </a:t>
-            </a:r>
-            <a:pPr algn="l" indent="0" marL="0">
-              <a:spcAft>
-                <a:spcPts val="800"/>
-              </a:spcAft>
-              <a:buNone/>
-            </a:pPr>
-            <a:r>
-              <a:rPr lang="en-US" sz="3600" dirty="0">
-                <a:solidFill>
-                  <a:srgbClr val="111111"/>
-                </a:solidFill>
-                <a:latin typeface="Times New Roman" pitchFamily="34" charset="0"/>
-                <a:ea typeface="Times New Roman" pitchFamily="34" charset="-122"/>
-                <a:cs typeface="Times New Roman" pitchFamily="34" charset="-120"/>
-              </a:rPr>
-              <a:t>cT is hot and dry (Sahara), mT is warm and moist (tropical oceans), cP is cold and dry (Siberia).</a:t>
-            </a:r>
-            <a:endParaRPr lang="en-US" sz="3600" dirty="0"/>
-          </a:p>
-        </p:txBody>
-      </p:sp>
       <p:pic>
         <p:nvPicPr>
-          <p:cNvPr id="5" name="Image 0" descr="/home/claude/f4/img/v2/airmass_classes_big.png">    </p:cNvPr>
+          <p:cNvPr id="3" name="Image 0" descr="/home/claude/f4/img/minesec_sheet.png">    </p:cNvPr>
           <p:cNvPicPr>
             <a:picLocks noChangeAspect="1"/>
           </p:cNvPicPr>
@@ -16793,8 +16957,8 @@
         </p:blipFill>
         <p:spPr>
           <a:xfrm>
-            <a:off x="5349240" y="2617506"/>
-            <a:ext cx="6659575" cy="2601397"/>
+            <a:off x="0" y="658368"/>
+            <a:ext cx="3840480" cy="5833872"/>
           </a:xfrm>
           <a:prstGeom prst="rect">
             <a:avLst/>
@@ -16803,14 +16967,14 @@
       </p:pic>
       <p:sp>
         <p:nvSpPr>
-          <p:cNvPr id="6" name="Text 3"/>
+          <p:cNvPr id="4" name="Text 1"/>
           <p:cNvSpPr/>
           <p:nvPr/>
         </p:nvSpPr>
         <p:spPr>
           <a:xfrm>
-            <a:off x="5349240" y="6089904"/>
-            <a:ext cx="6659575" cy="347472"/>
+            <a:off x="4069080" y="1005840"/>
+            <a:ext cx="7802575" cy="731520"/>
           </a:xfrm>
           <a:prstGeom prst="rect">
             <a:avLst/>
@@ -16819,24 +16983,85 @@
           <a:ln/>
         </p:spPr>
         <p:txBody>
-          <a:bodyPr wrap="square" lIns="0" tIns="0" rIns="0" bIns="0" rtlCol="0" anchor="ctr"/>
+          <a:bodyPr wrap="square" lIns="0" tIns="0" rIns="0" bIns="0" rtlCol="0" anchor="ctr">
+            <a:normAutofit/>
+          </a:bodyPr>
           <a:lstStyle/>
           <a:p>
             <a:pPr algn="ctr" indent="0" marL="0">
               <a:buNone/>
             </a:pPr>
             <a:r>
-              <a:rPr lang="en-US" sz="1600" i="1" dirty="0">
-                <a:solidFill>
-                  <a:srgbClr val="555555"/>
+              <a:rPr lang="en-US" sz="3600" b="1" dirty="0">
+                <a:solidFill>
+                  <a:srgbClr val="990011"/>
                 </a:solidFill>
                 <a:latin typeface="Times New Roman" pitchFamily="34" charset="0"/>
                 <a:ea typeface="Times New Roman" pitchFamily="34" charset="-122"/>
                 <a:cs typeface="Times New Roman" pitchFamily="34" charset="-120"/>
               </a:rPr>
-              <a:t>Illustration: classification of air masses</a:t>
-            </a:r>
-            <a:endParaRPr lang="en-US" sz="1600" dirty="0"/>
+              <a:t>2. Development of Air Masses</a:t>
+            </a:r>
+            <a:endParaRPr lang="en-US" sz="3600" dirty="0"/>
+          </a:p>
+        </p:txBody>
+      </p:sp>
+      <p:sp>
+        <p:nvSpPr>
+          <p:cNvPr id="5" name="Text 2"/>
+          <p:cNvSpPr/>
+          <p:nvPr/>
+        </p:nvSpPr>
+        <p:spPr>
+          <a:xfrm>
+            <a:off x="4069080" y="1783080"/>
+            <a:ext cx="7802575" cy="4663440"/>
+          </a:xfrm>
+          <a:prstGeom prst="rect">
+            <a:avLst/>
+          </a:prstGeom>
+          <a:noFill/>
+          <a:ln/>
+        </p:spPr>
+        <p:txBody>
+          <a:bodyPr wrap="square" lIns="0" tIns="0" rIns="0" bIns="0" rtlCol="0" anchor="t"/>
+          <a:lstStyle/>
+          <a:p>
+            <a:pPr algn="l" indent="0" marL="0">
+              <a:spcAft>
+                <a:spcPts val="800"/>
+              </a:spcAft>
+              <a:buNone/>
+            </a:pPr>
+            <a:r>
+              <a:rPr lang="en-US" sz="4000" b="1" dirty="0">
+                <a:solidFill>
+                  <a:srgbClr val="111111"/>
+                </a:solidFill>
+                <a:latin typeface="Times New Roman" pitchFamily="34" charset="0"/>
+                <a:ea typeface="Times New Roman" pitchFamily="34" charset="-122"/>
+                <a:cs typeface="Times New Roman" pitchFamily="34" charset="-120"/>
+              </a:rPr>
+              <a:t>A long stay over the source: </a:t>
+            </a:r>
+            <a:pPr algn="l" indent="0" marL="0">
+              <a:spcAft>
+                <a:spcPts val="800"/>
+              </a:spcAft>
+              <a:buNone/>
+            </a:pPr>
+            <a:r>
+              <a:rPr lang="en-US" sz="4000" dirty="0">
+                <a:solidFill>
+                  <a:srgbClr val="111111"/>
+                </a:solidFill>
+                <a:latin typeface="Times New Roman" pitchFamily="34" charset="0"/>
+                <a:ea typeface="Times New Roman" pitchFamily="34" charset="-122"/>
+                <a:cs typeface="Times New Roman" pitchFamily="34" charset="-120"/>
+              </a:rPr>
+              <a:t>The air must stay over the source for several days or weeks, usually in a calm anticyclone. Like a sponge, it slowly takes the temperature and moisture of the surface below.</a:t>
+            </a:r>
+            <a:endParaRPr lang="en-US" sz="4000" dirty="0"/>
           </a:p>
         </p:txBody>
       </p:sp>
@@ -16952,129 +17177,9 @@
           </a:p>
         </p:txBody>
       </p:sp>
-      <p:sp>
-        <p:nvSpPr>
-          <p:cNvPr id="3" name="Text 1"/>
-          <p:cNvSpPr/>
-          <p:nvPr/>
-        </p:nvSpPr>
-        <p:spPr>
-          <a:xfrm>
-            <a:off x="365760" y="1005840"/>
-            <a:ext cx="11460175" cy="731520"/>
-          </a:xfrm>
-          <a:prstGeom prst="rect">
-            <a:avLst/>
-          </a:prstGeom>
-          <a:noFill/>
-          <a:ln/>
-        </p:spPr>
-        <p:txBody>
-          <a:bodyPr wrap="square" lIns="0" tIns="0" rIns="0" bIns="0" rtlCol="0" anchor="ctr">
-            <a:normAutofit/>
-          </a:bodyPr>
-          <a:lstStyle/>
-          <a:p>
-            <a:pPr algn="ctr" indent="0" marL="0">
-              <a:buNone/>
-            </a:pPr>
-            <a:r>
-              <a:rPr lang="en-US" sz="3600" b="1" dirty="0">
-                <a:solidFill>
-                  <a:srgbClr val="990011"/>
-                </a:solidFill>
-                <a:latin typeface="Times New Roman" pitchFamily="34" charset="0"/>
-                <a:ea typeface="Times New Roman" pitchFamily="34" charset="-122"/>
-                <a:cs typeface="Times New Roman" pitchFamily="34" charset="-120"/>
-              </a:rPr>
-              <a:t>3. Air Masses Affecting Cameroon and West Africa</a:t>
-            </a:r>
-            <a:endParaRPr lang="en-US" sz="3600" dirty="0"/>
-          </a:p>
-        </p:txBody>
-      </p:sp>
-      <p:sp>
-        <p:nvSpPr>
-          <p:cNvPr id="4" name="Text 2"/>
-          <p:cNvSpPr/>
-          <p:nvPr/>
-        </p:nvSpPr>
-        <p:spPr>
-          <a:xfrm>
-            <a:off x="365760" y="1783080"/>
-            <a:ext cx="4846320" cy="4617720"/>
-          </a:xfrm>
-          <a:prstGeom prst="rect">
-            <a:avLst/>
-          </a:prstGeom>
-          <a:noFill/>
-          <a:ln/>
-        </p:spPr>
-        <p:txBody>
-          <a:bodyPr wrap="square" lIns="0" tIns="0" rIns="0" bIns="0" rtlCol="0" anchor="t"/>
-          <a:lstStyle/>
-          <a:p>
-            <a:pPr algn="l" indent="0" marL="0">
-              <a:spcAft>
-                <a:spcPts val="800"/>
-              </a:spcAft>
-              <a:buNone/>
-            </a:pPr>
-            <a:r>
-              <a:rPr lang="en-US" sz="3200" i="1" dirty="0">
-                <a:solidFill>
-                  <a:srgbClr val="111111"/>
-                </a:solidFill>
-                <a:latin typeface="Times New Roman" pitchFamily="34" charset="0"/>
-                <a:ea typeface="Times New Roman" pitchFamily="34" charset="-122"/>
-                <a:cs typeface="Times New Roman" pitchFamily="34" charset="-120"/>
-              </a:rPr>
-              <a:t>Two air masses control the seasons of Cameroon as follows:</a:t>
-            </a:r>
-            <a:endParaRPr lang="en-US" sz="3200" dirty="0"/>
-          </a:p>
-          <a:p>
-            <a:pPr algn="l" indent="0" marL="0">
-              <a:spcAft>
-                <a:spcPts val="800"/>
-              </a:spcAft>
-              <a:buNone/>
-            </a:pPr>
-            <a:r>
-              <a:rPr lang="en-US" sz="3200" b="1" dirty="0">
-                <a:solidFill>
-                  <a:srgbClr val="111111"/>
-                </a:solidFill>
-                <a:latin typeface="Times New Roman" pitchFamily="34" charset="0"/>
-                <a:ea typeface="Times New Roman" pitchFamily="34" charset="-122"/>
-                <a:cs typeface="Times New Roman" pitchFamily="34" charset="-120"/>
-              </a:rPr>
-              <a:t>Tropical continental (cT): </a:t>
-            </a:r>
-            <a:pPr algn="l" indent="0" marL="0">
-              <a:spcAft>
-                <a:spcPts val="800"/>
-              </a:spcAft>
-              <a:buNone/>
-            </a:pPr>
-            <a:r>
-              <a:rPr lang="en-US" sz="3200" dirty="0">
-                <a:solidFill>
-                  <a:srgbClr val="111111"/>
-                </a:solidFill>
-                <a:latin typeface="Times New Roman" pitchFamily="34" charset="0"/>
-                <a:ea typeface="Times New Roman" pitchFamily="34" charset="-122"/>
-                <a:cs typeface="Times New Roman" pitchFamily="34" charset="-120"/>
-              </a:rPr>
-              <a:t>It comes from the Sahara; it is hot, very dry, dusty and stable, and blows as the Harmattan.</a:t>
-            </a:r>
-            <a:endParaRPr lang="en-US" sz="3200" dirty="0"/>
-          </a:p>
-        </p:txBody>
-      </p:sp>
       <p:pic>
         <p:nvPicPr>
-          <p:cNvPr id="5" name="Image 0" descr="/home/claude/f4/img/v2/f2t_harmattan.jpg">    </p:cNvPr>
+          <p:cNvPr id="3" name="Image 0" descr="/home/claude/f4/img/minesec_sheet.png">    </p:cNvPr>
           <p:cNvPicPr>
             <a:picLocks noChangeAspect="1"/>
           </p:cNvPicPr>
@@ -17088,8 +17193,8 @@
         </p:blipFill>
         <p:spPr>
           <a:xfrm>
-            <a:off x="5349240" y="2071212"/>
-            <a:ext cx="6659575" cy="3693983"/>
+            <a:off x="0" y="658368"/>
+            <a:ext cx="2468880" cy="5833872"/>
           </a:xfrm>
           <a:prstGeom prst="rect">
             <a:avLst/>
@@ -17098,14 +17203,14 @@
       </p:pic>
       <p:sp>
         <p:nvSpPr>
-          <p:cNvPr id="6" name="Text 3"/>
+          <p:cNvPr id="4" name="Text 1"/>
           <p:cNvSpPr/>
           <p:nvPr/>
         </p:nvSpPr>
         <p:spPr>
           <a:xfrm>
-            <a:off x="5349240" y="6089904"/>
-            <a:ext cx="6659575" cy="347472"/>
+            <a:off x="2697480" y="1005840"/>
+            <a:ext cx="9174175" cy="731520"/>
           </a:xfrm>
           <a:prstGeom prst="rect">
             <a:avLst/>
@@ -17114,24 +17219,85 @@
           <a:ln/>
         </p:spPr>
         <p:txBody>
-          <a:bodyPr wrap="square" lIns="0" tIns="0" rIns="0" bIns="0" rtlCol="0" anchor="ctr"/>
+          <a:bodyPr wrap="square" lIns="0" tIns="0" rIns="0" bIns="0" rtlCol="0" anchor="ctr">
+            <a:normAutofit/>
+          </a:bodyPr>
           <a:lstStyle/>
           <a:p>
             <a:pPr algn="ctr" indent="0" marL="0">
               <a:buNone/>
             </a:pPr>
             <a:r>
-              <a:rPr lang="en-US" sz="1600" i="1" dirty="0">
-                <a:solidFill>
-                  <a:srgbClr val="555555"/>
+              <a:rPr lang="en-US" sz="3600" b="1" dirty="0">
+                <a:solidFill>
+                  <a:srgbClr val="990011"/>
                 </a:solidFill>
                 <a:latin typeface="Times New Roman" pitchFamily="34" charset="0"/>
                 <a:ea typeface="Times New Roman" pitchFamily="34" charset="-122"/>
                 <a:cs typeface="Times New Roman" pitchFamily="34" charset="-120"/>
               </a:rPr>
-              <a:t>Illustration: Harmattan haze</a:t>
-            </a:r>
-            <a:endParaRPr lang="en-US" sz="1600" dirty="0"/>
+              <a:t>2. Development of Air Masses</a:t>
+            </a:r>
+            <a:endParaRPr lang="en-US" sz="3600" dirty="0"/>
+          </a:p>
+        </p:txBody>
+      </p:sp>
+      <p:sp>
+        <p:nvSpPr>
+          <p:cNvPr id="5" name="Text 2"/>
+          <p:cNvSpPr/>
+          <p:nvPr/>
+        </p:nvSpPr>
+        <p:spPr>
+          <a:xfrm>
+            <a:off x="2697480" y="1783080"/>
+            <a:ext cx="9174175" cy="4663440"/>
+          </a:xfrm>
+          <a:prstGeom prst="rect">
+            <a:avLst/>
+          </a:prstGeom>
+          <a:noFill/>
+          <a:ln/>
+        </p:spPr>
+        <p:txBody>
+          <a:bodyPr wrap="square" lIns="0" tIns="0" rIns="0" bIns="0" rtlCol="0" anchor="t"/>
+          <a:lstStyle/>
+          <a:p>
+            <a:pPr algn="l" indent="0" marL="0">
+              <a:spcAft>
+                <a:spcPts val="800"/>
+              </a:spcAft>
+              <a:buNone/>
+            </a:pPr>
+            <a:r>
+              <a:rPr lang="en-US" sz="4000" b="1" dirty="0">
+                <a:solidFill>
+                  <a:srgbClr val="111111"/>
+                </a:solidFill>
+                <a:latin typeface="Times New Roman" pitchFamily="34" charset="0"/>
+                <a:ea typeface="Times New Roman" pitchFamily="34" charset="-122"/>
+                <a:cs typeface="Times New Roman" pitchFamily="34" charset="-120"/>
+              </a:rPr>
+              <a:t>Modification when moving: </a:t>
+            </a:r>
+            <a:pPr algn="l" indent="0" marL="0">
+              <a:spcAft>
+                <a:spcPts val="800"/>
+              </a:spcAft>
+              <a:buNone/>
+            </a:pPr>
+            <a:r>
+              <a:rPr lang="en-US" sz="4000" dirty="0">
+                <a:solidFill>
+                  <a:srgbClr val="111111"/>
+                </a:solidFill>
+                <a:latin typeface="Times New Roman" pitchFamily="34" charset="0"/>
+                <a:ea typeface="Times New Roman" pitchFamily="34" charset="-122"/>
+                <a:cs typeface="Times New Roman" pitchFamily="34" charset="-120"/>
+              </a:rPr>
+              <a:t>When the air mass moves, it is slowly changed by the surfaces it crosses. For example, dry Saharan air picks up moisture over the Gulf of Guinea, and cold air becomes unstable when it passes over a warm sea.</a:t>
+            </a:r>
+            <a:endParaRPr lang="en-US" sz="4000" dirty="0"/>
           </a:p>
         </p:txBody>
       </p:sp>
@@ -17264,7 +17430,7 @@
         <p:spPr>
           <a:xfrm>
             <a:off x="0" y="658368"/>
-            <a:ext cx="5120640" cy="5833872"/>
+            <a:ext cx="1463040" cy="5833872"/>
           </a:xfrm>
           <a:prstGeom prst="rect">
             <a:avLst/>
@@ -17279,8 +17445,8 @@
         </p:nvSpPr>
         <p:spPr>
           <a:xfrm>
-            <a:off x="5349240" y="1005840"/>
-            <a:ext cx="6522415" cy="731520"/>
+            <a:off x="1691640" y="1005840"/>
+            <a:ext cx="10180015" cy="731520"/>
           </a:xfrm>
           <a:prstGeom prst="rect">
             <a:avLst/>
@@ -17306,7 +17472,7 @@
                 <a:ea typeface="Times New Roman" pitchFamily="34" charset="-122"/>
                 <a:cs typeface="Times New Roman" pitchFamily="34" charset="-120"/>
               </a:rPr>
-              <a:t>3. Air Masses Affecting Cameroon and West Africa</a:t>
+              <a:t>3. Classification and Examples</a:t>
             </a:r>
             <a:endParaRPr lang="en-US" sz="3600" dirty="0"/>
           </a:p>
@@ -17320,8 +17486,8 @@
         </p:nvSpPr>
         <p:spPr>
           <a:xfrm>
-            <a:off x="5349240" y="1783080"/>
-            <a:ext cx="6522415" cy="4663440"/>
+            <a:off x="1691640" y="1783080"/>
+            <a:ext cx="10180015" cy="4663440"/>
           </a:xfrm>
           <a:prstGeom prst="rect">
             <a:avLst/>
@@ -17340,7 +17506,7 @@
               <a:buNone/>
             </a:pPr>
             <a:r>
-              <a:rPr lang="en-US" sz="4000" b="1" dirty="0">
+              <a:rPr lang="en-US" sz="4000" i="1" dirty="0">
                 <a:solidFill>
                   <a:srgbClr val="111111"/>
                 </a:solidFill>
@@ -17348,8 +17514,11 @@
                 <a:ea typeface="Times New Roman" pitchFamily="34" charset="-122"/>
                 <a:cs typeface="Times New Roman" pitchFamily="34" charset="-120"/>
               </a:rPr>
-              <a:t>Influence of cT: </a:t>
-            </a:r>
+              <a:t>Air masses are classified with two letters as follows:</a:t>
+            </a:r>
+            <a:endParaRPr lang="en-US" sz="4000" dirty="0"/>
+          </a:p>
+          <a:p>
             <a:pPr algn="l" indent="0" marL="0">
               <a:spcAft>
                 <a:spcPts val="800"/>
@@ -17357,7 +17526,7 @@
               <a:buNone/>
             </a:pPr>
             <a:r>
-              <a:rPr lang="en-US" sz="4000" dirty="0">
+              <a:rPr lang="en-US" sz="4000" b="1" dirty="0">
                 <a:solidFill>
                   <a:srgbClr val="111111"/>
                 </a:solidFill>
@@ -17365,7 +17534,24 @@
                 <a:ea typeface="Times New Roman" pitchFamily="34" charset="-122"/>
                 <a:cs typeface="Times New Roman" pitchFamily="34" charset="-120"/>
               </a:rPr>
-              <a:t>It dominates the dry season (about November to March in Garoua), with sunshine, haze, low humidity and a risk of fires.</a:t>
+              <a:t>First letter (humidity): </a:t>
+            </a:r>
+            <a:pPr algn="l" indent="0" marL="0">
+              <a:spcAft>
+                <a:spcPts val="800"/>
+              </a:spcAft>
+              <a:buNone/>
+            </a:pPr>
+            <a:r>
+              <a:rPr lang="en-US" sz="4000" dirty="0">
+                <a:solidFill>
+                  <a:srgbClr val="111111"/>
+                </a:solidFill>
+                <a:latin typeface="Times New Roman" pitchFamily="34" charset="0"/>
+                <a:ea typeface="Times New Roman" pitchFamily="34" charset="-122"/>
+                <a:cs typeface="Times New Roman" pitchFamily="34" charset="-120"/>
+              </a:rPr>
+              <a:t>The letter c (continental) is used for an air mass formed over land, which is dry. The letter m (maritime) is used for an air mass formed over the sea, which is moist.</a:t>
             </a:r>
             <a:endParaRPr lang="en-US" sz="4000" dirty="0"/>
           </a:p>
@@ -17518,7 +17704,7 @@
                 <a:ea typeface="Times New Roman" pitchFamily="34" charset="-122"/>
                 <a:cs typeface="Times New Roman" pitchFamily="34" charset="-120"/>
               </a:rPr>
-              <a:t>3. Air Masses Affecting Cameroon and West Africa</a:t>
+              <a:t>3. Classification and Examples</a:t>
             </a:r>
             <a:endParaRPr lang="en-US" sz="3600" dirty="0"/>
           </a:p>
@@ -17533,7 +17719,7 @@
         <p:spPr>
           <a:xfrm>
             <a:off x="365760" y="1783080"/>
-            <a:ext cx="4846320" cy="4617720"/>
+            <a:ext cx="6035040" cy="4617720"/>
           </a:xfrm>
           <a:prstGeom prst="rect">
             <a:avLst/>
@@ -17560,7 +17746,7 @@
                 <a:ea typeface="Times New Roman" pitchFamily="34" charset="-122"/>
                 <a:cs typeface="Times New Roman" pitchFamily="34" charset="-120"/>
               </a:rPr>
-              <a:t>Tropical maritime (mT): </a:t>
+              <a:t>Second letter (temperature): </a:t>
             </a:r>
             <a:pPr algn="l" indent="0" marL="0">
               <a:spcAft>
@@ -17577,7 +17763,7 @@
                 <a:ea typeface="Times New Roman" pitchFamily="34" charset="-122"/>
                 <a:cs typeface="Times New Roman" pitchFamily="34" charset="-120"/>
               </a:rPr>
-              <a:t>It comes from the South Atlantic; it is warm, very moist and unstable, and blows as the south-west monsoon.</a:t>
+              <a:t>E means equatorial (very warm), T tropical (warm), P polar (cold) and A arctic or antarctic (very cold). The letters show the latitude of the source region.</a:t>
             </a:r>
             <a:endParaRPr lang="en-US" sz="3600" dirty="0"/>
           </a:p>
@@ -17585,7 +17771,7 @@
       </p:sp>
       <p:pic>
         <p:nvPicPr>
-          <p:cNvPr id="5" name="Image 0" descr="/home/claude/f4/img/v2/f4_heavyrain.jpg">    </p:cNvPr>
+          <p:cNvPr id="5" name="Image 0" descr="/home/claude/f4/img/v2/airmass_classes_big.png">    </p:cNvPr>
           <p:cNvPicPr>
             <a:picLocks noChangeAspect="1"/>
           </p:cNvPicPr>
@@ -17599,8 +17785,8 @@
         </p:blipFill>
         <p:spPr>
           <a:xfrm>
-            <a:off x="5349240" y="2071212"/>
-            <a:ext cx="6659575" cy="3693983"/>
+            <a:off x="6537960" y="2849678"/>
+            <a:ext cx="5470855" cy="2137053"/>
           </a:xfrm>
           <a:prstGeom prst="rect">
             <a:avLst/>
@@ -17615,8 +17801,8 @@
         </p:nvSpPr>
         <p:spPr>
           <a:xfrm>
-            <a:off x="5349240" y="6089904"/>
-            <a:ext cx="6659575" cy="347472"/>
+            <a:off x="6537960" y="6089904"/>
+            <a:ext cx="5470855" cy="347472"/>
           </a:xfrm>
           <a:prstGeom prst="rect">
             <a:avLst/>
@@ -17640,7 +17826,7 @@
                 <a:ea typeface="Times New Roman" pitchFamily="34" charset="-122"/>
                 <a:cs typeface="Times New Roman" pitchFamily="34" charset="-120"/>
               </a:rPr>
-              <a:t>Illustration: heavy rain</a:t>
+              <a:t>Illustration: the classification of air masses</a:t>
             </a:r>
             <a:endParaRPr lang="en-US" sz="1600" dirty="0"/>
           </a:p>
@@ -17775,7 +17961,7 @@
         <p:spPr>
           <a:xfrm>
             <a:off x="0" y="658368"/>
-            <a:ext cx="5120640" cy="5833872"/>
+            <a:ext cx="2468880" cy="5833872"/>
           </a:xfrm>
           <a:prstGeom prst="rect">
             <a:avLst/>
@@ -17790,8 +17976,8 @@
         </p:nvSpPr>
         <p:spPr>
           <a:xfrm>
-            <a:off x="5349240" y="1005840"/>
-            <a:ext cx="6522415" cy="731520"/>
+            <a:off x="2697480" y="1005840"/>
+            <a:ext cx="9174175" cy="731520"/>
           </a:xfrm>
           <a:prstGeom prst="rect">
             <a:avLst/>
@@ -17817,7 +18003,7 @@
                 <a:ea typeface="Times New Roman" pitchFamily="34" charset="-122"/>
                 <a:cs typeface="Times New Roman" pitchFamily="34" charset="-120"/>
               </a:rPr>
-              <a:t>3. Air Masses Affecting Cameroon and West Africa</a:t>
+              <a:t>3. Classification and Examples</a:t>
             </a:r>
             <a:endParaRPr lang="en-US" sz="3600" dirty="0"/>
           </a:p>
@@ -17831,8 +18017,8 @@
         </p:nvSpPr>
         <p:spPr>
           <a:xfrm>
-            <a:off x="5349240" y="1783080"/>
-            <a:ext cx="6522415" cy="4663440"/>
+            <a:off x="2697480" y="1783080"/>
+            <a:ext cx="9174175" cy="4663440"/>
           </a:xfrm>
           <a:prstGeom prst="rect">
             <a:avLst/>
@@ -17859,7 +18045,7 @@
                 <a:ea typeface="Times New Roman" pitchFamily="34" charset="-122"/>
                 <a:cs typeface="Times New Roman" pitchFamily="34" charset="-120"/>
               </a:rPr>
-              <a:t>Influence of mT: </a:t>
+              <a:t>Examples: </a:t>
             </a:r>
             <a:pPr algn="l" indent="0" marL="0">
               <a:spcAft>
@@ -17876,7 +18062,7 @@
                 <a:ea typeface="Times New Roman" pitchFamily="34" charset="-122"/>
                 <a:cs typeface="Times New Roman" pitchFamily="34" charset="-120"/>
               </a:rPr>
-              <a:t>It brings the rainy season (about May to September–October in Garoua), with cumulonimbus clouds and storms; the coast of Cameroon receives the most rain.</a:t>
+              <a:t>cT is hot and dry, like the Saharan air; mT is warm and moist, like the air over the tropical oceans. cP is cold and dry, like the Siberian air in winter, and mP is cool and moist, like the air of the North Atlantic.</a:t>
             </a:r>
             <a:endParaRPr lang="en-US" sz="4000" dirty="0"/>
           </a:p>
@@ -17994,109 +18180,9 @@
           </a:p>
         </p:txBody>
       </p:sp>
-      <p:sp>
-        <p:nvSpPr>
-          <p:cNvPr id="3" name="Text 1"/>
-          <p:cNvSpPr/>
-          <p:nvPr/>
-        </p:nvSpPr>
-        <p:spPr>
-          <a:xfrm>
-            <a:off x="365760" y="1005840"/>
-            <a:ext cx="11460175" cy="731520"/>
-          </a:xfrm>
-          <a:prstGeom prst="rect">
-            <a:avLst/>
-          </a:prstGeom>
-          <a:noFill/>
-          <a:ln/>
-        </p:spPr>
-        <p:txBody>
-          <a:bodyPr wrap="square" lIns="0" tIns="0" rIns="0" bIns="0" rtlCol="0" anchor="ctr">
-            <a:normAutofit/>
-          </a:bodyPr>
-          <a:lstStyle/>
-          <a:p>
-            <a:pPr algn="ctr" indent="0" marL="0">
-              <a:buNone/>
-            </a:pPr>
-            <a:r>
-              <a:rPr lang="en-US" sz="3600" b="1" dirty="0">
-                <a:solidFill>
-                  <a:srgbClr val="990011"/>
-                </a:solidFill>
-                <a:latin typeface="Times New Roman" pitchFamily="34" charset="0"/>
-                <a:ea typeface="Times New Roman" pitchFamily="34" charset="-122"/>
-                <a:cs typeface="Times New Roman" pitchFamily="34" charset="-120"/>
-              </a:rPr>
-              <a:t>3. Air Masses Affecting Cameroon and West Africa</a:t>
-            </a:r>
-            <a:endParaRPr lang="en-US" sz="3600" dirty="0"/>
-          </a:p>
-        </p:txBody>
-      </p:sp>
-      <p:sp>
-        <p:nvSpPr>
-          <p:cNvPr id="4" name="Text 2"/>
-          <p:cNvSpPr/>
-          <p:nvPr/>
-        </p:nvSpPr>
-        <p:spPr>
-          <a:xfrm>
-            <a:off x="365760" y="1783080"/>
-            <a:ext cx="4846320" cy="4617720"/>
-          </a:xfrm>
-          <a:prstGeom prst="rect">
-            <a:avLst/>
-          </a:prstGeom>
-          <a:noFill/>
-          <a:ln/>
-        </p:spPr>
-        <p:txBody>
-          <a:bodyPr wrap="square" lIns="0" tIns="0" rIns="0" bIns="0" rtlCol="0" anchor="t"/>
-          <a:lstStyle/>
-          <a:p>
-            <a:pPr algn="l" indent="0" marL="0">
-              <a:spcAft>
-                <a:spcPts val="800"/>
-              </a:spcAft>
-              <a:buNone/>
-            </a:pPr>
-            <a:r>
-              <a:rPr lang="en-US" sz="3600" b="1" dirty="0">
-                <a:solidFill>
-                  <a:srgbClr val="111111"/>
-                </a:solidFill>
-                <a:latin typeface="Times New Roman" pitchFamily="34" charset="0"/>
-                <a:ea typeface="Times New Roman" pitchFamily="34" charset="-122"/>
-                <a:cs typeface="Times New Roman" pitchFamily="34" charset="-120"/>
-              </a:rPr>
-              <a:t>The meeting zone: </a:t>
-            </a:r>
-            <a:pPr algn="l" indent="0" marL="0">
-              <a:spcAft>
-                <a:spcPts val="800"/>
-              </a:spcAft>
-              <a:buNone/>
-            </a:pPr>
-            <a:r>
-              <a:rPr lang="en-US" sz="3600" dirty="0">
-                <a:solidFill>
-                  <a:srgbClr val="111111"/>
-                </a:solidFill>
-                <a:latin typeface="Times New Roman" pitchFamily="34" charset="0"/>
-                <a:ea typeface="Times New Roman" pitchFamily="34" charset="-122"/>
-                <a:cs typeface="Times New Roman" pitchFamily="34" charset="-120"/>
-              </a:rPr>
-              <a:t>The two air masses meet at the Intertropical Front (ITF), which moves north and south with the seasons.</a:t>
-            </a:r>
-            <a:endParaRPr lang="en-US" sz="3600" dirty="0"/>
-          </a:p>
-        </p:txBody>
-      </p:sp>
       <p:pic>
         <p:nvPicPr>
-          <p:cNvPr id="5" name="Image 0" descr="/home/claude/f4/img/v2/wa_airmasses_big.png">    </p:cNvPr>
+          <p:cNvPr id="3" name="Image 0" descr="/home/claude/f4/img/minesec_sheet.png">    </p:cNvPr>
           <p:cNvPicPr>
             <a:picLocks noChangeAspect="1"/>
           </p:cNvPicPr>
@@ -18110,8 +18196,8 @@
         </p:blipFill>
         <p:spPr>
           <a:xfrm>
-            <a:off x="5349240" y="2253310"/>
-            <a:ext cx="6659575" cy="3329788"/>
+            <a:off x="0" y="658368"/>
+            <a:ext cx="2468880" cy="5833872"/>
           </a:xfrm>
           <a:prstGeom prst="rect">
             <a:avLst/>
@@ -18120,14 +18206,14 @@
       </p:pic>
       <p:sp>
         <p:nvSpPr>
-          <p:cNvPr id="6" name="Text 3"/>
+          <p:cNvPr id="4" name="Text 1"/>
           <p:cNvSpPr/>
           <p:nvPr/>
         </p:nvSpPr>
         <p:spPr>
           <a:xfrm>
-            <a:off x="5349240" y="6089904"/>
-            <a:ext cx="6659575" cy="347472"/>
+            <a:off x="2697480" y="1005840"/>
+            <a:ext cx="9174175" cy="731520"/>
           </a:xfrm>
           <a:prstGeom prst="rect">
             <a:avLst/>
@@ -18136,24 +18222,105 @@
           <a:ln/>
         </p:spPr>
         <p:txBody>
-          <a:bodyPr wrap="square" lIns="0" tIns="0" rIns="0" bIns="0" rtlCol="0" anchor="ctr"/>
+          <a:bodyPr wrap="square" lIns="0" tIns="0" rIns="0" bIns="0" rtlCol="0" anchor="ctr">
+            <a:normAutofit/>
+          </a:bodyPr>
           <a:lstStyle/>
           <a:p>
             <a:pPr algn="ctr" indent="0" marL="0">
               <a:buNone/>
             </a:pPr>
             <a:r>
-              <a:rPr lang="en-US" sz="1600" i="1" dirty="0">
-                <a:solidFill>
-                  <a:srgbClr val="555555"/>
+              <a:rPr lang="en-US" sz="3600" b="1" dirty="0">
+                <a:solidFill>
+                  <a:srgbClr val="990011"/>
                 </a:solidFill>
                 <a:latin typeface="Times New Roman" pitchFamily="34" charset="0"/>
                 <a:ea typeface="Times New Roman" pitchFamily="34" charset="-122"/>
                 <a:cs typeface="Times New Roman" pitchFamily="34" charset="-120"/>
               </a:rPr>
-              <a:t>Illustration: air masses over West Africa</a:t>
-            </a:r>
-            <a:endParaRPr lang="en-US" sz="1600" dirty="0"/>
+              <a:t>4. Types and Movements of Air Masses</a:t>
+            </a:r>
+            <a:endParaRPr lang="en-US" sz="3600" dirty="0"/>
+          </a:p>
+        </p:txBody>
+      </p:sp>
+      <p:sp>
+        <p:nvSpPr>
+          <p:cNvPr id="5" name="Text 2"/>
+          <p:cNvSpPr/>
+          <p:nvPr/>
+        </p:nvSpPr>
+        <p:spPr>
+          <a:xfrm>
+            <a:off x="2697480" y="1783080"/>
+            <a:ext cx="9174175" cy="4663440"/>
+          </a:xfrm>
+          <a:prstGeom prst="rect">
+            <a:avLst/>
+          </a:prstGeom>
+          <a:noFill/>
+          <a:ln/>
+        </p:spPr>
+        <p:txBody>
+          <a:bodyPr wrap="square" lIns="0" tIns="0" rIns="0" bIns="0" rtlCol="0" anchor="t"/>
+          <a:lstStyle/>
+          <a:p>
+            <a:pPr algn="l" indent="0" marL="0">
+              <a:spcAft>
+                <a:spcPts val="800"/>
+              </a:spcAft>
+              <a:buNone/>
+            </a:pPr>
+            <a:r>
+              <a:rPr lang="en-US" sz="4000" i="1" dirty="0">
+                <a:solidFill>
+                  <a:srgbClr val="111111"/>
+                </a:solidFill>
+                <a:latin typeface="Times New Roman" pitchFamily="34" charset="0"/>
+                <a:ea typeface="Times New Roman" pitchFamily="34" charset="-122"/>
+                <a:cs typeface="Times New Roman" pitchFamily="34" charset="-120"/>
+              </a:rPr>
+              <a:t>Air masses are of the following types and move as follows:</a:t>
+            </a:r>
+            <a:endParaRPr lang="en-US" sz="4000" dirty="0"/>
+          </a:p>
+          <a:p>
+            <a:pPr algn="l" indent="0" marL="0">
+              <a:spcAft>
+                <a:spcPts val="800"/>
+              </a:spcAft>
+              <a:buNone/>
+            </a:pPr>
+            <a:r>
+              <a:rPr lang="en-US" sz="4000" b="1" dirty="0">
+                <a:solidFill>
+                  <a:srgbClr val="111111"/>
+                </a:solidFill>
+                <a:latin typeface="Times New Roman" pitchFamily="34" charset="0"/>
+                <a:ea typeface="Times New Roman" pitchFamily="34" charset="-122"/>
+                <a:cs typeface="Times New Roman" pitchFamily="34" charset="-120"/>
+              </a:rPr>
+              <a:t>Warm air masses: </a:t>
+            </a:r>
+            <a:pPr algn="l" indent="0" marL="0">
+              <a:spcAft>
+                <a:spcPts val="800"/>
+              </a:spcAft>
+              <a:buNone/>
+            </a:pPr>
+            <a:r>
+              <a:rPr lang="en-US" sz="4000" dirty="0">
+                <a:solidFill>
+                  <a:srgbClr val="111111"/>
+                </a:solidFill>
+                <a:latin typeface="Times New Roman" pitchFamily="34" charset="0"/>
+                <a:ea typeface="Times New Roman" pitchFamily="34" charset="-122"/>
+                <a:cs typeface="Times New Roman" pitchFamily="34" charset="-120"/>
+              </a:rPr>
+              <a:t>A warm air mass is warmer than the surface it moves over, so it is cooled from below. It becomes stable and brings layer clouds, drizzle and fog.</a:t>
+            </a:r>
+            <a:endParaRPr lang="en-US" sz="4000" dirty="0"/>
           </a:p>
         </p:txBody>
       </p:sp>
@@ -18269,109 +18436,9 @@
           </a:p>
         </p:txBody>
       </p:sp>
-      <p:sp>
-        <p:nvSpPr>
-          <p:cNvPr id="3" name="Text 1"/>
-          <p:cNvSpPr/>
-          <p:nvPr/>
-        </p:nvSpPr>
-        <p:spPr>
-          <a:xfrm>
-            <a:off x="365760" y="1005840"/>
-            <a:ext cx="11460175" cy="731520"/>
-          </a:xfrm>
-          <a:prstGeom prst="rect">
-            <a:avLst/>
-          </a:prstGeom>
-          <a:noFill/>
-          <a:ln/>
-        </p:spPr>
-        <p:txBody>
-          <a:bodyPr wrap="square" lIns="0" tIns="0" rIns="0" bIns="0" rtlCol="0" anchor="ctr">
-            <a:normAutofit/>
-          </a:bodyPr>
-          <a:lstStyle/>
-          <a:p>
-            <a:pPr algn="ctr" indent="0" marL="0">
-              <a:buNone/>
-            </a:pPr>
-            <a:r>
-              <a:rPr lang="en-US" sz="3600" b="1" dirty="0">
-                <a:solidFill>
-                  <a:srgbClr val="990011"/>
-                </a:solidFill>
-                <a:latin typeface="Times New Roman" pitchFamily="34" charset="0"/>
-                <a:ea typeface="Times New Roman" pitchFamily="34" charset="-122"/>
-                <a:cs typeface="Times New Roman" pitchFamily="34" charset="-120"/>
-              </a:rPr>
-              <a:t>3. Air Masses Affecting Cameroon and West Africa</a:t>
-            </a:r>
-            <a:endParaRPr lang="en-US" sz="3600" dirty="0"/>
-          </a:p>
-        </p:txBody>
-      </p:sp>
-      <p:sp>
-        <p:nvSpPr>
-          <p:cNvPr id="4" name="Text 2"/>
-          <p:cNvSpPr/>
-          <p:nvPr/>
-        </p:nvSpPr>
-        <p:spPr>
-          <a:xfrm>
-            <a:off x="365760" y="1783080"/>
-            <a:ext cx="4846320" cy="4617720"/>
-          </a:xfrm>
-          <a:prstGeom prst="rect">
-            <a:avLst/>
-          </a:prstGeom>
-          <a:noFill/>
-          <a:ln/>
-        </p:spPr>
-        <p:txBody>
-          <a:bodyPr wrap="square" lIns="0" tIns="0" rIns="0" bIns="0" rtlCol="0" anchor="t"/>
-          <a:lstStyle/>
-          <a:p>
-            <a:pPr algn="l" indent="0" marL="0">
-              <a:spcAft>
-                <a:spcPts val="800"/>
-              </a:spcAft>
-              <a:buNone/>
-            </a:pPr>
-            <a:r>
-              <a:rPr lang="en-US" sz="3600" b="1" dirty="0">
-                <a:solidFill>
-                  <a:srgbClr val="111111"/>
-                </a:solidFill>
-                <a:latin typeface="Times New Roman" pitchFamily="34" charset="0"/>
-                <a:ea typeface="Times New Roman" pitchFamily="34" charset="-122"/>
-                <a:cs typeface="Times New Roman" pitchFamily="34" charset="-120"/>
-              </a:rPr>
-              <a:t>Comparison: </a:t>
-            </a:r>
-            <a:pPr algn="l" indent="0" marL="0">
-              <a:spcAft>
-                <a:spcPts val="800"/>
-              </a:spcAft>
-              <a:buNone/>
-            </a:pPr>
-            <a:r>
-              <a:rPr lang="en-US" sz="3600" dirty="0">
-                <a:solidFill>
-                  <a:srgbClr val="111111"/>
-                </a:solidFill>
-                <a:latin typeface="Times New Roman" pitchFamily="34" charset="0"/>
-                <a:ea typeface="Times New Roman" pitchFamily="34" charset="-122"/>
-                <a:cs typeface="Times New Roman" pitchFamily="34" charset="-120"/>
-              </a:rPr>
-              <a:t>The two air masses are opposite in almost everything.</a:t>
-            </a:r>
-            <a:endParaRPr lang="en-US" sz="3600" dirty="0"/>
-          </a:p>
-        </p:txBody>
-      </p:sp>
       <p:pic>
         <p:nvPicPr>
-          <p:cNvPr id="5" name="Image 0" descr="/home/claude/f4/img/v2/met2_am_cmr.png">    </p:cNvPr>
+          <p:cNvPr id="3" name="Image 0" descr="/home/claude/f4/img/minesec_sheet.png">    </p:cNvPr>
           <p:cNvPicPr>
             <a:picLocks noChangeAspect="1"/>
           </p:cNvPicPr>
@@ -18385,8 +18452,8 @@
         </p:blipFill>
         <p:spPr>
           <a:xfrm>
-            <a:off x="5349240" y="2617506"/>
-            <a:ext cx="6659575" cy="2601397"/>
+            <a:off x="0" y="658368"/>
+            <a:ext cx="5120640" cy="5833872"/>
           </a:xfrm>
           <a:prstGeom prst="rect">
             <a:avLst/>
@@ -18395,14 +18462,14 @@
       </p:pic>
       <p:sp>
         <p:nvSpPr>
-          <p:cNvPr id="6" name="Text 3"/>
+          <p:cNvPr id="4" name="Text 1"/>
           <p:cNvSpPr/>
           <p:nvPr/>
         </p:nvSpPr>
         <p:spPr>
           <a:xfrm>
-            <a:off x="5349240" y="6089904"/>
-            <a:ext cx="6659575" cy="347472"/>
+            <a:off x="5349240" y="1005840"/>
+            <a:ext cx="6522415" cy="731520"/>
           </a:xfrm>
           <a:prstGeom prst="rect">
             <a:avLst/>
@@ -18411,24 +18478,85 @@
           <a:ln/>
         </p:spPr>
         <p:txBody>
-          <a:bodyPr wrap="square" lIns="0" tIns="0" rIns="0" bIns="0" rtlCol="0" anchor="ctr"/>
+          <a:bodyPr wrap="square" lIns="0" tIns="0" rIns="0" bIns="0" rtlCol="0" anchor="ctr">
+            <a:normAutofit/>
+          </a:bodyPr>
           <a:lstStyle/>
           <a:p>
             <a:pPr algn="ctr" indent="0" marL="0">
               <a:buNone/>
             </a:pPr>
             <a:r>
-              <a:rPr lang="en-US" sz="1600" i="1" dirty="0">
-                <a:solidFill>
-                  <a:srgbClr val="555555"/>
+              <a:rPr lang="en-US" sz="3600" b="1" dirty="0">
+                <a:solidFill>
+                  <a:srgbClr val="990011"/>
                 </a:solidFill>
                 <a:latin typeface="Times New Roman" pitchFamily="34" charset="0"/>
                 <a:ea typeface="Times New Roman" pitchFamily="34" charset="-122"/>
                 <a:cs typeface="Times New Roman" pitchFamily="34" charset="-120"/>
               </a:rPr>
-              <a:t>Illustration: cT and mT compared</a:t>
-            </a:r>
-            <a:endParaRPr lang="en-US" sz="1600" dirty="0"/>
+              <a:t>4. Types and Movements of Air Masses</a:t>
+            </a:r>
+            <a:endParaRPr lang="en-US" sz="3600" dirty="0"/>
+          </a:p>
+        </p:txBody>
+      </p:sp>
+      <p:sp>
+        <p:nvSpPr>
+          <p:cNvPr id="5" name="Text 2"/>
+          <p:cNvSpPr/>
+          <p:nvPr/>
+        </p:nvSpPr>
+        <p:spPr>
+          <a:xfrm>
+            <a:off x="5349240" y="1783080"/>
+            <a:ext cx="6522415" cy="4663440"/>
+          </a:xfrm>
+          <a:prstGeom prst="rect">
+            <a:avLst/>
+          </a:prstGeom>
+          <a:noFill/>
+          <a:ln/>
+        </p:spPr>
+        <p:txBody>
+          <a:bodyPr wrap="square" lIns="0" tIns="0" rIns="0" bIns="0" rtlCol="0" anchor="t"/>
+          <a:lstStyle/>
+          <a:p>
+            <a:pPr algn="l" indent="0" marL="0">
+              <a:spcAft>
+                <a:spcPts val="800"/>
+              </a:spcAft>
+              <a:buNone/>
+            </a:pPr>
+            <a:r>
+              <a:rPr lang="en-US" sz="4000" b="1" dirty="0">
+                <a:solidFill>
+                  <a:srgbClr val="111111"/>
+                </a:solidFill>
+                <a:latin typeface="Times New Roman" pitchFamily="34" charset="0"/>
+                <a:ea typeface="Times New Roman" pitchFamily="34" charset="-122"/>
+                <a:cs typeface="Times New Roman" pitchFamily="34" charset="-120"/>
+              </a:rPr>
+              <a:t>Cold air masses: </a:t>
+            </a:r>
+            <a:pPr algn="l" indent="0" marL="0">
+              <a:spcAft>
+                <a:spcPts val="800"/>
+              </a:spcAft>
+              <a:buNone/>
+            </a:pPr>
+            <a:r>
+              <a:rPr lang="en-US" sz="4000" dirty="0">
+                <a:solidFill>
+                  <a:srgbClr val="111111"/>
+                </a:solidFill>
+                <a:latin typeface="Times New Roman" pitchFamily="34" charset="0"/>
+                <a:ea typeface="Times New Roman" pitchFamily="34" charset="-122"/>
+                <a:cs typeface="Times New Roman" pitchFamily="34" charset="-120"/>
+              </a:rPr>
+              <a:t>A cold air mass is colder than the surface it moves over, so it is heated from below. It becomes unstable and brings cumulus clouds and showers.</a:t>
+            </a:r>
+            <a:endParaRPr lang="en-US" sz="4000" dirty="0"/>
           </a:p>
         </p:txBody>
       </p:sp>
@@ -18757,7 +18885,7 @@
                 <a:ea typeface="Calibri" pitchFamily="34" charset="-122"/>
                 <a:cs typeface="Calibri" pitchFamily="34" charset="-120"/>
               </a:rPr>
-              <a:t>FORMATIVE EVALUATION</a:t>
+              <a:t>BOARD SUMMARY</a:t>
             </a:r>
             <a:endParaRPr lang="en-US" sz="1400" dirty="0"/>
           </a:p>
@@ -18780,7 +18908,7 @@
         <p:spPr>
           <a:xfrm>
             <a:off x="0" y="658368"/>
-            <a:ext cx="5120640" cy="5833872"/>
+            <a:ext cx="3840480" cy="5833872"/>
           </a:xfrm>
           <a:prstGeom prst="rect">
             <a:avLst/>
@@ -18795,8 +18923,8 @@
         </p:nvSpPr>
         <p:spPr>
           <a:xfrm>
-            <a:off x="5349240" y="1005840"/>
-            <a:ext cx="6522415" cy="731520"/>
+            <a:off x="4069080" y="1005840"/>
+            <a:ext cx="7802575" cy="731520"/>
           </a:xfrm>
           <a:prstGeom prst="rect">
             <a:avLst/>
@@ -18822,7 +18950,7 @@
                 <a:ea typeface="Times New Roman" pitchFamily="34" charset="-122"/>
                 <a:cs typeface="Times New Roman" pitchFamily="34" charset="-120"/>
               </a:rPr>
-              <a:t>Evaluation 1</a:t>
+              <a:t>4. Types and Movements of Air Masses</a:t>
             </a:r>
             <a:endParaRPr lang="en-US" sz="3600" dirty="0"/>
           </a:p>
@@ -18836,8 +18964,8 @@
         </p:nvSpPr>
         <p:spPr>
           <a:xfrm>
-            <a:off x="5349240" y="1783080"/>
-            <a:ext cx="6522415" cy="4663440"/>
+            <a:off x="4069080" y="1783080"/>
+            <a:ext cx="7802575" cy="4663440"/>
           </a:xfrm>
           <a:prstGeom prst="rect">
             <a:avLst/>
@@ -18856,7 +18984,7 @@
               <a:buNone/>
             </a:pPr>
             <a:r>
-              <a:rPr lang="en-US" sz="4000" dirty="0">
+              <a:rPr lang="en-US" sz="4000" b="1" dirty="0">
                 <a:solidFill>
                   <a:srgbClr val="111111"/>
                 </a:solidFill>
@@ -18864,7 +18992,24 @@
                 <a:ea typeface="Times New Roman" pitchFamily="34" charset="-122"/>
                 <a:cs typeface="Times New Roman" pitchFamily="34" charset="-120"/>
               </a:rPr>
-              <a:t>Distinguish a continental air mass from a maritime air mass.</a:t>
+              <a:t>Seasonal movement: </a:t>
+            </a:r>
+            <a:pPr algn="l" indent="0" marL="0">
+              <a:spcAft>
+                <a:spcPts val="800"/>
+              </a:spcAft>
+              <a:buNone/>
+            </a:pPr>
+            <a:r>
+              <a:rPr lang="en-US" sz="4000" dirty="0">
+                <a:solidFill>
+                  <a:srgbClr val="111111"/>
+                </a:solidFill>
+                <a:latin typeface="Times New Roman" pitchFamily="34" charset="0"/>
+                <a:ea typeface="Times New Roman" pitchFamily="34" charset="-122"/>
+                <a:cs typeface="Times New Roman" pitchFamily="34" charset="-120"/>
+              </a:rPr>
+              <a:t>Air masses move with the pressure belts, which follow the overhead sun north and south during the year. As a result, each region is dominated by different air masses in different seasons.</a:t>
             </a:r>
             <a:endParaRPr lang="en-US" sz="4000" dirty="0"/>
           </a:p>
@@ -18976,15 +19121,135 @@
                 <a:ea typeface="Calibri" pitchFamily="34" charset="-122"/>
                 <a:cs typeface="Calibri" pitchFamily="34" charset="-120"/>
               </a:rPr>
-              <a:t>FORMATIVE EVALUATION</a:t>
+              <a:t>BOARD SUMMARY</a:t>
             </a:r>
             <a:endParaRPr lang="en-US" sz="1400" dirty="0"/>
+          </a:p>
+        </p:txBody>
+      </p:sp>
+      <p:sp>
+        <p:nvSpPr>
+          <p:cNvPr id="3" name="Text 1"/>
+          <p:cNvSpPr/>
+          <p:nvPr/>
+        </p:nvSpPr>
+        <p:spPr>
+          <a:xfrm>
+            <a:off x="365760" y="1005840"/>
+            <a:ext cx="11460175" cy="731520"/>
+          </a:xfrm>
+          <a:prstGeom prst="rect">
+            <a:avLst/>
+          </a:prstGeom>
+          <a:noFill/>
+          <a:ln/>
+        </p:spPr>
+        <p:txBody>
+          <a:bodyPr wrap="square" lIns="0" tIns="0" rIns="0" bIns="0" rtlCol="0" anchor="ctr">
+            <a:normAutofit/>
+          </a:bodyPr>
+          <a:lstStyle/>
+          <a:p>
+            <a:pPr algn="ctr" indent="0" marL="0">
+              <a:buNone/>
+            </a:pPr>
+            <a:r>
+              <a:rPr lang="en-US" sz="3600" b="1" dirty="0">
+                <a:solidFill>
+                  <a:srgbClr val="990011"/>
+                </a:solidFill>
+                <a:latin typeface="Times New Roman" pitchFamily="34" charset="0"/>
+                <a:ea typeface="Times New Roman" pitchFamily="34" charset="-122"/>
+                <a:cs typeface="Times New Roman" pitchFamily="34" charset="-120"/>
+              </a:rPr>
+              <a:t>5. Air Masses Affecting Cameroon and West Africa</a:t>
+            </a:r>
+            <a:endParaRPr lang="en-US" sz="3600" dirty="0"/>
+          </a:p>
+        </p:txBody>
+      </p:sp>
+      <p:sp>
+        <p:nvSpPr>
+          <p:cNvPr id="4" name="Text 2"/>
+          <p:cNvSpPr/>
+          <p:nvPr/>
+        </p:nvSpPr>
+        <p:spPr>
+          <a:xfrm>
+            <a:off x="365760" y="1783080"/>
+            <a:ext cx="6035040" cy="4617720"/>
+          </a:xfrm>
+          <a:prstGeom prst="rect">
+            <a:avLst/>
+          </a:prstGeom>
+          <a:noFill/>
+          <a:ln/>
+        </p:spPr>
+        <p:txBody>
+          <a:bodyPr wrap="square" lIns="0" tIns="0" rIns="0" bIns="0" rtlCol="0" anchor="t"/>
+          <a:lstStyle/>
+          <a:p>
+            <a:pPr algn="l" indent="0" marL="0">
+              <a:spcAft>
+                <a:spcPts val="800"/>
+              </a:spcAft>
+              <a:buNone/>
+            </a:pPr>
+            <a:r>
+              <a:rPr lang="en-US" sz="2800" i="1" dirty="0">
+                <a:solidFill>
+                  <a:srgbClr val="111111"/>
+                </a:solidFill>
+                <a:latin typeface="Times New Roman" pitchFamily="34" charset="0"/>
+                <a:ea typeface="Times New Roman" pitchFamily="34" charset="-122"/>
+                <a:cs typeface="Times New Roman" pitchFamily="34" charset="-120"/>
+              </a:rPr>
+              <a:t>Two air masses control the seasons of Cameroon as follows:</a:t>
+            </a:r>
+            <a:endParaRPr lang="en-US" sz="2800" dirty="0"/>
+          </a:p>
+          <a:p>
+            <a:pPr algn="l" indent="0" marL="0">
+              <a:spcAft>
+                <a:spcPts val="800"/>
+              </a:spcAft>
+              <a:buNone/>
+            </a:pPr>
+            <a:r>
+              <a:rPr lang="en-US" sz="2800" b="1" dirty="0">
+                <a:solidFill>
+                  <a:srgbClr val="111111"/>
+                </a:solidFill>
+                <a:latin typeface="Times New Roman" pitchFamily="34" charset="0"/>
+                <a:ea typeface="Times New Roman" pitchFamily="34" charset="-122"/>
+                <a:cs typeface="Times New Roman" pitchFamily="34" charset="-120"/>
+              </a:rPr>
+              <a:t>Tropical continental air (cT): </a:t>
+            </a:r>
+            <a:pPr algn="l" indent="0" marL="0">
+              <a:spcAft>
+                <a:spcPts val="800"/>
+              </a:spcAft>
+              <a:buNone/>
+            </a:pPr>
+            <a:r>
+              <a:rPr lang="en-US" sz="2800" dirty="0">
+                <a:solidFill>
+                  <a:srgbClr val="111111"/>
+                </a:solidFill>
+                <a:latin typeface="Times New Roman" pitchFamily="34" charset="0"/>
+                <a:ea typeface="Times New Roman" pitchFamily="34" charset="-122"/>
+                <a:cs typeface="Times New Roman" pitchFamily="34" charset="-120"/>
+              </a:rPr>
+              <a:t>It forms over the Sahara and is hot by day, very dry, dusty and stable, blowing as the north-east Harmattan. It dominates the dry season in Garoua from about November to March, with sunshine, haze and low humidity.</a:t>
+            </a:r>
+            <a:endParaRPr lang="en-US" sz="2800" dirty="0"/>
           </a:p>
         </p:txBody>
       </p:sp>
       <p:pic>
         <p:nvPicPr>
-          <p:cNvPr id="3" name="Image 0" descr="/home/claude/f4/img/minesec_sheet.png">    </p:cNvPr>
+          <p:cNvPr id="5" name="Image 0" descr="/home/claude/f4/img/v2/f2t_harmattan.jpg">    </p:cNvPr>
           <p:cNvPicPr>
             <a:picLocks noChangeAspect="1"/>
           </p:cNvPicPr>
@@ -18998,8 +19263,8 @@
         </p:blipFill>
         <p:spPr>
           <a:xfrm>
-            <a:off x="0" y="658368"/>
-            <a:ext cx="5120640" cy="5833872"/>
+            <a:off x="6537960" y="2400897"/>
+            <a:ext cx="5470855" cy="3034615"/>
           </a:xfrm>
           <a:prstGeom prst="rect">
             <a:avLst/>
@@ -19008,14 +19273,14 @@
       </p:pic>
       <p:sp>
         <p:nvSpPr>
-          <p:cNvPr id="4" name="Text 1"/>
+          <p:cNvPr id="6" name="Text 3"/>
           <p:cNvSpPr/>
           <p:nvPr/>
         </p:nvSpPr>
         <p:spPr>
           <a:xfrm>
-            <a:off x="5349240" y="1005840"/>
-            <a:ext cx="6522415" cy="731520"/>
+            <a:off x="6537960" y="6089904"/>
+            <a:ext cx="5470855" cy="347472"/>
           </a:xfrm>
           <a:prstGeom prst="rect">
             <a:avLst/>
@@ -19024,68 +19289,24 @@
           <a:ln/>
         </p:spPr>
         <p:txBody>
-          <a:bodyPr wrap="square" lIns="0" tIns="0" rIns="0" bIns="0" rtlCol="0" anchor="ctr">
-            <a:normAutofit/>
-          </a:bodyPr>
+          <a:bodyPr wrap="square" lIns="0" tIns="0" rIns="0" bIns="0" rtlCol="0" anchor="ctr"/>
           <a:lstStyle/>
           <a:p>
             <a:pPr algn="ctr" indent="0" marL="0">
               <a:buNone/>
             </a:pPr>
             <a:r>
-              <a:rPr lang="en-US" sz="3600" b="1" dirty="0">
-                <a:solidFill>
-                  <a:srgbClr val="990011"/>
+              <a:rPr lang="en-US" sz="1600" i="1" dirty="0">
+                <a:solidFill>
+                  <a:srgbClr val="555555"/>
                 </a:solidFill>
                 <a:latin typeface="Times New Roman" pitchFamily="34" charset="0"/>
                 <a:ea typeface="Times New Roman" pitchFamily="34" charset="-122"/>
                 <a:cs typeface="Times New Roman" pitchFamily="34" charset="-120"/>
               </a:rPr>
-              <a:t>Expected Answer</a:t>
-            </a:r>
-            <a:endParaRPr lang="en-US" sz="3600" dirty="0"/>
-          </a:p>
-        </p:txBody>
-      </p:sp>
-      <p:sp>
-        <p:nvSpPr>
-          <p:cNvPr id="5" name="Text 2"/>
-          <p:cNvSpPr/>
-          <p:nvPr/>
-        </p:nvSpPr>
-        <p:spPr>
-          <a:xfrm>
-            <a:off x="5349240" y="1783080"/>
-            <a:ext cx="6522415" cy="4663440"/>
-          </a:xfrm>
-          <a:prstGeom prst="rect">
-            <a:avLst/>
-          </a:prstGeom>
-          <a:noFill/>
-          <a:ln/>
-        </p:spPr>
-        <p:txBody>
-          <a:bodyPr wrap="square" lIns="0" tIns="0" rIns="0" bIns="0" rtlCol="0" anchor="t"/>
-          <a:lstStyle/>
-          <a:p>
-            <a:pPr algn="l" indent="0" marL="0">
-              <a:spcAft>
-                <a:spcPts val="800"/>
-              </a:spcAft>
-              <a:buNone/>
-            </a:pPr>
-            <a:r>
-              <a:rPr lang="en-US" sz="4000" dirty="0">
-                <a:solidFill>
-                  <a:srgbClr val="111111"/>
-                </a:solidFill>
-                <a:latin typeface="Times New Roman" pitchFamily="34" charset="0"/>
-                <a:ea typeface="Times New Roman" pitchFamily="34" charset="-122"/>
-                <a:cs typeface="Times New Roman" pitchFamily="34" charset="-120"/>
-              </a:rPr>
-              <a:t>A continental air mass forms over land and is dry; a maritime air mass forms over the sea and is moist.</a:t>
-            </a:r>
-            <a:endParaRPr lang="en-US" sz="4000" dirty="0"/>
+              <a:t>Illustration: the Harmattan</a:t>
+            </a:r>
+            <a:endParaRPr lang="en-US" sz="1600" dirty="0"/>
           </a:p>
         </p:txBody>
       </p:sp>
@@ -19195,15 +19416,115 @@
                 <a:ea typeface="Calibri" pitchFamily="34" charset="-122"/>
                 <a:cs typeface="Calibri" pitchFamily="34" charset="-120"/>
               </a:rPr>
-              <a:t>FORMATIVE EVALUATION</a:t>
+              <a:t>BOARD SUMMARY</a:t>
             </a:r>
             <a:endParaRPr lang="en-US" sz="1400" dirty="0"/>
+          </a:p>
+        </p:txBody>
+      </p:sp>
+      <p:sp>
+        <p:nvSpPr>
+          <p:cNvPr id="3" name="Text 1"/>
+          <p:cNvSpPr/>
+          <p:nvPr/>
+        </p:nvSpPr>
+        <p:spPr>
+          <a:xfrm>
+            <a:off x="365760" y="1005840"/>
+            <a:ext cx="11460175" cy="731520"/>
+          </a:xfrm>
+          <a:prstGeom prst="rect">
+            <a:avLst/>
+          </a:prstGeom>
+          <a:noFill/>
+          <a:ln/>
+        </p:spPr>
+        <p:txBody>
+          <a:bodyPr wrap="square" lIns="0" tIns="0" rIns="0" bIns="0" rtlCol="0" anchor="ctr">
+            <a:normAutofit/>
+          </a:bodyPr>
+          <a:lstStyle/>
+          <a:p>
+            <a:pPr algn="ctr" indent="0" marL="0">
+              <a:buNone/>
+            </a:pPr>
+            <a:r>
+              <a:rPr lang="en-US" sz="3600" b="1" dirty="0">
+                <a:solidFill>
+                  <a:srgbClr val="990011"/>
+                </a:solidFill>
+                <a:latin typeface="Times New Roman" pitchFamily="34" charset="0"/>
+                <a:ea typeface="Times New Roman" pitchFamily="34" charset="-122"/>
+                <a:cs typeface="Times New Roman" pitchFamily="34" charset="-120"/>
+              </a:rPr>
+              <a:t>5. Air Masses Affecting Cameroon and West Africa</a:t>
+            </a:r>
+            <a:endParaRPr lang="en-US" sz="3600" dirty="0"/>
+          </a:p>
+        </p:txBody>
+      </p:sp>
+      <p:sp>
+        <p:nvSpPr>
+          <p:cNvPr id="4" name="Text 2"/>
+          <p:cNvSpPr/>
+          <p:nvPr/>
+        </p:nvSpPr>
+        <p:spPr>
+          <a:xfrm>
+            <a:off x="365760" y="1783080"/>
+            <a:ext cx="6035040" cy="4617720"/>
+          </a:xfrm>
+          <a:prstGeom prst="rect">
+            <a:avLst/>
+          </a:prstGeom>
+          <a:noFill/>
+          <a:ln/>
+        </p:spPr>
+        <p:txBody>
+          <a:bodyPr wrap="square" lIns="0" tIns="0" rIns="0" bIns="0" rtlCol="0" anchor="t"/>
+          <a:lstStyle/>
+          <a:p>
+            <a:pPr algn="l" indent="0" marL="0">
+              <a:spcAft>
+                <a:spcPts val="800"/>
+              </a:spcAft>
+              <a:buNone/>
+            </a:pPr>
+            <a:r>
+              <a:rPr lang="en-US" sz="3200" b="1" dirty="0">
+                <a:solidFill>
+                  <a:srgbClr val="111111"/>
+                </a:solidFill>
+                <a:latin typeface="Times New Roman" pitchFamily="34" charset="0"/>
+                <a:ea typeface="Times New Roman" pitchFamily="34" charset="-122"/>
+                <a:cs typeface="Times New Roman" pitchFamily="34" charset="-120"/>
+              </a:rPr>
+              <a:t>Tropical maritime air (mT): </a:t>
+            </a:r>
+            <a:pPr algn="l" indent="0" marL="0">
+              <a:spcAft>
+                <a:spcPts val="800"/>
+              </a:spcAft>
+              <a:buNone/>
+            </a:pPr>
+            <a:r>
+              <a:rPr lang="en-US" sz="3200" dirty="0">
+                <a:solidFill>
+                  <a:srgbClr val="111111"/>
+                </a:solidFill>
+                <a:latin typeface="Times New Roman" pitchFamily="34" charset="0"/>
+                <a:ea typeface="Times New Roman" pitchFamily="34" charset="-122"/>
+                <a:cs typeface="Times New Roman" pitchFamily="34" charset="-120"/>
+              </a:rPr>
+              <a:t>It forms over the South Atlantic Ocean around Saint Helena and is warm, very moist and unstable, blowing as the south-west monsoon. It brings the rainy season to Garoua from about May to October, with cumulonimbus clouds and storms.</a:t>
+            </a:r>
+            <a:endParaRPr lang="en-US" sz="3200" dirty="0"/>
           </a:p>
         </p:txBody>
       </p:sp>
       <p:pic>
         <p:nvPicPr>
-          <p:cNvPr id="3" name="Image 0" descr="/home/claude/f4/img/minesec_sheet.png">    </p:cNvPr>
+          <p:cNvPr id="5" name="Image 0" descr="/home/claude/f4/img/v2/f4_heavyrain.jpg">    </p:cNvPr>
           <p:cNvPicPr>
             <a:picLocks noChangeAspect="1"/>
           </p:cNvPicPr>
@@ -19217,8 +19538,8 @@
         </p:blipFill>
         <p:spPr>
           <a:xfrm>
-            <a:off x="0" y="658368"/>
-            <a:ext cx="5120640" cy="5833872"/>
+            <a:off x="6537960" y="2400897"/>
+            <a:ext cx="5470855" cy="3034615"/>
           </a:xfrm>
           <a:prstGeom prst="rect">
             <a:avLst/>
@@ -19227,14 +19548,14 @@
       </p:pic>
       <p:sp>
         <p:nvSpPr>
-          <p:cNvPr id="4" name="Text 1"/>
+          <p:cNvPr id="6" name="Text 3"/>
           <p:cNvSpPr/>
           <p:nvPr/>
         </p:nvSpPr>
         <p:spPr>
           <a:xfrm>
-            <a:off x="5349240" y="1005840"/>
-            <a:ext cx="6522415" cy="731520"/>
+            <a:off x="6537960" y="6089904"/>
+            <a:ext cx="5470855" cy="347472"/>
           </a:xfrm>
           <a:prstGeom prst="rect">
             <a:avLst/>
@@ -19243,68 +19564,24 @@
           <a:ln/>
         </p:spPr>
         <p:txBody>
-          <a:bodyPr wrap="square" lIns="0" tIns="0" rIns="0" bIns="0" rtlCol="0" anchor="ctr">
-            <a:normAutofit/>
-          </a:bodyPr>
+          <a:bodyPr wrap="square" lIns="0" tIns="0" rIns="0" bIns="0" rtlCol="0" anchor="ctr"/>
           <a:lstStyle/>
           <a:p>
             <a:pPr algn="ctr" indent="0" marL="0">
               <a:buNone/>
             </a:pPr>
             <a:r>
-              <a:rPr lang="en-US" sz="3600" b="1" dirty="0">
-                <a:solidFill>
-                  <a:srgbClr val="990011"/>
+              <a:rPr lang="en-US" sz="1600" i="1" dirty="0">
+                <a:solidFill>
+                  <a:srgbClr val="555555"/>
                 </a:solidFill>
                 <a:latin typeface="Times New Roman" pitchFamily="34" charset="0"/>
                 <a:ea typeface="Times New Roman" pitchFamily="34" charset="-122"/>
                 <a:cs typeface="Times New Roman" pitchFamily="34" charset="-120"/>
               </a:rPr>
-              <a:t>Evaluation 2</a:t>
-            </a:r>
-            <a:endParaRPr lang="en-US" sz="3600" dirty="0"/>
-          </a:p>
-        </p:txBody>
-      </p:sp>
-      <p:sp>
-        <p:nvSpPr>
-          <p:cNvPr id="5" name="Text 2"/>
-          <p:cNvSpPr/>
-          <p:nvPr/>
-        </p:nvSpPr>
-        <p:spPr>
-          <a:xfrm>
-            <a:off x="5349240" y="1783080"/>
-            <a:ext cx="6522415" cy="4663440"/>
-          </a:xfrm>
-          <a:prstGeom prst="rect">
-            <a:avLst/>
-          </a:prstGeom>
-          <a:noFill/>
-          <a:ln/>
-        </p:spPr>
-        <p:txBody>
-          <a:bodyPr wrap="square" lIns="0" tIns="0" rIns="0" bIns="0" rtlCol="0" anchor="t"/>
-          <a:lstStyle/>
-          <a:p>
-            <a:pPr algn="l" indent="0" marL="0">
-              <a:spcAft>
-                <a:spcPts val="800"/>
-              </a:spcAft>
-              <a:buNone/>
-            </a:pPr>
-            <a:r>
-              <a:rPr lang="en-US" sz="4000" dirty="0">
-                <a:solidFill>
-                  <a:srgbClr val="111111"/>
-                </a:solidFill>
-                <a:latin typeface="Times New Roman" pitchFamily="34" charset="0"/>
-                <a:ea typeface="Times New Roman" pitchFamily="34" charset="-122"/>
-                <a:cs typeface="Times New Roman" pitchFamily="34" charset="-120"/>
-              </a:rPr>
-              <a:t>Which air mass brings the rainy season to Garoua, and why?</a:t>
-            </a:r>
-            <a:endParaRPr lang="en-US" sz="4000" dirty="0"/>
+              <a:t>Illustration: heavy rain</a:t>
+            </a:r>
+            <a:endParaRPr lang="en-US" sz="1600" dirty="0"/>
           </a:p>
         </p:txBody>
       </p:sp>
@@ -19414,15 +19691,115 @@
                 <a:ea typeface="Calibri" pitchFamily="34" charset="-122"/>
                 <a:cs typeface="Calibri" pitchFamily="34" charset="-120"/>
               </a:rPr>
-              <a:t>FORMATIVE EVALUATION</a:t>
+              <a:t>BOARD SUMMARY</a:t>
             </a:r>
             <a:endParaRPr lang="en-US" sz="1400" dirty="0"/>
+          </a:p>
+        </p:txBody>
+      </p:sp>
+      <p:sp>
+        <p:nvSpPr>
+          <p:cNvPr id="3" name="Text 1"/>
+          <p:cNvSpPr/>
+          <p:nvPr/>
+        </p:nvSpPr>
+        <p:spPr>
+          <a:xfrm>
+            <a:off x="365760" y="1005840"/>
+            <a:ext cx="11460175" cy="731520"/>
+          </a:xfrm>
+          <a:prstGeom prst="rect">
+            <a:avLst/>
+          </a:prstGeom>
+          <a:noFill/>
+          <a:ln/>
+        </p:spPr>
+        <p:txBody>
+          <a:bodyPr wrap="square" lIns="0" tIns="0" rIns="0" bIns="0" rtlCol="0" anchor="ctr">
+            <a:normAutofit/>
+          </a:bodyPr>
+          <a:lstStyle/>
+          <a:p>
+            <a:pPr algn="ctr" indent="0" marL="0">
+              <a:buNone/>
+            </a:pPr>
+            <a:r>
+              <a:rPr lang="en-US" sz="3600" b="1" dirty="0">
+                <a:solidFill>
+                  <a:srgbClr val="990011"/>
+                </a:solidFill>
+                <a:latin typeface="Times New Roman" pitchFamily="34" charset="0"/>
+                <a:ea typeface="Times New Roman" pitchFamily="34" charset="-122"/>
+                <a:cs typeface="Times New Roman" pitchFamily="34" charset="-120"/>
+              </a:rPr>
+              <a:t>5. Air Masses Affecting Cameroon and West Africa</a:t>
+            </a:r>
+            <a:endParaRPr lang="en-US" sz="3600" dirty="0"/>
+          </a:p>
+        </p:txBody>
+      </p:sp>
+      <p:sp>
+        <p:nvSpPr>
+          <p:cNvPr id="4" name="Text 2"/>
+          <p:cNvSpPr/>
+          <p:nvPr/>
+        </p:nvSpPr>
+        <p:spPr>
+          <a:xfrm>
+            <a:off x="365760" y="1783080"/>
+            <a:ext cx="6035040" cy="4617720"/>
+          </a:xfrm>
+          <a:prstGeom prst="rect">
+            <a:avLst/>
+          </a:prstGeom>
+          <a:noFill/>
+          <a:ln/>
+        </p:spPr>
+        <p:txBody>
+          <a:bodyPr wrap="square" lIns="0" tIns="0" rIns="0" bIns="0" rtlCol="0" anchor="t"/>
+          <a:lstStyle/>
+          <a:p>
+            <a:pPr algn="l" indent="0" marL="0">
+              <a:spcAft>
+                <a:spcPts val="800"/>
+              </a:spcAft>
+              <a:buNone/>
+            </a:pPr>
+            <a:r>
+              <a:rPr lang="en-US" sz="3200" b="1" dirty="0">
+                <a:solidFill>
+                  <a:srgbClr val="111111"/>
+                </a:solidFill>
+                <a:latin typeface="Times New Roman" pitchFamily="34" charset="0"/>
+                <a:ea typeface="Times New Roman" pitchFamily="34" charset="-122"/>
+                <a:cs typeface="Times New Roman" pitchFamily="34" charset="-120"/>
+              </a:rPr>
+              <a:t>The Intertropical Front (ITF): </a:t>
+            </a:r>
+            <a:pPr algn="l" indent="0" marL="0">
+              <a:spcAft>
+                <a:spcPts val="800"/>
+              </a:spcAft>
+              <a:buNone/>
+            </a:pPr>
+            <a:r>
+              <a:rPr lang="en-US" sz="3200" dirty="0">
+                <a:solidFill>
+                  <a:srgbClr val="111111"/>
+                </a:solidFill>
+                <a:latin typeface="Times New Roman" pitchFamily="34" charset="0"/>
+                <a:ea typeface="Times New Roman" pitchFamily="34" charset="-122"/>
+                <a:cs typeface="Times New Roman" pitchFamily="34" charset="-120"/>
+              </a:rPr>
+              <a:t>The two air masses meet along the ITF, which moves north in the northern summer and south in winter. Places south of the ITF receive rain, which explains why the rainy season is longer in the south of Cameroon than in the north.</a:t>
+            </a:r>
+            <a:endParaRPr lang="en-US" sz="3200" dirty="0"/>
           </a:p>
         </p:txBody>
       </p:sp>
       <p:pic>
         <p:nvPicPr>
-          <p:cNvPr id="3" name="Image 0" descr="/home/claude/f4/img/minesec_sheet.png">    </p:cNvPr>
+          <p:cNvPr id="5" name="Image 0" descr="/home/claude/f4/img/v2/wa_airmasses_big.png">    </p:cNvPr>
           <p:cNvPicPr>
             <a:picLocks noChangeAspect="1"/>
           </p:cNvPicPr>
@@ -19436,8 +19813,8 @@
         </p:blipFill>
         <p:spPr>
           <a:xfrm>
-            <a:off x="0" y="658368"/>
-            <a:ext cx="5120640" cy="5833872"/>
+            <a:off x="6537960" y="2550490"/>
+            <a:ext cx="5470855" cy="2735428"/>
           </a:xfrm>
           <a:prstGeom prst="rect">
             <a:avLst/>
@@ -19446,14 +19823,14 @@
       </p:pic>
       <p:sp>
         <p:nvSpPr>
-          <p:cNvPr id="4" name="Text 1"/>
+          <p:cNvPr id="6" name="Text 3"/>
           <p:cNvSpPr/>
           <p:nvPr/>
         </p:nvSpPr>
         <p:spPr>
           <a:xfrm>
-            <a:off x="5349240" y="1005840"/>
-            <a:ext cx="6522415" cy="731520"/>
+            <a:off x="6537960" y="6089904"/>
+            <a:ext cx="5470855" cy="347472"/>
           </a:xfrm>
           <a:prstGeom prst="rect">
             <a:avLst/>
@@ -19462,68 +19839,24 @@
           <a:ln/>
         </p:spPr>
         <p:txBody>
-          <a:bodyPr wrap="square" lIns="0" tIns="0" rIns="0" bIns="0" rtlCol="0" anchor="ctr">
-            <a:normAutofit/>
-          </a:bodyPr>
+          <a:bodyPr wrap="square" lIns="0" tIns="0" rIns="0" bIns="0" rtlCol="0" anchor="ctr"/>
           <a:lstStyle/>
           <a:p>
             <a:pPr algn="ctr" indent="0" marL="0">
               <a:buNone/>
             </a:pPr>
             <a:r>
-              <a:rPr lang="en-US" sz="3600" b="1" dirty="0">
-                <a:solidFill>
-                  <a:srgbClr val="990011"/>
+              <a:rPr lang="en-US" sz="1600" i="1" dirty="0">
+                <a:solidFill>
+                  <a:srgbClr val="555555"/>
                 </a:solidFill>
                 <a:latin typeface="Times New Roman" pitchFamily="34" charset="0"/>
                 <a:ea typeface="Times New Roman" pitchFamily="34" charset="-122"/>
                 <a:cs typeface="Times New Roman" pitchFamily="34" charset="-120"/>
               </a:rPr>
-              <a:t>Expected Answer</a:t>
-            </a:r>
-            <a:endParaRPr lang="en-US" sz="3600" dirty="0"/>
-          </a:p>
-        </p:txBody>
-      </p:sp>
-      <p:sp>
-        <p:nvSpPr>
-          <p:cNvPr id="5" name="Text 2"/>
-          <p:cNvSpPr/>
-          <p:nvPr/>
-        </p:nvSpPr>
-        <p:spPr>
-          <a:xfrm>
-            <a:off x="5349240" y="1783080"/>
-            <a:ext cx="6522415" cy="4663440"/>
-          </a:xfrm>
-          <a:prstGeom prst="rect">
-            <a:avLst/>
-          </a:prstGeom>
-          <a:noFill/>
-          <a:ln/>
-        </p:spPr>
-        <p:txBody>
-          <a:bodyPr wrap="square" lIns="0" tIns="0" rIns="0" bIns="0" rtlCol="0" anchor="t"/>
-          <a:lstStyle/>
-          <a:p>
-            <a:pPr algn="l" indent="0" marL="0">
-              <a:spcAft>
-                <a:spcPts val="800"/>
-              </a:spcAft>
-              <a:buNone/>
-            </a:pPr>
-            <a:r>
-              <a:rPr lang="en-US" sz="4000" dirty="0">
-                <a:solidFill>
-                  <a:srgbClr val="111111"/>
-                </a:solidFill>
-                <a:latin typeface="Times New Roman" pitchFamily="34" charset="0"/>
-                <a:ea typeface="Times New Roman" pitchFamily="34" charset="-122"/>
-                <a:cs typeface="Times New Roman" pitchFamily="34" charset="-120"/>
-              </a:rPr>
-              <a:t>The tropical maritime (mT) air mass, because it is moist and unstable.</a:t>
-            </a:r>
-            <a:endParaRPr lang="en-US" sz="4000" dirty="0"/>
+              <a:t>Illustration: the air masses of West Africa</a:t>
+            </a:r>
+            <a:endParaRPr lang="en-US" sz="1600" dirty="0"/>
           </a:p>
         </p:txBody>
       </p:sp>
@@ -19633,7 +19966,7 @@
                 <a:ea typeface="Calibri" pitchFamily="34" charset="-122"/>
                 <a:cs typeface="Calibri" pitchFamily="34" charset="-120"/>
               </a:rPr>
-              <a:t>REMEDIATION</a:t>
+              <a:t>FORMATIVE EVALUATION</a:t>
             </a:r>
             <a:endParaRPr lang="en-US" sz="1400" dirty="0"/>
           </a:p>
@@ -19656,7 +19989,7 @@
         <p:spPr>
           <a:xfrm>
             <a:off x="0" y="658368"/>
-            <a:ext cx="2468880" cy="5833872"/>
+            <a:ext cx="5120640" cy="5833872"/>
           </a:xfrm>
           <a:prstGeom prst="rect">
             <a:avLst/>
@@ -19671,8 +20004,8 @@
         </p:nvSpPr>
         <p:spPr>
           <a:xfrm>
-            <a:off x="2697480" y="1005840"/>
-            <a:ext cx="9174175" cy="731520"/>
+            <a:off x="5349240" y="1005840"/>
+            <a:ext cx="6522415" cy="731520"/>
           </a:xfrm>
           <a:prstGeom prst="rect">
             <a:avLst/>
@@ -19698,7 +20031,7 @@
                 <a:ea typeface="Times New Roman" pitchFamily="34" charset="-122"/>
                 <a:cs typeface="Times New Roman" pitchFamily="34" charset="-120"/>
               </a:rPr>
-              <a:t>Remediation</a:t>
+              <a:t>Evaluation 1</a:t>
             </a:r>
             <a:endParaRPr lang="en-US" sz="3600" dirty="0"/>
           </a:p>
@@ -19712,8 +20045,8 @@
         </p:nvSpPr>
         <p:spPr>
           <a:xfrm>
-            <a:off x="2697480" y="1783080"/>
-            <a:ext cx="9174175" cy="4663440"/>
+            <a:off x="5349240" y="1783080"/>
+            <a:ext cx="6522415" cy="4663440"/>
           </a:xfrm>
           <a:prstGeom prst="rect">
             <a:avLst/>
@@ -19732,7 +20065,7 @@
               <a:buNone/>
             </a:pPr>
             <a:r>
-              <a:rPr lang="en-US" sz="4000" b="1" dirty="0">
+              <a:rPr lang="en-US" sz="4000" dirty="0">
                 <a:solidFill>
                   <a:srgbClr val="111111"/>
                 </a:solidFill>
@@ -19740,73 +20073,7 @@
                 <a:ea typeface="Times New Roman" pitchFamily="34" charset="-122"/>
                 <a:cs typeface="Times New Roman" pitchFamily="34" charset="-120"/>
               </a:rPr>
-              <a:t>Fill in the blanks:</a:t>
-            </a:r>
-            <a:endParaRPr lang="en-US" sz="4000" dirty="0"/>
-          </a:p>
-          <a:p>
-            <a:pPr algn="l" marL="342900" indent="-342900">
-              <a:spcAft>
-                <a:spcPts val="800"/>
-              </a:spcAft>
-              <a:buSzPct val="100000"/>
-              <a:buFont typeface="+mj-lt"/>
-              <a:buAutoNum type="arabicPeriod" startAt="1"/>
-            </a:pPr>
-            <a:r>
-              <a:rPr lang="en-US" sz="4000" dirty="0">
-                <a:solidFill>
-                  <a:srgbClr val="111111"/>
-                </a:solidFill>
-                <a:latin typeface="Times New Roman" pitchFamily="34" charset="0"/>
-                <a:ea typeface="Times New Roman" pitchFamily="34" charset="-122"/>
-                <a:cs typeface="Times New Roman" pitchFamily="34" charset="-120"/>
-              </a:rPr>
-              <a:t>An air mass takes its characteristics from its ______ region.</a:t>
-            </a:r>
-            <a:endParaRPr lang="en-US" sz="4000" dirty="0"/>
-          </a:p>
-          <a:p>
-            <a:pPr algn="l" marL="342900" indent="-342900">
-              <a:spcAft>
-                <a:spcPts val="800"/>
-              </a:spcAft>
-              <a:buSzPct val="100000"/>
-              <a:buFont typeface="+mj-lt"/>
-              <a:buAutoNum type="arabicPeriod" startAt="1"/>
-            </a:pPr>
-            <a:r>
-              <a:rPr lang="en-US" sz="4000" dirty="0">
-                <a:solidFill>
-                  <a:srgbClr val="111111"/>
-                </a:solidFill>
-                <a:latin typeface="Times New Roman" pitchFamily="34" charset="0"/>
-                <a:ea typeface="Times New Roman" pitchFamily="34" charset="-122"/>
-                <a:cs typeface="Times New Roman" pitchFamily="34" charset="-120"/>
-              </a:rPr>
-              <a:t>The Harmattan is a ______ air mass.</a:t>
-            </a:r>
-            <a:endParaRPr lang="en-US" sz="4000" dirty="0"/>
-          </a:p>
-          <a:p>
-            <a:pPr algn="l" marL="342900" indent="-342900">
-              <a:spcAft>
-                <a:spcPts val="800"/>
-              </a:spcAft>
-              <a:buSzPct val="100000"/>
-              <a:buFont typeface="+mj-lt"/>
-              <a:buAutoNum type="arabicPeriod" startAt="1"/>
-            </a:pPr>
-            <a:r>
-              <a:rPr lang="en-US" sz="4000" dirty="0">
-                <a:solidFill>
-                  <a:srgbClr val="111111"/>
-                </a:solidFill>
-                <a:latin typeface="Times New Roman" pitchFamily="34" charset="0"/>
-                <a:ea typeface="Times New Roman" pitchFamily="34" charset="-122"/>
-                <a:cs typeface="Times New Roman" pitchFamily="34" charset="-120"/>
-              </a:rPr>
-              <a:t>The two air masses meet at the ______.</a:t>
+              <a:t>Distinguish a continental air mass from a maritime air mass.</a:t>
             </a:r>
             <a:endParaRPr lang="en-US" sz="4000" dirty="0"/>
           </a:p>
@@ -19918,7 +20185,7 @@
                 <a:ea typeface="Calibri" pitchFamily="34" charset="-122"/>
                 <a:cs typeface="Calibri" pitchFamily="34" charset="-120"/>
               </a:rPr>
-              <a:t>HOMEWORK</a:t>
+              <a:t>FORMATIVE EVALUATION</a:t>
             </a:r>
             <a:endParaRPr lang="en-US" sz="1400" dirty="0"/>
           </a:p>
@@ -19983,7 +20250,7 @@
                 <a:ea typeface="Times New Roman" pitchFamily="34" charset="-122"/>
                 <a:cs typeface="Times New Roman" pitchFamily="34" charset="-120"/>
               </a:rPr>
-              <a:t>Homework</a:t>
+              <a:t>Expected Answer</a:t>
             </a:r>
             <a:endParaRPr lang="en-US" sz="3600" dirty="0"/>
           </a:p>
@@ -20025,7 +20292,7 @@
                 <a:ea typeface="Times New Roman" pitchFamily="34" charset="-122"/>
                 <a:cs typeface="Times New Roman" pitchFamily="34" charset="-120"/>
               </a:rPr>
-              <a:t>Define climate.</a:t>
+              <a:t>A continental air mass forms over land and is dry; a maritime air mass forms over the sea and is moist.</a:t>
             </a:r>
             <a:endParaRPr lang="en-US" sz="4000" dirty="0"/>
           </a:p>
@@ -20137,7 +20404,7 @@
                 <a:ea typeface="Calibri" pitchFamily="34" charset="-122"/>
                 <a:cs typeface="Calibri" pitchFamily="34" charset="-120"/>
               </a:rPr>
-              <a:t>NEXT LESSON</a:t>
+              <a:t>FORMATIVE EVALUATION</a:t>
             </a:r>
             <a:endParaRPr lang="en-US" sz="1400" dirty="0"/>
           </a:p>
@@ -20202,7 +20469,7 @@
                 <a:ea typeface="Times New Roman" pitchFamily="34" charset="-122"/>
                 <a:cs typeface="Times New Roman" pitchFamily="34" charset="-120"/>
               </a:rPr>
-              <a:t>Next Lesson</a:t>
+              <a:t>Evaluation 2</a:t>
             </a:r>
             <a:endParaRPr lang="en-US" sz="3600" dirty="0"/>
           </a:p>
@@ -20226,17 +20493,17 @@
           <a:ln/>
         </p:spPr>
         <p:txBody>
-          <a:bodyPr wrap="square" lIns="0" tIns="0" rIns="0" bIns="0" rtlCol="0" anchor="ctr"/>
-          <a:lstStyle/>
-          <a:p>
-            <a:pPr algn="ctr" indent="0" marL="0">
+          <a:bodyPr wrap="square" lIns="0" tIns="0" rIns="0" bIns="0" rtlCol="0" anchor="t"/>
+          <a:lstStyle/>
+          <a:p>
+            <a:pPr algn="l" indent="0" marL="0">
               <a:spcAft>
                 <a:spcPts val="800"/>
               </a:spcAft>
               <a:buNone/>
             </a:pPr>
             <a:r>
-              <a:rPr lang="en-US" sz="4000" b="1" dirty="0">
+              <a:rPr lang="en-US" sz="4000" dirty="0">
                 <a:solidFill>
                   <a:srgbClr val="111111"/>
                 </a:solidFill>
@@ -20244,27 +20511,7 @@
                 <a:ea typeface="Times New Roman" pitchFamily="34" charset="-122"/>
                 <a:cs typeface="Times New Roman" pitchFamily="34" charset="-120"/>
               </a:rPr>
-              <a:t>Our next lesson will be on:</a:t>
-            </a:r>
-            <a:endParaRPr lang="en-US" sz="4000" dirty="0"/>
-          </a:p>
-          <a:p>
-            <a:pPr algn="ctr" indent="0" marL="0">
-              <a:spcAft>
-                <a:spcPts val="800"/>
-              </a:spcAft>
-              <a:buNone/>
-            </a:pPr>
-            <a:r>
-              <a:rPr lang="en-US" sz="4000" b="1" dirty="0">
-                <a:solidFill>
-                  <a:srgbClr val="990011"/>
-                </a:solidFill>
-                <a:latin typeface="Times New Roman" pitchFamily="34" charset="0"/>
-                <a:ea typeface="Times New Roman" pitchFamily="34" charset="-122"/>
-                <a:cs typeface="Times New Roman" pitchFamily="34" charset="-120"/>
-              </a:rPr>
-              <a:t>Lesson 19: Meaning of Climate and Köppen's Classification</a:t>
+              <a:t>Which air mass brings the rainy season to Garoua, and why?</a:t>
             </a:r>
             <a:endParaRPr lang="en-US" sz="4000" dirty="0"/>
           </a:p>
@@ -20376,6 +20623,1299 @@
                 <a:ea typeface="Calibri" pitchFamily="34" charset="-122"/>
                 <a:cs typeface="Calibri" pitchFamily="34" charset="-120"/>
               </a:rPr>
+              <a:t>FORMATIVE EVALUATION</a:t>
+            </a:r>
+            <a:endParaRPr lang="en-US" sz="1400" dirty="0"/>
+          </a:p>
+        </p:txBody>
+      </p:sp>
+      <p:pic>
+        <p:nvPicPr>
+          <p:cNvPr id="3" name="Image 0" descr="/home/claude/f4/img/minesec_sheet.png">    </p:cNvPr>
+          <p:cNvPicPr>
+            <a:picLocks noChangeAspect="1"/>
+          </p:cNvPicPr>
+          <p:nvPr/>
+        </p:nvPicPr>
+        <p:blipFill>
+          <a:blip r:embed="rId1"/>
+          <a:stretch>
+            <a:fillRect/>
+          </a:stretch>
+        </p:blipFill>
+        <p:spPr>
+          <a:xfrm>
+            <a:off x="0" y="658368"/>
+            <a:ext cx="5120640" cy="5833872"/>
+          </a:xfrm>
+          <a:prstGeom prst="rect">
+            <a:avLst/>
+          </a:prstGeom>
+        </p:spPr>
+      </p:pic>
+      <p:sp>
+        <p:nvSpPr>
+          <p:cNvPr id="4" name="Text 1"/>
+          <p:cNvSpPr/>
+          <p:nvPr/>
+        </p:nvSpPr>
+        <p:spPr>
+          <a:xfrm>
+            <a:off x="5349240" y="1005840"/>
+            <a:ext cx="6522415" cy="731520"/>
+          </a:xfrm>
+          <a:prstGeom prst="rect">
+            <a:avLst/>
+          </a:prstGeom>
+          <a:noFill/>
+          <a:ln/>
+        </p:spPr>
+        <p:txBody>
+          <a:bodyPr wrap="square" lIns="0" tIns="0" rIns="0" bIns="0" rtlCol="0" anchor="ctr">
+            <a:normAutofit/>
+          </a:bodyPr>
+          <a:lstStyle/>
+          <a:p>
+            <a:pPr algn="ctr" indent="0" marL="0">
+              <a:buNone/>
+            </a:pPr>
+            <a:r>
+              <a:rPr lang="en-US" sz="3600" b="1" dirty="0">
+                <a:solidFill>
+                  <a:srgbClr val="990011"/>
+                </a:solidFill>
+                <a:latin typeface="Times New Roman" pitchFamily="34" charset="0"/>
+                <a:ea typeface="Times New Roman" pitchFamily="34" charset="-122"/>
+                <a:cs typeface="Times New Roman" pitchFamily="34" charset="-120"/>
+              </a:rPr>
+              <a:t>Expected Answer</a:t>
+            </a:r>
+            <a:endParaRPr lang="en-US" sz="3600" dirty="0"/>
+          </a:p>
+        </p:txBody>
+      </p:sp>
+      <p:sp>
+        <p:nvSpPr>
+          <p:cNvPr id="5" name="Text 2"/>
+          <p:cNvSpPr/>
+          <p:nvPr/>
+        </p:nvSpPr>
+        <p:spPr>
+          <a:xfrm>
+            <a:off x="5349240" y="1783080"/>
+            <a:ext cx="6522415" cy="4663440"/>
+          </a:xfrm>
+          <a:prstGeom prst="rect">
+            <a:avLst/>
+          </a:prstGeom>
+          <a:noFill/>
+          <a:ln/>
+        </p:spPr>
+        <p:txBody>
+          <a:bodyPr wrap="square" lIns="0" tIns="0" rIns="0" bIns="0" rtlCol="0" anchor="t"/>
+          <a:lstStyle/>
+          <a:p>
+            <a:pPr algn="l" indent="0" marL="0">
+              <a:spcAft>
+                <a:spcPts val="800"/>
+              </a:spcAft>
+              <a:buNone/>
+            </a:pPr>
+            <a:r>
+              <a:rPr lang="en-US" sz="4000" dirty="0">
+                <a:solidFill>
+                  <a:srgbClr val="111111"/>
+                </a:solidFill>
+                <a:latin typeface="Times New Roman" pitchFamily="34" charset="0"/>
+                <a:ea typeface="Times New Roman" pitchFamily="34" charset="-122"/>
+                <a:cs typeface="Times New Roman" pitchFamily="34" charset="-120"/>
+              </a:rPr>
+              <a:t>The tropical maritime (mT) air mass, because it is moist and unstable.</a:t>
+            </a:r>
+            <a:endParaRPr lang="en-US" sz="4000" dirty="0"/>
+          </a:p>
+        </p:txBody>
+      </p:sp>
+      <p:sp>
+        <p:nvSpPr>
+          <p:cNvPr id="25" name="Slide Number Placeholder 0"/>
+          <p:cNvSpPr>
+            <a:spLocks noGrp="1"/>
+          </p:cNvSpPr>
+          <p:nvPr>
+            <p:ph type="sldNum" sz="quarter" idx="4294967295"/>
+          </p:nvPr>
+        </p:nvSpPr>
+        <p:spPr>
+          <a:xfrm>
+            <a:off x="27432" y="91440"/>
+            <a:ext cx="585216" cy="475488"/>
+          </a:xfrm>
+          <a:prstGeom prst="rect">
+            <a:avLst/>
+          </a:prstGeom>
+          <a:extLst>
+            <a:ext uri="{C572A759-6A51-4108-AA02-DFA0A04FC94B}">
+              <ma14:wrappingTextBoxFlag xmlns:ma14="http://schemas.microsoft.com/office/mac/drawingml/2011/main" val="0"/>
+            </a:ext>
+          </a:extLst>
+        </p:spPr>
+        <p:txBody>
+          <a:bodyPr/>
+          <a:lstStyle>
+            <a:lvl1pPr>
+              <a:defRPr sz="2000">
+                <a:solidFill>
+                  <a:srgbClr val="FFFFFF"/>
+                </a:solidFill>
+                <a:latin typeface="Calibri"/>
+                <a:ea typeface="Calibri"/>
+                <a:cs typeface="Calibri"/>
+              </a:defRPr>
+            </a:lvl1pPr>
+          </a:lstStyle>
+          <a:p>
+            <a:pPr algn="ctr"/>
+            <a:fld id="{F7021451-1387-4CA6-816F-3879F97B5CBC}" type="slidenum">
+              <a:rPr b="1" lang="en-US"/>
+              <a:t>57</a:t>
+            </a:fld>
+            <a:endParaRPr lang="en-US"/>
+          </a:p>
+        </p:txBody>
+      </p:sp>
+    </p:spTree>
+  </p:cSld>
+  <p:clrMapOvr>
+    <a:masterClrMapping/>
+  </p:clrMapOvr>
+</p:sld>
+</file>
+
+<file path=ppt/slides/slide58.xml><?xml version="1.0" encoding="utf-8"?>
+<p:sld xmlns:a="http://schemas.openxmlformats.org/drawingml/2006/main" xmlns:r="http://schemas.openxmlformats.org/officeDocument/2006/relationships" xmlns:p="http://schemas.openxmlformats.org/presentationml/2006/main">
+  <p:cSld name="Slide 58">
+    <p:spTree>
+      <p:nvGrpSpPr>
+        <p:cNvPr id="1" name=""/>
+        <p:cNvGrpSpPr/>
+        <p:nvPr/>
+      </p:nvGrpSpPr>
+      <p:grpSpPr>
+        <a:xfrm>
+          <a:off x="0" y="0"/>
+          <a:ext cx="0" cy="0"/>
+          <a:chOff x="0" y="0"/>
+          <a:chExt cx="0" cy="0"/>
+        </a:xfrm>
+      </p:grpSpPr>
+      <p:sp>
+        <p:nvSpPr>
+          <p:cNvPr id="2" name="Text 0"/>
+          <p:cNvSpPr/>
+          <p:nvPr/>
+        </p:nvSpPr>
+        <p:spPr>
+          <a:xfrm>
+            <a:off x="457200" y="713232"/>
+            <a:ext cx="11368735" cy="274320"/>
+          </a:xfrm>
+          <a:prstGeom prst="rect">
+            <a:avLst/>
+          </a:prstGeom>
+          <a:noFill/>
+          <a:ln/>
+        </p:spPr>
+        <p:txBody>
+          <a:bodyPr wrap="square" lIns="0" tIns="0" rIns="0" bIns="0" rtlCol="0" anchor="ctr"/>
+          <a:lstStyle/>
+          <a:p>
+            <a:pPr algn="r" indent="0" marL="0">
+              <a:buNone/>
+            </a:pPr>
+            <a:r>
+              <a:rPr lang="en-US" sz="1400" b="1" dirty="0">
+                <a:solidFill>
+                  <a:srgbClr val="1C3F6E"/>
+                </a:solidFill>
+                <a:latin typeface="Calibri" pitchFamily="34" charset="0"/>
+                <a:ea typeface="Calibri" pitchFamily="34" charset="-122"/>
+                <a:cs typeface="Calibri" pitchFamily="34" charset="-120"/>
+              </a:rPr>
+              <a:t>REMEDIATION</a:t>
+            </a:r>
+            <a:endParaRPr lang="en-US" sz="1400" dirty="0"/>
+          </a:p>
+        </p:txBody>
+      </p:sp>
+      <p:pic>
+        <p:nvPicPr>
+          <p:cNvPr id="3" name="Image 0" descr="/home/claude/f4/img/minesec_sheet.png">    </p:cNvPr>
+          <p:cNvPicPr>
+            <a:picLocks noChangeAspect="1"/>
+          </p:cNvPicPr>
+          <p:nvPr/>
+        </p:nvPicPr>
+        <p:blipFill>
+          <a:blip r:embed="rId1"/>
+          <a:stretch>
+            <a:fillRect/>
+          </a:stretch>
+        </p:blipFill>
+        <p:spPr>
+          <a:xfrm>
+            <a:off x="0" y="658368"/>
+            <a:ext cx="2468880" cy="5833872"/>
+          </a:xfrm>
+          <a:prstGeom prst="rect">
+            <a:avLst/>
+          </a:prstGeom>
+        </p:spPr>
+      </p:pic>
+      <p:sp>
+        <p:nvSpPr>
+          <p:cNvPr id="4" name="Text 1"/>
+          <p:cNvSpPr/>
+          <p:nvPr/>
+        </p:nvSpPr>
+        <p:spPr>
+          <a:xfrm>
+            <a:off x="2697480" y="1005840"/>
+            <a:ext cx="9174175" cy="731520"/>
+          </a:xfrm>
+          <a:prstGeom prst="rect">
+            <a:avLst/>
+          </a:prstGeom>
+          <a:noFill/>
+          <a:ln/>
+        </p:spPr>
+        <p:txBody>
+          <a:bodyPr wrap="square" lIns="0" tIns="0" rIns="0" bIns="0" rtlCol="0" anchor="ctr">
+            <a:normAutofit/>
+          </a:bodyPr>
+          <a:lstStyle/>
+          <a:p>
+            <a:pPr algn="ctr" indent="0" marL="0">
+              <a:buNone/>
+            </a:pPr>
+            <a:r>
+              <a:rPr lang="en-US" sz="3600" b="1" dirty="0">
+                <a:solidFill>
+                  <a:srgbClr val="990011"/>
+                </a:solidFill>
+                <a:latin typeface="Times New Roman" pitchFamily="34" charset="0"/>
+                <a:ea typeface="Times New Roman" pitchFamily="34" charset="-122"/>
+                <a:cs typeface="Times New Roman" pitchFamily="34" charset="-120"/>
+              </a:rPr>
+              <a:t>Remediation</a:t>
+            </a:r>
+            <a:endParaRPr lang="en-US" sz="3600" dirty="0"/>
+          </a:p>
+        </p:txBody>
+      </p:sp>
+      <p:sp>
+        <p:nvSpPr>
+          <p:cNvPr id="5" name="Text 2"/>
+          <p:cNvSpPr/>
+          <p:nvPr/>
+        </p:nvSpPr>
+        <p:spPr>
+          <a:xfrm>
+            <a:off x="2697480" y="1783080"/>
+            <a:ext cx="9174175" cy="4663440"/>
+          </a:xfrm>
+          <a:prstGeom prst="rect">
+            <a:avLst/>
+          </a:prstGeom>
+          <a:noFill/>
+          <a:ln/>
+        </p:spPr>
+        <p:txBody>
+          <a:bodyPr wrap="square" lIns="0" tIns="0" rIns="0" bIns="0" rtlCol="0" anchor="t"/>
+          <a:lstStyle/>
+          <a:p>
+            <a:pPr algn="l" indent="0" marL="0">
+              <a:spcAft>
+                <a:spcPts val="800"/>
+              </a:spcAft>
+              <a:buNone/>
+            </a:pPr>
+            <a:r>
+              <a:rPr lang="en-US" sz="4000" b="1" dirty="0">
+                <a:solidFill>
+                  <a:srgbClr val="111111"/>
+                </a:solidFill>
+                <a:latin typeface="Times New Roman" pitchFamily="34" charset="0"/>
+                <a:ea typeface="Times New Roman" pitchFamily="34" charset="-122"/>
+                <a:cs typeface="Times New Roman" pitchFamily="34" charset="-120"/>
+              </a:rPr>
+              <a:t>Fill in the blanks:</a:t>
+            </a:r>
+            <a:endParaRPr lang="en-US" sz="4000" dirty="0"/>
+          </a:p>
+          <a:p>
+            <a:pPr algn="l" marL="342900" indent="-342900">
+              <a:spcAft>
+                <a:spcPts val="800"/>
+              </a:spcAft>
+              <a:buSzPct val="100000"/>
+              <a:buFont typeface="+mj-lt"/>
+              <a:buAutoNum type="arabicPeriod" startAt="1"/>
+            </a:pPr>
+            <a:r>
+              <a:rPr lang="en-US" sz="4000" dirty="0">
+                <a:solidFill>
+                  <a:srgbClr val="111111"/>
+                </a:solidFill>
+                <a:latin typeface="Times New Roman" pitchFamily="34" charset="0"/>
+                <a:ea typeface="Times New Roman" pitchFamily="34" charset="-122"/>
+                <a:cs typeface="Times New Roman" pitchFamily="34" charset="-120"/>
+              </a:rPr>
+              <a:t>An air mass takes its characteristics from its ______ region.</a:t>
+            </a:r>
+            <a:endParaRPr lang="en-US" sz="4000" dirty="0"/>
+          </a:p>
+          <a:p>
+            <a:pPr algn="l" marL="342900" indent="-342900">
+              <a:spcAft>
+                <a:spcPts val="800"/>
+              </a:spcAft>
+              <a:buSzPct val="100000"/>
+              <a:buFont typeface="+mj-lt"/>
+              <a:buAutoNum type="arabicPeriod" startAt="1"/>
+            </a:pPr>
+            <a:r>
+              <a:rPr lang="en-US" sz="4000" dirty="0">
+                <a:solidFill>
+                  <a:srgbClr val="111111"/>
+                </a:solidFill>
+                <a:latin typeface="Times New Roman" pitchFamily="34" charset="0"/>
+                <a:ea typeface="Times New Roman" pitchFamily="34" charset="-122"/>
+                <a:cs typeface="Times New Roman" pitchFamily="34" charset="-120"/>
+              </a:rPr>
+              <a:t>The Harmattan is a ______ air mass.</a:t>
+            </a:r>
+            <a:endParaRPr lang="en-US" sz="4000" dirty="0"/>
+          </a:p>
+          <a:p>
+            <a:pPr algn="l" marL="342900" indent="-342900">
+              <a:spcAft>
+                <a:spcPts val="800"/>
+              </a:spcAft>
+              <a:buSzPct val="100000"/>
+              <a:buFont typeface="+mj-lt"/>
+              <a:buAutoNum type="arabicPeriod" startAt="1"/>
+            </a:pPr>
+            <a:r>
+              <a:rPr lang="en-US" sz="4000" dirty="0">
+                <a:solidFill>
+                  <a:srgbClr val="111111"/>
+                </a:solidFill>
+                <a:latin typeface="Times New Roman" pitchFamily="34" charset="0"/>
+                <a:ea typeface="Times New Roman" pitchFamily="34" charset="-122"/>
+                <a:cs typeface="Times New Roman" pitchFamily="34" charset="-120"/>
+              </a:rPr>
+              <a:t>The two air masses meet at the ______.</a:t>
+            </a:r>
+            <a:endParaRPr lang="en-US" sz="4000" dirty="0"/>
+          </a:p>
+        </p:txBody>
+      </p:sp>
+      <p:sp>
+        <p:nvSpPr>
+          <p:cNvPr id="25" name="Slide Number Placeholder 0"/>
+          <p:cNvSpPr>
+            <a:spLocks noGrp="1"/>
+          </p:cNvSpPr>
+          <p:nvPr>
+            <p:ph type="sldNum" sz="quarter" idx="4294967295"/>
+          </p:nvPr>
+        </p:nvSpPr>
+        <p:spPr>
+          <a:xfrm>
+            <a:off x="27432" y="91440"/>
+            <a:ext cx="585216" cy="475488"/>
+          </a:xfrm>
+          <a:prstGeom prst="rect">
+            <a:avLst/>
+          </a:prstGeom>
+          <a:extLst>
+            <a:ext uri="{C572A759-6A51-4108-AA02-DFA0A04FC94B}">
+              <ma14:wrappingTextBoxFlag xmlns:ma14="http://schemas.microsoft.com/office/mac/drawingml/2011/main" val="0"/>
+            </a:ext>
+          </a:extLst>
+        </p:spPr>
+        <p:txBody>
+          <a:bodyPr/>
+          <a:lstStyle>
+            <a:lvl1pPr>
+              <a:defRPr sz="2000">
+                <a:solidFill>
+                  <a:srgbClr val="FFFFFF"/>
+                </a:solidFill>
+                <a:latin typeface="Calibri"/>
+                <a:ea typeface="Calibri"/>
+                <a:cs typeface="Calibri"/>
+              </a:defRPr>
+            </a:lvl1pPr>
+          </a:lstStyle>
+          <a:p>
+            <a:pPr algn="ctr"/>
+            <a:fld id="{F7021451-1387-4CA6-816F-3879F97B5CBC}" type="slidenum">
+              <a:rPr b="1" lang="en-US"/>
+              <a:t>58</a:t>
+            </a:fld>
+            <a:endParaRPr lang="en-US"/>
+          </a:p>
+        </p:txBody>
+      </p:sp>
+    </p:spTree>
+  </p:cSld>
+  <p:clrMapOvr>
+    <a:masterClrMapping/>
+  </p:clrMapOvr>
+</p:sld>
+</file>
+
+<file path=ppt/slides/slide59.xml><?xml version="1.0" encoding="utf-8"?>
+<p:sld xmlns:a="http://schemas.openxmlformats.org/drawingml/2006/main" xmlns:r="http://schemas.openxmlformats.org/officeDocument/2006/relationships" xmlns:p="http://schemas.openxmlformats.org/presentationml/2006/main">
+  <p:cSld name="Slide 59">
+    <p:spTree>
+      <p:nvGrpSpPr>
+        <p:cNvPr id="1" name=""/>
+        <p:cNvGrpSpPr/>
+        <p:nvPr/>
+      </p:nvGrpSpPr>
+      <p:grpSpPr>
+        <a:xfrm>
+          <a:off x="0" y="0"/>
+          <a:ext cx="0" cy="0"/>
+          <a:chOff x="0" y="0"/>
+          <a:chExt cx="0" cy="0"/>
+        </a:xfrm>
+      </p:grpSpPr>
+      <p:sp>
+        <p:nvSpPr>
+          <p:cNvPr id="2" name="Text 0"/>
+          <p:cNvSpPr/>
+          <p:nvPr/>
+        </p:nvSpPr>
+        <p:spPr>
+          <a:xfrm>
+            <a:off x="457200" y="713232"/>
+            <a:ext cx="11368735" cy="274320"/>
+          </a:xfrm>
+          <a:prstGeom prst="rect">
+            <a:avLst/>
+          </a:prstGeom>
+          <a:noFill/>
+          <a:ln/>
+        </p:spPr>
+        <p:txBody>
+          <a:bodyPr wrap="square" lIns="0" tIns="0" rIns="0" bIns="0" rtlCol="0" anchor="ctr"/>
+          <a:lstStyle/>
+          <a:p>
+            <a:pPr algn="r" indent="0" marL="0">
+              <a:buNone/>
+            </a:pPr>
+            <a:r>
+              <a:rPr lang="en-US" sz="1400" b="1" dirty="0">
+                <a:solidFill>
+                  <a:srgbClr val="1C3F6E"/>
+                </a:solidFill>
+                <a:latin typeface="Calibri" pitchFamily="34" charset="0"/>
+                <a:ea typeface="Calibri" pitchFamily="34" charset="-122"/>
+                <a:cs typeface="Calibri" pitchFamily="34" charset="-120"/>
+              </a:rPr>
+              <a:t>HOMEWORK</a:t>
+            </a:r>
+            <a:endParaRPr lang="en-US" sz="1400" dirty="0"/>
+          </a:p>
+        </p:txBody>
+      </p:sp>
+      <p:pic>
+        <p:nvPicPr>
+          <p:cNvPr id="3" name="Image 0" descr="/home/claude/f4/img/minesec_sheet.png">    </p:cNvPr>
+          <p:cNvPicPr>
+            <a:picLocks noChangeAspect="1"/>
+          </p:cNvPicPr>
+          <p:nvPr/>
+        </p:nvPicPr>
+        <p:blipFill>
+          <a:blip r:embed="rId1"/>
+          <a:stretch>
+            <a:fillRect/>
+          </a:stretch>
+        </p:blipFill>
+        <p:spPr>
+          <a:xfrm>
+            <a:off x="0" y="658368"/>
+            <a:ext cx="5120640" cy="5833872"/>
+          </a:xfrm>
+          <a:prstGeom prst="rect">
+            <a:avLst/>
+          </a:prstGeom>
+        </p:spPr>
+      </p:pic>
+      <p:sp>
+        <p:nvSpPr>
+          <p:cNvPr id="4" name="Text 1"/>
+          <p:cNvSpPr/>
+          <p:nvPr/>
+        </p:nvSpPr>
+        <p:spPr>
+          <a:xfrm>
+            <a:off x="5349240" y="1005840"/>
+            <a:ext cx="6522415" cy="731520"/>
+          </a:xfrm>
+          <a:prstGeom prst="rect">
+            <a:avLst/>
+          </a:prstGeom>
+          <a:noFill/>
+          <a:ln/>
+        </p:spPr>
+        <p:txBody>
+          <a:bodyPr wrap="square" lIns="0" tIns="0" rIns="0" bIns="0" rtlCol="0" anchor="ctr">
+            <a:normAutofit/>
+          </a:bodyPr>
+          <a:lstStyle/>
+          <a:p>
+            <a:pPr algn="ctr" indent="0" marL="0">
+              <a:buNone/>
+            </a:pPr>
+            <a:r>
+              <a:rPr lang="en-US" sz="3600" b="1" dirty="0">
+                <a:solidFill>
+                  <a:srgbClr val="990011"/>
+                </a:solidFill>
+                <a:latin typeface="Times New Roman" pitchFamily="34" charset="0"/>
+                <a:ea typeface="Times New Roman" pitchFamily="34" charset="-122"/>
+                <a:cs typeface="Times New Roman" pitchFamily="34" charset="-120"/>
+              </a:rPr>
+              <a:t>Homework</a:t>
+            </a:r>
+            <a:endParaRPr lang="en-US" sz="3600" dirty="0"/>
+          </a:p>
+        </p:txBody>
+      </p:sp>
+      <p:sp>
+        <p:nvSpPr>
+          <p:cNvPr id="5" name="Text 2"/>
+          <p:cNvSpPr/>
+          <p:nvPr/>
+        </p:nvSpPr>
+        <p:spPr>
+          <a:xfrm>
+            <a:off x="5349240" y="1783080"/>
+            <a:ext cx="6522415" cy="4663440"/>
+          </a:xfrm>
+          <a:prstGeom prst="rect">
+            <a:avLst/>
+          </a:prstGeom>
+          <a:noFill/>
+          <a:ln/>
+        </p:spPr>
+        <p:txBody>
+          <a:bodyPr wrap="square" lIns="0" tIns="0" rIns="0" bIns="0" rtlCol="0" anchor="t"/>
+          <a:lstStyle/>
+          <a:p>
+            <a:pPr algn="l" indent="0" marL="0">
+              <a:spcAft>
+                <a:spcPts val="800"/>
+              </a:spcAft>
+              <a:buNone/>
+            </a:pPr>
+            <a:r>
+              <a:rPr lang="en-US" sz="4000" dirty="0">
+                <a:solidFill>
+                  <a:srgbClr val="111111"/>
+                </a:solidFill>
+                <a:latin typeface="Times New Roman" pitchFamily="34" charset="0"/>
+                <a:ea typeface="Times New Roman" pitchFamily="34" charset="-122"/>
+                <a:cs typeface="Times New Roman" pitchFamily="34" charset="-120"/>
+              </a:rPr>
+              <a:t>Define climate.</a:t>
+            </a:r>
+            <a:endParaRPr lang="en-US" sz="4000" dirty="0"/>
+          </a:p>
+        </p:txBody>
+      </p:sp>
+      <p:sp>
+        <p:nvSpPr>
+          <p:cNvPr id="25" name="Slide Number Placeholder 0"/>
+          <p:cNvSpPr>
+            <a:spLocks noGrp="1"/>
+          </p:cNvSpPr>
+          <p:nvPr>
+            <p:ph type="sldNum" sz="quarter" idx="4294967295"/>
+          </p:nvPr>
+        </p:nvSpPr>
+        <p:spPr>
+          <a:xfrm>
+            <a:off x="27432" y="91440"/>
+            <a:ext cx="585216" cy="475488"/>
+          </a:xfrm>
+          <a:prstGeom prst="rect">
+            <a:avLst/>
+          </a:prstGeom>
+          <a:extLst>
+            <a:ext uri="{C572A759-6A51-4108-AA02-DFA0A04FC94B}">
+              <ma14:wrappingTextBoxFlag xmlns:ma14="http://schemas.microsoft.com/office/mac/drawingml/2011/main" val="0"/>
+            </a:ext>
+          </a:extLst>
+        </p:spPr>
+        <p:txBody>
+          <a:bodyPr/>
+          <a:lstStyle>
+            <a:lvl1pPr>
+              <a:defRPr sz="2000">
+                <a:solidFill>
+                  <a:srgbClr val="FFFFFF"/>
+                </a:solidFill>
+                <a:latin typeface="Calibri"/>
+                <a:ea typeface="Calibri"/>
+                <a:cs typeface="Calibri"/>
+              </a:defRPr>
+            </a:lvl1pPr>
+          </a:lstStyle>
+          <a:p>
+            <a:pPr algn="ctr"/>
+            <a:fld id="{F7021451-1387-4CA6-816F-3879F97B5CBC}" type="slidenum">
+              <a:rPr b="1" lang="en-US"/>
+              <a:t>59</a:t>
+            </a:fld>
+            <a:endParaRPr lang="en-US"/>
+          </a:p>
+        </p:txBody>
+      </p:sp>
+    </p:spTree>
+  </p:cSld>
+  <p:clrMapOvr>
+    <a:masterClrMapping/>
+  </p:clrMapOvr>
+</p:sld>
+</file>
+
+<file path=ppt/slides/slide6.xml><?xml version="1.0" encoding="utf-8"?>
+<p:sld xmlns:a="http://schemas.openxmlformats.org/drawingml/2006/main" xmlns:r="http://schemas.openxmlformats.org/officeDocument/2006/relationships" xmlns:p="http://schemas.openxmlformats.org/presentationml/2006/main">
+  <p:cSld name="Slide 6">
+    <p:spTree>
+      <p:nvGrpSpPr>
+        <p:cNvPr id="1" name=""/>
+        <p:cNvGrpSpPr/>
+        <p:nvPr/>
+      </p:nvGrpSpPr>
+      <p:grpSpPr>
+        <a:xfrm>
+          <a:off x="0" y="0"/>
+          <a:ext cx="0" cy="0"/>
+          <a:chOff x="0" y="0"/>
+          <a:chExt cx="0" cy="0"/>
+        </a:xfrm>
+      </p:grpSpPr>
+      <p:sp>
+        <p:nvSpPr>
+          <p:cNvPr id="2" name="Text 0"/>
+          <p:cNvSpPr/>
+          <p:nvPr/>
+        </p:nvSpPr>
+        <p:spPr>
+          <a:xfrm>
+            <a:off x="457200" y="713232"/>
+            <a:ext cx="11368735" cy="274320"/>
+          </a:xfrm>
+          <a:prstGeom prst="rect">
+            <a:avLst/>
+          </a:prstGeom>
+          <a:noFill/>
+          <a:ln/>
+        </p:spPr>
+        <p:txBody>
+          <a:bodyPr wrap="square" lIns="0" tIns="0" rIns="0" bIns="0" rtlCol="0" anchor="ctr"/>
+          <a:lstStyle/>
+          <a:p>
+            <a:pPr algn="r" indent="0" marL="0">
+              <a:buNone/>
+            </a:pPr>
+            <a:r>
+              <a:rPr lang="en-US" sz="1400" b="1" dirty="0">
+                <a:solidFill>
+                  <a:srgbClr val="1C3F6E"/>
+                </a:solidFill>
+                <a:latin typeface="Calibri" pitchFamily="34" charset="0"/>
+                <a:ea typeface="Calibri" pitchFamily="34" charset="-122"/>
+                <a:cs typeface="Calibri" pitchFamily="34" charset="-120"/>
+              </a:rPr>
+              <a:t>LESSON PLAN</a:t>
+            </a:r>
+            <a:endParaRPr lang="en-US" sz="1400" dirty="0"/>
+          </a:p>
+        </p:txBody>
+      </p:sp>
+      <p:pic>
+        <p:nvPicPr>
+          <p:cNvPr id="3" name="Image 0" descr="/home/claude/f4/img/minesec_sheet.png">    </p:cNvPr>
+          <p:cNvPicPr>
+            <a:picLocks noChangeAspect="1"/>
+          </p:cNvPicPr>
+          <p:nvPr/>
+        </p:nvPicPr>
+        <p:blipFill>
+          <a:blip r:embed="rId1"/>
+          <a:stretch>
+            <a:fillRect/>
+          </a:stretch>
+        </p:blipFill>
+        <p:spPr>
+          <a:xfrm>
+            <a:off x="0" y="658368"/>
+            <a:ext cx="2468880" cy="5833872"/>
+          </a:xfrm>
+          <a:prstGeom prst="rect">
+            <a:avLst/>
+          </a:prstGeom>
+        </p:spPr>
+      </p:pic>
+      <p:sp>
+        <p:nvSpPr>
+          <p:cNvPr id="4" name="Text 1"/>
+          <p:cNvSpPr/>
+          <p:nvPr/>
+        </p:nvSpPr>
+        <p:spPr>
+          <a:xfrm>
+            <a:off x="2697480" y="1005840"/>
+            <a:ext cx="9174175" cy="731520"/>
+          </a:xfrm>
+          <a:prstGeom prst="rect">
+            <a:avLst/>
+          </a:prstGeom>
+          <a:noFill/>
+          <a:ln/>
+        </p:spPr>
+        <p:txBody>
+          <a:bodyPr wrap="square" lIns="0" tIns="0" rIns="0" bIns="0" rtlCol="0" anchor="ctr">
+            <a:normAutofit/>
+          </a:bodyPr>
+          <a:lstStyle/>
+          <a:p>
+            <a:pPr algn="ctr" indent="0" marL="0">
+              <a:buNone/>
+            </a:pPr>
+            <a:r>
+              <a:rPr lang="en-US" sz="3600" b="1" dirty="0">
+                <a:solidFill>
+                  <a:srgbClr val="990011"/>
+                </a:solidFill>
+                <a:latin typeface="Times New Roman" pitchFamily="34" charset="0"/>
+                <a:ea typeface="Times New Roman" pitchFamily="34" charset="-122"/>
+                <a:cs typeface="Times New Roman" pitchFamily="34" charset="-120"/>
+              </a:rPr>
+              <a:t>Lesson Plan</a:t>
+            </a:r>
+            <a:endParaRPr lang="en-US" sz="3600" dirty="0"/>
+          </a:p>
+        </p:txBody>
+      </p:sp>
+      <p:sp>
+        <p:nvSpPr>
+          <p:cNvPr id="5" name="Text 2"/>
+          <p:cNvSpPr/>
+          <p:nvPr/>
+        </p:nvSpPr>
+        <p:spPr>
+          <a:xfrm>
+            <a:off x="2697480" y="1783080"/>
+            <a:ext cx="9174175" cy="4663440"/>
+          </a:xfrm>
+          <a:prstGeom prst="rect">
+            <a:avLst/>
+          </a:prstGeom>
+          <a:noFill/>
+          <a:ln/>
+        </p:spPr>
+        <p:txBody>
+          <a:bodyPr wrap="square" lIns="0" tIns="0" rIns="0" bIns="0" rtlCol="0" anchor="t"/>
+          <a:lstStyle/>
+          <a:p>
+            <a:pPr algn="l" marL="342900" indent="-342900">
+              <a:spcAft>
+                <a:spcPts val="800"/>
+              </a:spcAft>
+              <a:buSzPct val="100000"/>
+              <a:buFont typeface="+mj-lt"/>
+              <a:buAutoNum type="arabicPeriod" startAt="1"/>
+            </a:pPr>
+            <a:r>
+              <a:rPr lang="en-US" sz="4000" dirty="0">
+                <a:solidFill>
+                  <a:srgbClr val="111111"/>
+                </a:solidFill>
+                <a:latin typeface="Times New Roman" pitchFamily="34" charset="0"/>
+                <a:ea typeface="Times New Roman" pitchFamily="34" charset="-122"/>
+                <a:cs typeface="Times New Roman" pitchFamily="34" charset="-120"/>
+              </a:rPr>
+              <a:t>Correction of the homework</a:t>
+            </a:r>
+            <a:endParaRPr lang="en-US" sz="4000" dirty="0"/>
+          </a:p>
+          <a:p>
+            <a:pPr algn="l" marL="342900" indent="-342900">
+              <a:spcAft>
+                <a:spcPts val="800"/>
+              </a:spcAft>
+              <a:buSzPct val="100000"/>
+              <a:buFont typeface="+mj-lt"/>
+              <a:buAutoNum type="arabicPeriod" startAt="1"/>
+            </a:pPr>
+            <a:r>
+              <a:rPr lang="en-US" sz="4000" dirty="0">
+                <a:solidFill>
+                  <a:srgbClr val="111111"/>
+                </a:solidFill>
+                <a:latin typeface="Times New Roman" pitchFamily="34" charset="0"/>
+                <a:ea typeface="Times New Roman" pitchFamily="34" charset="-122"/>
+                <a:cs typeface="Times New Roman" pitchFamily="34" charset="-120"/>
+              </a:rPr>
+              <a:t>Objectives and recall</a:t>
+            </a:r>
+            <a:endParaRPr lang="en-US" sz="4000" dirty="0"/>
+          </a:p>
+          <a:p>
+            <a:pPr algn="l" marL="342900" indent="-342900">
+              <a:spcAft>
+                <a:spcPts val="800"/>
+              </a:spcAft>
+              <a:buSzPct val="100000"/>
+              <a:buFont typeface="+mj-lt"/>
+              <a:buAutoNum type="arabicPeriod" startAt="1"/>
+            </a:pPr>
+            <a:r>
+              <a:rPr lang="en-US" sz="4000" dirty="0">
+                <a:solidFill>
+                  <a:srgbClr val="111111"/>
+                </a:solidFill>
+                <a:latin typeface="Times New Roman" pitchFamily="34" charset="0"/>
+                <a:ea typeface="Times New Roman" pitchFamily="34" charset="-122"/>
+                <a:cs typeface="Times New Roman" pitchFamily="34" charset="-120"/>
+              </a:rPr>
+              <a:t>Real-life situation and action to take</a:t>
+            </a:r>
+            <a:endParaRPr lang="en-US" sz="4000" dirty="0"/>
+          </a:p>
+          <a:p>
+            <a:pPr algn="l" marL="342900" indent="-342900">
+              <a:spcAft>
+                <a:spcPts val="800"/>
+              </a:spcAft>
+              <a:buSzPct val="100000"/>
+              <a:buFont typeface="+mj-lt"/>
+              <a:buAutoNum type="arabicPeriod" startAt="1"/>
+            </a:pPr>
+            <a:r>
+              <a:rPr lang="en-US" sz="4000" dirty="0">
+                <a:solidFill>
+                  <a:srgbClr val="111111"/>
+                </a:solidFill>
+                <a:latin typeface="Times New Roman" pitchFamily="34" charset="0"/>
+                <a:ea typeface="Times New Roman" pitchFamily="34" charset="-122"/>
+                <a:cs typeface="Times New Roman" pitchFamily="34" charset="-120"/>
+              </a:rPr>
+              <a:t>Learning activities</a:t>
+            </a:r>
+            <a:endParaRPr lang="en-US" sz="4000" dirty="0"/>
+          </a:p>
+          <a:p>
+            <a:pPr algn="l" marL="342900" indent="-342900">
+              <a:spcAft>
+                <a:spcPts val="800"/>
+              </a:spcAft>
+              <a:buSzPct val="100000"/>
+              <a:buFont typeface="+mj-lt"/>
+              <a:buAutoNum type="arabicPeriod" startAt="1"/>
+            </a:pPr>
+            <a:r>
+              <a:rPr lang="en-US" sz="4000" dirty="0">
+                <a:solidFill>
+                  <a:srgbClr val="111111"/>
+                </a:solidFill>
+                <a:latin typeface="Times New Roman" pitchFamily="34" charset="0"/>
+                <a:ea typeface="Times New Roman" pitchFamily="34" charset="-122"/>
+                <a:cs typeface="Times New Roman" pitchFamily="34" charset="-120"/>
+              </a:rPr>
+              <a:t>Board summary</a:t>
+            </a:r>
+            <a:endParaRPr lang="en-US" sz="4000" dirty="0"/>
+          </a:p>
+          <a:p>
+            <a:pPr algn="l" marL="342900" indent="-342900">
+              <a:spcAft>
+                <a:spcPts val="800"/>
+              </a:spcAft>
+              <a:buSzPct val="100000"/>
+              <a:buFont typeface="+mj-lt"/>
+              <a:buAutoNum type="arabicPeriod" startAt="1"/>
+            </a:pPr>
+            <a:r>
+              <a:rPr lang="en-US" sz="4000" dirty="0">
+                <a:solidFill>
+                  <a:srgbClr val="111111"/>
+                </a:solidFill>
+                <a:latin typeface="Times New Roman" pitchFamily="34" charset="0"/>
+                <a:ea typeface="Times New Roman" pitchFamily="34" charset="-122"/>
+                <a:cs typeface="Times New Roman" pitchFamily="34" charset="-120"/>
+              </a:rPr>
+              <a:t>Evaluation, remediation and homework</a:t>
+            </a:r>
+            <a:endParaRPr lang="en-US" sz="4000" dirty="0"/>
+          </a:p>
+        </p:txBody>
+      </p:sp>
+      <p:sp>
+        <p:nvSpPr>
+          <p:cNvPr id="25" name="Slide Number Placeholder 0"/>
+          <p:cNvSpPr>
+            <a:spLocks noGrp="1"/>
+          </p:cNvSpPr>
+          <p:nvPr>
+            <p:ph type="sldNum" sz="quarter" idx="4294967295"/>
+          </p:nvPr>
+        </p:nvSpPr>
+        <p:spPr>
+          <a:xfrm>
+            <a:off x="27432" y="91440"/>
+            <a:ext cx="585216" cy="475488"/>
+          </a:xfrm>
+          <a:prstGeom prst="rect">
+            <a:avLst/>
+          </a:prstGeom>
+          <a:extLst>
+            <a:ext uri="{C572A759-6A51-4108-AA02-DFA0A04FC94B}">
+              <ma14:wrappingTextBoxFlag xmlns:ma14="http://schemas.microsoft.com/office/mac/drawingml/2011/main" val="0"/>
+            </a:ext>
+          </a:extLst>
+        </p:spPr>
+        <p:txBody>
+          <a:bodyPr/>
+          <a:lstStyle>
+            <a:lvl1pPr>
+              <a:defRPr sz="2000">
+                <a:solidFill>
+                  <a:srgbClr val="FFFFFF"/>
+                </a:solidFill>
+                <a:latin typeface="Calibri"/>
+                <a:ea typeface="Calibri"/>
+                <a:cs typeface="Calibri"/>
+              </a:defRPr>
+            </a:lvl1pPr>
+          </a:lstStyle>
+          <a:p>
+            <a:pPr algn="ctr"/>
+            <a:fld id="{F7021451-1387-4CA6-816F-3879F97B5CBC}" type="slidenum">
+              <a:rPr b="1" lang="en-US"/>
+              <a:t>6</a:t>
+            </a:fld>
+            <a:endParaRPr lang="en-US"/>
+          </a:p>
+        </p:txBody>
+      </p:sp>
+    </p:spTree>
+  </p:cSld>
+  <p:clrMapOvr>
+    <a:masterClrMapping/>
+  </p:clrMapOvr>
+</p:sld>
+</file>
+
+<file path=ppt/slides/slide60.xml><?xml version="1.0" encoding="utf-8"?>
+<p:sld xmlns:a="http://schemas.openxmlformats.org/drawingml/2006/main" xmlns:r="http://schemas.openxmlformats.org/officeDocument/2006/relationships" xmlns:p="http://schemas.openxmlformats.org/presentationml/2006/main">
+  <p:cSld name="Slide 60">
+    <p:spTree>
+      <p:nvGrpSpPr>
+        <p:cNvPr id="1" name=""/>
+        <p:cNvGrpSpPr/>
+        <p:nvPr/>
+      </p:nvGrpSpPr>
+      <p:grpSpPr>
+        <a:xfrm>
+          <a:off x="0" y="0"/>
+          <a:ext cx="0" cy="0"/>
+          <a:chOff x="0" y="0"/>
+          <a:chExt cx="0" cy="0"/>
+        </a:xfrm>
+      </p:grpSpPr>
+      <p:sp>
+        <p:nvSpPr>
+          <p:cNvPr id="2" name="Text 0"/>
+          <p:cNvSpPr/>
+          <p:nvPr/>
+        </p:nvSpPr>
+        <p:spPr>
+          <a:xfrm>
+            <a:off x="457200" y="713232"/>
+            <a:ext cx="11368735" cy="274320"/>
+          </a:xfrm>
+          <a:prstGeom prst="rect">
+            <a:avLst/>
+          </a:prstGeom>
+          <a:noFill/>
+          <a:ln/>
+        </p:spPr>
+        <p:txBody>
+          <a:bodyPr wrap="square" lIns="0" tIns="0" rIns="0" bIns="0" rtlCol="0" anchor="ctr"/>
+          <a:lstStyle/>
+          <a:p>
+            <a:pPr algn="r" indent="0" marL="0">
+              <a:buNone/>
+            </a:pPr>
+            <a:r>
+              <a:rPr lang="en-US" sz="1400" b="1" dirty="0">
+                <a:solidFill>
+                  <a:srgbClr val="1C3F6E"/>
+                </a:solidFill>
+                <a:latin typeface="Calibri" pitchFamily="34" charset="0"/>
+                <a:ea typeface="Calibri" pitchFamily="34" charset="-122"/>
+                <a:cs typeface="Calibri" pitchFamily="34" charset="-120"/>
+              </a:rPr>
+              <a:t>NEXT LESSON</a:t>
+            </a:r>
+            <a:endParaRPr lang="en-US" sz="1400" dirty="0"/>
+          </a:p>
+        </p:txBody>
+      </p:sp>
+      <p:pic>
+        <p:nvPicPr>
+          <p:cNvPr id="3" name="Image 0" descr="/home/claude/f4/img/minesec_sheet.png">    </p:cNvPr>
+          <p:cNvPicPr>
+            <a:picLocks noChangeAspect="1"/>
+          </p:cNvPicPr>
+          <p:nvPr/>
+        </p:nvPicPr>
+        <p:blipFill>
+          <a:blip r:embed="rId1"/>
+          <a:stretch>
+            <a:fillRect/>
+          </a:stretch>
+        </p:blipFill>
+        <p:spPr>
+          <a:xfrm>
+            <a:off x="0" y="658368"/>
+            <a:ext cx="5120640" cy="5833872"/>
+          </a:xfrm>
+          <a:prstGeom prst="rect">
+            <a:avLst/>
+          </a:prstGeom>
+        </p:spPr>
+      </p:pic>
+      <p:sp>
+        <p:nvSpPr>
+          <p:cNvPr id="4" name="Text 1"/>
+          <p:cNvSpPr/>
+          <p:nvPr/>
+        </p:nvSpPr>
+        <p:spPr>
+          <a:xfrm>
+            <a:off x="5349240" y="1005840"/>
+            <a:ext cx="6522415" cy="731520"/>
+          </a:xfrm>
+          <a:prstGeom prst="rect">
+            <a:avLst/>
+          </a:prstGeom>
+          <a:noFill/>
+          <a:ln/>
+        </p:spPr>
+        <p:txBody>
+          <a:bodyPr wrap="square" lIns="0" tIns="0" rIns="0" bIns="0" rtlCol="0" anchor="ctr">
+            <a:normAutofit/>
+          </a:bodyPr>
+          <a:lstStyle/>
+          <a:p>
+            <a:pPr algn="ctr" indent="0" marL="0">
+              <a:buNone/>
+            </a:pPr>
+            <a:r>
+              <a:rPr lang="en-US" sz="3600" b="1" dirty="0">
+                <a:solidFill>
+                  <a:srgbClr val="990011"/>
+                </a:solidFill>
+                <a:latin typeface="Times New Roman" pitchFamily="34" charset="0"/>
+                <a:ea typeface="Times New Roman" pitchFamily="34" charset="-122"/>
+                <a:cs typeface="Times New Roman" pitchFamily="34" charset="-120"/>
+              </a:rPr>
+              <a:t>Next Lesson</a:t>
+            </a:r>
+            <a:endParaRPr lang="en-US" sz="3600" dirty="0"/>
+          </a:p>
+        </p:txBody>
+      </p:sp>
+      <p:sp>
+        <p:nvSpPr>
+          <p:cNvPr id="5" name="Text 2"/>
+          <p:cNvSpPr/>
+          <p:nvPr/>
+        </p:nvSpPr>
+        <p:spPr>
+          <a:xfrm>
+            <a:off x="5349240" y="1783080"/>
+            <a:ext cx="6522415" cy="4663440"/>
+          </a:xfrm>
+          <a:prstGeom prst="rect">
+            <a:avLst/>
+          </a:prstGeom>
+          <a:noFill/>
+          <a:ln/>
+        </p:spPr>
+        <p:txBody>
+          <a:bodyPr wrap="square" lIns="0" tIns="0" rIns="0" bIns="0" rtlCol="0" anchor="ctr"/>
+          <a:lstStyle/>
+          <a:p>
+            <a:pPr algn="ctr" indent="0" marL="0">
+              <a:spcAft>
+                <a:spcPts val="800"/>
+              </a:spcAft>
+              <a:buNone/>
+            </a:pPr>
+            <a:r>
+              <a:rPr lang="en-US" sz="4000" b="1" dirty="0">
+                <a:solidFill>
+                  <a:srgbClr val="111111"/>
+                </a:solidFill>
+                <a:latin typeface="Times New Roman" pitchFamily="34" charset="0"/>
+                <a:ea typeface="Times New Roman" pitchFamily="34" charset="-122"/>
+                <a:cs typeface="Times New Roman" pitchFamily="34" charset="-120"/>
+              </a:rPr>
+              <a:t>Our next lesson will be on:</a:t>
+            </a:r>
+            <a:endParaRPr lang="en-US" sz="4000" dirty="0"/>
+          </a:p>
+          <a:p>
+            <a:pPr algn="ctr" indent="0" marL="0">
+              <a:spcAft>
+                <a:spcPts val="800"/>
+              </a:spcAft>
+              <a:buNone/>
+            </a:pPr>
+            <a:r>
+              <a:rPr lang="en-US" sz="4000" b="1" dirty="0">
+                <a:solidFill>
+                  <a:srgbClr val="990011"/>
+                </a:solidFill>
+                <a:latin typeface="Times New Roman" pitchFamily="34" charset="0"/>
+                <a:ea typeface="Times New Roman" pitchFamily="34" charset="-122"/>
+                <a:cs typeface="Times New Roman" pitchFamily="34" charset="-120"/>
+              </a:rPr>
+              <a:t>Lesson 19: Meaning of Climate and Köppen's Classification</a:t>
+            </a:r>
+            <a:endParaRPr lang="en-US" sz="4000" dirty="0"/>
+          </a:p>
+        </p:txBody>
+      </p:sp>
+      <p:sp>
+        <p:nvSpPr>
+          <p:cNvPr id="25" name="Slide Number Placeholder 0"/>
+          <p:cNvSpPr>
+            <a:spLocks noGrp="1"/>
+          </p:cNvSpPr>
+          <p:nvPr>
+            <p:ph type="sldNum" sz="quarter" idx="4294967295"/>
+          </p:nvPr>
+        </p:nvSpPr>
+        <p:spPr>
+          <a:xfrm>
+            <a:off x="27432" y="91440"/>
+            <a:ext cx="585216" cy="475488"/>
+          </a:xfrm>
+          <a:prstGeom prst="rect">
+            <a:avLst/>
+          </a:prstGeom>
+          <a:extLst>
+            <a:ext uri="{C572A759-6A51-4108-AA02-DFA0A04FC94B}">
+              <ma14:wrappingTextBoxFlag xmlns:ma14="http://schemas.microsoft.com/office/mac/drawingml/2011/main" val="0"/>
+            </a:ext>
+          </a:extLst>
+        </p:spPr>
+        <p:txBody>
+          <a:bodyPr/>
+          <a:lstStyle>
+            <a:lvl1pPr>
+              <a:defRPr sz="2000">
+                <a:solidFill>
+                  <a:srgbClr val="FFFFFF"/>
+                </a:solidFill>
+                <a:latin typeface="Calibri"/>
+                <a:ea typeface="Calibri"/>
+                <a:cs typeface="Calibri"/>
+              </a:defRPr>
+            </a:lvl1pPr>
+          </a:lstStyle>
+          <a:p>
+            <a:pPr algn="ctr"/>
+            <a:fld id="{F7021451-1387-4CA6-816F-3879F97B5CBC}" type="slidenum">
+              <a:rPr b="1" lang="en-US"/>
+              <a:t>60</a:t>
+            </a:fld>
+            <a:endParaRPr lang="en-US"/>
+          </a:p>
+        </p:txBody>
+      </p:sp>
+    </p:spTree>
+  </p:cSld>
+  <p:clrMapOvr>
+    <a:masterClrMapping/>
+  </p:clrMapOvr>
+</p:sld>
+</file>
+
+<file path=ppt/slides/slide61.xml><?xml version="1.0" encoding="utf-8"?>
+<p:sld xmlns:a="http://schemas.openxmlformats.org/drawingml/2006/main" xmlns:r="http://schemas.openxmlformats.org/officeDocument/2006/relationships" xmlns:p="http://schemas.openxmlformats.org/presentationml/2006/main">
+  <p:cSld name="Slide 61">
+    <p:spTree>
+      <p:nvGrpSpPr>
+        <p:cNvPr id="1" name=""/>
+        <p:cNvGrpSpPr/>
+        <p:nvPr/>
+      </p:nvGrpSpPr>
+      <p:grpSpPr>
+        <a:xfrm>
+          <a:off x="0" y="0"/>
+          <a:ext cx="0" cy="0"/>
+          <a:chOff x="0" y="0"/>
+          <a:chExt cx="0" cy="0"/>
+        </a:xfrm>
+      </p:grpSpPr>
+      <p:sp>
+        <p:nvSpPr>
+          <p:cNvPr id="2" name="Text 0"/>
+          <p:cNvSpPr/>
+          <p:nvPr/>
+        </p:nvSpPr>
+        <p:spPr>
+          <a:xfrm>
+            <a:off x="457200" y="713232"/>
+            <a:ext cx="11368735" cy="274320"/>
+          </a:xfrm>
+          <a:prstGeom prst="rect">
+            <a:avLst/>
+          </a:prstGeom>
+          <a:noFill/>
+          <a:ln/>
+        </p:spPr>
+        <p:txBody>
+          <a:bodyPr wrap="square" lIns="0" tIns="0" rIns="0" bIns="0" rtlCol="0" anchor="ctr"/>
+          <a:lstStyle/>
+          <a:p>
+            <a:pPr algn="r" indent="0" marL="0">
+              <a:buNone/>
+            </a:pPr>
+            <a:r>
+              <a:rPr lang="en-US" sz="1400" b="1" dirty="0">
+                <a:solidFill>
+                  <a:srgbClr val="1C3F6E"/>
+                </a:solidFill>
+                <a:latin typeface="Calibri" pitchFamily="34" charset="0"/>
+                <a:ea typeface="Calibri" pitchFamily="34" charset="-122"/>
+                <a:cs typeface="Calibri" pitchFamily="34" charset="-120"/>
+              </a:rPr>
               <a:t>BILINGUAL GAME</a:t>
             </a:r>
             <a:endParaRPr lang="en-US" sz="1400" dirty="0"/>
@@ -20423,7 +21963,7 @@
       </p:sp>
       <p:graphicFrame>
         <p:nvGraphicFramePr>
-          <p:cNvPr id="58" name="Table 0"/>
+          <p:cNvPr id="62" name="Table 0"/>
           <p:cNvGraphicFramePr>
             <a:graphicFrameLocks noGrp="1"/>
           </p:cNvGraphicFramePr>
@@ -21459,7 +22999,7 @@
             <a:pPr algn="ctr"/>
             <a:fld id="{F7021451-1387-4CA6-816F-3879F97B5CBC}" type="slidenum">
               <a:rPr b="1" lang="en-US"/>
-              <a:t>57</a:t>
+              <a:t>61</a:t>
             </a:fld>
             <a:endParaRPr lang="en-US"/>
           </a:p>
@@ -21473,9 +23013,9 @@
 </p:sld>
 </file>
 
-<file path=ppt/slides/slide58.xml><?xml version="1.0" encoding="utf-8"?>
+<file path=ppt/slides/slide62.xml><?xml version="1.0" encoding="utf-8"?>
 <p:sld xmlns:a="http://schemas.openxmlformats.org/drawingml/2006/main" xmlns:r="http://schemas.openxmlformats.org/officeDocument/2006/relationships" xmlns:p="http://schemas.openxmlformats.org/presentationml/2006/main">
-  <p:cSld name="Slide 58">
+  <p:cSld name="Slide 62">
     <p:spTree>
       <p:nvGrpSpPr>
         <p:cNvPr id="1" name=""/>
@@ -21570,7 +23110,7 @@
       </p:sp>
       <p:graphicFrame>
         <p:nvGraphicFramePr>
-          <p:cNvPr id="59" name="Table 0"/>
+          <p:cNvPr id="63" name="Table 0"/>
           <p:cNvGraphicFramePr>
             <a:graphicFrameLocks noGrp="1"/>
           </p:cNvGraphicFramePr>
@@ -22192,7 +23732,7 @@
             <a:pPr algn="ctr"/>
             <a:fld id="{F7021451-1387-4CA6-816F-3879F97B5CBC}" type="slidenum">
               <a:rPr b="1" lang="en-US"/>
-              <a:t>58</a:t>
+              <a:t>62</a:t>
             </a:fld>
             <a:endParaRPr lang="en-US"/>
           </a:p>
@@ -22206,9 +23746,9 @@
 </p:sld>
 </file>
 
-<file path=ppt/slides/slide59.xml><?xml version="1.0" encoding="utf-8"?>
+<file path=ppt/slides/slide63.xml><?xml version="1.0" encoding="utf-8"?>
 <p:sld xmlns:a="http://schemas.openxmlformats.org/drawingml/2006/main" xmlns:r="http://schemas.openxmlformats.org/officeDocument/2006/relationships" xmlns:p="http://schemas.openxmlformats.org/presentationml/2006/main">
-  <p:cSld name="Slide 59">
+  <p:cSld name="Slide 63">
     <p:spTree>
       <p:nvGrpSpPr>
         <p:cNvPr id="1" name=""/>
@@ -22303,7 +23843,7 @@
       </p:sp>
       <p:graphicFrame>
         <p:nvGraphicFramePr>
-          <p:cNvPr id="60" name="Table 0"/>
+          <p:cNvPr id="64" name="Table 0"/>
           <p:cNvGraphicFramePr>
             <a:graphicFrameLocks noGrp="1"/>
           </p:cNvGraphicFramePr>
@@ -22413,7 +23953,7 @@
                           <a:ea typeface="Calibri" pitchFamily="34" charset="-122"/>
                           <a:cs typeface="Calibri" pitchFamily="34" charset="-120"/>
                         </a:rPr>
-                        <a:t>DEFINITIONS; Meaning and Characteristics of Air Masses; Classification of Air Masses; Air Masses Affecting Cameroon and West Africa.</a:t>
+                        <a:t>DEFINITIONS; Meaning and Characteristics of Air Masses; Development of Air Masses; Classification and Examples; Types and Movements of Air Masses; Air Masses Affecting Cameroon and West Africa.</a:t>
                       </a:r>
                       <a:endParaRPr lang="en-US" sz="1600" dirty="0">
                         <a:latin typeface="Calibri" charset="0"/>
@@ -23063,7 +24603,7 @@
             <a:pPr algn="ctr"/>
             <a:fld id="{F7021451-1387-4CA6-816F-3879F97B5CBC}" type="slidenum">
               <a:rPr b="1" lang="en-US"/>
-              <a:t>59</a:t>
+              <a:t>63</a:t>
             </a:fld>
             <a:endParaRPr lang="en-US"/>
           </a:p>
@@ -23077,9 +24617,9 @@
 </p:sld>
 </file>
 
-<file path=ppt/slides/slide6.xml><?xml version="1.0" encoding="utf-8"?>
+<file path=ppt/slides/slide64.xml><?xml version="1.0" encoding="utf-8"?>
 <p:sld xmlns:a="http://schemas.openxmlformats.org/drawingml/2006/main" xmlns:r="http://schemas.openxmlformats.org/officeDocument/2006/relationships" xmlns:p="http://schemas.openxmlformats.org/presentationml/2006/main">
-  <p:cSld name="Slide 6">
+  <p:cSld name="Slide 64">
     <p:spTree>
       <p:nvGrpSpPr>
         <p:cNvPr id="1" name=""/>
@@ -23127,7 +24667,7 @@
                 <a:ea typeface="Calibri" pitchFamily="34" charset="-122"/>
                 <a:cs typeface="Calibri" pitchFamily="34" charset="-120"/>
               </a:rPr>
-              <a:t>LESSON PLAN</a:t>
+              <a:t>TEACHER'S NOTE</a:t>
             </a:r>
             <a:endParaRPr lang="en-US" sz="1400" dirty="0"/>
           </a:p>
@@ -23150,7 +24690,7 @@
         <p:spPr>
           <a:xfrm>
             <a:off x="0" y="658368"/>
-            <a:ext cx="2468880" cy="5833872"/>
+            <a:ext cx="3840480" cy="5833872"/>
           </a:xfrm>
           <a:prstGeom prst="rect">
             <a:avLst/>
@@ -23165,8 +24705,8 @@
         </p:nvSpPr>
         <p:spPr>
           <a:xfrm>
-            <a:off x="2697480" y="1005840"/>
-            <a:ext cx="9174175" cy="731520"/>
+            <a:off x="4069080" y="1005840"/>
+            <a:ext cx="7802575" cy="731520"/>
           </a:xfrm>
           <a:prstGeom prst="rect">
             <a:avLst/>
@@ -23192,7 +24732,7 @@
                 <a:ea typeface="Times New Roman" pitchFamily="34" charset="-122"/>
                 <a:cs typeface="Times New Roman" pitchFamily="34" charset="-120"/>
               </a:rPr>
-              <a:t>Lesson Plan</a:t>
+              <a:t>Teacher's Note</a:t>
             </a:r>
             <a:endParaRPr lang="en-US" sz="3600" dirty="0"/>
           </a:p>
@@ -23206,8 +24746,8 @@
         </p:nvSpPr>
         <p:spPr>
           <a:xfrm>
-            <a:off x="2697480" y="1783080"/>
-            <a:ext cx="9174175" cy="4663440"/>
+            <a:off x="4069080" y="1783080"/>
+            <a:ext cx="7802575" cy="4663440"/>
           </a:xfrm>
           <a:prstGeom prst="rect">
             <a:avLst/>
@@ -23224,21 +24764,20 @@
                 <a:spcPts val="800"/>
               </a:spcAft>
               <a:buSzPct val="100000"/>
-              <a:buFont typeface="+mj-lt"/>
-              <a:buAutoNum type="arabicPeriod" startAt="1"/>
+              <a:buChar char="•"/>
             </a:pPr>
             <a:r>
-              <a:rPr lang="en-US" sz="4000" dirty="0">
+              <a:rPr lang="en-US" sz="2000" dirty="0">
                 <a:solidFill>
                   <a:srgbClr val="111111"/>
                 </a:solidFill>
-                <a:latin typeface="Times New Roman" pitchFamily="34" charset="0"/>
-                <a:ea typeface="Times New Roman" pitchFamily="34" charset="-122"/>
-                <a:cs typeface="Times New Roman" pitchFamily="34" charset="-120"/>
+                <a:latin typeface="Calibri" pitchFamily="34" charset="0"/>
+                <a:ea typeface="Calibri" pitchFamily="34" charset="-122"/>
+                <a:cs typeface="Calibri" pitchFamily="34" charset="-120"/>
               </a:rPr>
-              <a:t>Correction of the homework</a:t>
-            </a:r>
-            <a:endParaRPr lang="en-US" sz="4000" dirty="0"/>
+              <a:t>Timing: Homework correction, plan, objectives 8 min | Recall, situation, action 10 min | 5 activities 30 min | Board summary (copying) 30 min | Evaluation, remediation 10 min | Homework, next lesson 5 min | Logbook 7 min</a:t>
+            </a:r>
+            <a:endParaRPr lang="en-US" sz="2000" dirty="0"/>
           </a:p>
           <a:p>
             <a:pPr algn="l" marL="342900" indent="-342900">
@@ -23246,21 +24785,20 @@
                 <a:spcPts val="800"/>
               </a:spcAft>
               <a:buSzPct val="100000"/>
-              <a:buFont typeface="+mj-lt"/>
-              <a:buAutoNum type="arabicPeriod" startAt="1"/>
+              <a:buChar char="•"/>
             </a:pPr>
             <a:r>
-              <a:rPr lang="en-US" sz="4000" dirty="0">
+              <a:rPr lang="en-US" sz="2000" dirty="0">
                 <a:solidFill>
                   <a:srgbClr val="111111"/>
                 </a:solidFill>
-                <a:latin typeface="Times New Roman" pitchFamily="34" charset="0"/>
-                <a:ea typeface="Times New Roman" pitchFamily="34" charset="-122"/>
-                <a:cs typeface="Times New Roman" pitchFamily="34" charset="-120"/>
+                <a:latin typeface="Calibri" pitchFamily="34" charset="0"/>
+                <a:ea typeface="Calibri" pitchFamily="34" charset="-122"/>
+                <a:cs typeface="Calibri" pitchFamily="34" charset="-120"/>
               </a:rPr>
-              <a:t>Objectives and recall</a:t>
-            </a:r>
-            <a:endParaRPr lang="en-US" sz="4000" dirty="0"/>
+              <a:t>Without the projector (Activity 1): use the sponge example.</a:t>
+            </a:r>
+            <a:endParaRPr lang="en-US" sz="2000" dirty="0"/>
           </a:p>
           <a:p>
             <a:pPr algn="l" marL="342900" indent="-342900">
@@ -23268,21 +24806,20 @@
                 <a:spcPts val="800"/>
               </a:spcAft>
               <a:buSzPct val="100000"/>
-              <a:buFont typeface="+mj-lt"/>
-              <a:buAutoNum type="arabicPeriod" startAt="1"/>
+              <a:buChar char="•"/>
             </a:pPr>
             <a:r>
-              <a:rPr lang="en-US" sz="4000" dirty="0">
+              <a:rPr lang="en-US" sz="2000" dirty="0">
                 <a:solidFill>
                   <a:srgbClr val="111111"/>
                 </a:solidFill>
-                <a:latin typeface="Times New Roman" pitchFamily="34" charset="0"/>
-                <a:ea typeface="Times New Roman" pitchFamily="34" charset="-122"/>
-                <a:cs typeface="Times New Roman" pitchFamily="34" charset="-120"/>
+                <a:latin typeface="Calibri" pitchFamily="34" charset="0"/>
+                <a:ea typeface="Calibri" pitchFamily="34" charset="-122"/>
+                <a:cs typeface="Calibri" pitchFamily="34" charset="-120"/>
               </a:rPr>
-              <a:t>Real-life situation and action to take</a:t>
-            </a:r>
-            <a:endParaRPr lang="en-US" sz="4000" dirty="0"/>
+              <a:t>Without the projector (Activity 2): write the codes on the board.</a:t>
+            </a:r>
+            <a:endParaRPr lang="en-US" sz="2000" dirty="0"/>
           </a:p>
           <a:p>
             <a:pPr algn="l" marL="342900" indent="-342900">
@@ -23290,21 +24827,20 @@
                 <a:spcPts val="800"/>
               </a:spcAft>
               <a:buSzPct val="100000"/>
-              <a:buFont typeface="+mj-lt"/>
-              <a:buAutoNum type="arabicPeriod" startAt="1"/>
+              <a:buChar char="•"/>
             </a:pPr>
             <a:r>
-              <a:rPr lang="en-US" sz="4000" dirty="0">
+              <a:rPr lang="en-US" sz="2000" dirty="0">
                 <a:solidFill>
                   <a:srgbClr val="111111"/>
                 </a:solidFill>
-                <a:latin typeface="Times New Roman" pitchFamily="34" charset="0"/>
-                <a:ea typeface="Times New Roman" pitchFamily="34" charset="-122"/>
-                <a:cs typeface="Times New Roman" pitchFamily="34" charset="-120"/>
+                <a:latin typeface="Calibri" pitchFamily="34" charset="0"/>
+                <a:ea typeface="Calibri" pitchFamily="34" charset="-122"/>
+                <a:cs typeface="Calibri" pitchFamily="34" charset="-120"/>
               </a:rPr>
-              <a:t>Learning activities</a:t>
-            </a:r>
-            <a:endParaRPr lang="en-US" sz="4000" dirty="0"/>
+              <a:t>Without the projector (Activity 3): draw the two air masses and the ITF.</a:t>
+            </a:r>
+            <a:endParaRPr lang="en-US" sz="2000" dirty="0"/>
           </a:p>
           <a:p>
             <a:pPr algn="l" marL="342900" indent="-342900">
@@ -23312,21 +24848,20 @@
                 <a:spcPts val="800"/>
               </a:spcAft>
               <a:buSzPct val="100000"/>
-              <a:buFont typeface="+mj-lt"/>
-              <a:buAutoNum type="arabicPeriod" startAt="1"/>
+              <a:buChar char="•"/>
             </a:pPr>
             <a:r>
-              <a:rPr lang="en-US" sz="4000" dirty="0">
+              <a:rPr lang="en-US" sz="2000" dirty="0">
                 <a:solidFill>
                   <a:srgbClr val="111111"/>
                 </a:solidFill>
-                <a:latin typeface="Times New Roman" pitchFamily="34" charset="0"/>
-                <a:ea typeface="Times New Roman" pitchFamily="34" charset="-122"/>
-                <a:cs typeface="Times New Roman" pitchFamily="34" charset="-120"/>
+                <a:latin typeface="Calibri" pitchFamily="34" charset="0"/>
+                <a:ea typeface="Calibri" pitchFamily="34" charset="-122"/>
+                <a:cs typeface="Calibri" pitchFamily="34" charset="-120"/>
               </a:rPr>
-              <a:t>Board summary</a:t>
-            </a:r>
-            <a:endParaRPr lang="en-US" sz="4000" dirty="0"/>
+              <a:t>Without the projector (Activity 4): describe a Harmattan day.</a:t>
+            </a:r>
+            <a:endParaRPr lang="en-US" sz="2000" dirty="0"/>
           </a:p>
           <a:p>
             <a:pPr algn="l" marL="342900" indent="-342900">
@@ -23334,21 +24869,20 @@
                 <a:spcPts val="800"/>
               </a:spcAft>
               <a:buSzPct val="100000"/>
-              <a:buFont typeface="+mj-lt"/>
-              <a:buAutoNum type="arabicPeriod" startAt="1"/>
+              <a:buChar char="•"/>
             </a:pPr>
             <a:r>
-              <a:rPr lang="en-US" sz="4000" dirty="0">
+              <a:rPr lang="en-US" sz="2000" dirty="0">
                 <a:solidFill>
                   <a:srgbClr val="111111"/>
                 </a:solidFill>
-                <a:latin typeface="Times New Roman" pitchFamily="34" charset="0"/>
-                <a:ea typeface="Times New Roman" pitchFamily="34" charset="-122"/>
-                <a:cs typeface="Times New Roman" pitchFamily="34" charset="-120"/>
+                <a:latin typeface="Calibri" pitchFamily="34" charset="0"/>
+                <a:ea typeface="Calibri" pitchFamily="34" charset="-122"/>
+                <a:cs typeface="Calibri" pitchFamily="34" charset="-120"/>
               </a:rPr>
-              <a:t>Evaluation, remediation and homework</a:t>
-            </a:r>
-            <a:endParaRPr lang="en-US" sz="4000" dirty="0"/>
+              <a:t>Without the projector (Activity 5): describe an August storm.</a:t>
+            </a:r>
+            <a:endParaRPr lang="en-US" sz="2000" dirty="0"/>
           </a:p>
         </p:txBody>
       </p:sp>
@@ -23394,7 +24928,7 @@
             <a:pPr algn="ctr"/>
             <a:fld id="{F7021451-1387-4CA6-816F-3879F97B5CBC}" type="slidenum">
               <a:rPr b="1" lang="en-US"/>
-              <a:t>6</a:t>
+              <a:t>64</a:t>
             </a:fld>
             <a:endParaRPr lang="en-US"/>
           </a:p>
@@ -23408,9 +24942,9 @@
 </p:sld>
 </file>
 
-<file path=ppt/slides/slide60.xml><?xml version="1.0" encoding="utf-8"?>
+<file path=ppt/slides/slide65.xml><?xml version="1.0" encoding="utf-8"?>
 <p:sld xmlns:a="http://schemas.openxmlformats.org/drawingml/2006/main" xmlns:r="http://schemas.openxmlformats.org/officeDocument/2006/relationships" xmlns:p="http://schemas.openxmlformats.org/presentationml/2006/main">
-  <p:cSld name="Slide 60">
+  <p:cSld name="Slide 65">
     <p:spTree>
       <p:nvGrpSpPr>
         <p:cNvPr id="1" name=""/>
@@ -23458,7 +24992,7 @@
                 <a:ea typeface="Calibri" pitchFamily="34" charset="-122"/>
                 <a:cs typeface="Calibri" pitchFamily="34" charset="-120"/>
               </a:rPr>
-              <a:t>TEACHER'S NOTE</a:t>
+              <a:t>REFERENCES</a:t>
             </a:r>
             <a:endParaRPr lang="en-US" sz="1400" dirty="0"/>
           </a:p>
@@ -23481,7 +25015,7 @@
         <p:spPr>
           <a:xfrm>
             <a:off x="0" y="658368"/>
-            <a:ext cx="3840480" cy="5833872"/>
+            <a:ext cx="5120640" cy="5833872"/>
           </a:xfrm>
           <a:prstGeom prst="rect">
             <a:avLst/>
@@ -23496,8 +25030,8 @@
         </p:nvSpPr>
         <p:spPr>
           <a:xfrm>
-            <a:off x="4069080" y="1005840"/>
-            <a:ext cx="7802575" cy="731520"/>
+            <a:off x="5349240" y="1005840"/>
+            <a:ext cx="6522415" cy="731520"/>
           </a:xfrm>
           <a:prstGeom prst="rect">
             <a:avLst/>
@@ -23523,7 +25057,7 @@
                 <a:ea typeface="Times New Roman" pitchFamily="34" charset="-122"/>
                 <a:cs typeface="Times New Roman" pitchFamily="34" charset="-120"/>
               </a:rPr>
-              <a:t>Teacher's Note</a:t>
+              <a:t>References</a:t>
             </a:r>
             <a:endParaRPr lang="en-US" sz="3600" dirty="0"/>
           </a:p>
@@ -23537,8 +25071,8 @@
         </p:nvSpPr>
         <p:spPr>
           <a:xfrm>
-            <a:off x="4069080" y="1783080"/>
-            <a:ext cx="7802575" cy="4663440"/>
+            <a:off x="5349240" y="1783080"/>
+            <a:ext cx="6522415" cy="4663440"/>
           </a:xfrm>
           <a:prstGeom prst="rect">
             <a:avLst/>
@@ -23558,7 +25092,7 @@
               <a:buChar char="•"/>
             </a:pPr>
             <a:r>
-              <a:rPr lang="en-US" sz="2000" dirty="0">
+              <a:rPr lang="en-US" sz="1800" dirty="0">
                 <a:solidFill>
                   <a:srgbClr val="111111"/>
                 </a:solidFill>
@@ -23566,9 +25100,9 @@
                 <a:ea typeface="Calibri" pitchFamily="34" charset="-122"/>
                 <a:cs typeface="Calibri" pitchFamily="34" charset="-120"/>
               </a:rPr>
-              <a:t>Timing: Homework correction, plan, objectives 8 min | Recall, situation, action 10 min | 5 activities 30 min | Board summary (copying) 30 min | Evaluation, remediation 10 min | Homework, next lesson 5 min | Logbook 7 min</a:t>
-            </a:r>
-            <a:endParaRPr lang="en-US" sz="2000" dirty="0"/>
+              <a:t>Geography Syllabus for Sixth Forms (Lower and Upper Sixth), MINESEC, 2019 — Module 1 (Meteorology, Climatology &amp; Hydrology).</a:t>
+            </a:r>
+            <a:endParaRPr lang="en-US" sz="1800" dirty="0"/>
           </a:p>
           <a:p>
             <a:pPr algn="l" marL="342900" indent="-342900">
@@ -23579,7 +25113,7 @@
               <a:buChar char="•"/>
             </a:pPr>
             <a:r>
-              <a:rPr lang="en-US" sz="2000" dirty="0">
+              <a:rPr lang="en-US" sz="1800" dirty="0">
                 <a:solidFill>
                   <a:srgbClr val="111111"/>
                 </a:solidFill>
@@ -23587,9 +25121,9 @@
                 <a:ea typeface="Calibri" pitchFamily="34" charset="-122"/>
                 <a:cs typeface="Calibri" pitchFamily="34" charset="-120"/>
               </a:rPr>
-              <a:t>Without the projector (Activity 1): use the sponge example.</a:t>
-            </a:r>
-            <a:endParaRPr lang="en-US" sz="2000" dirty="0"/>
+              <a:t>Teacher's course notes: Mr KAMDEM E., Meteorology (LSA), GBHS Garoua, 2026.</a:t>
+            </a:r>
+            <a:endParaRPr lang="en-US" sz="1800" dirty="0"/>
           </a:p>
           <a:p>
             <a:pPr algn="l" marL="342900" indent="-342900">
@@ -23600,7 +25134,7 @@
               <a:buChar char="•"/>
             </a:pPr>
             <a:r>
-              <a:rPr lang="en-US" sz="2000" dirty="0">
+              <a:rPr lang="en-US" sz="1800" dirty="0">
                 <a:solidFill>
                   <a:srgbClr val="111111"/>
                 </a:solidFill>
@@ -23608,9 +25142,9 @@
                 <a:ea typeface="Calibri" pitchFamily="34" charset="-122"/>
                 <a:cs typeface="Calibri" pitchFamily="34" charset="-120"/>
               </a:rPr>
-              <a:t>Without the projector (Activity 2): write the codes on the board.</a:t>
-            </a:r>
-            <a:endParaRPr lang="en-US" sz="2000" dirty="0"/>
+              <a:t>Photo, Activity 4: “Bamenda sob a poeira do Harmattan” by carlosoliveirareis, CC BY-NC-SA 2.0, via Flickr (https://www.flickr.com/photos/54218923@N00/387054136)</a:t>
+            </a:r>
+            <a:endParaRPr lang="en-US" sz="1800" dirty="0"/>
           </a:p>
           <a:p>
             <a:pPr algn="l" marL="342900" indent="-342900">
@@ -23621,7 +25155,7 @@
               <a:buChar char="•"/>
             </a:pPr>
             <a:r>
-              <a:rPr lang="en-US" sz="2000" dirty="0">
+              <a:rPr lang="en-US" sz="1800" dirty="0">
                 <a:solidFill>
                   <a:srgbClr val="111111"/>
                 </a:solidFill>
@@ -23629,9 +25163,9 @@
                 <a:ea typeface="Calibri" pitchFamily="34" charset="-122"/>
                 <a:cs typeface="Calibri" pitchFamily="34" charset="-120"/>
               </a:rPr>
-              <a:t>Without the projector (Activity 3): draw the two air masses and the ITF.</a:t>
-            </a:r>
-            <a:endParaRPr lang="en-US" sz="2000" dirty="0"/>
+              <a:t>Photo, Activity 5: “Heavy rain. Johannesburg, South Africa” by varfolomeev, CC BY-NC 2.0, via Flickr (https://www.flickr.com/photos/45427632@N02/49745935146)</a:t>
+            </a:r>
+            <a:endParaRPr lang="en-US" sz="1800" dirty="0"/>
           </a:p>
           <a:p>
             <a:pPr algn="l" marL="342900" indent="-342900">
@@ -23642,7 +25176,7 @@
               <a:buChar char="•"/>
             </a:pPr>
             <a:r>
-              <a:rPr lang="en-US" sz="2000" dirty="0">
+              <a:rPr lang="en-US" sz="1800" dirty="0">
                 <a:solidFill>
                   <a:srgbClr val="111111"/>
                 </a:solidFill>
@@ -23650,30 +25184,9 @@
                 <a:ea typeface="Calibri" pitchFamily="34" charset="-122"/>
                 <a:cs typeface="Calibri" pitchFamily="34" charset="-120"/>
               </a:rPr>
-              <a:t>Without the projector (Activity 4): describe a Harmattan day.</a:t>
-            </a:r>
-            <a:endParaRPr lang="en-US" sz="2000" dirty="0"/>
-          </a:p>
-          <a:p>
-            <a:pPr algn="l" marL="342900" indent="-342900">
-              <a:spcAft>
-                <a:spcPts val="800"/>
-              </a:spcAft>
-              <a:buSzPct val="100000"/>
-              <a:buChar char="•"/>
-            </a:pPr>
-            <a:r>
-              <a:rPr lang="en-US" sz="2000" dirty="0">
-                <a:solidFill>
-                  <a:srgbClr val="111111"/>
-                </a:solidFill>
-                <a:latin typeface="Calibri" pitchFamily="34" charset="0"/>
-                <a:ea typeface="Calibri" pitchFamily="34" charset="-122"/>
-                <a:cs typeface="Calibri" pitchFamily="34" charset="-120"/>
-              </a:rPr>
-              <a:t>Without the projector (Activity 5): describe an August storm.</a:t>
-            </a:r>
-            <a:endParaRPr lang="en-US" sz="2000" dirty="0"/>
+              <a:t>Diagrams and animations: drawn for this lesson (Geography Department).</a:t>
+            </a:r>
+            <a:endParaRPr lang="en-US" sz="1800" dirty="0"/>
           </a:p>
         </p:txBody>
       </p:sp>
@@ -23719,311 +25232,7 @@
             <a:pPr algn="ctr"/>
             <a:fld id="{F7021451-1387-4CA6-816F-3879F97B5CBC}" type="slidenum">
               <a:rPr b="1" lang="en-US"/>
-              <a:t>60</a:t>
-            </a:fld>
-            <a:endParaRPr lang="en-US"/>
-          </a:p>
-        </p:txBody>
-      </p:sp>
-    </p:spTree>
-  </p:cSld>
-  <p:clrMapOvr>
-    <a:masterClrMapping/>
-  </p:clrMapOvr>
-</p:sld>
-</file>
-
-<file path=ppt/slides/slide61.xml><?xml version="1.0" encoding="utf-8"?>
-<p:sld xmlns:a="http://schemas.openxmlformats.org/drawingml/2006/main" xmlns:r="http://schemas.openxmlformats.org/officeDocument/2006/relationships" xmlns:p="http://schemas.openxmlformats.org/presentationml/2006/main">
-  <p:cSld name="Slide 61">
-    <p:spTree>
-      <p:nvGrpSpPr>
-        <p:cNvPr id="1" name=""/>
-        <p:cNvGrpSpPr/>
-        <p:nvPr/>
-      </p:nvGrpSpPr>
-      <p:grpSpPr>
-        <a:xfrm>
-          <a:off x="0" y="0"/>
-          <a:ext cx="0" cy="0"/>
-          <a:chOff x="0" y="0"/>
-          <a:chExt cx="0" cy="0"/>
-        </a:xfrm>
-      </p:grpSpPr>
-      <p:sp>
-        <p:nvSpPr>
-          <p:cNvPr id="2" name="Text 0"/>
-          <p:cNvSpPr/>
-          <p:nvPr/>
-        </p:nvSpPr>
-        <p:spPr>
-          <a:xfrm>
-            <a:off x="457200" y="713232"/>
-            <a:ext cx="11368735" cy="274320"/>
-          </a:xfrm>
-          <a:prstGeom prst="rect">
-            <a:avLst/>
-          </a:prstGeom>
-          <a:noFill/>
-          <a:ln/>
-        </p:spPr>
-        <p:txBody>
-          <a:bodyPr wrap="square" lIns="0" tIns="0" rIns="0" bIns="0" rtlCol="0" anchor="ctr"/>
-          <a:lstStyle/>
-          <a:p>
-            <a:pPr algn="r" indent="0" marL="0">
-              <a:buNone/>
-            </a:pPr>
-            <a:r>
-              <a:rPr lang="en-US" sz="1400" b="1" dirty="0">
-                <a:solidFill>
-                  <a:srgbClr val="1C3F6E"/>
-                </a:solidFill>
-                <a:latin typeface="Calibri" pitchFamily="34" charset="0"/>
-                <a:ea typeface="Calibri" pitchFamily="34" charset="-122"/>
-                <a:cs typeface="Calibri" pitchFamily="34" charset="-120"/>
-              </a:rPr>
-              <a:t>REFERENCES</a:t>
-            </a:r>
-            <a:endParaRPr lang="en-US" sz="1400" dirty="0"/>
-          </a:p>
-        </p:txBody>
-      </p:sp>
-      <p:pic>
-        <p:nvPicPr>
-          <p:cNvPr id="3" name="Image 0" descr="/home/claude/f4/img/minesec_sheet.png">    </p:cNvPr>
-          <p:cNvPicPr>
-            <a:picLocks noChangeAspect="1"/>
-          </p:cNvPicPr>
-          <p:nvPr/>
-        </p:nvPicPr>
-        <p:blipFill>
-          <a:blip r:embed="rId1"/>
-          <a:stretch>
-            <a:fillRect/>
-          </a:stretch>
-        </p:blipFill>
-        <p:spPr>
-          <a:xfrm>
-            <a:off x="0" y="658368"/>
-            <a:ext cx="5120640" cy="5833872"/>
-          </a:xfrm>
-          <a:prstGeom prst="rect">
-            <a:avLst/>
-          </a:prstGeom>
-        </p:spPr>
-      </p:pic>
-      <p:sp>
-        <p:nvSpPr>
-          <p:cNvPr id="4" name="Text 1"/>
-          <p:cNvSpPr/>
-          <p:nvPr/>
-        </p:nvSpPr>
-        <p:spPr>
-          <a:xfrm>
-            <a:off x="5349240" y="1005840"/>
-            <a:ext cx="6522415" cy="731520"/>
-          </a:xfrm>
-          <a:prstGeom prst="rect">
-            <a:avLst/>
-          </a:prstGeom>
-          <a:noFill/>
-          <a:ln/>
-        </p:spPr>
-        <p:txBody>
-          <a:bodyPr wrap="square" lIns="0" tIns="0" rIns="0" bIns="0" rtlCol="0" anchor="ctr">
-            <a:normAutofit/>
-          </a:bodyPr>
-          <a:lstStyle/>
-          <a:p>
-            <a:pPr algn="ctr" indent="0" marL="0">
-              <a:buNone/>
-            </a:pPr>
-            <a:r>
-              <a:rPr lang="en-US" sz="3600" b="1" dirty="0">
-                <a:solidFill>
-                  <a:srgbClr val="990011"/>
-                </a:solidFill>
-                <a:latin typeface="Times New Roman" pitchFamily="34" charset="0"/>
-                <a:ea typeface="Times New Roman" pitchFamily="34" charset="-122"/>
-                <a:cs typeface="Times New Roman" pitchFamily="34" charset="-120"/>
-              </a:rPr>
-              <a:t>References</a:t>
-            </a:r>
-            <a:endParaRPr lang="en-US" sz="3600" dirty="0"/>
-          </a:p>
-        </p:txBody>
-      </p:sp>
-      <p:sp>
-        <p:nvSpPr>
-          <p:cNvPr id="5" name="Text 2"/>
-          <p:cNvSpPr/>
-          <p:nvPr/>
-        </p:nvSpPr>
-        <p:spPr>
-          <a:xfrm>
-            <a:off x="5349240" y="1783080"/>
-            <a:ext cx="6522415" cy="4663440"/>
-          </a:xfrm>
-          <a:prstGeom prst="rect">
-            <a:avLst/>
-          </a:prstGeom>
-          <a:noFill/>
-          <a:ln/>
-        </p:spPr>
-        <p:txBody>
-          <a:bodyPr wrap="square" lIns="0" tIns="0" rIns="0" bIns="0" rtlCol="0" anchor="t"/>
-          <a:lstStyle/>
-          <a:p>
-            <a:pPr algn="l" marL="342900" indent="-342900">
-              <a:spcAft>
-                <a:spcPts val="800"/>
-              </a:spcAft>
-              <a:buSzPct val="100000"/>
-              <a:buChar char="•"/>
-            </a:pPr>
-            <a:r>
-              <a:rPr lang="en-US" sz="1800" dirty="0">
-                <a:solidFill>
-                  <a:srgbClr val="111111"/>
-                </a:solidFill>
-                <a:latin typeface="Calibri" pitchFamily="34" charset="0"/>
-                <a:ea typeface="Calibri" pitchFamily="34" charset="-122"/>
-                <a:cs typeface="Calibri" pitchFamily="34" charset="-120"/>
-              </a:rPr>
-              <a:t>Geography Syllabus for Sixth Forms (Lower and Upper Sixth), MINESEC, 2019 — Module 1 (Meteorology, Climatology &amp; Hydrology).</a:t>
-            </a:r>
-            <a:endParaRPr lang="en-US" sz="1800" dirty="0"/>
-          </a:p>
-          <a:p>
-            <a:pPr algn="l" marL="342900" indent="-342900">
-              <a:spcAft>
-                <a:spcPts val="800"/>
-              </a:spcAft>
-              <a:buSzPct val="100000"/>
-              <a:buChar char="•"/>
-            </a:pPr>
-            <a:r>
-              <a:rPr lang="en-US" sz="1800" dirty="0">
-                <a:solidFill>
-                  <a:srgbClr val="111111"/>
-                </a:solidFill>
-                <a:latin typeface="Calibri" pitchFamily="34" charset="0"/>
-                <a:ea typeface="Calibri" pitchFamily="34" charset="-122"/>
-                <a:cs typeface="Calibri" pitchFamily="34" charset="-120"/>
-              </a:rPr>
-              <a:t>Teacher's course notes: Mr KAMDEM E., Meteorology (LSA), GBHS Garoua, 2026.</a:t>
-            </a:r>
-            <a:endParaRPr lang="en-US" sz="1800" dirty="0"/>
-          </a:p>
-          <a:p>
-            <a:pPr algn="l" marL="342900" indent="-342900">
-              <a:spcAft>
-                <a:spcPts val="800"/>
-              </a:spcAft>
-              <a:buSzPct val="100000"/>
-              <a:buChar char="•"/>
-            </a:pPr>
-            <a:r>
-              <a:rPr lang="en-US" sz="1800" dirty="0">
-                <a:solidFill>
-                  <a:srgbClr val="111111"/>
-                </a:solidFill>
-                <a:latin typeface="Calibri" pitchFamily="34" charset="0"/>
-                <a:ea typeface="Calibri" pitchFamily="34" charset="-122"/>
-                <a:cs typeface="Calibri" pitchFamily="34" charset="-120"/>
-              </a:rPr>
-              <a:t>Photo, Activity 4: “Bamenda sob a poeira do Harmattan” by carlosoliveirareis, CC BY-NC-SA 2.0, via Flickr (https://www.flickr.com/photos/54218923@N00/387054136)</a:t>
-            </a:r>
-            <a:endParaRPr lang="en-US" sz="1800" dirty="0"/>
-          </a:p>
-          <a:p>
-            <a:pPr algn="l" marL="342900" indent="-342900">
-              <a:spcAft>
-                <a:spcPts val="800"/>
-              </a:spcAft>
-              <a:buSzPct val="100000"/>
-              <a:buChar char="•"/>
-            </a:pPr>
-            <a:r>
-              <a:rPr lang="en-US" sz="1800" dirty="0">
-                <a:solidFill>
-                  <a:srgbClr val="111111"/>
-                </a:solidFill>
-                <a:latin typeface="Calibri" pitchFamily="34" charset="0"/>
-                <a:ea typeface="Calibri" pitchFamily="34" charset="-122"/>
-                <a:cs typeface="Calibri" pitchFamily="34" charset="-120"/>
-              </a:rPr>
-              <a:t>Photo, Activity 5: “Heavy rain. Johannesburg, South Africa” by varfolomeev, CC BY-NC 2.0, via Flickr (https://www.flickr.com/photos/45427632@N02/49745935146)</a:t>
-            </a:r>
-            <a:endParaRPr lang="en-US" sz="1800" dirty="0"/>
-          </a:p>
-          <a:p>
-            <a:pPr algn="l" marL="342900" indent="-342900">
-              <a:spcAft>
-                <a:spcPts val="800"/>
-              </a:spcAft>
-              <a:buSzPct val="100000"/>
-              <a:buChar char="•"/>
-            </a:pPr>
-            <a:r>
-              <a:rPr lang="en-US" sz="1800" dirty="0">
-                <a:solidFill>
-                  <a:srgbClr val="111111"/>
-                </a:solidFill>
-                <a:latin typeface="Calibri" pitchFamily="34" charset="0"/>
-                <a:ea typeface="Calibri" pitchFamily="34" charset="-122"/>
-                <a:cs typeface="Calibri" pitchFamily="34" charset="-120"/>
-              </a:rPr>
-              <a:t>Diagrams and animations: drawn for this lesson (Geography Department).</a:t>
-            </a:r>
-            <a:endParaRPr lang="en-US" sz="1800" dirty="0"/>
-          </a:p>
-        </p:txBody>
-      </p:sp>
-      <p:sp>
-        <p:nvSpPr>
-          <p:cNvPr id="25" name="Slide Number Placeholder 0"/>
-          <p:cNvSpPr>
-            <a:spLocks noGrp="1"/>
-          </p:cNvSpPr>
-          <p:nvPr>
-            <p:ph type="sldNum" sz="quarter" idx="4294967295"/>
-          </p:nvPr>
-        </p:nvSpPr>
-        <p:spPr>
-          <a:xfrm>
-            <a:off x="27432" y="91440"/>
-            <a:ext cx="585216" cy="475488"/>
-          </a:xfrm>
-          <a:prstGeom prst="rect">
-            <a:avLst/>
-          </a:prstGeom>
-          <a:extLst>
-            <a:ext uri="{C572A759-6A51-4108-AA02-DFA0A04FC94B}">
-              <ma14:wrappingTextBoxFlag xmlns:ma14="http://schemas.microsoft.com/office/mac/drawingml/2011/main" val="0"/>
-            </a:ext>
-          </a:extLst>
-        </p:spPr>
-        <p:txBody>
-          <a:bodyPr/>
-          <a:lstStyle>
-            <a:lvl1pPr>
-              <a:defRPr sz="2000">
-                <a:solidFill>
-                  <a:srgbClr val="FFFFFF"/>
-                </a:solidFill>
-                <a:latin typeface="Calibri"/>
-                <a:ea typeface="Calibri"/>
-                <a:cs typeface="Calibri"/>
-              </a:defRPr>
-            </a:lvl1pPr>
-          </a:lstStyle>
-          <a:p>
-            <a:pPr algn="ctr"/>
-            <a:fld id="{F7021451-1387-4CA6-816F-3879F97B5CBC}" type="slidenum">
-              <a:rPr b="1" lang="en-US"/>
-              <a:t>61</a:t>
+              <a:t>65</a:t>
             </a:fld>
             <a:endParaRPr lang="en-US"/>
           </a:p>

--- a/lecons/LSA/Meteorology/18_LSA_MET_L18_Air_Masses.pptx
+++ b/lecons/LSA/Meteorology/18_LSA_MET_L18_Air_Masses.pptx
@@ -70,9 +70,12 @@
     <p:sldId id="318" r:id="rId64"/>
     <p:sldId id="319" r:id="rId65"/>
     <p:sldId id="320" r:id="rId66"/>
+    <p:sldId id="321" r:id="rId67"/>
+    <p:sldId id="322" r:id="rId68"/>
+    <p:sldId id="323" r:id="rId69"/>
   </p:sldIdLst>
   <p:notesMasterIdLst>
-    <p:notesMasterId r:id="rId67"/>
+    <p:notesMasterId r:id="rId70"/>
   </p:notesMasterIdLst>
   <p:sldSz cx="12192000" cy="6858000"/>
   <p:notesSz cx="6858000" cy="12192000"/>
@@ -3998,7 +4001,7 @@
           <a:p>
             <a:r>
               <a:rPr lang="en-US" dirty="0"/>
-              <a:t>Let us copy Classification and Examples. Air masses are classified with two letters as follows. Copy the point on First letter (humidity): write the key term first, then its explanation.</a:t>
+              <a:t>Let us copy The Two Letters. Air masses are classified with two letters as follows. Copy the point on First letter (humidity): write the key term first, then its explanation.</a:t>
             </a:r>
             <a:endParaRPr lang="en-US" dirty="0"/>
           </a:p>
@@ -4174,7 +4177,7 @@
           <a:p>
             <a:r>
               <a:rPr lang="en-US" dirty="0"/>
-              <a:t>We continue with Classification and Examples. Copy the point on Examples: write the key term first, then its explanation.</a:t>
+              <a:t>Let us copy Examples. The main air masses are the following. Copy the point on Tropical continental (cT): write the key term first, then its explanation.</a:t>
             </a:r>
             <a:endParaRPr lang="en-US" dirty="0"/>
           </a:p>
@@ -4262,7 +4265,7 @@
           <a:p>
             <a:r>
               <a:rPr lang="en-US" dirty="0"/>
-              <a:t>Let us copy Types and Movements of Air Masses. Air masses are of the following types and move as follows. Copy the point on Warm air masses: write the key term first, then its explanation.</a:t>
+              <a:t>We continue with Examples. Copy the point on Tropical maritime (mT): write the key term first, then its explanation.</a:t>
             </a:r>
             <a:endParaRPr lang="en-US" dirty="0"/>
           </a:p>
@@ -4350,7 +4353,7 @@
           <a:p>
             <a:r>
               <a:rPr lang="en-US" dirty="0"/>
-              <a:t>We continue with Types and Movements of Air Masses. Copy the point on Cold air masses: write the key term first, then its explanation.</a:t>
+              <a:t>We continue with Examples. Copy the point on Polar continental (cP): write the key term first, then its explanation.</a:t>
             </a:r>
             <a:endParaRPr lang="en-US" dirty="0"/>
           </a:p>
@@ -4526,7 +4529,7 @@
           <a:p>
             <a:r>
               <a:rPr lang="en-US" dirty="0"/>
-              <a:t>We continue with Types and Movements of Air Masses. Copy the point on Seasonal movement: write the key term first, then its explanation.</a:t>
+              <a:t>We continue with Examples. Copy the point on Polar maritime (mP): write the key term first, then its explanation.</a:t>
             </a:r>
             <a:endParaRPr lang="en-US" dirty="0"/>
           </a:p>
@@ -4614,7 +4617,7 @@
           <a:p>
             <a:r>
               <a:rPr lang="en-US" dirty="0"/>
-              <a:t>Let us copy Air Masses Affecting Cameroon and West Africa. Two air masses control the seasons of Cameroon as follows. Copy the point on Tropical continental air (cT) on the left, then draw the diagram on the right: the Harmattan. Give it a title and label it clearly.</a:t>
+              <a:t>Let us copy Types and Movements of Air Masses. Air masses are of the following types and move as follows. Copy the point on Warm air masses: write the key term first, then its explanation.</a:t>
             </a:r>
             <a:endParaRPr lang="en-US" dirty="0"/>
           </a:p>
@@ -4702,7 +4705,7 @@
           <a:p>
             <a:r>
               <a:rPr lang="en-US" dirty="0"/>
-              <a:t>Copy the point on Tropical maritime air (mT) on the left, then draw the diagram on the right: heavy rain. Give it a title and label it clearly.</a:t>
+              <a:t>We continue with Types and Movements of Air Masses. Copy the point on Cold air masses: write the key term first, then its explanation.</a:t>
             </a:r>
             <a:endParaRPr lang="en-US" dirty="0"/>
           </a:p>
@@ -4790,7 +4793,7 @@
           <a:p>
             <a:r>
               <a:rPr lang="en-US" dirty="0"/>
-              <a:t>Copy the point on The Intertropical Front (ITF) on the left, then draw the diagram on the right: the air masses of West Africa. Give it a title and label it clearly.</a:t>
+              <a:t>We continue with Types and Movements of Air Masses. Copy the point on Seasonal movement: write the key term first, then its explanation.</a:t>
             </a:r>
             <a:endParaRPr lang="en-US" dirty="0"/>
           </a:p>
@@ -4878,7 +4881,7 @@
           <a:p>
             <a:r>
               <a:rPr lang="en-US" dirty="0"/>
-              <a:t>Now let us check what you have understood. Question 1: Distinguish a continental air mass from a maritime air mass. Answer in your exercise book.</a:t>
+              <a:t>Let us copy Air Masses Affecting Cameroon and West Africa. Two air masses control the seasons of Cameroon as follows. Copy the point on Tropical continental air (cT) on the left, then draw the diagram on the right: the Harmattan. Give it a title and label it clearly.</a:t>
             </a:r>
             <a:endParaRPr lang="en-US" dirty="0"/>
           </a:p>
@@ -4966,7 +4969,7 @@
           <a:p>
             <a:r>
               <a:rPr lang="en-US" dirty="0"/>
-              <a:t>The expected answer is: a continental air mass forms over land and is dry; a maritime air mass forms over the sea and is moist. If you got it right, well done.</a:t>
+              <a:t>Copy the point on Tropical maritime air (mT) on the left, then draw the diagram on the right: heavy rain. Give it a title and label it clearly.</a:t>
             </a:r>
             <a:endParaRPr lang="en-US" dirty="0"/>
           </a:p>
@@ -5054,7 +5057,7 @@
           <a:p>
             <a:r>
               <a:rPr lang="en-US" dirty="0"/>
-              <a:t>Now let us check what you have understood. Question 2: Which air mass brings the rainy season to Garoua, and why? Answer in your exercise book.</a:t>
+              <a:t>Copy the point on The Intertropical Front (ITF) on the left, then draw the diagram on the right: the air masses of West Africa. Give it a title and label it clearly.</a:t>
             </a:r>
             <a:endParaRPr lang="en-US" dirty="0"/>
           </a:p>
@@ -5142,7 +5145,7 @@
           <a:p>
             <a:r>
               <a:rPr lang="en-US" dirty="0"/>
-              <a:t>The expected answer is: the tropical maritime (mT) air mass, because it is moist and unstable. If you got it right, well done.</a:t>
+              <a:t>Now let us check what you have understood. Question 1: Distinguish a continental air mass from a maritime air mass. Answer in your exercise book.</a:t>
             </a:r>
             <a:endParaRPr lang="en-US" dirty="0"/>
           </a:p>
@@ -5230,7 +5233,7 @@
           <a:p>
             <a:r>
               <a:rPr lang="en-US" dirty="0"/>
-              <a:t>For those who need more practice, fill in the blanks in your exercise book. The answers are: number 1, source; number 2, tropical continental (cT); number 3, Intertropical Front (ITF).</a:t>
+              <a:t>The expected answer is: a continental air mass forms over land and is dry; a maritime air mass forms over the sea and is moist. If you got it right, well done.</a:t>
             </a:r>
             <a:endParaRPr lang="en-US" dirty="0"/>
           </a:p>
@@ -5318,7 +5321,7 @@
           <a:p>
             <a:r>
               <a:rPr lang="en-US" dirty="0"/>
-              <a:t>For your homework: Define climate. We shall correct it at the beginning of our next lesson.</a:t>
+              <a:t>Now let us check what you have understood. Question 2: Which air mass brings the rainy season to Garoua, and why? Answer in your exercise book.</a:t>
             </a:r>
             <a:endParaRPr lang="en-US" dirty="0"/>
           </a:p>
@@ -5494,7 +5497,7 @@
           <a:p>
             <a:r>
               <a:rPr lang="en-US" dirty="0"/>
-              <a:t>Our next lesson will be on Lesson 19: Meaning of Climate and Köppen's Classification. Thank you for your attention, and see you next time.</a:t>
+              <a:t>The expected answer is: the tropical maritime (mT) air mass, because it is moist and unstable. If you got it right, well done.</a:t>
             </a:r>
             <a:endParaRPr lang="en-US" dirty="0"/>
           </a:p>
@@ -5582,7 +5585,7 @@
           <a:p>
             <a:r>
               <a:rPr lang="en-US" dirty="0"/>
-              <a:t>Let us play the bilingual game. I say a word in English, and you give me the French word. Then we do the reverse.</a:t>
+              <a:t>For those who need more practice, fill in the blanks in your exercise book. The answers are: number 1, source; number 2, tropical continental (cT); number 3, Intertropical Front (ITF).</a:t>
             </a:r>
             <a:endParaRPr lang="en-US" dirty="0"/>
           </a:p>
@@ -5670,7 +5673,7 @@
           <a:p>
             <a:r>
               <a:rPr lang="en-US" dirty="0"/>
-              <a:t>I record this information in the official logbook of the class after the lesson.</a:t>
+              <a:t>For your homework: Define climate. We shall correct it at the beginning of our next lesson.</a:t>
             </a:r>
             <a:endParaRPr lang="en-US" dirty="0"/>
           </a:p>
@@ -5758,7 +5761,7 @@
           <a:p>
             <a:r>
               <a:rPr lang="en-US" dirty="0"/>
-              <a:t>I complete the second page of the logbook: the matter taught, the evaluation, the homework and the attendance.</a:t>
+              <a:t>Our next lesson will be on Lesson 19: Meaning of Climate and Köppen's Classification. Thank you for your attention, and see you next time.</a:t>
             </a:r>
             <a:endParaRPr lang="en-US" dirty="0"/>
           </a:p>
@@ -5846,7 +5849,7 @@
           <a:p>
             <a:r>
               <a:rPr lang="en-US" dirty="0"/>
-              <a:t>This slide is for me, the teacher: it gives the timing of the lesson and what to do if the projector is not available.</a:t>
+              <a:t>Let us play the bilingual game. I say a word in English, and you give me the French word. Then we do the reverse.</a:t>
             </a:r>
             <a:endParaRPr lang="en-US" dirty="0"/>
           </a:p>
@@ -5934,7 +5937,7 @@
           <a:p>
             <a:r>
               <a:rPr lang="en-US" dirty="0"/>
-              <a:t>These are the references and picture credits used to prepare this lesson.</a:t>
+              <a:t>I record this information in the official logbook of the class after the lesson.</a:t>
             </a:r>
             <a:endParaRPr lang="en-US" dirty="0"/>
           </a:p>
@@ -5958,6 +5961,270 @@
             <a:fld id="{F7021451-1387-4CA6-816F-3879F97B5CBC}" type="slidenum">
               <a:rPr lang="en-US"/>
               <a:t>65</a:t>
+            </a:fld>
+            <a:endParaRPr lang="en-US"/>
+          </a:p>
+        </p:txBody>
+      </p:sp>
+    </p:spTree>
+    <p:extLst>
+      <p:ext uri="{BB962C8B-B14F-4D97-AF65-F5344CB8AC3E}">
+        <p14:creationId xmlns:p14="http://schemas.microsoft.com/office/powerpoint/2010/main" val="1024086991"/>
+      </p:ext>
+    </p:extLst>
+  </p:cSld>
+  <p:clrMapOvr>
+    <a:masterClrMapping/>
+  </p:clrMapOvr>
+</p:notes>
+</file>
+
+<file path=ppt/notesSlides/notesSlide66.xml><?xml version="1.0" encoding="utf-8"?>
+<p:notes xmlns:a="http://schemas.openxmlformats.org/drawingml/2006/main" xmlns:r="http://schemas.openxmlformats.org/officeDocument/2006/relationships" xmlns:p="http://schemas.openxmlformats.org/presentationml/2006/main">
+  <p:cSld>
+    <p:spTree>
+      <p:nvGrpSpPr>
+        <p:cNvPr id="1" name=""/>
+        <p:cNvGrpSpPr/>
+        <p:nvPr/>
+      </p:nvGrpSpPr>
+      <p:grpSpPr>
+        <a:xfrm>
+          <a:off x="0" y="0"/>
+          <a:ext cx="0" cy="0"/>
+          <a:chOff x="0" y="0"/>
+          <a:chExt cx="0" cy="0"/>
+        </a:xfrm>
+      </p:grpSpPr>
+      <p:sp>
+        <p:nvSpPr>
+          <p:cNvPr id="2" name="Slide Image Placeholder 1"/>
+          <p:cNvSpPr>
+            <a:spLocks noGrp="1" noRot="1" noChangeAspect="1"/>
+          </p:cNvSpPr>
+          <p:nvPr>
+            <p:ph type="sldImg"/>
+          </p:nvPr>
+        </p:nvSpPr>
+        <p:spPr/>
+      </p:sp>
+      <p:sp>
+        <p:nvSpPr>
+          <p:cNvPr id="3" name="Notes Placeholder 2"/>
+          <p:cNvSpPr>
+            <a:spLocks noGrp="1"/>
+          </p:cNvSpPr>
+          <p:nvPr>
+            <p:ph type="body" idx="1"/>
+          </p:nvPr>
+        </p:nvSpPr>
+        <p:spPr/>
+        <p:txBody>
+          <a:bodyPr/>
+          <a:lstStyle/>
+          <a:p>
+            <a:r>
+              <a:rPr lang="en-US" dirty="0"/>
+              <a:t>I complete the second page of the logbook: the matter taught, the evaluation, the homework and the attendance.</a:t>
+            </a:r>
+            <a:endParaRPr lang="en-US" dirty="0"/>
+          </a:p>
+        </p:txBody>
+      </p:sp>
+      <p:sp>
+        <p:nvSpPr>
+          <p:cNvPr id="4" name="Slide Number Placeholder 3"/>
+          <p:cNvSpPr>
+            <a:spLocks noGrp="1"/>
+          </p:cNvSpPr>
+          <p:nvPr>
+            <p:ph type="sldNum" sz="quarter" idx="10"/>
+          </p:nvPr>
+        </p:nvSpPr>
+        <p:spPr/>
+        <p:txBody>
+          <a:bodyPr/>
+          <a:lstStyle/>
+          <a:p>
+            <a:fld id="{F7021451-1387-4CA6-816F-3879F97B5CBC}" type="slidenum">
+              <a:rPr lang="en-US"/>
+              <a:t>66</a:t>
+            </a:fld>
+            <a:endParaRPr lang="en-US"/>
+          </a:p>
+        </p:txBody>
+      </p:sp>
+    </p:spTree>
+    <p:extLst>
+      <p:ext uri="{BB962C8B-B14F-4D97-AF65-F5344CB8AC3E}">
+        <p14:creationId xmlns:p14="http://schemas.microsoft.com/office/powerpoint/2010/main" val="1024086991"/>
+      </p:ext>
+    </p:extLst>
+  </p:cSld>
+  <p:clrMapOvr>
+    <a:masterClrMapping/>
+  </p:clrMapOvr>
+</p:notes>
+</file>
+
+<file path=ppt/notesSlides/notesSlide67.xml><?xml version="1.0" encoding="utf-8"?>
+<p:notes xmlns:a="http://schemas.openxmlformats.org/drawingml/2006/main" xmlns:r="http://schemas.openxmlformats.org/officeDocument/2006/relationships" xmlns:p="http://schemas.openxmlformats.org/presentationml/2006/main">
+  <p:cSld>
+    <p:spTree>
+      <p:nvGrpSpPr>
+        <p:cNvPr id="1" name=""/>
+        <p:cNvGrpSpPr/>
+        <p:nvPr/>
+      </p:nvGrpSpPr>
+      <p:grpSpPr>
+        <a:xfrm>
+          <a:off x="0" y="0"/>
+          <a:ext cx="0" cy="0"/>
+          <a:chOff x="0" y="0"/>
+          <a:chExt cx="0" cy="0"/>
+        </a:xfrm>
+      </p:grpSpPr>
+      <p:sp>
+        <p:nvSpPr>
+          <p:cNvPr id="2" name="Slide Image Placeholder 1"/>
+          <p:cNvSpPr>
+            <a:spLocks noGrp="1" noRot="1" noChangeAspect="1"/>
+          </p:cNvSpPr>
+          <p:nvPr>
+            <p:ph type="sldImg"/>
+          </p:nvPr>
+        </p:nvSpPr>
+        <p:spPr/>
+      </p:sp>
+      <p:sp>
+        <p:nvSpPr>
+          <p:cNvPr id="3" name="Notes Placeholder 2"/>
+          <p:cNvSpPr>
+            <a:spLocks noGrp="1"/>
+          </p:cNvSpPr>
+          <p:nvPr>
+            <p:ph type="body" idx="1"/>
+          </p:nvPr>
+        </p:nvSpPr>
+        <p:spPr/>
+        <p:txBody>
+          <a:bodyPr/>
+          <a:lstStyle/>
+          <a:p>
+            <a:r>
+              <a:rPr lang="en-US" dirty="0"/>
+              <a:t>This slide is for me, the teacher: it gives the timing of the lesson and what to do if the projector is not available.</a:t>
+            </a:r>
+            <a:endParaRPr lang="en-US" dirty="0"/>
+          </a:p>
+        </p:txBody>
+      </p:sp>
+      <p:sp>
+        <p:nvSpPr>
+          <p:cNvPr id="4" name="Slide Number Placeholder 3"/>
+          <p:cNvSpPr>
+            <a:spLocks noGrp="1"/>
+          </p:cNvSpPr>
+          <p:nvPr>
+            <p:ph type="sldNum" sz="quarter" idx="10"/>
+          </p:nvPr>
+        </p:nvSpPr>
+        <p:spPr/>
+        <p:txBody>
+          <a:bodyPr/>
+          <a:lstStyle/>
+          <a:p>
+            <a:fld id="{F7021451-1387-4CA6-816F-3879F97B5CBC}" type="slidenum">
+              <a:rPr lang="en-US"/>
+              <a:t>67</a:t>
+            </a:fld>
+            <a:endParaRPr lang="en-US"/>
+          </a:p>
+        </p:txBody>
+      </p:sp>
+    </p:spTree>
+    <p:extLst>
+      <p:ext uri="{BB962C8B-B14F-4D97-AF65-F5344CB8AC3E}">
+        <p14:creationId xmlns:p14="http://schemas.microsoft.com/office/powerpoint/2010/main" val="1024086991"/>
+      </p:ext>
+    </p:extLst>
+  </p:cSld>
+  <p:clrMapOvr>
+    <a:masterClrMapping/>
+  </p:clrMapOvr>
+</p:notes>
+</file>
+
+<file path=ppt/notesSlides/notesSlide68.xml><?xml version="1.0" encoding="utf-8"?>
+<p:notes xmlns:a="http://schemas.openxmlformats.org/drawingml/2006/main" xmlns:r="http://schemas.openxmlformats.org/officeDocument/2006/relationships" xmlns:p="http://schemas.openxmlformats.org/presentationml/2006/main">
+  <p:cSld>
+    <p:spTree>
+      <p:nvGrpSpPr>
+        <p:cNvPr id="1" name=""/>
+        <p:cNvGrpSpPr/>
+        <p:nvPr/>
+      </p:nvGrpSpPr>
+      <p:grpSpPr>
+        <a:xfrm>
+          <a:off x="0" y="0"/>
+          <a:ext cx="0" cy="0"/>
+          <a:chOff x="0" y="0"/>
+          <a:chExt cx="0" cy="0"/>
+        </a:xfrm>
+      </p:grpSpPr>
+      <p:sp>
+        <p:nvSpPr>
+          <p:cNvPr id="2" name="Slide Image Placeholder 1"/>
+          <p:cNvSpPr>
+            <a:spLocks noGrp="1" noRot="1" noChangeAspect="1"/>
+          </p:cNvSpPr>
+          <p:nvPr>
+            <p:ph type="sldImg"/>
+          </p:nvPr>
+        </p:nvSpPr>
+        <p:spPr/>
+      </p:sp>
+      <p:sp>
+        <p:nvSpPr>
+          <p:cNvPr id="3" name="Notes Placeholder 2"/>
+          <p:cNvSpPr>
+            <a:spLocks noGrp="1"/>
+          </p:cNvSpPr>
+          <p:nvPr>
+            <p:ph type="body" idx="1"/>
+          </p:nvPr>
+        </p:nvSpPr>
+        <p:spPr/>
+        <p:txBody>
+          <a:bodyPr/>
+          <a:lstStyle/>
+          <a:p>
+            <a:r>
+              <a:rPr lang="en-US" dirty="0"/>
+              <a:t>These are the references and picture credits used to prepare this lesson.</a:t>
+            </a:r>
+            <a:endParaRPr lang="en-US" dirty="0"/>
+          </a:p>
+        </p:txBody>
+      </p:sp>
+      <p:sp>
+        <p:nvSpPr>
+          <p:cNvPr id="4" name="Slide Number Placeholder 3"/>
+          <p:cNvSpPr>
+            <a:spLocks noGrp="1"/>
+          </p:cNvSpPr>
+          <p:nvPr>
+            <p:ph type="sldNum" sz="quarter" idx="10"/>
+          </p:nvPr>
+        </p:nvSpPr>
+        <p:spPr/>
+        <p:txBody>
+          <a:bodyPr/>
+          <a:lstStyle/>
+          <a:p>
+            <a:fld id="{F7021451-1387-4CA6-816F-3879F97B5CBC}" type="slidenum">
+              <a:rPr lang="en-US"/>
+              <a:t>68</a:t>
             </a:fld>
             <a:endParaRPr lang="en-US"/>
           </a:p>
@@ -17430,7 +17697,7 @@
         <p:spPr>
           <a:xfrm>
             <a:off x="0" y="658368"/>
-            <a:ext cx="1463040" cy="5833872"/>
+            <a:ext cx="2468880" cy="5833872"/>
           </a:xfrm>
           <a:prstGeom prst="rect">
             <a:avLst/>
@@ -17445,8 +17712,8 @@
         </p:nvSpPr>
         <p:spPr>
           <a:xfrm>
-            <a:off x="1691640" y="1005840"/>
-            <a:ext cx="10180015" cy="731520"/>
+            <a:off x="2697480" y="1005840"/>
+            <a:ext cx="9174175" cy="731520"/>
           </a:xfrm>
           <a:prstGeom prst="rect">
             <a:avLst/>
@@ -17486,8 +17753,47 @@
         </p:nvSpPr>
         <p:spPr>
           <a:xfrm>
-            <a:off x="1691640" y="1783080"/>
-            <a:ext cx="10180015" cy="4663440"/>
+            <a:off x="2697480" y="1737360"/>
+            <a:ext cx="9174175" cy="457200"/>
+          </a:xfrm>
+          <a:prstGeom prst="rect">
+            <a:avLst/>
+          </a:prstGeom>
+          <a:noFill/>
+          <a:ln/>
+        </p:spPr>
+        <p:txBody>
+          <a:bodyPr wrap="square" lIns="0" tIns="0" rIns="0" bIns="0" rtlCol="0" anchor="ctr"/>
+          <a:lstStyle/>
+          <a:p>
+            <a:pPr algn="l" indent="0" marL="0">
+              <a:buNone/>
+            </a:pPr>
+            <a:r>
+              <a:rPr lang="en-US" sz="3200" b="1" dirty="0">
+                <a:solidFill>
+                  <a:srgbClr val="990011"/>
+                </a:solidFill>
+                <a:latin typeface="Times New Roman" pitchFamily="34" charset="0"/>
+                <a:ea typeface="Times New Roman" pitchFamily="34" charset="-122"/>
+                <a:cs typeface="Times New Roman" pitchFamily="34" charset="-120"/>
+              </a:rPr>
+              <a:t>A) The Two Letters</a:t>
+            </a:r>
+            <a:endParaRPr lang="en-US" sz="3200" dirty="0"/>
+          </a:p>
+        </p:txBody>
+      </p:sp>
+      <p:sp>
+        <p:nvSpPr>
+          <p:cNvPr id="6" name="Text 3"/>
+          <p:cNvSpPr/>
+          <p:nvPr/>
+        </p:nvSpPr>
+        <p:spPr>
+          <a:xfrm>
+            <a:off x="2697480" y="2240280"/>
+            <a:ext cx="9174175" cy="4206240"/>
           </a:xfrm>
           <a:prstGeom prst="rect">
             <a:avLst/>
@@ -17506,7 +17812,7 @@
               <a:buNone/>
             </a:pPr>
             <a:r>
-              <a:rPr lang="en-US" sz="4000" i="1" dirty="0">
+              <a:rPr lang="en-US" sz="3600" i="1" dirty="0">
                 <a:solidFill>
                   <a:srgbClr val="111111"/>
                 </a:solidFill>
@@ -17516,7 +17822,7 @@
               </a:rPr>
               <a:t>Air masses are classified with two letters as follows:</a:t>
             </a:r>
-            <a:endParaRPr lang="en-US" sz="4000" dirty="0"/>
+            <a:endParaRPr lang="en-US" sz="3600" dirty="0"/>
           </a:p>
           <a:p>
             <a:pPr algn="l" indent="0" marL="0">
@@ -17526,7 +17832,7 @@
               <a:buNone/>
             </a:pPr>
             <a:r>
-              <a:rPr lang="en-US" sz="4000" b="1" dirty="0">
+              <a:rPr lang="en-US" sz="3600" b="1" dirty="0">
                 <a:solidFill>
                   <a:srgbClr val="111111"/>
                 </a:solidFill>
@@ -17543,7 +17849,7 @@
               <a:buNone/>
             </a:pPr>
             <a:r>
-              <a:rPr lang="en-US" sz="4000" dirty="0">
+              <a:rPr lang="en-US" sz="3600" dirty="0">
                 <a:solidFill>
                   <a:srgbClr val="111111"/>
                 </a:solidFill>
@@ -17553,7 +17859,7 @@
               </a:rPr>
               <a:t>The letter c (continental) is used for an air mass formed over land, which is dry. The letter m (maritime) is used for an air mass formed over the sea, which is moist.</a:t>
             </a:r>
-            <a:endParaRPr lang="en-US" sz="4000" dirty="0"/>
+            <a:endParaRPr lang="en-US" sz="3600" dirty="0"/>
           </a:p>
         </p:txBody>
       </p:sp>
@@ -17718,8 +18024,49 @@
         </p:nvSpPr>
         <p:spPr>
           <a:xfrm>
-            <a:off x="365760" y="1783080"/>
-            <a:ext cx="6035040" cy="4617720"/>
+            <a:off x="365760" y="1737360"/>
+            <a:ext cx="6035040" cy="457200"/>
+          </a:xfrm>
+          <a:prstGeom prst="rect">
+            <a:avLst/>
+          </a:prstGeom>
+          <a:noFill/>
+          <a:ln/>
+        </p:spPr>
+        <p:txBody>
+          <a:bodyPr wrap="square" lIns="0" tIns="0" rIns="0" bIns="0" rtlCol="0" anchor="ctr">
+            <a:normAutofit/>
+          </a:bodyPr>
+          <a:lstStyle/>
+          <a:p>
+            <a:pPr algn="l" indent="0" marL="0">
+              <a:buNone/>
+            </a:pPr>
+            <a:r>
+              <a:rPr lang="en-US" sz="3000" b="1" dirty="0">
+                <a:solidFill>
+                  <a:srgbClr val="990011"/>
+                </a:solidFill>
+                <a:latin typeface="Times New Roman" pitchFamily="34" charset="0"/>
+                <a:ea typeface="Times New Roman" pitchFamily="34" charset="-122"/>
+                <a:cs typeface="Times New Roman" pitchFamily="34" charset="-120"/>
+              </a:rPr>
+              <a:t>A) The Two Letters</a:t>
+            </a:r>
+            <a:endParaRPr lang="en-US" sz="3000" dirty="0"/>
+          </a:p>
+        </p:txBody>
+      </p:sp>
+      <p:sp>
+        <p:nvSpPr>
+          <p:cNvPr id="5" name="Text 3"/>
+          <p:cNvSpPr/>
+          <p:nvPr/>
+        </p:nvSpPr>
+        <p:spPr>
+          <a:xfrm>
+            <a:off x="365760" y="2240280"/>
+            <a:ext cx="6035040" cy="4160520"/>
           </a:xfrm>
           <a:prstGeom prst="rect">
             <a:avLst/>
@@ -17771,7 +18118,7 @@
       </p:sp>
       <p:pic>
         <p:nvPicPr>
-          <p:cNvPr id="5" name="Image 0" descr="/home/claude/f4/img/v2/airmass_classes_big.png">    </p:cNvPr>
+          <p:cNvPr id="6" name="Image 0" descr="/home/claude/f4/img/v2/airmass_classes_big.png">    </p:cNvPr>
           <p:cNvPicPr>
             <a:picLocks noChangeAspect="1"/>
           </p:cNvPicPr>
@@ -17795,7 +18142,7 @@
       </p:pic>
       <p:sp>
         <p:nvSpPr>
-          <p:cNvPr id="6" name="Text 3"/>
+          <p:cNvPr id="7" name="Text 4"/>
           <p:cNvSpPr/>
           <p:nvPr/>
         </p:nvSpPr>
@@ -17961,7 +18308,7 @@
         <p:spPr>
           <a:xfrm>
             <a:off x="0" y="658368"/>
-            <a:ext cx="2468880" cy="5833872"/>
+            <a:ext cx="3840480" cy="5833872"/>
           </a:xfrm>
           <a:prstGeom prst="rect">
             <a:avLst/>
@@ -17976,8 +18323,8 @@
         </p:nvSpPr>
         <p:spPr>
           <a:xfrm>
-            <a:off x="2697480" y="1005840"/>
-            <a:ext cx="9174175" cy="731520"/>
+            <a:off x="4069080" y="1005840"/>
+            <a:ext cx="7802575" cy="731520"/>
           </a:xfrm>
           <a:prstGeom prst="rect">
             <a:avLst/>
@@ -18017,8 +18364,47 @@
         </p:nvSpPr>
         <p:spPr>
           <a:xfrm>
-            <a:off x="2697480" y="1783080"/>
-            <a:ext cx="9174175" cy="4663440"/>
+            <a:off x="4069080" y="1737360"/>
+            <a:ext cx="7802575" cy="457200"/>
+          </a:xfrm>
+          <a:prstGeom prst="rect">
+            <a:avLst/>
+          </a:prstGeom>
+          <a:noFill/>
+          <a:ln/>
+        </p:spPr>
+        <p:txBody>
+          <a:bodyPr wrap="square" lIns="0" tIns="0" rIns="0" bIns="0" rtlCol="0" anchor="ctr"/>
+          <a:lstStyle/>
+          <a:p>
+            <a:pPr algn="l" indent="0" marL="0">
+              <a:buNone/>
+            </a:pPr>
+            <a:r>
+              <a:rPr lang="en-US" sz="3200" b="1" dirty="0">
+                <a:solidFill>
+                  <a:srgbClr val="990011"/>
+                </a:solidFill>
+                <a:latin typeface="Times New Roman" pitchFamily="34" charset="0"/>
+                <a:ea typeface="Times New Roman" pitchFamily="34" charset="-122"/>
+                <a:cs typeface="Times New Roman" pitchFamily="34" charset="-120"/>
+              </a:rPr>
+              <a:t>B) Examples</a:t>
+            </a:r>
+            <a:endParaRPr lang="en-US" sz="3200" dirty="0"/>
+          </a:p>
+        </p:txBody>
+      </p:sp>
+      <p:sp>
+        <p:nvSpPr>
+          <p:cNvPr id="6" name="Text 3"/>
+          <p:cNvSpPr/>
+          <p:nvPr/>
+        </p:nvSpPr>
+        <p:spPr>
+          <a:xfrm>
+            <a:off x="4069080" y="2240280"/>
+            <a:ext cx="7802575" cy="4206240"/>
           </a:xfrm>
           <a:prstGeom prst="rect">
             <a:avLst/>
@@ -18037,7 +18423,7 @@
               <a:buNone/>
             </a:pPr>
             <a:r>
-              <a:rPr lang="en-US" sz="4000" b="1" dirty="0">
+              <a:rPr lang="en-US" sz="4000" i="1" dirty="0">
                 <a:solidFill>
                   <a:srgbClr val="111111"/>
                 </a:solidFill>
@@ -18045,8 +18431,11 @@
                 <a:ea typeface="Times New Roman" pitchFamily="34" charset="-122"/>
                 <a:cs typeface="Times New Roman" pitchFamily="34" charset="-120"/>
               </a:rPr>
-              <a:t>Examples: </a:t>
-            </a:r>
+              <a:t>The main air masses are the following:</a:t>
+            </a:r>
+            <a:endParaRPr lang="en-US" sz="4000" dirty="0"/>
+          </a:p>
+          <a:p>
             <a:pPr algn="l" indent="0" marL="0">
               <a:spcAft>
                 <a:spcPts val="800"/>
@@ -18054,7 +18443,7 @@
               <a:buNone/>
             </a:pPr>
             <a:r>
-              <a:rPr lang="en-US" sz="4000" dirty="0">
+              <a:rPr lang="en-US" sz="4000" b="1" dirty="0">
                 <a:solidFill>
                   <a:srgbClr val="111111"/>
                 </a:solidFill>
@@ -18062,7 +18451,24 @@
                 <a:ea typeface="Times New Roman" pitchFamily="34" charset="-122"/>
                 <a:cs typeface="Times New Roman" pitchFamily="34" charset="-120"/>
               </a:rPr>
-              <a:t>cT is hot and dry, like the Saharan air; mT is warm and moist, like the air over the tropical oceans. cP is cold and dry, like the Siberian air in winter, and mP is cool and moist, like the air of the North Atlantic.</a:t>
+              <a:t>Tropical continental (cT): </a:t>
+            </a:r>
+            <a:pPr algn="l" indent="0" marL="0">
+              <a:spcAft>
+                <a:spcPts val="800"/>
+              </a:spcAft>
+              <a:buNone/>
+            </a:pPr>
+            <a:r>
+              <a:rPr lang="en-US" sz="4000" dirty="0">
+                <a:solidFill>
+                  <a:srgbClr val="111111"/>
+                </a:solidFill>
+                <a:latin typeface="Times New Roman" pitchFamily="34" charset="0"/>
+                <a:ea typeface="Times New Roman" pitchFamily="34" charset="-122"/>
+                <a:cs typeface="Times New Roman" pitchFamily="34" charset="-120"/>
+              </a:rPr>
+              <a:t>It is hot and dry, like the air of the Sahara. It brings dry, sunny and dusty weather.</a:t>
             </a:r>
             <a:endParaRPr lang="en-US" sz="4000" dirty="0"/>
           </a:p>
@@ -18197,7 +18603,7 @@
         <p:spPr>
           <a:xfrm>
             <a:off x="0" y="658368"/>
-            <a:ext cx="2468880" cy="5833872"/>
+            <a:ext cx="5120640" cy="5833872"/>
           </a:xfrm>
           <a:prstGeom prst="rect">
             <a:avLst/>
@@ -18212,8 +18618,8 @@
         </p:nvSpPr>
         <p:spPr>
           <a:xfrm>
-            <a:off x="2697480" y="1005840"/>
-            <a:ext cx="9174175" cy="731520"/>
+            <a:off x="5349240" y="1005840"/>
+            <a:ext cx="6522415" cy="731520"/>
           </a:xfrm>
           <a:prstGeom prst="rect">
             <a:avLst/>
@@ -18239,7 +18645,7 @@
                 <a:ea typeface="Times New Roman" pitchFamily="34" charset="-122"/>
                 <a:cs typeface="Times New Roman" pitchFamily="34" charset="-120"/>
               </a:rPr>
-              <a:t>4. Types and Movements of Air Masses</a:t>
+              <a:t>3. Classification and Examples</a:t>
             </a:r>
             <a:endParaRPr lang="en-US" sz="3600" dirty="0"/>
           </a:p>
@@ -18253,8 +18659,47 @@
         </p:nvSpPr>
         <p:spPr>
           <a:xfrm>
-            <a:off x="2697480" y="1783080"/>
-            <a:ext cx="9174175" cy="4663440"/>
+            <a:off x="5349240" y="1737360"/>
+            <a:ext cx="6522415" cy="457200"/>
+          </a:xfrm>
+          <a:prstGeom prst="rect">
+            <a:avLst/>
+          </a:prstGeom>
+          <a:noFill/>
+          <a:ln/>
+        </p:spPr>
+        <p:txBody>
+          <a:bodyPr wrap="square" lIns="0" tIns="0" rIns="0" bIns="0" rtlCol="0" anchor="ctr"/>
+          <a:lstStyle/>
+          <a:p>
+            <a:pPr algn="l" indent="0" marL="0">
+              <a:buNone/>
+            </a:pPr>
+            <a:r>
+              <a:rPr lang="en-US" sz="3200" b="1" dirty="0">
+                <a:solidFill>
+                  <a:srgbClr val="990011"/>
+                </a:solidFill>
+                <a:latin typeface="Times New Roman" pitchFamily="34" charset="0"/>
+                <a:ea typeface="Times New Roman" pitchFamily="34" charset="-122"/>
+                <a:cs typeface="Times New Roman" pitchFamily="34" charset="-120"/>
+              </a:rPr>
+              <a:t>B) Examples</a:t>
+            </a:r>
+            <a:endParaRPr lang="en-US" sz="3200" dirty="0"/>
+          </a:p>
+        </p:txBody>
+      </p:sp>
+      <p:sp>
+        <p:nvSpPr>
+          <p:cNvPr id="6" name="Text 3"/>
+          <p:cNvSpPr/>
+          <p:nvPr/>
+        </p:nvSpPr>
+        <p:spPr>
+          <a:xfrm>
+            <a:off x="5349240" y="2240280"/>
+            <a:ext cx="6522415" cy="4206240"/>
           </a:xfrm>
           <a:prstGeom prst="rect">
             <a:avLst/>
@@ -18273,7 +18718,7 @@
               <a:buNone/>
             </a:pPr>
             <a:r>
-              <a:rPr lang="en-US" sz="4000" i="1" dirty="0">
+              <a:rPr lang="en-US" sz="4000" b="1" dirty="0">
                 <a:solidFill>
                   <a:srgbClr val="111111"/>
                 </a:solidFill>
@@ -18281,11 +18726,8 @@
                 <a:ea typeface="Times New Roman" pitchFamily="34" charset="-122"/>
                 <a:cs typeface="Times New Roman" pitchFamily="34" charset="-120"/>
               </a:rPr>
-              <a:t>Air masses are of the following types and move as follows:</a:t>
-            </a:r>
-            <a:endParaRPr lang="en-US" sz="4000" dirty="0"/>
-          </a:p>
-          <a:p>
+              <a:t>Tropical maritime (mT): </a:t>
+            </a:r>
             <a:pPr algn="l" indent="0" marL="0">
               <a:spcAft>
                 <a:spcPts val="800"/>
@@ -18293,7 +18735,7 @@
               <a:buNone/>
             </a:pPr>
             <a:r>
-              <a:rPr lang="en-US" sz="4000" b="1" dirty="0">
+              <a:rPr lang="en-US" sz="4000" dirty="0">
                 <a:solidFill>
                   <a:srgbClr val="111111"/>
                 </a:solidFill>
@@ -18301,24 +18743,7 @@
                 <a:ea typeface="Times New Roman" pitchFamily="34" charset="-122"/>
                 <a:cs typeface="Times New Roman" pitchFamily="34" charset="-120"/>
               </a:rPr>
-              <a:t>Warm air masses: </a:t>
-            </a:r>
-            <a:pPr algn="l" indent="0" marL="0">
-              <a:spcAft>
-                <a:spcPts val="800"/>
-              </a:spcAft>
-              <a:buNone/>
-            </a:pPr>
-            <a:r>
-              <a:rPr lang="en-US" sz="4000" dirty="0">
-                <a:solidFill>
-                  <a:srgbClr val="111111"/>
-                </a:solidFill>
-                <a:latin typeface="Times New Roman" pitchFamily="34" charset="0"/>
-                <a:ea typeface="Times New Roman" pitchFamily="34" charset="-122"/>
-                <a:cs typeface="Times New Roman" pitchFamily="34" charset="-120"/>
-              </a:rPr>
-              <a:t>A warm air mass is warmer than the surface it moves over, so it is cooled from below. It becomes stable and brings layer clouds, drizzle and fog.</a:t>
+              <a:t>It is warm and moist, like the air over the tropical oceans. It brings clouds and rain.</a:t>
             </a:r>
             <a:endParaRPr lang="en-US" sz="4000" dirty="0"/>
           </a:p>
@@ -18495,7 +18920,7 @@
                 <a:ea typeface="Times New Roman" pitchFamily="34" charset="-122"/>
                 <a:cs typeface="Times New Roman" pitchFamily="34" charset="-120"/>
               </a:rPr>
-              <a:t>4. Types and Movements of Air Masses</a:t>
+              <a:t>3. Classification and Examples</a:t>
             </a:r>
             <a:endParaRPr lang="en-US" sz="3600" dirty="0"/>
           </a:p>
@@ -18509,8 +18934,47 @@
         </p:nvSpPr>
         <p:spPr>
           <a:xfrm>
-            <a:off x="5349240" y="1783080"/>
-            <a:ext cx="6522415" cy="4663440"/>
+            <a:off x="5349240" y="1737360"/>
+            <a:ext cx="6522415" cy="457200"/>
+          </a:xfrm>
+          <a:prstGeom prst="rect">
+            <a:avLst/>
+          </a:prstGeom>
+          <a:noFill/>
+          <a:ln/>
+        </p:spPr>
+        <p:txBody>
+          <a:bodyPr wrap="square" lIns="0" tIns="0" rIns="0" bIns="0" rtlCol="0" anchor="ctr"/>
+          <a:lstStyle/>
+          <a:p>
+            <a:pPr algn="l" indent="0" marL="0">
+              <a:buNone/>
+            </a:pPr>
+            <a:r>
+              <a:rPr lang="en-US" sz="3200" b="1" dirty="0">
+                <a:solidFill>
+                  <a:srgbClr val="990011"/>
+                </a:solidFill>
+                <a:latin typeface="Times New Roman" pitchFamily="34" charset="0"/>
+                <a:ea typeface="Times New Roman" pitchFamily="34" charset="-122"/>
+                <a:cs typeface="Times New Roman" pitchFamily="34" charset="-120"/>
+              </a:rPr>
+              <a:t>B) Examples</a:t>
+            </a:r>
+            <a:endParaRPr lang="en-US" sz="3200" dirty="0"/>
+          </a:p>
+        </p:txBody>
+      </p:sp>
+      <p:sp>
+        <p:nvSpPr>
+          <p:cNvPr id="6" name="Text 3"/>
+          <p:cNvSpPr/>
+          <p:nvPr/>
+        </p:nvSpPr>
+        <p:spPr>
+          <a:xfrm>
+            <a:off x="5349240" y="2240280"/>
+            <a:ext cx="6522415" cy="4206240"/>
           </a:xfrm>
           <a:prstGeom prst="rect">
             <a:avLst/>
@@ -18537,7 +19001,7 @@
                 <a:ea typeface="Times New Roman" pitchFamily="34" charset="-122"/>
                 <a:cs typeface="Times New Roman" pitchFamily="34" charset="-120"/>
               </a:rPr>
-              <a:t>Cold air masses: </a:t>
+              <a:t>Polar continental (cP): </a:t>
             </a:r>
             <a:pPr algn="l" indent="0" marL="0">
               <a:spcAft>
@@ -18554,7 +19018,7 @@
                 <a:ea typeface="Times New Roman" pitchFamily="34" charset="-122"/>
                 <a:cs typeface="Times New Roman" pitchFamily="34" charset="-120"/>
               </a:rPr>
-              <a:t>A cold air mass is colder than the surface it moves over, so it is heated from below. It becomes unstable and brings cumulus clouds and showers.</a:t>
+              <a:t>It is cold and dry, like the air of Siberia in winter. It brings very cold, clear weather.</a:t>
             </a:r>
             <a:endParaRPr lang="en-US" sz="4000" dirty="0"/>
           </a:p>
@@ -18908,7 +19372,7 @@
         <p:spPr>
           <a:xfrm>
             <a:off x="0" y="658368"/>
-            <a:ext cx="3840480" cy="5833872"/>
+            <a:ext cx="5120640" cy="5833872"/>
           </a:xfrm>
           <a:prstGeom prst="rect">
             <a:avLst/>
@@ -18923,8 +19387,8 @@
         </p:nvSpPr>
         <p:spPr>
           <a:xfrm>
-            <a:off x="4069080" y="1005840"/>
-            <a:ext cx="7802575" cy="731520"/>
+            <a:off x="5349240" y="1005840"/>
+            <a:ext cx="6522415" cy="731520"/>
           </a:xfrm>
           <a:prstGeom prst="rect">
             <a:avLst/>
@@ -18950,7 +19414,7 @@
                 <a:ea typeface="Times New Roman" pitchFamily="34" charset="-122"/>
                 <a:cs typeface="Times New Roman" pitchFamily="34" charset="-120"/>
               </a:rPr>
-              <a:t>4. Types and Movements of Air Masses</a:t>
+              <a:t>3. Classification and Examples</a:t>
             </a:r>
             <a:endParaRPr lang="en-US" sz="3600" dirty="0"/>
           </a:p>
@@ -18964,8 +19428,47 @@
         </p:nvSpPr>
         <p:spPr>
           <a:xfrm>
-            <a:off x="4069080" y="1783080"/>
-            <a:ext cx="7802575" cy="4663440"/>
+            <a:off x="5349240" y="1737360"/>
+            <a:ext cx="6522415" cy="457200"/>
+          </a:xfrm>
+          <a:prstGeom prst="rect">
+            <a:avLst/>
+          </a:prstGeom>
+          <a:noFill/>
+          <a:ln/>
+        </p:spPr>
+        <p:txBody>
+          <a:bodyPr wrap="square" lIns="0" tIns="0" rIns="0" bIns="0" rtlCol="0" anchor="ctr"/>
+          <a:lstStyle/>
+          <a:p>
+            <a:pPr algn="l" indent="0" marL="0">
+              <a:buNone/>
+            </a:pPr>
+            <a:r>
+              <a:rPr lang="en-US" sz="3200" b="1" dirty="0">
+                <a:solidFill>
+                  <a:srgbClr val="990011"/>
+                </a:solidFill>
+                <a:latin typeface="Times New Roman" pitchFamily="34" charset="0"/>
+                <a:ea typeface="Times New Roman" pitchFamily="34" charset="-122"/>
+                <a:cs typeface="Times New Roman" pitchFamily="34" charset="-120"/>
+              </a:rPr>
+              <a:t>B) Examples</a:t>
+            </a:r>
+            <a:endParaRPr lang="en-US" sz="3200" dirty="0"/>
+          </a:p>
+        </p:txBody>
+      </p:sp>
+      <p:sp>
+        <p:nvSpPr>
+          <p:cNvPr id="6" name="Text 3"/>
+          <p:cNvSpPr/>
+          <p:nvPr/>
+        </p:nvSpPr>
+        <p:spPr>
+          <a:xfrm>
+            <a:off x="5349240" y="2240280"/>
+            <a:ext cx="6522415" cy="4206240"/>
           </a:xfrm>
           <a:prstGeom prst="rect">
             <a:avLst/>
@@ -18992,7 +19495,7 @@
                 <a:ea typeface="Times New Roman" pitchFamily="34" charset="-122"/>
                 <a:cs typeface="Times New Roman" pitchFamily="34" charset="-120"/>
               </a:rPr>
-              <a:t>Seasonal movement: </a:t>
+              <a:t>Polar maritime (mP): </a:t>
             </a:r>
             <a:pPr algn="l" indent="0" marL="0">
               <a:spcAft>
@@ -19009,7 +19512,7 @@
                 <a:ea typeface="Times New Roman" pitchFamily="34" charset="-122"/>
                 <a:cs typeface="Times New Roman" pitchFamily="34" charset="-120"/>
               </a:rPr>
-              <a:t>Air masses move with the pressure belts, which follow the overhead sun north and south during the year. As a result, each region is dominated by different air masses in different seasons.</a:t>
+              <a:t>It is cool and moist, like the air of the North Atlantic. It brings cool, showery weather.</a:t>
             </a:r>
             <a:endParaRPr lang="en-US" sz="4000" dirty="0"/>
           </a:p>
@@ -19127,129 +19630,9 @@
           </a:p>
         </p:txBody>
       </p:sp>
-      <p:sp>
-        <p:nvSpPr>
-          <p:cNvPr id="3" name="Text 1"/>
-          <p:cNvSpPr/>
-          <p:nvPr/>
-        </p:nvSpPr>
-        <p:spPr>
-          <a:xfrm>
-            <a:off x="365760" y="1005840"/>
-            <a:ext cx="11460175" cy="731520"/>
-          </a:xfrm>
-          <a:prstGeom prst="rect">
-            <a:avLst/>
-          </a:prstGeom>
-          <a:noFill/>
-          <a:ln/>
-        </p:spPr>
-        <p:txBody>
-          <a:bodyPr wrap="square" lIns="0" tIns="0" rIns="0" bIns="0" rtlCol="0" anchor="ctr">
-            <a:normAutofit/>
-          </a:bodyPr>
-          <a:lstStyle/>
-          <a:p>
-            <a:pPr algn="ctr" indent="0" marL="0">
-              <a:buNone/>
-            </a:pPr>
-            <a:r>
-              <a:rPr lang="en-US" sz="3600" b="1" dirty="0">
-                <a:solidFill>
-                  <a:srgbClr val="990011"/>
-                </a:solidFill>
-                <a:latin typeface="Times New Roman" pitchFamily="34" charset="0"/>
-                <a:ea typeface="Times New Roman" pitchFamily="34" charset="-122"/>
-                <a:cs typeface="Times New Roman" pitchFamily="34" charset="-120"/>
-              </a:rPr>
-              <a:t>5. Air Masses Affecting Cameroon and West Africa</a:t>
-            </a:r>
-            <a:endParaRPr lang="en-US" sz="3600" dirty="0"/>
-          </a:p>
-        </p:txBody>
-      </p:sp>
-      <p:sp>
-        <p:nvSpPr>
-          <p:cNvPr id="4" name="Text 2"/>
-          <p:cNvSpPr/>
-          <p:nvPr/>
-        </p:nvSpPr>
-        <p:spPr>
-          <a:xfrm>
-            <a:off x="365760" y="1783080"/>
-            <a:ext cx="6035040" cy="4617720"/>
-          </a:xfrm>
-          <a:prstGeom prst="rect">
-            <a:avLst/>
-          </a:prstGeom>
-          <a:noFill/>
-          <a:ln/>
-        </p:spPr>
-        <p:txBody>
-          <a:bodyPr wrap="square" lIns="0" tIns="0" rIns="0" bIns="0" rtlCol="0" anchor="t"/>
-          <a:lstStyle/>
-          <a:p>
-            <a:pPr algn="l" indent="0" marL="0">
-              <a:spcAft>
-                <a:spcPts val="800"/>
-              </a:spcAft>
-              <a:buNone/>
-            </a:pPr>
-            <a:r>
-              <a:rPr lang="en-US" sz="2800" i="1" dirty="0">
-                <a:solidFill>
-                  <a:srgbClr val="111111"/>
-                </a:solidFill>
-                <a:latin typeface="Times New Roman" pitchFamily="34" charset="0"/>
-                <a:ea typeface="Times New Roman" pitchFamily="34" charset="-122"/>
-                <a:cs typeface="Times New Roman" pitchFamily="34" charset="-120"/>
-              </a:rPr>
-              <a:t>Two air masses control the seasons of Cameroon as follows:</a:t>
-            </a:r>
-            <a:endParaRPr lang="en-US" sz="2800" dirty="0"/>
-          </a:p>
-          <a:p>
-            <a:pPr algn="l" indent="0" marL="0">
-              <a:spcAft>
-                <a:spcPts val="800"/>
-              </a:spcAft>
-              <a:buNone/>
-            </a:pPr>
-            <a:r>
-              <a:rPr lang="en-US" sz="2800" b="1" dirty="0">
-                <a:solidFill>
-                  <a:srgbClr val="111111"/>
-                </a:solidFill>
-                <a:latin typeface="Times New Roman" pitchFamily="34" charset="0"/>
-                <a:ea typeface="Times New Roman" pitchFamily="34" charset="-122"/>
-                <a:cs typeface="Times New Roman" pitchFamily="34" charset="-120"/>
-              </a:rPr>
-              <a:t>Tropical continental air (cT): </a:t>
-            </a:r>
-            <a:pPr algn="l" indent="0" marL="0">
-              <a:spcAft>
-                <a:spcPts val="800"/>
-              </a:spcAft>
-              <a:buNone/>
-            </a:pPr>
-            <a:r>
-              <a:rPr lang="en-US" sz="2800" dirty="0">
-                <a:solidFill>
-                  <a:srgbClr val="111111"/>
-                </a:solidFill>
-                <a:latin typeface="Times New Roman" pitchFamily="34" charset="0"/>
-                <a:ea typeface="Times New Roman" pitchFamily="34" charset="-122"/>
-                <a:cs typeface="Times New Roman" pitchFamily="34" charset="-120"/>
-              </a:rPr>
-              <a:t>It forms over the Sahara and is hot by day, very dry, dusty and stable, blowing as the north-east Harmattan. It dominates the dry season in Garoua from about November to March, with sunshine, haze and low humidity.</a:t>
-            </a:r>
-            <a:endParaRPr lang="en-US" sz="2800" dirty="0"/>
-          </a:p>
-        </p:txBody>
-      </p:sp>
       <p:pic>
         <p:nvPicPr>
-          <p:cNvPr id="5" name="Image 0" descr="/home/claude/f4/img/v2/f2t_harmattan.jpg">    </p:cNvPr>
+          <p:cNvPr id="3" name="Image 0" descr="/home/claude/f4/img/minesec_sheet.png">    </p:cNvPr>
           <p:cNvPicPr>
             <a:picLocks noChangeAspect="1"/>
           </p:cNvPicPr>
@@ -19263,8 +19646,8 @@
         </p:blipFill>
         <p:spPr>
           <a:xfrm>
-            <a:off x="6537960" y="2400897"/>
-            <a:ext cx="5470855" cy="3034615"/>
+            <a:off x="0" y="658368"/>
+            <a:ext cx="2468880" cy="5833872"/>
           </a:xfrm>
           <a:prstGeom prst="rect">
             <a:avLst/>
@@ -19273,14 +19656,14 @@
       </p:pic>
       <p:sp>
         <p:nvSpPr>
-          <p:cNvPr id="6" name="Text 3"/>
+          <p:cNvPr id="4" name="Text 1"/>
           <p:cNvSpPr/>
           <p:nvPr/>
         </p:nvSpPr>
         <p:spPr>
           <a:xfrm>
-            <a:off x="6537960" y="6089904"/>
-            <a:ext cx="5470855" cy="347472"/>
+            <a:off x="2697480" y="1005840"/>
+            <a:ext cx="9174175" cy="731520"/>
           </a:xfrm>
           <a:prstGeom prst="rect">
             <a:avLst/>
@@ -19289,24 +19672,105 @@
           <a:ln/>
         </p:spPr>
         <p:txBody>
-          <a:bodyPr wrap="square" lIns="0" tIns="0" rIns="0" bIns="0" rtlCol="0" anchor="ctr"/>
+          <a:bodyPr wrap="square" lIns="0" tIns="0" rIns="0" bIns="0" rtlCol="0" anchor="ctr">
+            <a:normAutofit/>
+          </a:bodyPr>
           <a:lstStyle/>
           <a:p>
             <a:pPr algn="ctr" indent="0" marL="0">
               <a:buNone/>
             </a:pPr>
             <a:r>
-              <a:rPr lang="en-US" sz="1600" i="1" dirty="0">
-                <a:solidFill>
-                  <a:srgbClr val="555555"/>
+              <a:rPr lang="en-US" sz="3600" b="1" dirty="0">
+                <a:solidFill>
+                  <a:srgbClr val="990011"/>
                 </a:solidFill>
                 <a:latin typeface="Times New Roman" pitchFamily="34" charset="0"/>
                 <a:ea typeface="Times New Roman" pitchFamily="34" charset="-122"/>
                 <a:cs typeface="Times New Roman" pitchFamily="34" charset="-120"/>
               </a:rPr>
-              <a:t>Illustration: the Harmattan</a:t>
-            </a:r>
-            <a:endParaRPr lang="en-US" sz="1600" dirty="0"/>
+              <a:t>4. Types and Movements of Air Masses</a:t>
+            </a:r>
+            <a:endParaRPr lang="en-US" sz="3600" dirty="0"/>
+          </a:p>
+        </p:txBody>
+      </p:sp>
+      <p:sp>
+        <p:nvSpPr>
+          <p:cNvPr id="5" name="Text 2"/>
+          <p:cNvSpPr/>
+          <p:nvPr/>
+        </p:nvSpPr>
+        <p:spPr>
+          <a:xfrm>
+            <a:off x="2697480" y="1783080"/>
+            <a:ext cx="9174175" cy="4663440"/>
+          </a:xfrm>
+          <a:prstGeom prst="rect">
+            <a:avLst/>
+          </a:prstGeom>
+          <a:noFill/>
+          <a:ln/>
+        </p:spPr>
+        <p:txBody>
+          <a:bodyPr wrap="square" lIns="0" tIns="0" rIns="0" bIns="0" rtlCol="0" anchor="t"/>
+          <a:lstStyle/>
+          <a:p>
+            <a:pPr algn="l" indent="0" marL="0">
+              <a:spcAft>
+                <a:spcPts val="800"/>
+              </a:spcAft>
+              <a:buNone/>
+            </a:pPr>
+            <a:r>
+              <a:rPr lang="en-US" sz="4000" i="1" dirty="0">
+                <a:solidFill>
+                  <a:srgbClr val="111111"/>
+                </a:solidFill>
+                <a:latin typeface="Times New Roman" pitchFamily="34" charset="0"/>
+                <a:ea typeface="Times New Roman" pitchFamily="34" charset="-122"/>
+                <a:cs typeface="Times New Roman" pitchFamily="34" charset="-120"/>
+              </a:rPr>
+              <a:t>Air masses are of the following types and move as follows:</a:t>
+            </a:r>
+            <a:endParaRPr lang="en-US" sz="4000" dirty="0"/>
+          </a:p>
+          <a:p>
+            <a:pPr algn="l" indent="0" marL="0">
+              <a:spcAft>
+                <a:spcPts val="800"/>
+              </a:spcAft>
+              <a:buNone/>
+            </a:pPr>
+            <a:r>
+              <a:rPr lang="en-US" sz="4000" b="1" dirty="0">
+                <a:solidFill>
+                  <a:srgbClr val="111111"/>
+                </a:solidFill>
+                <a:latin typeface="Times New Roman" pitchFamily="34" charset="0"/>
+                <a:ea typeface="Times New Roman" pitchFamily="34" charset="-122"/>
+                <a:cs typeface="Times New Roman" pitchFamily="34" charset="-120"/>
+              </a:rPr>
+              <a:t>Warm air masses: </a:t>
+            </a:r>
+            <a:pPr algn="l" indent="0" marL="0">
+              <a:spcAft>
+                <a:spcPts val="800"/>
+              </a:spcAft>
+              <a:buNone/>
+            </a:pPr>
+            <a:r>
+              <a:rPr lang="en-US" sz="4000" dirty="0">
+                <a:solidFill>
+                  <a:srgbClr val="111111"/>
+                </a:solidFill>
+                <a:latin typeface="Times New Roman" pitchFamily="34" charset="0"/>
+                <a:ea typeface="Times New Roman" pitchFamily="34" charset="-122"/>
+                <a:cs typeface="Times New Roman" pitchFamily="34" charset="-120"/>
+              </a:rPr>
+              <a:t>A warm air mass is warmer than the surface it moves over, so it is cooled from below. It becomes stable and brings layer clouds, drizzle and fog.</a:t>
+            </a:r>
+            <a:endParaRPr lang="en-US" sz="4000" dirty="0"/>
           </a:p>
         </p:txBody>
       </p:sp>
@@ -19422,109 +19886,9 @@
           </a:p>
         </p:txBody>
       </p:sp>
-      <p:sp>
-        <p:nvSpPr>
-          <p:cNvPr id="3" name="Text 1"/>
-          <p:cNvSpPr/>
-          <p:nvPr/>
-        </p:nvSpPr>
-        <p:spPr>
-          <a:xfrm>
-            <a:off x="365760" y="1005840"/>
-            <a:ext cx="11460175" cy="731520"/>
-          </a:xfrm>
-          <a:prstGeom prst="rect">
-            <a:avLst/>
-          </a:prstGeom>
-          <a:noFill/>
-          <a:ln/>
-        </p:spPr>
-        <p:txBody>
-          <a:bodyPr wrap="square" lIns="0" tIns="0" rIns="0" bIns="0" rtlCol="0" anchor="ctr">
-            <a:normAutofit/>
-          </a:bodyPr>
-          <a:lstStyle/>
-          <a:p>
-            <a:pPr algn="ctr" indent="0" marL="0">
-              <a:buNone/>
-            </a:pPr>
-            <a:r>
-              <a:rPr lang="en-US" sz="3600" b="1" dirty="0">
-                <a:solidFill>
-                  <a:srgbClr val="990011"/>
-                </a:solidFill>
-                <a:latin typeface="Times New Roman" pitchFamily="34" charset="0"/>
-                <a:ea typeface="Times New Roman" pitchFamily="34" charset="-122"/>
-                <a:cs typeface="Times New Roman" pitchFamily="34" charset="-120"/>
-              </a:rPr>
-              <a:t>5. Air Masses Affecting Cameroon and West Africa</a:t>
-            </a:r>
-            <a:endParaRPr lang="en-US" sz="3600" dirty="0"/>
-          </a:p>
-        </p:txBody>
-      </p:sp>
-      <p:sp>
-        <p:nvSpPr>
-          <p:cNvPr id="4" name="Text 2"/>
-          <p:cNvSpPr/>
-          <p:nvPr/>
-        </p:nvSpPr>
-        <p:spPr>
-          <a:xfrm>
-            <a:off x="365760" y="1783080"/>
-            <a:ext cx="6035040" cy="4617720"/>
-          </a:xfrm>
-          <a:prstGeom prst="rect">
-            <a:avLst/>
-          </a:prstGeom>
-          <a:noFill/>
-          <a:ln/>
-        </p:spPr>
-        <p:txBody>
-          <a:bodyPr wrap="square" lIns="0" tIns="0" rIns="0" bIns="0" rtlCol="0" anchor="t"/>
-          <a:lstStyle/>
-          <a:p>
-            <a:pPr algn="l" indent="0" marL="0">
-              <a:spcAft>
-                <a:spcPts val="800"/>
-              </a:spcAft>
-              <a:buNone/>
-            </a:pPr>
-            <a:r>
-              <a:rPr lang="en-US" sz="3200" b="1" dirty="0">
-                <a:solidFill>
-                  <a:srgbClr val="111111"/>
-                </a:solidFill>
-                <a:latin typeface="Times New Roman" pitchFamily="34" charset="0"/>
-                <a:ea typeface="Times New Roman" pitchFamily="34" charset="-122"/>
-                <a:cs typeface="Times New Roman" pitchFamily="34" charset="-120"/>
-              </a:rPr>
-              <a:t>Tropical maritime air (mT): </a:t>
-            </a:r>
-            <a:pPr algn="l" indent="0" marL="0">
-              <a:spcAft>
-                <a:spcPts val="800"/>
-              </a:spcAft>
-              <a:buNone/>
-            </a:pPr>
-            <a:r>
-              <a:rPr lang="en-US" sz="3200" dirty="0">
-                <a:solidFill>
-                  <a:srgbClr val="111111"/>
-                </a:solidFill>
-                <a:latin typeface="Times New Roman" pitchFamily="34" charset="0"/>
-                <a:ea typeface="Times New Roman" pitchFamily="34" charset="-122"/>
-                <a:cs typeface="Times New Roman" pitchFamily="34" charset="-120"/>
-              </a:rPr>
-              <a:t>It forms over the South Atlantic Ocean around Saint Helena and is warm, very moist and unstable, blowing as the south-west monsoon. It brings the rainy season to Garoua from about May to October, with cumulonimbus clouds and storms.</a:t>
-            </a:r>
-            <a:endParaRPr lang="en-US" sz="3200" dirty="0"/>
-          </a:p>
-        </p:txBody>
-      </p:sp>
       <p:pic>
         <p:nvPicPr>
-          <p:cNvPr id="5" name="Image 0" descr="/home/claude/f4/img/v2/f4_heavyrain.jpg">    </p:cNvPr>
+          <p:cNvPr id="3" name="Image 0" descr="/home/claude/f4/img/minesec_sheet.png">    </p:cNvPr>
           <p:cNvPicPr>
             <a:picLocks noChangeAspect="1"/>
           </p:cNvPicPr>
@@ -19538,8 +19902,8 @@
         </p:blipFill>
         <p:spPr>
           <a:xfrm>
-            <a:off x="6537960" y="2400897"/>
-            <a:ext cx="5470855" cy="3034615"/>
+            <a:off x="0" y="658368"/>
+            <a:ext cx="5120640" cy="5833872"/>
           </a:xfrm>
           <a:prstGeom prst="rect">
             <a:avLst/>
@@ -19548,14 +19912,14 @@
       </p:pic>
       <p:sp>
         <p:nvSpPr>
-          <p:cNvPr id="6" name="Text 3"/>
+          <p:cNvPr id="4" name="Text 1"/>
           <p:cNvSpPr/>
           <p:nvPr/>
         </p:nvSpPr>
         <p:spPr>
           <a:xfrm>
-            <a:off x="6537960" y="6089904"/>
-            <a:ext cx="5470855" cy="347472"/>
+            <a:off x="5349240" y="1005840"/>
+            <a:ext cx="6522415" cy="731520"/>
           </a:xfrm>
           <a:prstGeom prst="rect">
             <a:avLst/>
@@ -19564,24 +19928,85 @@
           <a:ln/>
         </p:spPr>
         <p:txBody>
-          <a:bodyPr wrap="square" lIns="0" tIns="0" rIns="0" bIns="0" rtlCol="0" anchor="ctr"/>
+          <a:bodyPr wrap="square" lIns="0" tIns="0" rIns="0" bIns="0" rtlCol="0" anchor="ctr">
+            <a:normAutofit/>
+          </a:bodyPr>
           <a:lstStyle/>
           <a:p>
             <a:pPr algn="ctr" indent="0" marL="0">
               <a:buNone/>
             </a:pPr>
             <a:r>
-              <a:rPr lang="en-US" sz="1600" i="1" dirty="0">
-                <a:solidFill>
-                  <a:srgbClr val="555555"/>
+              <a:rPr lang="en-US" sz="3600" b="1" dirty="0">
+                <a:solidFill>
+                  <a:srgbClr val="990011"/>
                 </a:solidFill>
                 <a:latin typeface="Times New Roman" pitchFamily="34" charset="0"/>
                 <a:ea typeface="Times New Roman" pitchFamily="34" charset="-122"/>
                 <a:cs typeface="Times New Roman" pitchFamily="34" charset="-120"/>
               </a:rPr>
-              <a:t>Illustration: heavy rain</a:t>
-            </a:r>
-            <a:endParaRPr lang="en-US" sz="1600" dirty="0"/>
+              <a:t>4. Types and Movements of Air Masses</a:t>
+            </a:r>
+            <a:endParaRPr lang="en-US" sz="3600" dirty="0"/>
+          </a:p>
+        </p:txBody>
+      </p:sp>
+      <p:sp>
+        <p:nvSpPr>
+          <p:cNvPr id="5" name="Text 2"/>
+          <p:cNvSpPr/>
+          <p:nvPr/>
+        </p:nvSpPr>
+        <p:spPr>
+          <a:xfrm>
+            <a:off x="5349240" y="1783080"/>
+            <a:ext cx="6522415" cy="4663440"/>
+          </a:xfrm>
+          <a:prstGeom prst="rect">
+            <a:avLst/>
+          </a:prstGeom>
+          <a:noFill/>
+          <a:ln/>
+        </p:spPr>
+        <p:txBody>
+          <a:bodyPr wrap="square" lIns="0" tIns="0" rIns="0" bIns="0" rtlCol="0" anchor="t"/>
+          <a:lstStyle/>
+          <a:p>
+            <a:pPr algn="l" indent="0" marL="0">
+              <a:spcAft>
+                <a:spcPts val="800"/>
+              </a:spcAft>
+              <a:buNone/>
+            </a:pPr>
+            <a:r>
+              <a:rPr lang="en-US" sz="4000" b="1" dirty="0">
+                <a:solidFill>
+                  <a:srgbClr val="111111"/>
+                </a:solidFill>
+                <a:latin typeface="Times New Roman" pitchFamily="34" charset="0"/>
+                <a:ea typeface="Times New Roman" pitchFamily="34" charset="-122"/>
+                <a:cs typeface="Times New Roman" pitchFamily="34" charset="-120"/>
+              </a:rPr>
+              <a:t>Cold air masses: </a:t>
+            </a:r>
+            <a:pPr algn="l" indent="0" marL="0">
+              <a:spcAft>
+                <a:spcPts val="800"/>
+              </a:spcAft>
+              <a:buNone/>
+            </a:pPr>
+            <a:r>
+              <a:rPr lang="en-US" sz="4000" dirty="0">
+                <a:solidFill>
+                  <a:srgbClr val="111111"/>
+                </a:solidFill>
+                <a:latin typeface="Times New Roman" pitchFamily="34" charset="0"/>
+                <a:ea typeface="Times New Roman" pitchFamily="34" charset="-122"/>
+                <a:cs typeface="Times New Roman" pitchFamily="34" charset="-120"/>
+              </a:rPr>
+              <a:t>A cold air mass is colder than the surface it moves over, so it is heated from below. It becomes unstable and brings cumulus clouds and showers.</a:t>
+            </a:r>
+            <a:endParaRPr lang="en-US" sz="4000" dirty="0"/>
           </a:p>
         </p:txBody>
       </p:sp>
@@ -19697,109 +20122,9 @@
           </a:p>
         </p:txBody>
       </p:sp>
-      <p:sp>
-        <p:nvSpPr>
-          <p:cNvPr id="3" name="Text 1"/>
-          <p:cNvSpPr/>
-          <p:nvPr/>
-        </p:nvSpPr>
-        <p:spPr>
-          <a:xfrm>
-            <a:off x="365760" y="1005840"/>
-            <a:ext cx="11460175" cy="731520"/>
-          </a:xfrm>
-          <a:prstGeom prst="rect">
-            <a:avLst/>
-          </a:prstGeom>
-          <a:noFill/>
-          <a:ln/>
-        </p:spPr>
-        <p:txBody>
-          <a:bodyPr wrap="square" lIns="0" tIns="0" rIns="0" bIns="0" rtlCol="0" anchor="ctr">
-            <a:normAutofit/>
-          </a:bodyPr>
-          <a:lstStyle/>
-          <a:p>
-            <a:pPr algn="ctr" indent="0" marL="0">
-              <a:buNone/>
-            </a:pPr>
-            <a:r>
-              <a:rPr lang="en-US" sz="3600" b="1" dirty="0">
-                <a:solidFill>
-                  <a:srgbClr val="990011"/>
-                </a:solidFill>
-                <a:latin typeface="Times New Roman" pitchFamily="34" charset="0"/>
-                <a:ea typeface="Times New Roman" pitchFamily="34" charset="-122"/>
-                <a:cs typeface="Times New Roman" pitchFamily="34" charset="-120"/>
-              </a:rPr>
-              <a:t>5. Air Masses Affecting Cameroon and West Africa</a:t>
-            </a:r>
-            <a:endParaRPr lang="en-US" sz="3600" dirty="0"/>
-          </a:p>
-        </p:txBody>
-      </p:sp>
-      <p:sp>
-        <p:nvSpPr>
-          <p:cNvPr id="4" name="Text 2"/>
-          <p:cNvSpPr/>
-          <p:nvPr/>
-        </p:nvSpPr>
-        <p:spPr>
-          <a:xfrm>
-            <a:off x="365760" y="1783080"/>
-            <a:ext cx="6035040" cy="4617720"/>
-          </a:xfrm>
-          <a:prstGeom prst="rect">
-            <a:avLst/>
-          </a:prstGeom>
-          <a:noFill/>
-          <a:ln/>
-        </p:spPr>
-        <p:txBody>
-          <a:bodyPr wrap="square" lIns="0" tIns="0" rIns="0" bIns="0" rtlCol="0" anchor="t"/>
-          <a:lstStyle/>
-          <a:p>
-            <a:pPr algn="l" indent="0" marL="0">
-              <a:spcAft>
-                <a:spcPts val="800"/>
-              </a:spcAft>
-              <a:buNone/>
-            </a:pPr>
-            <a:r>
-              <a:rPr lang="en-US" sz="3200" b="1" dirty="0">
-                <a:solidFill>
-                  <a:srgbClr val="111111"/>
-                </a:solidFill>
-                <a:latin typeface="Times New Roman" pitchFamily="34" charset="0"/>
-                <a:ea typeface="Times New Roman" pitchFamily="34" charset="-122"/>
-                <a:cs typeface="Times New Roman" pitchFamily="34" charset="-120"/>
-              </a:rPr>
-              <a:t>The Intertropical Front (ITF): </a:t>
-            </a:r>
-            <a:pPr algn="l" indent="0" marL="0">
-              <a:spcAft>
-                <a:spcPts val="800"/>
-              </a:spcAft>
-              <a:buNone/>
-            </a:pPr>
-            <a:r>
-              <a:rPr lang="en-US" sz="3200" dirty="0">
-                <a:solidFill>
-                  <a:srgbClr val="111111"/>
-                </a:solidFill>
-                <a:latin typeface="Times New Roman" pitchFamily="34" charset="0"/>
-                <a:ea typeface="Times New Roman" pitchFamily="34" charset="-122"/>
-                <a:cs typeface="Times New Roman" pitchFamily="34" charset="-120"/>
-              </a:rPr>
-              <a:t>The two air masses meet along the ITF, which moves north in the northern summer and south in winter. Places south of the ITF receive rain, which explains why the rainy season is longer in the south of Cameroon than in the north.</a:t>
-            </a:r>
-            <a:endParaRPr lang="en-US" sz="3200" dirty="0"/>
-          </a:p>
-        </p:txBody>
-      </p:sp>
       <p:pic>
         <p:nvPicPr>
-          <p:cNvPr id="5" name="Image 0" descr="/home/claude/f4/img/v2/wa_airmasses_big.png">    </p:cNvPr>
+          <p:cNvPr id="3" name="Image 0" descr="/home/claude/f4/img/minesec_sheet.png">    </p:cNvPr>
           <p:cNvPicPr>
             <a:picLocks noChangeAspect="1"/>
           </p:cNvPicPr>
@@ -19813,8 +20138,8 @@
         </p:blipFill>
         <p:spPr>
           <a:xfrm>
-            <a:off x="6537960" y="2550490"/>
-            <a:ext cx="5470855" cy="2735428"/>
+            <a:off x="0" y="658368"/>
+            <a:ext cx="3840480" cy="5833872"/>
           </a:xfrm>
           <a:prstGeom prst="rect">
             <a:avLst/>
@@ -19823,14 +20148,14 @@
       </p:pic>
       <p:sp>
         <p:nvSpPr>
-          <p:cNvPr id="6" name="Text 3"/>
+          <p:cNvPr id="4" name="Text 1"/>
           <p:cNvSpPr/>
           <p:nvPr/>
         </p:nvSpPr>
         <p:spPr>
           <a:xfrm>
-            <a:off x="6537960" y="6089904"/>
-            <a:ext cx="5470855" cy="347472"/>
+            <a:off x="4069080" y="1005840"/>
+            <a:ext cx="7802575" cy="731520"/>
           </a:xfrm>
           <a:prstGeom prst="rect">
             <a:avLst/>
@@ -19839,24 +20164,85 @@
           <a:ln/>
         </p:spPr>
         <p:txBody>
-          <a:bodyPr wrap="square" lIns="0" tIns="0" rIns="0" bIns="0" rtlCol="0" anchor="ctr"/>
+          <a:bodyPr wrap="square" lIns="0" tIns="0" rIns="0" bIns="0" rtlCol="0" anchor="ctr">
+            <a:normAutofit/>
+          </a:bodyPr>
           <a:lstStyle/>
           <a:p>
             <a:pPr algn="ctr" indent="0" marL="0">
               <a:buNone/>
             </a:pPr>
             <a:r>
-              <a:rPr lang="en-US" sz="1600" i="1" dirty="0">
-                <a:solidFill>
-                  <a:srgbClr val="555555"/>
+              <a:rPr lang="en-US" sz="3600" b="1" dirty="0">
+                <a:solidFill>
+                  <a:srgbClr val="990011"/>
                 </a:solidFill>
                 <a:latin typeface="Times New Roman" pitchFamily="34" charset="0"/>
                 <a:ea typeface="Times New Roman" pitchFamily="34" charset="-122"/>
                 <a:cs typeface="Times New Roman" pitchFamily="34" charset="-120"/>
               </a:rPr>
-              <a:t>Illustration: the air masses of West Africa</a:t>
-            </a:r>
-            <a:endParaRPr lang="en-US" sz="1600" dirty="0"/>
+              <a:t>4. Types and Movements of Air Masses</a:t>
+            </a:r>
+            <a:endParaRPr lang="en-US" sz="3600" dirty="0"/>
+          </a:p>
+        </p:txBody>
+      </p:sp>
+      <p:sp>
+        <p:nvSpPr>
+          <p:cNvPr id="5" name="Text 2"/>
+          <p:cNvSpPr/>
+          <p:nvPr/>
+        </p:nvSpPr>
+        <p:spPr>
+          <a:xfrm>
+            <a:off x="4069080" y="1783080"/>
+            <a:ext cx="7802575" cy="4663440"/>
+          </a:xfrm>
+          <a:prstGeom prst="rect">
+            <a:avLst/>
+          </a:prstGeom>
+          <a:noFill/>
+          <a:ln/>
+        </p:spPr>
+        <p:txBody>
+          <a:bodyPr wrap="square" lIns="0" tIns="0" rIns="0" bIns="0" rtlCol="0" anchor="t"/>
+          <a:lstStyle/>
+          <a:p>
+            <a:pPr algn="l" indent="0" marL="0">
+              <a:spcAft>
+                <a:spcPts val="800"/>
+              </a:spcAft>
+              <a:buNone/>
+            </a:pPr>
+            <a:r>
+              <a:rPr lang="en-US" sz="4000" b="1" dirty="0">
+                <a:solidFill>
+                  <a:srgbClr val="111111"/>
+                </a:solidFill>
+                <a:latin typeface="Times New Roman" pitchFamily="34" charset="0"/>
+                <a:ea typeface="Times New Roman" pitchFamily="34" charset="-122"/>
+                <a:cs typeface="Times New Roman" pitchFamily="34" charset="-120"/>
+              </a:rPr>
+              <a:t>Seasonal movement: </a:t>
+            </a:r>
+            <a:pPr algn="l" indent="0" marL="0">
+              <a:spcAft>
+                <a:spcPts val="800"/>
+              </a:spcAft>
+              <a:buNone/>
+            </a:pPr>
+            <a:r>
+              <a:rPr lang="en-US" sz="4000" dirty="0">
+                <a:solidFill>
+                  <a:srgbClr val="111111"/>
+                </a:solidFill>
+                <a:latin typeface="Times New Roman" pitchFamily="34" charset="0"/>
+                <a:ea typeface="Times New Roman" pitchFamily="34" charset="-122"/>
+                <a:cs typeface="Times New Roman" pitchFamily="34" charset="-120"/>
+              </a:rPr>
+              <a:t>Air masses move with the pressure belts, which follow the overhead sun north and south during the year. As a result, each region is dominated by different air masses in different seasons.</a:t>
+            </a:r>
+            <a:endParaRPr lang="en-US" sz="4000" dirty="0"/>
           </a:p>
         </p:txBody>
       </p:sp>
@@ -19966,15 +20352,135 @@
                 <a:ea typeface="Calibri" pitchFamily="34" charset="-122"/>
                 <a:cs typeface="Calibri" pitchFamily="34" charset="-120"/>
               </a:rPr>
-              <a:t>FORMATIVE EVALUATION</a:t>
+              <a:t>BOARD SUMMARY</a:t>
             </a:r>
             <a:endParaRPr lang="en-US" sz="1400" dirty="0"/>
+          </a:p>
+        </p:txBody>
+      </p:sp>
+      <p:sp>
+        <p:nvSpPr>
+          <p:cNvPr id="3" name="Text 1"/>
+          <p:cNvSpPr/>
+          <p:nvPr/>
+        </p:nvSpPr>
+        <p:spPr>
+          <a:xfrm>
+            <a:off x="365760" y="1005840"/>
+            <a:ext cx="11460175" cy="731520"/>
+          </a:xfrm>
+          <a:prstGeom prst="rect">
+            <a:avLst/>
+          </a:prstGeom>
+          <a:noFill/>
+          <a:ln/>
+        </p:spPr>
+        <p:txBody>
+          <a:bodyPr wrap="square" lIns="0" tIns="0" rIns="0" bIns="0" rtlCol="0" anchor="ctr">
+            <a:normAutofit/>
+          </a:bodyPr>
+          <a:lstStyle/>
+          <a:p>
+            <a:pPr algn="ctr" indent="0" marL="0">
+              <a:buNone/>
+            </a:pPr>
+            <a:r>
+              <a:rPr lang="en-US" sz="3600" b="1" dirty="0">
+                <a:solidFill>
+                  <a:srgbClr val="990011"/>
+                </a:solidFill>
+                <a:latin typeface="Times New Roman" pitchFamily="34" charset="0"/>
+                <a:ea typeface="Times New Roman" pitchFamily="34" charset="-122"/>
+                <a:cs typeface="Times New Roman" pitchFamily="34" charset="-120"/>
+              </a:rPr>
+              <a:t>5. Air Masses Affecting Cameroon and West Africa</a:t>
+            </a:r>
+            <a:endParaRPr lang="en-US" sz="3600" dirty="0"/>
+          </a:p>
+        </p:txBody>
+      </p:sp>
+      <p:sp>
+        <p:nvSpPr>
+          <p:cNvPr id="4" name="Text 2"/>
+          <p:cNvSpPr/>
+          <p:nvPr/>
+        </p:nvSpPr>
+        <p:spPr>
+          <a:xfrm>
+            <a:off x="365760" y="1783080"/>
+            <a:ext cx="6035040" cy="4617720"/>
+          </a:xfrm>
+          <a:prstGeom prst="rect">
+            <a:avLst/>
+          </a:prstGeom>
+          <a:noFill/>
+          <a:ln/>
+        </p:spPr>
+        <p:txBody>
+          <a:bodyPr wrap="square" lIns="0" tIns="0" rIns="0" bIns="0" rtlCol="0" anchor="t"/>
+          <a:lstStyle/>
+          <a:p>
+            <a:pPr algn="l" indent="0" marL="0">
+              <a:spcAft>
+                <a:spcPts val="800"/>
+              </a:spcAft>
+              <a:buNone/>
+            </a:pPr>
+            <a:r>
+              <a:rPr lang="en-US" sz="2800" i="1" dirty="0">
+                <a:solidFill>
+                  <a:srgbClr val="111111"/>
+                </a:solidFill>
+                <a:latin typeface="Times New Roman" pitchFamily="34" charset="0"/>
+                <a:ea typeface="Times New Roman" pitchFamily="34" charset="-122"/>
+                <a:cs typeface="Times New Roman" pitchFamily="34" charset="-120"/>
+              </a:rPr>
+              <a:t>Two air masses control the seasons of Cameroon as follows:</a:t>
+            </a:r>
+            <a:endParaRPr lang="en-US" sz="2800" dirty="0"/>
+          </a:p>
+          <a:p>
+            <a:pPr algn="l" indent="0" marL="0">
+              <a:spcAft>
+                <a:spcPts val="800"/>
+              </a:spcAft>
+              <a:buNone/>
+            </a:pPr>
+            <a:r>
+              <a:rPr lang="en-US" sz="2800" b="1" dirty="0">
+                <a:solidFill>
+                  <a:srgbClr val="111111"/>
+                </a:solidFill>
+                <a:latin typeface="Times New Roman" pitchFamily="34" charset="0"/>
+                <a:ea typeface="Times New Roman" pitchFamily="34" charset="-122"/>
+                <a:cs typeface="Times New Roman" pitchFamily="34" charset="-120"/>
+              </a:rPr>
+              <a:t>Tropical continental air (cT): </a:t>
+            </a:r>
+            <a:pPr algn="l" indent="0" marL="0">
+              <a:spcAft>
+                <a:spcPts val="800"/>
+              </a:spcAft>
+              <a:buNone/>
+            </a:pPr>
+            <a:r>
+              <a:rPr lang="en-US" sz="2800" dirty="0">
+                <a:solidFill>
+                  <a:srgbClr val="111111"/>
+                </a:solidFill>
+                <a:latin typeface="Times New Roman" pitchFamily="34" charset="0"/>
+                <a:ea typeface="Times New Roman" pitchFamily="34" charset="-122"/>
+                <a:cs typeface="Times New Roman" pitchFamily="34" charset="-120"/>
+              </a:rPr>
+              <a:t>It forms over the Sahara and is hot by day, very dry, dusty and stable, blowing as the north-east Harmattan. It dominates the dry season in Garoua from about November to March, with sunshine, haze and low humidity.</a:t>
+            </a:r>
+            <a:endParaRPr lang="en-US" sz="2800" dirty="0"/>
           </a:p>
         </p:txBody>
       </p:sp>
       <p:pic>
         <p:nvPicPr>
-          <p:cNvPr id="3" name="Image 0" descr="/home/claude/f4/img/minesec_sheet.png">    </p:cNvPr>
+          <p:cNvPr id="5" name="Image 0" descr="/home/claude/f4/img/v2/f2t_harmattan.jpg">    </p:cNvPr>
           <p:cNvPicPr>
             <a:picLocks noChangeAspect="1"/>
           </p:cNvPicPr>
@@ -19988,8 +20494,8 @@
         </p:blipFill>
         <p:spPr>
           <a:xfrm>
-            <a:off x="0" y="658368"/>
-            <a:ext cx="5120640" cy="5833872"/>
+            <a:off x="6537960" y="2400897"/>
+            <a:ext cx="5470855" cy="3034615"/>
           </a:xfrm>
           <a:prstGeom prst="rect">
             <a:avLst/>
@@ -19998,14 +20504,14 @@
       </p:pic>
       <p:sp>
         <p:nvSpPr>
-          <p:cNvPr id="4" name="Text 1"/>
+          <p:cNvPr id="6" name="Text 3"/>
           <p:cNvSpPr/>
           <p:nvPr/>
         </p:nvSpPr>
         <p:spPr>
           <a:xfrm>
-            <a:off x="5349240" y="1005840"/>
-            <a:ext cx="6522415" cy="731520"/>
+            <a:off x="6537960" y="6089904"/>
+            <a:ext cx="5470855" cy="347472"/>
           </a:xfrm>
           <a:prstGeom prst="rect">
             <a:avLst/>
@@ -20014,68 +20520,24 @@
           <a:ln/>
         </p:spPr>
         <p:txBody>
-          <a:bodyPr wrap="square" lIns="0" tIns="0" rIns="0" bIns="0" rtlCol="0" anchor="ctr">
-            <a:normAutofit/>
-          </a:bodyPr>
+          <a:bodyPr wrap="square" lIns="0" tIns="0" rIns="0" bIns="0" rtlCol="0" anchor="ctr"/>
           <a:lstStyle/>
           <a:p>
             <a:pPr algn="ctr" indent="0" marL="0">
               <a:buNone/>
             </a:pPr>
             <a:r>
-              <a:rPr lang="en-US" sz="3600" b="1" dirty="0">
-                <a:solidFill>
-                  <a:srgbClr val="990011"/>
+              <a:rPr lang="en-US" sz="1600" i="1" dirty="0">
+                <a:solidFill>
+                  <a:srgbClr val="555555"/>
                 </a:solidFill>
                 <a:latin typeface="Times New Roman" pitchFamily="34" charset="0"/>
                 <a:ea typeface="Times New Roman" pitchFamily="34" charset="-122"/>
                 <a:cs typeface="Times New Roman" pitchFamily="34" charset="-120"/>
               </a:rPr>
-              <a:t>Evaluation 1</a:t>
-            </a:r>
-            <a:endParaRPr lang="en-US" sz="3600" dirty="0"/>
-          </a:p>
-        </p:txBody>
-      </p:sp>
-      <p:sp>
-        <p:nvSpPr>
-          <p:cNvPr id="5" name="Text 2"/>
-          <p:cNvSpPr/>
-          <p:nvPr/>
-        </p:nvSpPr>
-        <p:spPr>
-          <a:xfrm>
-            <a:off x="5349240" y="1783080"/>
-            <a:ext cx="6522415" cy="4663440"/>
-          </a:xfrm>
-          <a:prstGeom prst="rect">
-            <a:avLst/>
-          </a:prstGeom>
-          <a:noFill/>
-          <a:ln/>
-        </p:spPr>
-        <p:txBody>
-          <a:bodyPr wrap="square" lIns="0" tIns="0" rIns="0" bIns="0" rtlCol="0" anchor="t"/>
-          <a:lstStyle/>
-          <a:p>
-            <a:pPr algn="l" indent="0" marL="0">
-              <a:spcAft>
-                <a:spcPts val="800"/>
-              </a:spcAft>
-              <a:buNone/>
-            </a:pPr>
-            <a:r>
-              <a:rPr lang="en-US" sz="4000" dirty="0">
-                <a:solidFill>
-                  <a:srgbClr val="111111"/>
-                </a:solidFill>
-                <a:latin typeface="Times New Roman" pitchFamily="34" charset="0"/>
-                <a:ea typeface="Times New Roman" pitchFamily="34" charset="-122"/>
-                <a:cs typeface="Times New Roman" pitchFamily="34" charset="-120"/>
-              </a:rPr>
-              <a:t>Distinguish a continental air mass from a maritime air mass.</a:t>
-            </a:r>
-            <a:endParaRPr lang="en-US" sz="4000" dirty="0"/>
+              <a:t>Illustration: the Harmattan</a:t>
+            </a:r>
+            <a:endParaRPr lang="en-US" sz="1600" dirty="0"/>
           </a:p>
         </p:txBody>
       </p:sp>
@@ -20185,15 +20647,115 @@
                 <a:ea typeface="Calibri" pitchFamily="34" charset="-122"/>
                 <a:cs typeface="Calibri" pitchFamily="34" charset="-120"/>
               </a:rPr>
-              <a:t>FORMATIVE EVALUATION</a:t>
+              <a:t>BOARD SUMMARY</a:t>
             </a:r>
             <a:endParaRPr lang="en-US" sz="1400" dirty="0"/>
+          </a:p>
+        </p:txBody>
+      </p:sp>
+      <p:sp>
+        <p:nvSpPr>
+          <p:cNvPr id="3" name="Text 1"/>
+          <p:cNvSpPr/>
+          <p:nvPr/>
+        </p:nvSpPr>
+        <p:spPr>
+          <a:xfrm>
+            <a:off x="365760" y="1005840"/>
+            <a:ext cx="11460175" cy="731520"/>
+          </a:xfrm>
+          <a:prstGeom prst="rect">
+            <a:avLst/>
+          </a:prstGeom>
+          <a:noFill/>
+          <a:ln/>
+        </p:spPr>
+        <p:txBody>
+          <a:bodyPr wrap="square" lIns="0" tIns="0" rIns="0" bIns="0" rtlCol="0" anchor="ctr">
+            <a:normAutofit/>
+          </a:bodyPr>
+          <a:lstStyle/>
+          <a:p>
+            <a:pPr algn="ctr" indent="0" marL="0">
+              <a:buNone/>
+            </a:pPr>
+            <a:r>
+              <a:rPr lang="en-US" sz="3600" b="1" dirty="0">
+                <a:solidFill>
+                  <a:srgbClr val="990011"/>
+                </a:solidFill>
+                <a:latin typeface="Times New Roman" pitchFamily="34" charset="0"/>
+                <a:ea typeface="Times New Roman" pitchFamily="34" charset="-122"/>
+                <a:cs typeface="Times New Roman" pitchFamily="34" charset="-120"/>
+              </a:rPr>
+              <a:t>5. Air Masses Affecting Cameroon and West Africa</a:t>
+            </a:r>
+            <a:endParaRPr lang="en-US" sz="3600" dirty="0"/>
+          </a:p>
+        </p:txBody>
+      </p:sp>
+      <p:sp>
+        <p:nvSpPr>
+          <p:cNvPr id="4" name="Text 2"/>
+          <p:cNvSpPr/>
+          <p:nvPr/>
+        </p:nvSpPr>
+        <p:spPr>
+          <a:xfrm>
+            <a:off x="365760" y="1783080"/>
+            <a:ext cx="6035040" cy="4617720"/>
+          </a:xfrm>
+          <a:prstGeom prst="rect">
+            <a:avLst/>
+          </a:prstGeom>
+          <a:noFill/>
+          <a:ln/>
+        </p:spPr>
+        <p:txBody>
+          <a:bodyPr wrap="square" lIns="0" tIns="0" rIns="0" bIns="0" rtlCol="0" anchor="t"/>
+          <a:lstStyle/>
+          <a:p>
+            <a:pPr algn="l" indent="0" marL="0">
+              <a:spcAft>
+                <a:spcPts val="800"/>
+              </a:spcAft>
+              <a:buNone/>
+            </a:pPr>
+            <a:r>
+              <a:rPr lang="en-US" sz="3200" b="1" dirty="0">
+                <a:solidFill>
+                  <a:srgbClr val="111111"/>
+                </a:solidFill>
+                <a:latin typeface="Times New Roman" pitchFamily="34" charset="0"/>
+                <a:ea typeface="Times New Roman" pitchFamily="34" charset="-122"/>
+                <a:cs typeface="Times New Roman" pitchFamily="34" charset="-120"/>
+              </a:rPr>
+              <a:t>Tropical maritime air (mT): </a:t>
+            </a:r>
+            <a:pPr algn="l" indent="0" marL="0">
+              <a:spcAft>
+                <a:spcPts val="800"/>
+              </a:spcAft>
+              <a:buNone/>
+            </a:pPr>
+            <a:r>
+              <a:rPr lang="en-US" sz="3200" dirty="0">
+                <a:solidFill>
+                  <a:srgbClr val="111111"/>
+                </a:solidFill>
+                <a:latin typeface="Times New Roman" pitchFamily="34" charset="0"/>
+                <a:ea typeface="Times New Roman" pitchFamily="34" charset="-122"/>
+                <a:cs typeface="Times New Roman" pitchFamily="34" charset="-120"/>
+              </a:rPr>
+              <a:t>It forms over the South Atlantic Ocean around Saint Helena and is warm, very moist and unstable, blowing as the south-west monsoon. It brings the rainy season to Garoua from about May to October, with cumulonimbus clouds and storms.</a:t>
+            </a:r>
+            <a:endParaRPr lang="en-US" sz="3200" dirty="0"/>
           </a:p>
         </p:txBody>
       </p:sp>
       <p:pic>
         <p:nvPicPr>
-          <p:cNvPr id="3" name="Image 0" descr="/home/claude/f4/img/minesec_sheet.png">    </p:cNvPr>
+          <p:cNvPr id="5" name="Image 0" descr="/home/claude/f4/img/v2/f4_heavyrain.jpg">    </p:cNvPr>
           <p:cNvPicPr>
             <a:picLocks noChangeAspect="1"/>
           </p:cNvPicPr>
@@ -20207,8 +20769,8 @@
         </p:blipFill>
         <p:spPr>
           <a:xfrm>
-            <a:off x="0" y="658368"/>
-            <a:ext cx="5120640" cy="5833872"/>
+            <a:off x="6537960" y="2400897"/>
+            <a:ext cx="5470855" cy="3034615"/>
           </a:xfrm>
           <a:prstGeom prst="rect">
             <a:avLst/>
@@ -20217,14 +20779,14 @@
       </p:pic>
       <p:sp>
         <p:nvSpPr>
-          <p:cNvPr id="4" name="Text 1"/>
+          <p:cNvPr id="6" name="Text 3"/>
           <p:cNvSpPr/>
           <p:nvPr/>
         </p:nvSpPr>
         <p:spPr>
           <a:xfrm>
-            <a:off x="5349240" y="1005840"/>
-            <a:ext cx="6522415" cy="731520"/>
+            <a:off x="6537960" y="6089904"/>
+            <a:ext cx="5470855" cy="347472"/>
           </a:xfrm>
           <a:prstGeom prst="rect">
             <a:avLst/>
@@ -20233,68 +20795,24 @@
           <a:ln/>
         </p:spPr>
         <p:txBody>
-          <a:bodyPr wrap="square" lIns="0" tIns="0" rIns="0" bIns="0" rtlCol="0" anchor="ctr">
-            <a:normAutofit/>
-          </a:bodyPr>
+          <a:bodyPr wrap="square" lIns="0" tIns="0" rIns="0" bIns="0" rtlCol="0" anchor="ctr"/>
           <a:lstStyle/>
           <a:p>
             <a:pPr algn="ctr" indent="0" marL="0">
               <a:buNone/>
             </a:pPr>
             <a:r>
-              <a:rPr lang="en-US" sz="3600" b="1" dirty="0">
-                <a:solidFill>
-                  <a:srgbClr val="990011"/>
+              <a:rPr lang="en-US" sz="1600" i="1" dirty="0">
+                <a:solidFill>
+                  <a:srgbClr val="555555"/>
                 </a:solidFill>
                 <a:latin typeface="Times New Roman" pitchFamily="34" charset="0"/>
                 <a:ea typeface="Times New Roman" pitchFamily="34" charset="-122"/>
                 <a:cs typeface="Times New Roman" pitchFamily="34" charset="-120"/>
               </a:rPr>
-              <a:t>Expected Answer</a:t>
-            </a:r>
-            <a:endParaRPr lang="en-US" sz="3600" dirty="0"/>
-          </a:p>
-        </p:txBody>
-      </p:sp>
-      <p:sp>
-        <p:nvSpPr>
-          <p:cNvPr id="5" name="Text 2"/>
-          <p:cNvSpPr/>
-          <p:nvPr/>
-        </p:nvSpPr>
-        <p:spPr>
-          <a:xfrm>
-            <a:off x="5349240" y="1783080"/>
-            <a:ext cx="6522415" cy="4663440"/>
-          </a:xfrm>
-          <a:prstGeom prst="rect">
-            <a:avLst/>
-          </a:prstGeom>
-          <a:noFill/>
-          <a:ln/>
-        </p:spPr>
-        <p:txBody>
-          <a:bodyPr wrap="square" lIns="0" tIns="0" rIns="0" bIns="0" rtlCol="0" anchor="t"/>
-          <a:lstStyle/>
-          <a:p>
-            <a:pPr algn="l" indent="0" marL="0">
-              <a:spcAft>
-                <a:spcPts val="800"/>
-              </a:spcAft>
-              <a:buNone/>
-            </a:pPr>
-            <a:r>
-              <a:rPr lang="en-US" sz="4000" dirty="0">
-                <a:solidFill>
-                  <a:srgbClr val="111111"/>
-                </a:solidFill>
-                <a:latin typeface="Times New Roman" pitchFamily="34" charset="0"/>
-                <a:ea typeface="Times New Roman" pitchFamily="34" charset="-122"/>
-                <a:cs typeface="Times New Roman" pitchFamily="34" charset="-120"/>
-              </a:rPr>
-              <a:t>A continental air mass forms over land and is dry; a maritime air mass forms over the sea and is moist.</a:t>
-            </a:r>
-            <a:endParaRPr lang="en-US" sz="4000" dirty="0"/>
+              <a:t>Illustration: heavy rain</a:t>
+            </a:r>
+            <a:endParaRPr lang="en-US" sz="1600" dirty="0"/>
           </a:p>
         </p:txBody>
       </p:sp>
@@ -20404,15 +20922,115 @@
                 <a:ea typeface="Calibri" pitchFamily="34" charset="-122"/>
                 <a:cs typeface="Calibri" pitchFamily="34" charset="-120"/>
               </a:rPr>
-              <a:t>FORMATIVE EVALUATION</a:t>
+              <a:t>BOARD SUMMARY</a:t>
             </a:r>
             <a:endParaRPr lang="en-US" sz="1400" dirty="0"/>
+          </a:p>
+        </p:txBody>
+      </p:sp>
+      <p:sp>
+        <p:nvSpPr>
+          <p:cNvPr id="3" name="Text 1"/>
+          <p:cNvSpPr/>
+          <p:nvPr/>
+        </p:nvSpPr>
+        <p:spPr>
+          <a:xfrm>
+            <a:off x="365760" y="1005840"/>
+            <a:ext cx="11460175" cy="731520"/>
+          </a:xfrm>
+          <a:prstGeom prst="rect">
+            <a:avLst/>
+          </a:prstGeom>
+          <a:noFill/>
+          <a:ln/>
+        </p:spPr>
+        <p:txBody>
+          <a:bodyPr wrap="square" lIns="0" tIns="0" rIns="0" bIns="0" rtlCol="0" anchor="ctr">
+            <a:normAutofit/>
+          </a:bodyPr>
+          <a:lstStyle/>
+          <a:p>
+            <a:pPr algn="ctr" indent="0" marL="0">
+              <a:buNone/>
+            </a:pPr>
+            <a:r>
+              <a:rPr lang="en-US" sz="3600" b="1" dirty="0">
+                <a:solidFill>
+                  <a:srgbClr val="990011"/>
+                </a:solidFill>
+                <a:latin typeface="Times New Roman" pitchFamily="34" charset="0"/>
+                <a:ea typeface="Times New Roman" pitchFamily="34" charset="-122"/>
+                <a:cs typeface="Times New Roman" pitchFamily="34" charset="-120"/>
+              </a:rPr>
+              <a:t>5. Air Masses Affecting Cameroon and West Africa</a:t>
+            </a:r>
+            <a:endParaRPr lang="en-US" sz="3600" dirty="0"/>
+          </a:p>
+        </p:txBody>
+      </p:sp>
+      <p:sp>
+        <p:nvSpPr>
+          <p:cNvPr id="4" name="Text 2"/>
+          <p:cNvSpPr/>
+          <p:nvPr/>
+        </p:nvSpPr>
+        <p:spPr>
+          <a:xfrm>
+            <a:off x="365760" y="1783080"/>
+            <a:ext cx="6035040" cy="4617720"/>
+          </a:xfrm>
+          <a:prstGeom prst="rect">
+            <a:avLst/>
+          </a:prstGeom>
+          <a:noFill/>
+          <a:ln/>
+        </p:spPr>
+        <p:txBody>
+          <a:bodyPr wrap="square" lIns="0" tIns="0" rIns="0" bIns="0" rtlCol="0" anchor="t"/>
+          <a:lstStyle/>
+          <a:p>
+            <a:pPr algn="l" indent="0" marL="0">
+              <a:spcAft>
+                <a:spcPts val="800"/>
+              </a:spcAft>
+              <a:buNone/>
+            </a:pPr>
+            <a:r>
+              <a:rPr lang="en-US" sz="3200" b="1" dirty="0">
+                <a:solidFill>
+                  <a:srgbClr val="111111"/>
+                </a:solidFill>
+                <a:latin typeface="Times New Roman" pitchFamily="34" charset="0"/>
+                <a:ea typeface="Times New Roman" pitchFamily="34" charset="-122"/>
+                <a:cs typeface="Times New Roman" pitchFamily="34" charset="-120"/>
+              </a:rPr>
+              <a:t>The Intertropical Front (ITF): </a:t>
+            </a:r>
+            <a:pPr algn="l" indent="0" marL="0">
+              <a:spcAft>
+                <a:spcPts val="800"/>
+              </a:spcAft>
+              <a:buNone/>
+            </a:pPr>
+            <a:r>
+              <a:rPr lang="en-US" sz="3200" dirty="0">
+                <a:solidFill>
+                  <a:srgbClr val="111111"/>
+                </a:solidFill>
+                <a:latin typeface="Times New Roman" pitchFamily="34" charset="0"/>
+                <a:ea typeface="Times New Roman" pitchFamily="34" charset="-122"/>
+                <a:cs typeface="Times New Roman" pitchFamily="34" charset="-120"/>
+              </a:rPr>
+              <a:t>The two air masses meet along the ITF, which moves north in the northern summer and south in winter. Places south of the ITF receive rain, which explains why the rainy season is longer in the south of Cameroon than in the north.</a:t>
+            </a:r>
+            <a:endParaRPr lang="en-US" sz="3200" dirty="0"/>
           </a:p>
         </p:txBody>
       </p:sp>
       <p:pic>
         <p:nvPicPr>
-          <p:cNvPr id="3" name="Image 0" descr="/home/claude/f4/img/minesec_sheet.png">    </p:cNvPr>
+          <p:cNvPr id="5" name="Image 0" descr="/home/claude/f4/img/v2/wa_airmasses_big.png">    </p:cNvPr>
           <p:cNvPicPr>
             <a:picLocks noChangeAspect="1"/>
           </p:cNvPicPr>
@@ -20426,8 +21044,8 @@
         </p:blipFill>
         <p:spPr>
           <a:xfrm>
-            <a:off x="0" y="658368"/>
-            <a:ext cx="5120640" cy="5833872"/>
+            <a:off x="6537960" y="2550490"/>
+            <a:ext cx="5470855" cy="2735428"/>
           </a:xfrm>
           <a:prstGeom prst="rect">
             <a:avLst/>
@@ -20436,14 +21054,14 @@
       </p:pic>
       <p:sp>
         <p:nvSpPr>
-          <p:cNvPr id="4" name="Text 1"/>
+          <p:cNvPr id="6" name="Text 3"/>
           <p:cNvSpPr/>
           <p:nvPr/>
         </p:nvSpPr>
         <p:spPr>
           <a:xfrm>
-            <a:off x="5349240" y="1005840"/>
-            <a:ext cx="6522415" cy="731520"/>
+            <a:off x="6537960" y="6089904"/>
+            <a:ext cx="5470855" cy="347472"/>
           </a:xfrm>
           <a:prstGeom prst="rect">
             <a:avLst/>
@@ -20452,68 +21070,24 @@
           <a:ln/>
         </p:spPr>
         <p:txBody>
-          <a:bodyPr wrap="square" lIns="0" tIns="0" rIns="0" bIns="0" rtlCol="0" anchor="ctr">
-            <a:normAutofit/>
-          </a:bodyPr>
+          <a:bodyPr wrap="square" lIns="0" tIns="0" rIns="0" bIns="0" rtlCol="0" anchor="ctr"/>
           <a:lstStyle/>
           <a:p>
             <a:pPr algn="ctr" indent="0" marL="0">
               <a:buNone/>
             </a:pPr>
             <a:r>
-              <a:rPr lang="en-US" sz="3600" b="1" dirty="0">
-                <a:solidFill>
-                  <a:srgbClr val="990011"/>
+              <a:rPr lang="en-US" sz="1600" i="1" dirty="0">
+                <a:solidFill>
+                  <a:srgbClr val="555555"/>
                 </a:solidFill>
                 <a:latin typeface="Times New Roman" pitchFamily="34" charset="0"/>
                 <a:ea typeface="Times New Roman" pitchFamily="34" charset="-122"/>
                 <a:cs typeface="Times New Roman" pitchFamily="34" charset="-120"/>
               </a:rPr>
-              <a:t>Evaluation 2</a:t>
-            </a:r>
-            <a:endParaRPr lang="en-US" sz="3600" dirty="0"/>
-          </a:p>
-        </p:txBody>
-      </p:sp>
-      <p:sp>
-        <p:nvSpPr>
-          <p:cNvPr id="5" name="Text 2"/>
-          <p:cNvSpPr/>
-          <p:nvPr/>
-        </p:nvSpPr>
-        <p:spPr>
-          <a:xfrm>
-            <a:off x="5349240" y="1783080"/>
-            <a:ext cx="6522415" cy="4663440"/>
-          </a:xfrm>
-          <a:prstGeom prst="rect">
-            <a:avLst/>
-          </a:prstGeom>
-          <a:noFill/>
-          <a:ln/>
-        </p:spPr>
-        <p:txBody>
-          <a:bodyPr wrap="square" lIns="0" tIns="0" rIns="0" bIns="0" rtlCol="0" anchor="t"/>
-          <a:lstStyle/>
-          <a:p>
-            <a:pPr algn="l" indent="0" marL="0">
-              <a:spcAft>
-                <a:spcPts val="800"/>
-              </a:spcAft>
-              <a:buNone/>
-            </a:pPr>
-            <a:r>
-              <a:rPr lang="en-US" sz="4000" dirty="0">
-                <a:solidFill>
-                  <a:srgbClr val="111111"/>
-                </a:solidFill>
-                <a:latin typeface="Times New Roman" pitchFamily="34" charset="0"/>
-                <a:ea typeface="Times New Roman" pitchFamily="34" charset="-122"/>
-                <a:cs typeface="Times New Roman" pitchFamily="34" charset="-120"/>
-              </a:rPr>
-              <a:t>Which air mass brings the rainy season to Garoua, and why?</a:t>
-            </a:r>
-            <a:endParaRPr lang="en-US" sz="4000" dirty="0"/>
+              <a:t>Illustration: the air masses of West Africa</a:t>
+            </a:r>
+            <a:endParaRPr lang="en-US" sz="1600" dirty="0"/>
           </a:p>
         </p:txBody>
       </p:sp>
@@ -20688,7 +21262,7 @@
                 <a:ea typeface="Times New Roman" pitchFamily="34" charset="-122"/>
                 <a:cs typeface="Times New Roman" pitchFamily="34" charset="-120"/>
               </a:rPr>
-              <a:t>Expected Answer</a:t>
+              <a:t>Evaluation 1</a:t>
             </a:r>
             <a:endParaRPr lang="en-US" sz="3600" dirty="0"/>
           </a:p>
@@ -20730,7 +21304,7 @@
                 <a:ea typeface="Times New Roman" pitchFamily="34" charset="-122"/>
                 <a:cs typeface="Times New Roman" pitchFamily="34" charset="-120"/>
               </a:rPr>
-              <a:t>The tropical maritime (mT) air mass, because it is moist and unstable.</a:t>
+              <a:t>Distinguish a continental air mass from a maritime air mass.</a:t>
             </a:r>
             <a:endParaRPr lang="en-US" sz="4000" dirty="0"/>
           </a:p>
@@ -20842,7 +21416,7 @@
                 <a:ea typeface="Calibri" pitchFamily="34" charset="-122"/>
                 <a:cs typeface="Calibri" pitchFamily="34" charset="-120"/>
               </a:rPr>
-              <a:t>REMEDIATION</a:t>
+              <a:t>FORMATIVE EVALUATION</a:t>
             </a:r>
             <a:endParaRPr lang="en-US" sz="1400" dirty="0"/>
           </a:p>
@@ -20865,7 +21439,7 @@
         <p:spPr>
           <a:xfrm>
             <a:off x="0" y="658368"/>
-            <a:ext cx="2468880" cy="5833872"/>
+            <a:ext cx="5120640" cy="5833872"/>
           </a:xfrm>
           <a:prstGeom prst="rect">
             <a:avLst/>
@@ -20880,8 +21454,8 @@
         </p:nvSpPr>
         <p:spPr>
           <a:xfrm>
-            <a:off x="2697480" y="1005840"/>
-            <a:ext cx="9174175" cy="731520"/>
+            <a:off x="5349240" y="1005840"/>
+            <a:ext cx="6522415" cy="731520"/>
           </a:xfrm>
           <a:prstGeom prst="rect">
             <a:avLst/>
@@ -20907,7 +21481,7 @@
                 <a:ea typeface="Times New Roman" pitchFamily="34" charset="-122"/>
                 <a:cs typeface="Times New Roman" pitchFamily="34" charset="-120"/>
               </a:rPr>
-              <a:t>Remediation</a:t>
+              <a:t>Expected Answer</a:t>
             </a:r>
             <a:endParaRPr lang="en-US" sz="3600" dirty="0"/>
           </a:p>
@@ -20921,8 +21495,8 @@
         </p:nvSpPr>
         <p:spPr>
           <a:xfrm>
-            <a:off x="2697480" y="1783080"/>
-            <a:ext cx="9174175" cy="4663440"/>
+            <a:off x="5349240" y="1783080"/>
+            <a:ext cx="6522415" cy="4663440"/>
           </a:xfrm>
           <a:prstGeom prst="rect">
             <a:avLst/>
@@ -20941,7 +21515,7 @@
               <a:buNone/>
             </a:pPr>
             <a:r>
-              <a:rPr lang="en-US" sz="4000" b="1" dirty="0">
+              <a:rPr lang="en-US" sz="4000" dirty="0">
                 <a:solidFill>
                   <a:srgbClr val="111111"/>
                 </a:solidFill>
@@ -20949,73 +21523,7 @@
                 <a:ea typeface="Times New Roman" pitchFamily="34" charset="-122"/>
                 <a:cs typeface="Times New Roman" pitchFamily="34" charset="-120"/>
               </a:rPr>
-              <a:t>Fill in the blanks:</a:t>
-            </a:r>
-            <a:endParaRPr lang="en-US" sz="4000" dirty="0"/>
-          </a:p>
-          <a:p>
-            <a:pPr algn="l" marL="342900" indent="-342900">
-              <a:spcAft>
-                <a:spcPts val="800"/>
-              </a:spcAft>
-              <a:buSzPct val="100000"/>
-              <a:buFont typeface="+mj-lt"/>
-              <a:buAutoNum type="arabicPeriod" startAt="1"/>
-            </a:pPr>
-            <a:r>
-              <a:rPr lang="en-US" sz="4000" dirty="0">
-                <a:solidFill>
-                  <a:srgbClr val="111111"/>
-                </a:solidFill>
-                <a:latin typeface="Times New Roman" pitchFamily="34" charset="0"/>
-                <a:ea typeface="Times New Roman" pitchFamily="34" charset="-122"/>
-                <a:cs typeface="Times New Roman" pitchFamily="34" charset="-120"/>
-              </a:rPr>
-              <a:t>An air mass takes its characteristics from its ______ region.</a:t>
-            </a:r>
-            <a:endParaRPr lang="en-US" sz="4000" dirty="0"/>
-          </a:p>
-          <a:p>
-            <a:pPr algn="l" marL="342900" indent="-342900">
-              <a:spcAft>
-                <a:spcPts val="800"/>
-              </a:spcAft>
-              <a:buSzPct val="100000"/>
-              <a:buFont typeface="+mj-lt"/>
-              <a:buAutoNum type="arabicPeriod" startAt="1"/>
-            </a:pPr>
-            <a:r>
-              <a:rPr lang="en-US" sz="4000" dirty="0">
-                <a:solidFill>
-                  <a:srgbClr val="111111"/>
-                </a:solidFill>
-                <a:latin typeface="Times New Roman" pitchFamily="34" charset="0"/>
-                <a:ea typeface="Times New Roman" pitchFamily="34" charset="-122"/>
-                <a:cs typeface="Times New Roman" pitchFamily="34" charset="-120"/>
-              </a:rPr>
-              <a:t>The Harmattan is a ______ air mass.</a:t>
-            </a:r>
-            <a:endParaRPr lang="en-US" sz="4000" dirty="0"/>
-          </a:p>
-          <a:p>
-            <a:pPr algn="l" marL="342900" indent="-342900">
-              <a:spcAft>
-                <a:spcPts val="800"/>
-              </a:spcAft>
-              <a:buSzPct val="100000"/>
-              <a:buFont typeface="+mj-lt"/>
-              <a:buAutoNum type="arabicPeriod" startAt="1"/>
-            </a:pPr>
-            <a:r>
-              <a:rPr lang="en-US" sz="4000" dirty="0">
-                <a:solidFill>
-                  <a:srgbClr val="111111"/>
-                </a:solidFill>
-                <a:latin typeface="Times New Roman" pitchFamily="34" charset="0"/>
-                <a:ea typeface="Times New Roman" pitchFamily="34" charset="-122"/>
-                <a:cs typeface="Times New Roman" pitchFamily="34" charset="-120"/>
-              </a:rPr>
-              <a:t>The two air masses meet at the ______.</a:t>
+              <a:t>A continental air mass forms over land and is dry; a maritime air mass forms over the sea and is moist.</a:t>
             </a:r>
             <a:endParaRPr lang="en-US" sz="4000" dirty="0"/>
           </a:p>
@@ -21127,7 +21635,7 @@
                 <a:ea typeface="Calibri" pitchFamily="34" charset="-122"/>
                 <a:cs typeface="Calibri" pitchFamily="34" charset="-120"/>
               </a:rPr>
-              <a:t>HOMEWORK</a:t>
+              <a:t>FORMATIVE EVALUATION</a:t>
             </a:r>
             <a:endParaRPr lang="en-US" sz="1400" dirty="0"/>
           </a:p>
@@ -21192,7 +21700,7 @@
                 <a:ea typeface="Times New Roman" pitchFamily="34" charset="-122"/>
                 <a:cs typeface="Times New Roman" pitchFamily="34" charset="-120"/>
               </a:rPr>
-              <a:t>Homework</a:t>
+              <a:t>Evaluation 2</a:t>
             </a:r>
             <a:endParaRPr lang="en-US" sz="3600" dirty="0"/>
           </a:p>
@@ -21234,7 +21742,7 @@
                 <a:ea typeface="Times New Roman" pitchFamily="34" charset="-122"/>
                 <a:cs typeface="Times New Roman" pitchFamily="34" charset="-120"/>
               </a:rPr>
-              <a:t>Define climate.</a:t>
+              <a:t>Which air mass brings the rainy season to Garoua, and why?</a:t>
             </a:r>
             <a:endParaRPr lang="en-US" sz="4000" dirty="0"/>
           </a:p>
@@ -21677,7 +22185,7 @@
                 <a:ea typeface="Calibri" pitchFamily="34" charset="-122"/>
                 <a:cs typeface="Calibri" pitchFamily="34" charset="-120"/>
               </a:rPr>
-              <a:t>NEXT LESSON</a:t>
+              <a:t>FORMATIVE EVALUATION</a:t>
             </a:r>
             <a:endParaRPr lang="en-US" sz="1400" dirty="0"/>
           </a:p>
@@ -21742,7 +22250,7 @@
                 <a:ea typeface="Times New Roman" pitchFamily="34" charset="-122"/>
                 <a:cs typeface="Times New Roman" pitchFamily="34" charset="-120"/>
               </a:rPr>
-              <a:t>Next Lesson</a:t>
+              <a:t>Expected Answer</a:t>
             </a:r>
             <a:endParaRPr lang="en-US" sz="3600" dirty="0"/>
           </a:p>
@@ -21766,17 +22274,17 @@
           <a:ln/>
         </p:spPr>
         <p:txBody>
-          <a:bodyPr wrap="square" lIns="0" tIns="0" rIns="0" bIns="0" rtlCol="0" anchor="ctr"/>
-          <a:lstStyle/>
-          <a:p>
-            <a:pPr algn="ctr" indent="0" marL="0">
+          <a:bodyPr wrap="square" lIns="0" tIns="0" rIns="0" bIns="0" rtlCol="0" anchor="t"/>
+          <a:lstStyle/>
+          <a:p>
+            <a:pPr algn="l" indent="0" marL="0">
               <a:spcAft>
                 <a:spcPts val="800"/>
               </a:spcAft>
               <a:buNone/>
             </a:pPr>
             <a:r>
-              <a:rPr lang="en-US" sz="4000" b="1" dirty="0">
+              <a:rPr lang="en-US" sz="4000" dirty="0">
                 <a:solidFill>
                   <a:srgbClr val="111111"/>
                 </a:solidFill>
@@ -21784,27 +22292,7 @@
                 <a:ea typeface="Times New Roman" pitchFamily="34" charset="-122"/>
                 <a:cs typeface="Times New Roman" pitchFamily="34" charset="-120"/>
               </a:rPr>
-              <a:t>Our next lesson will be on:</a:t>
-            </a:r>
-            <a:endParaRPr lang="en-US" sz="4000" dirty="0"/>
-          </a:p>
-          <a:p>
-            <a:pPr algn="ctr" indent="0" marL="0">
-              <a:spcAft>
-                <a:spcPts val="800"/>
-              </a:spcAft>
-              <a:buNone/>
-            </a:pPr>
-            <a:r>
-              <a:rPr lang="en-US" sz="4000" b="1" dirty="0">
-                <a:solidFill>
-                  <a:srgbClr val="990011"/>
-                </a:solidFill>
-                <a:latin typeface="Times New Roman" pitchFamily="34" charset="0"/>
-                <a:ea typeface="Times New Roman" pitchFamily="34" charset="-122"/>
-                <a:cs typeface="Times New Roman" pitchFamily="34" charset="-120"/>
-              </a:rPr>
-              <a:t>Lesson 19: Meaning of Climate and Köppen's Classification</a:t>
+              <a:t>The tropical maritime (mT) air mass, because it is moist and unstable.</a:t>
             </a:r>
             <a:endParaRPr lang="en-US" sz="4000" dirty="0"/>
           </a:p>
@@ -21916,22 +22404,46 @@
                 <a:ea typeface="Calibri" pitchFamily="34" charset="-122"/>
                 <a:cs typeface="Calibri" pitchFamily="34" charset="-120"/>
               </a:rPr>
-              <a:t>BILINGUAL GAME</a:t>
+              <a:t>REMEDIATION</a:t>
             </a:r>
             <a:endParaRPr lang="en-US" sz="1400" dirty="0"/>
           </a:p>
         </p:txBody>
       </p:sp>
-      <p:sp>
-        <p:nvSpPr>
-          <p:cNvPr id="3" name="Text 1"/>
+      <p:pic>
+        <p:nvPicPr>
+          <p:cNvPr id="3" name="Image 0" descr="/home/claude/f4/img/minesec_sheet.png">    </p:cNvPr>
+          <p:cNvPicPr>
+            <a:picLocks noChangeAspect="1"/>
+          </p:cNvPicPr>
+          <p:nvPr/>
+        </p:nvPicPr>
+        <p:blipFill>
+          <a:blip r:embed="rId1"/>
+          <a:stretch>
+            <a:fillRect/>
+          </a:stretch>
+        </p:blipFill>
+        <p:spPr>
+          <a:xfrm>
+            <a:off x="0" y="658368"/>
+            <a:ext cx="2468880" cy="5833872"/>
+          </a:xfrm>
+          <a:prstGeom prst="rect">
+            <a:avLst/>
+          </a:prstGeom>
+        </p:spPr>
+      </p:pic>
+      <p:sp>
+        <p:nvSpPr>
+          <p:cNvPr id="4" name="Text 1"/>
           <p:cNvSpPr/>
           <p:nvPr/>
         </p:nvSpPr>
         <p:spPr>
           <a:xfrm>
-            <a:off x="457200" y="1005840"/>
-            <a:ext cx="11277295" cy="731520"/>
+            <a:off x="2697480" y="1005840"/>
+            <a:ext cx="9174175" cy="731520"/>
           </a:xfrm>
           <a:prstGeom prst="rect">
             <a:avLst/>
@@ -21940,7 +22452,9 @@
           <a:ln/>
         </p:spPr>
         <p:txBody>
-          <a:bodyPr wrap="square" lIns="0" tIns="0" rIns="0" bIns="0" rtlCol="0" anchor="ctr"/>
+          <a:bodyPr wrap="square" lIns="0" tIns="0" rIns="0" bIns="0" rtlCol="0" anchor="ctr">
+            <a:normAutofit/>
+          </a:bodyPr>
           <a:lstStyle/>
           <a:p>
             <a:pPr algn="ctr" indent="0" marL="0">
@@ -21955,6 +22469,723 @@
                 <a:ea typeface="Times New Roman" pitchFamily="34" charset="-122"/>
                 <a:cs typeface="Times New Roman" pitchFamily="34" charset="-120"/>
               </a:rPr>
+              <a:t>Remediation</a:t>
+            </a:r>
+            <a:endParaRPr lang="en-US" sz="3600" dirty="0"/>
+          </a:p>
+        </p:txBody>
+      </p:sp>
+      <p:sp>
+        <p:nvSpPr>
+          <p:cNvPr id="5" name="Text 2"/>
+          <p:cNvSpPr/>
+          <p:nvPr/>
+        </p:nvSpPr>
+        <p:spPr>
+          <a:xfrm>
+            <a:off x="2697480" y="1783080"/>
+            <a:ext cx="9174175" cy="4663440"/>
+          </a:xfrm>
+          <a:prstGeom prst="rect">
+            <a:avLst/>
+          </a:prstGeom>
+          <a:noFill/>
+          <a:ln/>
+        </p:spPr>
+        <p:txBody>
+          <a:bodyPr wrap="square" lIns="0" tIns="0" rIns="0" bIns="0" rtlCol="0" anchor="t"/>
+          <a:lstStyle/>
+          <a:p>
+            <a:pPr algn="l" indent="0" marL="0">
+              <a:spcAft>
+                <a:spcPts val="800"/>
+              </a:spcAft>
+              <a:buNone/>
+            </a:pPr>
+            <a:r>
+              <a:rPr lang="en-US" sz="4000" b="1" dirty="0">
+                <a:solidFill>
+                  <a:srgbClr val="111111"/>
+                </a:solidFill>
+                <a:latin typeface="Times New Roman" pitchFamily="34" charset="0"/>
+                <a:ea typeface="Times New Roman" pitchFamily="34" charset="-122"/>
+                <a:cs typeface="Times New Roman" pitchFamily="34" charset="-120"/>
+              </a:rPr>
+              <a:t>Fill in the blanks:</a:t>
+            </a:r>
+            <a:endParaRPr lang="en-US" sz="4000" dirty="0"/>
+          </a:p>
+          <a:p>
+            <a:pPr algn="l" marL="342900" indent="-342900">
+              <a:spcAft>
+                <a:spcPts val="800"/>
+              </a:spcAft>
+              <a:buSzPct val="100000"/>
+              <a:buFont typeface="+mj-lt"/>
+              <a:buAutoNum type="arabicPeriod" startAt="1"/>
+            </a:pPr>
+            <a:r>
+              <a:rPr lang="en-US" sz="4000" dirty="0">
+                <a:solidFill>
+                  <a:srgbClr val="111111"/>
+                </a:solidFill>
+                <a:latin typeface="Times New Roman" pitchFamily="34" charset="0"/>
+                <a:ea typeface="Times New Roman" pitchFamily="34" charset="-122"/>
+                <a:cs typeface="Times New Roman" pitchFamily="34" charset="-120"/>
+              </a:rPr>
+              <a:t>An air mass takes its characteristics from its ______ region.</a:t>
+            </a:r>
+            <a:endParaRPr lang="en-US" sz="4000" dirty="0"/>
+          </a:p>
+          <a:p>
+            <a:pPr algn="l" marL="342900" indent="-342900">
+              <a:spcAft>
+                <a:spcPts val="800"/>
+              </a:spcAft>
+              <a:buSzPct val="100000"/>
+              <a:buFont typeface="+mj-lt"/>
+              <a:buAutoNum type="arabicPeriod" startAt="1"/>
+            </a:pPr>
+            <a:r>
+              <a:rPr lang="en-US" sz="4000" dirty="0">
+                <a:solidFill>
+                  <a:srgbClr val="111111"/>
+                </a:solidFill>
+                <a:latin typeface="Times New Roman" pitchFamily="34" charset="0"/>
+                <a:ea typeface="Times New Roman" pitchFamily="34" charset="-122"/>
+                <a:cs typeface="Times New Roman" pitchFamily="34" charset="-120"/>
+              </a:rPr>
+              <a:t>The Harmattan is a ______ air mass.</a:t>
+            </a:r>
+            <a:endParaRPr lang="en-US" sz="4000" dirty="0"/>
+          </a:p>
+          <a:p>
+            <a:pPr algn="l" marL="342900" indent="-342900">
+              <a:spcAft>
+                <a:spcPts val="800"/>
+              </a:spcAft>
+              <a:buSzPct val="100000"/>
+              <a:buFont typeface="+mj-lt"/>
+              <a:buAutoNum type="arabicPeriod" startAt="1"/>
+            </a:pPr>
+            <a:r>
+              <a:rPr lang="en-US" sz="4000" dirty="0">
+                <a:solidFill>
+                  <a:srgbClr val="111111"/>
+                </a:solidFill>
+                <a:latin typeface="Times New Roman" pitchFamily="34" charset="0"/>
+                <a:ea typeface="Times New Roman" pitchFamily="34" charset="-122"/>
+                <a:cs typeface="Times New Roman" pitchFamily="34" charset="-120"/>
+              </a:rPr>
+              <a:t>The two air masses meet at the ______.</a:t>
+            </a:r>
+            <a:endParaRPr lang="en-US" sz="4000" dirty="0"/>
+          </a:p>
+        </p:txBody>
+      </p:sp>
+      <p:sp>
+        <p:nvSpPr>
+          <p:cNvPr id="25" name="Slide Number Placeholder 0"/>
+          <p:cNvSpPr>
+            <a:spLocks noGrp="1"/>
+          </p:cNvSpPr>
+          <p:nvPr>
+            <p:ph type="sldNum" sz="quarter" idx="4294967295"/>
+          </p:nvPr>
+        </p:nvSpPr>
+        <p:spPr>
+          <a:xfrm>
+            <a:off x="27432" y="91440"/>
+            <a:ext cx="585216" cy="475488"/>
+          </a:xfrm>
+          <a:prstGeom prst="rect">
+            <a:avLst/>
+          </a:prstGeom>
+          <a:extLst>
+            <a:ext uri="{C572A759-6A51-4108-AA02-DFA0A04FC94B}">
+              <ma14:wrappingTextBoxFlag xmlns:ma14="http://schemas.microsoft.com/office/mac/drawingml/2011/main" val="0"/>
+            </a:ext>
+          </a:extLst>
+        </p:spPr>
+        <p:txBody>
+          <a:bodyPr/>
+          <a:lstStyle>
+            <a:lvl1pPr>
+              <a:defRPr sz="2000">
+                <a:solidFill>
+                  <a:srgbClr val="FFFFFF"/>
+                </a:solidFill>
+                <a:latin typeface="Calibri"/>
+                <a:ea typeface="Calibri"/>
+                <a:cs typeface="Calibri"/>
+              </a:defRPr>
+            </a:lvl1pPr>
+          </a:lstStyle>
+          <a:p>
+            <a:pPr algn="ctr"/>
+            <a:fld id="{F7021451-1387-4CA6-816F-3879F97B5CBC}" type="slidenum">
+              <a:rPr b="1" lang="en-US"/>
+              <a:t>61</a:t>
+            </a:fld>
+            <a:endParaRPr lang="en-US"/>
+          </a:p>
+        </p:txBody>
+      </p:sp>
+    </p:spTree>
+  </p:cSld>
+  <p:clrMapOvr>
+    <a:masterClrMapping/>
+  </p:clrMapOvr>
+</p:sld>
+</file>
+
+<file path=ppt/slides/slide62.xml><?xml version="1.0" encoding="utf-8"?>
+<p:sld xmlns:a="http://schemas.openxmlformats.org/drawingml/2006/main" xmlns:r="http://schemas.openxmlformats.org/officeDocument/2006/relationships" xmlns:p="http://schemas.openxmlformats.org/presentationml/2006/main">
+  <p:cSld name="Slide 62">
+    <p:spTree>
+      <p:nvGrpSpPr>
+        <p:cNvPr id="1" name=""/>
+        <p:cNvGrpSpPr/>
+        <p:nvPr/>
+      </p:nvGrpSpPr>
+      <p:grpSpPr>
+        <a:xfrm>
+          <a:off x="0" y="0"/>
+          <a:ext cx="0" cy="0"/>
+          <a:chOff x="0" y="0"/>
+          <a:chExt cx="0" cy="0"/>
+        </a:xfrm>
+      </p:grpSpPr>
+      <p:sp>
+        <p:nvSpPr>
+          <p:cNvPr id="2" name="Text 0"/>
+          <p:cNvSpPr/>
+          <p:nvPr/>
+        </p:nvSpPr>
+        <p:spPr>
+          <a:xfrm>
+            <a:off x="457200" y="713232"/>
+            <a:ext cx="11368735" cy="274320"/>
+          </a:xfrm>
+          <a:prstGeom prst="rect">
+            <a:avLst/>
+          </a:prstGeom>
+          <a:noFill/>
+          <a:ln/>
+        </p:spPr>
+        <p:txBody>
+          <a:bodyPr wrap="square" lIns="0" tIns="0" rIns="0" bIns="0" rtlCol="0" anchor="ctr"/>
+          <a:lstStyle/>
+          <a:p>
+            <a:pPr algn="r" indent="0" marL="0">
+              <a:buNone/>
+            </a:pPr>
+            <a:r>
+              <a:rPr lang="en-US" sz="1400" b="1" dirty="0">
+                <a:solidFill>
+                  <a:srgbClr val="1C3F6E"/>
+                </a:solidFill>
+                <a:latin typeface="Calibri" pitchFamily="34" charset="0"/>
+                <a:ea typeface="Calibri" pitchFamily="34" charset="-122"/>
+                <a:cs typeface="Calibri" pitchFamily="34" charset="-120"/>
+              </a:rPr>
+              <a:t>HOMEWORK</a:t>
+            </a:r>
+            <a:endParaRPr lang="en-US" sz="1400" dirty="0"/>
+          </a:p>
+        </p:txBody>
+      </p:sp>
+      <p:pic>
+        <p:nvPicPr>
+          <p:cNvPr id="3" name="Image 0" descr="/home/claude/f4/img/minesec_sheet.png">    </p:cNvPr>
+          <p:cNvPicPr>
+            <a:picLocks noChangeAspect="1"/>
+          </p:cNvPicPr>
+          <p:nvPr/>
+        </p:nvPicPr>
+        <p:blipFill>
+          <a:blip r:embed="rId1"/>
+          <a:stretch>
+            <a:fillRect/>
+          </a:stretch>
+        </p:blipFill>
+        <p:spPr>
+          <a:xfrm>
+            <a:off x="0" y="658368"/>
+            <a:ext cx="5120640" cy="5833872"/>
+          </a:xfrm>
+          <a:prstGeom prst="rect">
+            <a:avLst/>
+          </a:prstGeom>
+        </p:spPr>
+      </p:pic>
+      <p:sp>
+        <p:nvSpPr>
+          <p:cNvPr id="4" name="Text 1"/>
+          <p:cNvSpPr/>
+          <p:nvPr/>
+        </p:nvSpPr>
+        <p:spPr>
+          <a:xfrm>
+            <a:off x="5349240" y="1005840"/>
+            <a:ext cx="6522415" cy="731520"/>
+          </a:xfrm>
+          <a:prstGeom prst="rect">
+            <a:avLst/>
+          </a:prstGeom>
+          <a:noFill/>
+          <a:ln/>
+        </p:spPr>
+        <p:txBody>
+          <a:bodyPr wrap="square" lIns="0" tIns="0" rIns="0" bIns="0" rtlCol="0" anchor="ctr">
+            <a:normAutofit/>
+          </a:bodyPr>
+          <a:lstStyle/>
+          <a:p>
+            <a:pPr algn="ctr" indent="0" marL="0">
+              <a:buNone/>
+            </a:pPr>
+            <a:r>
+              <a:rPr lang="en-US" sz="3600" b="1" dirty="0">
+                <a:solidFill>
+                  <a:srgbClr val="990011"/>
+                </a:solidFill>
+                <a:latin typeface="Times New Roman" pitchFamily="34" charset="0"/>
+                <a:ea typeface="Times New Roman" pitchFamily="34" charset="-122"/>
+                <a:cs typeface="Times New Roman" pitchFamily="34" charset="-120"/>
+              </a:rPr>
+              <a:t>Homework</a:t>
+            </a:r>
+            <a:endParaRPr lang="en-US" sz="3600" dirty="0"/>
+          </a:p>
+        </p:txBody>
+      </p:sp>
+      <p:sp>
+        <p:nvSpPr>
+          <p:cNvPr id="5" name="Text 2"/>
+          <p:cNvSpPr/>
+          <p:nvPr/>
+        </p:nvSpPr>
+        <p:spPr>
+          <a:xfrm>
+            <a:off x="5349240" y="1783080"/>
+            <a:ext cx="6522415" cy="4663440"/>
+          </a:xfrm>
+          <a:prstGeom prst="rect">
+            <a:avLst/>
+          </a:prstGeom>
+          <a:noFill/>
+          <a:ln/>
+        </p:spPr>
+        <p:txBody>
+          <a:bodyPr wrap="square" lIns="0" tIns="0" rIns="0" bIns="0" rtlCol="0" anchor="t"/>
+          <a:lstStyle/>
+          <a:p>
+            <a:pPr algn="l" indent="0" marL="0">
+              <a:spcAft>
+                <a:spcPts val="800"/>
+              </a:spcAft>
+              <a:buNone/>
+            </a:pPr>
+            <a:r>
+              <a:rPr lang="en-US" sz="4000" dirty="0">
+                <a:solidFill>
+                  <a:srgbClr val="111111"/>
+                </a:solidFill>
+                <a:latin typeface="Times New Roman" pitchFamily="34" charset="0"/>
+                <a:ea typeface="Times New Roman" pitchFamily="34" charset="-122"/>
+                <a:cs typeface="Times New Roman" pitchFamily="34" charset="-120"/>
+              </a:rPr>
+              <a:t>Define climate.</a:t>
+            </a:r>
+            <a:endParaRPr lang="en-US" sz="4000" dirty="0"/>
+          </a:p>
+        </p:txBody>
+      </p:sp>
+      <p:sp>
+        <p:nvSpPr>
+          <p:cNvPr id="25" name="Slide Number Placeholder 0"/>
+          <p:cNvSpPr>
+            <a:spLocks noGrp="1"/>
+          </p:cNvSpPr>
+          <p:nvPr>
+            <p:ph type="sldNum" sz="quarter" idx="4294967295"/>
+          </p:nvPr>
+        </p:nvSpPr>
+        <p:spPr>
+          <a:xfrm>
+            <a:off x="27432" y="91440"/>
+            <a:ext cx="585216" cy="475488"/>
+          </a:xfrm>
+          <a:prstGeom prst="rect">
+            <a:avLst/>
+          </a:prstGeom>
+          <a:extLst>
+            <a:ext uri="{C572A759-6A51-4108-AA02-DFA0A04FC94B}">
+              <ma14:wrappingTextBoxFlag xmlns:ma14="http://schemas.microsoft.com/office/mac/drawingml/2011/main" val="0"/>
+            </a:ext>
+          </a:extLst>
+        </p:spPr>
+        <p:txBody>
+          <a:bodyPr/>
+          <a:lstStyle>
+            <a:lvl1pPr>
+              <a:defRPr sz="2000">
+                <a:solidFill>
+                  <a:srgbClr val="FFFFFF"/>
+                </a:solidFill>
+                <a:latin typeface="Calibri"/>
+                <a:ea typeface="Calibri"/>
+                <a:cs typeface="Calibri"/>
+              </a:defRPr>
+            </a:lvl1pPr>
+          </a:lstStyle>
+          <a:p>
+            <a:pPr algn="ctr"/>
+            <a:fld id="{F7021451-1387-4CA6-816F-3879F97B5CBC}" type="slidenum">
+              <a:rPr b="1" lang="en-US"/>
+              <a:t>62</a:t>
+            </a:fld>
+            <a:endParaRPr lang="en-US"/>
+          </a:p>
+        </p:txBody>
+      </p:sp>
+    </p:spTree>
+  </p:cSld>
+  <p:clrMapOvr>
+    <a:masterClrMapping/>
+  </p:clrMapOvr>
+</p:sld>
+</file>
+
+<file path=ppt/slides/slide63.xml><?xml version="1.0" encoding="utf-8"?>
+<p:sld xmlns:a="http://schemas.openxmlformats.org/drawingml/2006/main" xmlns:r="http://schemas.openxmlformats.org/officeDocument/2006/relationships" xmlns:p="http://schemas.openxmlformats.org/presentationml/2006/main">
+  <p:cSld name="Slide 63">
+    <p:spTree>
+      <p:nvGrpSpPr>
+        <p:cNvPr id="1" name=""/>
+        <p:cNvGrpSpPr/>
+        <p:nvPr/>
+      </p:nvGrpSpPr>
+      <p:grpSpPr>
+        <a:xfrm>
+          <a:off x="0" y="0"/>
+          <a:ext cx="0" cy="0"/>
+          <a:chOff x="0" y="0"/>
+          <a:chExt cx="0" cy="0"/>
+        </a:xfrm>
+      </p:grpSpPr>
+      <p:sp>
+        <p:nvSpPr>
+          <p:cNvPr id="2" name="Text 0"/>
+          <p:cNvSpPr/>
+          <p:nvPr/>
+        </p:nvSpPr>
+        <p:spPr>
+          <a:xfrm>
+            <a:off x="457200" y="713232"/>
+            <a:ext cx="11368735" cy="274320"/>
+          </a:xfrm>
+          <a:prstGeom prst="rect">
+            <a:avLst/>
+          </a:prstGeom>
+          <a:noFill/>
+          <a:ln/>
+        </p:spPr>
+        <p:txBody>
+          <a:bodyPr wrap="square" lIns="0" tIns="0" rIns="0" bIns="0" rtlCol="0" anchor="ctr"/>
+          <a:lstStyle/>
+          <a:p>
+            <a:pPr algn="r" indent="0" marL="0">
+              <a:buNone/>
+            </a:pPr>
+            <a:r>
+              <a:rPr lang="en-US" sz="1400" b="1" dirty="0">
+                <a:solidFill>
+                  <a:srgbClr val="1C3F6E"/>
+                </a:solidFill>
+                <a:latin typeface="Calibri" pitchFamily="34" charset="0"/>
+                <a:ea typeface="Calibri" pitchFamily="34" charset="-122"/>
+                <a:cs typeface="Calibri" pitchFamily="34" charset="-120"/>
+              </a:rPr>
+              <a:t>NEXT LESSON</a:t>
+            </a:r>
+            <a:endParaRPr lang="en-US" sz="1400" dirty="0"/>
+          </a:p>
+        </p:txBody>
+      </p:sp>
+      <p:pic>
+        <p:nvPicPr>
+          <p:cNvPr id="3" name="Image 0" descr="/home/claude/f4/img/minesec_sheet.png">    </p:cNvPr>
+          <p:cNvPicPr>
+            <a:picLocks noChangeAspect="1"/>
+          </p:cNvPicPr>
+          <p:nvPr/>
+        </p:nvPicPr>
+        <p:blipFill>
+          <a:blip r:embed="rId1"/>
+          <a:stretch>
+            <a:fillRect/>
+          </a:stretch>
+        </p:blipFill>
+        <p:spPr>
+          <a:xfrm>
+            <a:off x="0" y="658368"/>
+            <a:ext cx="5120640" cy="5833872"/>
+          </a:xfrm>
+          <a:prstGeom prst="rect">
+            <a:avLst/>
+          </a:prstGeom>
+        </p:spPr>
+      </p:pic>
+      <p:sp>
+        <p:nvSpPr>
+          <p:cNvPr id="4" name="Text 1"/>
+          <p:cNvSpPr/>
+          <p:nvPr/>
+        </p:nvSpPr>
+        <p:spPr>
+          <a:xfrm>
+            <a:off x="5349240" y="1005840"/>
+            <a:ext cx="6522415" cy="731520"/>
+          </a:xfrm>
+          <a:prstGeom prst="rect">
+            <a:avLst/>
+          </a:prstGeom>
+          <a:noFill/>
+          <a:ln/>
+        </p:spPr>
+        <p:txBody>
+          <a:bodyPr wrap="square" lIns="0" tIns="0" rIns="0" bIns="0" rtlCol="0" anchor="ctr">
+            <a:normAutofit/>
+          </a:bodyPr>
+          <a:lstStyle/>
+          <a:p>
+            <a:pPr algn="ctr" indent="0" marL="0">
+              <a:buNone/>
+            </a:pPr>
+            <a:r>
+              <a:rPr lang="en-US" sz="3600" b="1" dirty="0">
+                <a:solidFill>
+                  <a:srgbClr val="990011"/>
+                </a:solidFill>
+                <a:latin typeface="Times New Roman" pitchFamily="34" charset="0"/>
+                <a:ea typeface="Times New Roman" pitchFamily="34" charset="-122"/>
+                <a:cs typeface="Times New Roman" pitchFamily="34" charset="-120"/>
+              </a:rPr>
+              <a:t>Next Lesson</a:t>
+            </a:r>
+            <a:endParaRPr lang="en-US" sz="3600" dirty="0"/>
+          </a:p>
+        </p:txBody>
+      </p:sp>
+      <p:sp>
+        <p:nvSpPr>
+          <p:cNvPr id="5" name="Text 2"/>
+          <p:cNvSpPr/>
+          <p:nvPr/>
+        </p:nvSpPr>
+        <p:spPr>
+          <a:xfrm>
+            <a:off x="5349240" y="1783080"/>
+            <a:ext cx="6522415" cy="4663440"/>
+          </a:xfrm>
+          <a:prstGeom prst="rect">
+            <a:avLst/>
+          </a:prstGeom>
+          <a:noFill/>
+          <a:ln/>
+        </p:spPr>
+        <p:txBody>
+          <a:bodyPr wrap="square" lIns="0" tIns="0" rIns="0" bIns="0" rtlCol="0" anchor="ctr"/>
+          <a:lstStyle/>
+          <a:p>
+            <a:pPr algn="ctr" indent="0" marL="0">
+              <a:spcAft>
+                <a:spcPts val="800"/>
+              </a:spcAft>
+              <a:buNone/>
+            </a:pPr>
+            <a:r>
+              <a:rPr lang="en-US" sz="4000" b="1" dirty="0">
+                <a:solidFill>
+                  <a:srgbClr val="111111"/>
+                </a:solidFill>
+                <a:latin typeface="Times New Roman" pitchFamily="34" charset="0"/>
+                <a:ea typeface="Times New Roman" pitchFamily="34" charset="-122"/>
+                <a:cs typeface="Times New Roman" pitchFamily="34" charset="-120"/>
+              </a:rPr>
+              <a:t>Our next lesson will be on:</a:t>
+            </a:r>
+            <a:endParaRPr lang="en-US" sz="4000" dirty="0"/>
+          </a:p>
+          <a:p>
+            <a:pPr algn="ctr" indent="0" marL="0">
+              <a:spcAft>
+                <a:spcPts val="800"/>
+              </a:spcAft>
+              <a:buNone/>
+            </a:pPr>
+            <a:r>
+              <a:rPr lang="en-US" sz="4000" b="1" dirty="0">
+                <a:solidFill>
+                  <a:srgbClr val="990011"/>
+                </a:solidFill>
+                <a:latin typeface="Times New Roman" pitchFamily="34" charset="0"/>
+                <a:ea typeface="Times New Roman" pitchFamily="34" charset="-122"/>
+                <a:cs typeface="Times New Roman" pitchFamily="34" charset="-120"/>
+              </a:rPr>
+              <a:t>Lesson 19: Meaning of Climate and Köppen's Classification</a:t>
+            </a:r>
+            <a:endParaRPr lang="en-US" sz="4000" dirty="0"/>
+          </a:p>
+        </p:txBody>
+      </p:sp>
+      <p:sp>
+        <p:nvSpPr>
+          <p:cNvPr id="25" name="Slide Number Placeholder 0"/>
+          <p:cNvSpPr>
+            <a:spLocks noGrp="1"/>
+          </p:cNvSpPr>
+          <p:nvPr>
+            <p:ph type="sldNum" sz="quarter" idx="4294967295"/>
+          </p:nvPr>
+        </p:nvSpPr>
+        <p:spPr>
+          <a:xfrm>
+            <a:off x="27432" y="91440"/>
+            <a:ext cx="585216" cy="475488"/>
+          </a:xfrm>
+          <a:prstGeom prst="rect">
+            <a:avLst/>
+          </a:prstGeom>
+          <a:extLst>
+            <a:ext uri="{C572A759-6A51-4108-AA02-DFA0A04FC94B}">
+              <ma14:wrappingTextBoxFlag xmlns:ma14="http://schemas.microsoft.com/office/mac/drawingml/2011/main" val="0"/>
+            </a:ext>
+          </a:extLst>
+        </p:spPr>
+        <p:txBody>
+          <a:bodyPr/>
+          <a:lstStyle>
+            <a:lvl1pPr>
+              <a:defRPr sz="2000">
+                <a:solidFill>
+                  <a:srgbClr val="FFFFFF"/>
+                </a:solidFill>
+                <a:latin typeface="Calibri"/>
+                <a:ea typeface="Calibri"/>
+                <a:cs typeface="Calibri"/>
+              </a:defRPr>
+            </a:lvl1pPr>
+          </a:lstStyle>
+          <a:p>
+            <a:pPr algn="ctr"/>
+            <a:fld id="{F7021451-1387-4CA6-816F-3879F97B5CBC}" type="slidenum">
+              <a:rPr b="1" lang="en-US"/>
+              <a:t>63</a:t>
+            </a:fld>
+            <a:endParaRPr lang="en-US"/>
+          </a:p>
+        </p:txBody>
+      </p:sp>
+    </p:spTree>
+  </p:cSld>
+  <p:clrMapOvr>
+    <a:masterClrMapping/>
+  </p:clrMapOvr>
+</p:sld>
+</file>
+
+<file path=ppt/slides/slide64.xml><?xml version="1.0" encoding="utf-8"?>
+<p:sld xmlns:a="http://schemas.openxmlformats.org/drawingml/2006/main" xmlns:r="http://schemas.openxmlformats.org/officeDocument/2006/relationships" xmlns:p="http://schemas.openxmlformats.org/presentationml/2006/main">
+  <p:cSld name="Slide 64">
+    <p:spTree>
+      <p:nvGrpSpPr>
+        <p:cNvPr id="1" name=""/>
+        <p:cNvGrpSpPr/>
+        <p:nvPr/>
+      </p:nvGrpSpPr>
+      <p:grpSpPr>
+        <a:xfrm>
+          <a:off x="0" y="0"/>
+          <a:ext cx="0" cy="0"/>
+          <a:chOff x="0" y="0"/>
+          <a:chExt cx="0" cy="0"/>
+        </a:xfrm>
+      </p:grpSpPr>
+      <p:sp>
+        <p:nvSpPr>
+          <p:cNvPr id="2" name="Text 0"/>
+          <p:cNvSpPr/>
+          <p:nvPr/>
+        </p:nvSpPr>
+        <p:spPr>
+          <a:xfrm>
+            <a:off x="457200" y="713232"/>
+            <a:ext cx="11368735" cy="274320"/>
+          </a:xfrm>
+          <a:prstGeom prst="rect">
+            <a:avLst/>
+          </a:prstGeom>
+          <a:noFill/>
+          <a:ln/>
+        </p:spPr>
+        <p:txBody>
+          <a:bodyPr wrap="square" lIns="0" tIns="0" rIns="0" bIns="0" rtlCol="0" anchor="ctr"/>
+          <a:lstStyle/>
+          <a:p>
+            <a:pPr algn="r" indent="0" marL="0">
+              <a:buNone/>
+            </a:pPr>
+            <a:r>
+              <a:rPr lang="en-US" sz="1400" b="1" dirty="0">
+                <a:solidFill>
+                  <a:srgbClr val="1C3F6E"/>
+                </a:solidFill>
+                <a:latin typeface="Calibri" pitchFamily="34" charset="0"/>
+                <a:ea typeface="Calibri" pitchFamily="34" charset="-122"/>
+                <a:cs typeface="Calibri" pitchFamily="34" charset="-120"/>
+              </a:rPr>
+              <a:t>BILINGUAL GAME</a:t>
+            </a:r>
+            <a:endParaRPr lang="en-US" sz="1400" dirty="0"/>
+          </a:p>
+        </p:txBody>
+      </p:sp>
+      <p:sp>
+        <p:nvSpPr>
+          <p:cNvPr id="3" name="Text 1"/>
+          <p:cNvSpPr/>
+          <p:nvPr/>
+        </p:nvSpPr>
+        <p:spPr>
+          <a:xfrm>
+            <a:off x="457200" y="1005840"/>
+            <a:ext cx="11277295" cy="731520"/>
+          </a:xfrm>
+          <a:prstGeom prst="rect">
+            <a:avLst/>
+          </a:prstGeom>
+          <a:noFill/>
+          <a:ln/>
+        </p:spPr>
+        <p:txBody>
+          <a:bodyPr wrap="square" lIns="0" tIns="0" rIns="0" bIns="0" rtlCol="0" anchor="ctr"/>
+          <a:lstStyle/>
+          <a:p>
+            <a:pPr algn="ctr" indent="0" marL="0">
+              <a:buNone/>
+            </a:pPr>
+            <a:r>
+              <a:rPr lang="en-US" sz="3600" b="1" dirty="0">
+                <a:solidFill>
+                  <a:srgbClr val="990011"/>
+                </a:solidFill>
+                <a:latin typeface="Times New Roman" pitchFamily="34" charset="0"/>
+                <a:ea typeface="Times New Roman" pitchFamily="34" charset="-122"/>
+                <a:cs typeface="Times New Roman" pitchFamily="34" charset="-120"/>
+              </a:rPr>
               <a:t>Bilingual Game (Jeu Bilingue)</a:t>
             </a:r>
             <a:endParaRPr lang="en-US" sz="3600" dirty="0"/>
@@ -21963,7 +23194,7 @@
       </p:sp>
       <p:graphicFrame>
         <p:nvGraphicFramePr>
-          <p:cNvPr id="62" name="Table 0"/>
+          <p:cNvPr id="65" name="Table 0"/>
           <p:cNvGraphicFramePr>
             <a:graphicFrameLocks noGrp="1"/>
           </p:cNvGraphicFramePr>
@@ -22999,7 +24230,7 @@
             <a:pPr algn="ctr"/>
             <a:fld id="{F7021451-1387-4CA6-816F-3879F97B5CBC}" type="slidenum">
               <a:rPr b="1" lang="en-US"/>
-              <a:t>61</a:t>
+              <a:t>64</a:t>
             </a:fld>
             <a:endParaRPr lang="en-US"/>
           </a:p>
@@ -23013,9 +24244,9 @@
 </p:sld>
 </file>
 
-<file path=ppt/slides/slide62.xml><?xml version="1.0" encoding="utf-8"?>
+<file path=ppt/slides/slide65.xml><?xml version="1.0" encoding="utf-8"?>
 <p:sld xmlns:a="http://schemas.openxmlformats.org/drawingml/2006/main" xmlns:r="http://schemas.openxmlformats.org/officeDocument/2006/relationships" xmlns:p="http://schemas.openxmlformats.org/presentationml/2006/main">
-  <p:cSld name="Slide 62">
+  <p:cSld name="Slide 65">
     <p:spTree>
       <p:nvGrpSpPr>
         <p:cNvPr id="1" name=""/>
@@ -23110,7 +24341,7 @@
       </p:sp>
       <p:graphicFrame>
         <p:nvGraphicFramePr>
-          <p:cNvPr id="63" name="Table 0"/>
+          <p:cNvPr id="66" name="Table 0"/>
           <p:cNvGraphicFramePr>
             <a:graphicFrameLocks noGrp="1"/>
           </p:cNvGraphicFramePr>
@@ -23732,7 +24963,7 @@
             <a:pPr algn="ctr"/>
             <a:fld id="{F7021451-1387-4CA6-816F-3879F97B5CBC}" type="slidenum">
               <a:rPr b="1" lang="en-US"/>
-              <a:t>62</a:t>
+              <a:t>65</a:t>
             </a:fld>
             <a:endParaRPr lang="en-US"/>
           </a:p>
@@ -23746,9 +24977,9 @@
 </p:sld>
 </file>
 
-<file path=ppt/slides/slide63.xml><?xml version="1.0" encoding="utf-8"?>
+<file path=ppt/slides/slide66.xml><?xml version="1.0" encoding="utf-8"?>
 <p:sld xmlns:a="http://schemas.openxmlformats.org/drawingml/2006/main" xmlns:r="http://schemas.openxmlformats.org/officeDocument/2006/relationships" xmlns:p="http://schemas.openxmlformats.org/presentationml/2006/main">
-  <p:cSld name="Slide 63">
+  <p:cSld name="Slide 66">
     <p:spTree>
       <p:nvGrpSpPr>
         <p:cNvPr id="1" name=""/>
@@ -23843,7 +25074,7 @@
       </p:sp>
       <p:graphicFrame>
         <p:nvGraphicFramePr>
-          <p:cNvPr id="64" name="Table 0"/>
+          <p:cNvPr id="67" name="Table 0"/>
           <p:cNvGraphicFramePr>
             <a:graphicFrameLocks noGrp="1"/>
           </p:cNvGraphicFramePr>
@@ -23953,7 +25184,7 @@
                           <a:ea typeface="Calibri" pitchFamily="34" charset="-122"/>
                           <a:cs typeface="Calibri" pitchFamily="34" charset="-120"/>
                         </a:rPr>
-                        <a:t>DEFINITIONS; Meaning and Characteristics of Air Masses; Development of Air Masses; Classification and Examples; Types and Movements of Air Masses; Air Masses Affecting Cameroon and West Africa.</a:t>
+                        <a:t>DEFINITIONS; Meaning and Characteristics of Air Masses; Development of Air Masses; The Two Letters; Examples; Types and Movements of Air Masses; Air Masses Affecting Cameroon and West Africa.</a:t>
                       </a:r>
                       <a:endParaRPr lang="en-US" sz="1600" dirty="0">
                         <a:latin typeface="Calibri" charset="0"/>
@@ -24603,7 +25834,7 @@
             <a:pPr algn="ctr"/>
             <a:fld id="{F7021451-1387-4CA6-816F-3879F97B5CBC}" type="slidenum">
               <a:rPr b="1" lang="en-US"/>
-              <a:t>63</a:t>
+              <a:t>66</a:t>
             </a:fld>
             <a:endParaRPr lang="en-US"/>
           </a:p>
@@ -24617,9 +25848,9 @@
 </p:sld>
 </file>
 
-<file path=ppt/slides/slide64.xml><?xml version="1.0" encoding="utf-8"?>
+<file path=ppt/slides/slide67.xml><?xml version="1.0" encoding="utf-8"?>
 <p:sld xmlns:a="http://schemas.openxmlformats.org/drawingml/2006/main" xmlns:r="http://schemas.openxmlformats.org/officeDocument/2006/relationships" xmlns:p="http://schemas.openxmlformats.org/presentationml/2006/main">
-  <p:cSld name="Slide 64">
+  <p:cSld name="Slide 67">
     <p:spTree>
       <p:nvGrpSpPr>
         <p:cNvPr id="1" name=""/>
@@ -24928,7 +26159,7 @@
             <a:pPr algn="ctr"/>
             <a:fld id="{F7021451-1387-4CA6-816F-3879F97B5CBC}" type="slidenum">
               <a:rPr b="1" lang="en-US"/>
-              <a:t>64</a:t>
+              <a:t>67</a:t>
             </a:fld>
             <a:endParaRPr lang="en-US"/>
           </a:p>
@@ -24942,9 +26173,9 @@
 </p:sld>
 </file>
 
-<file path=ppt/slides/slide65.xml><?xml version="1.0" encoding="utf-8"?>
+<file path=ppt/slides/slide68.xml><?xml version="1.0" encoding="utf-8"?>
 <p:sld xmlns:a="http://schemas.openxmlformats.org/drawingml/2006/main" xmlns:r="http://schemas.openxmlformats.org/officeDocument/2006/relationships" xmlns:p="http://schemas.openxmlformats.org/presentationml/2006/main">
-  <p:cSld name="Slide 65">
+  <p:cSld name="Slide 68">
     <p:spTree>
       <p:nvGrpSpPr>
         <p:cNvPr id="1" name=""/>
@@ -25232,7 +26463,7 @@
             <a:pPr algn="ctr"/>
             <a:fld id="{F7021451-1387-4CA6-816F-3879F97B5CBC}" type="slidenum">
               <a:rPr b="1" lang="en-US"/>
-              <a:t>65</a:t>
+              <a:t>68</a:t>
             </a:fld>
             <a:endParaRPr lang="en-US"/>
           </a:p>
